--- a/case-for-fossil-fuels.pptx
+++ b/case-for-fossil-fuels.pptx
@@ -14,7 +14,6 @@
     <p:sldId id="262" r:id="rId14"/>
     <p:sldId id="263" r:id="rId15"/>
     <p:sldId id="264" r:id="rId16"/>
-    <p:sldId id="265" r:id="rId17"/>
   </p:sldIdLst>
   <p:sldSz cx="12191695" cy="6858000" type="screen4x3"/>
   <p:notesSz cx="6858000" cy="9144000"/>
@@ -511,77 +510,7 @@
           <a:lstStyle/>
           <a:p>
             <a:r>
-              <a:t>(~10 sec) Last week I argued we should cut fossil fuels. Today I want to make the most honest counter-argument I can — not because I've changed my mind on climate change, but because the picture I painted was incomplete.</a:t>
-            </a:r>
-          </a:p>
-        </p:txBody>
-      </p:sp>
-      <p:sp>
-        <p:nvSpPr>
-          <p:cNvPr id="4" name="Slide Number Placeholder 3"/>
-          <p:cNvSpPr>
-            <a:spLocks noGrp="1"/>
-          </p:cNvSpPr>
-          <p:nvPr>
-            <p:ph type="sldNum" idx="5" sz="quarter"/>
-          </p:nvPr>
-        </p:nvSpPr>
-        <p:spPr/>
-      </p:sp>
-    </p:spTree>
-  </p:cSld>
-  <p:clrMapOvr>
-    <a:masterClrMapping/>
-  </p:clrMapOvr>
-</p:notes>
-</file>
-
-<file path=ppt/notesSlides/notesSlide10.xml><?xml version="1.0" encoding="utf-8"?>
-<p:notes xmlns:a="http://schemas.openxmlformats.org/drawingml/2006/main" xmlns:p="http://schemas.openxmlformats.org/presentationml/2006/main" xmlns:r="http://schemas.openxmlformats.org/officeDocument/2006/relationships">
-  <p:cSld>
-    <p:spTree>
-      <p:nvGrpSpPr>
-        <p:cNvPr id="1" name=""/>
-        <p:cNvGrpSpPr/>
-        <p:nvPr/>
-      </p:nvGrpSpPr>
-      <p:grpSpPr>
-        <a:xfrm>
-          <a:off x="0" y="0"/>
-          <a:ext cx="0" cy="0"/>
-          <a:chOff x="0" y="0"/>
-          <a:chExt cx="0" cy="0"/>
-        </a:xfrm>
-      </p:grpSpPr>
-      <p:sp>
-        <p:nvSpPr>
-          <p:cNvPr id="2" name="Slide Image Placeholder 1"/>
-          <p:cNvSpPr>
-            <a:spLocks noGrp="1"/>
-          </p:cNvSpPr>
-          <p:nvPr>
-            <p:ph type="sldImg" idx="2"/>
-          </p:nvPr>
-        </p:nvSpPr>
-        <p:spPr/>
-      </p:sp>
-      <p:sp>
-        <p:nvSpPr>
-          <p:cNvPr id="3" name="Notes Placeholder 2"/>
-          <p:cNvSpPr>
-            <a:spLocks noGrp="1"/>
-          </p:cNvSpPr>
-          <p:nvPr>
-            <p:ph type="body" idx="3" sz="quarter"/>
-          </p:nvPr>
-        </p:nvSpPr>
-        <p:spPr/>
-        <p:txBody>
-          <a:bodyPr/>
-          <a:lstStyle/>
-          <a:p>
-            <a:r>
-              <a:t>Reference slide for Q&amp;A. If anyone questions a stat, the source is here. Full URLs are in the repo's research/notes.md.</a:t>
+              <a:t>(~15 sec) Yesterday I argued we should cut fossil fuels. You all saw that talk, so I won't recap it. Today I want to make the most honest counter-argument I can — not because I've changed my mind on climate change, but because the picture I painted was incomplete. The story today is simple: reliable energy is survival, and clean energy alone can't guarantee it yet — not in Lusaka, and not in Alberta.</a:t>
             </a:r>
           </a:p>
         </p:txBody>
@@ -721,7 +650,7 @@
           <a:lstStyle/>
           <a:p>
             <a:r>
-              <a:t>(~20 sec) This is what I want you to walk out of the room remembering. Let me show you how I got there.</a:t>
+              <a:t>(~20 sec) This is what I want you to walk out of the room remembering. Reliable energy is survival — and the clean-energy-only plan can't guarantee it yet. We have lived proof on two continents: Zambia's drought and a Canadian winter. So the honest answer isn't abandonment — it's a managed transition. Let me show you how I got there.</a:t>
             </a:r>
           </a:p>
         </p:txBody>
@@ -791,7 +720,7 @@
           <a:lstStyle/>
           <a:p>
             <a:r>
-              <a:t>(~30 sec) The climate data hasn't moved. CO₂ is rising, temperatures are rising, disasters are increasing. That deck was honest about half the story. Today I want to show you the other half.</a:t>
+              <a:t>(~40 sec) We lived this. We did the 'clean' thing — 85% of our installed capacity is hydropower. Then the climate broke our climate solution. The 2024 drought collapsed reservoir levels and ZESCO ran load shedding of up to 21 hours a day. The lesson is NOT 'burn more coal.' The lesson is: firm, dispatchable power matters, and pretending otherwise is paid for in dark hospitals and empty cold-chains.</a:t>
             </a:r>
           </a:p>
         </p:txBody>
@@ -861,7 +790,7 @@
           <a:lstStyle/>
           <a:p>
             <a:r>
-              <a:t>(~40 sec) My last deck counted future deaths from climate change. It did not count the 3.2 million people who die EVERY YEAR right now from cooking on open fires because they have no clean fuel. In sub-Saharan Africa alone that's 815,000 deaths a year — most of them women and children. Energy poverty has a body count today.</a:t>
+              <a:t>(~45 sec) And it isn't only the poor South. In January 2024, Alberta — a rich, modern province — hit a minus-forty cold snap. Demand smashed a record at 12,384 megawatts. The province has over six thousand megawatts of wind and solar, but at the evening peak the sun had set and the wind was calm, so it delivered almost nothing. The grid fell to TEN megawatts of reserve and the government sent an emergency text telling everyone to cut power to essentials. Gas-fired plants carried the province. And remember — worldwide, cold kills about nine times as many people as heat. In most of the cold world, staying warm runs on fossil fuels: gas heats roughly half of Canadian homes. 'No fossil fuels' in a minus-thirty winter means no heat.</a:t>
             </a:r>
           </a:p>
         </p:txBody>
@@ -931,7 +860,7 @@
           <a:lstStyle/>
           <a:p>
             <a:r>
-              <a:t>(~40 sec) Look at this asymmetry. Every wealthy country on Earth got rich by burning coal, then oil, then gas. They are now asking the continent that contributed least to the problem to skip that ladder — using clean-energy technology whose OWN supply chain still runs on fossil fuels. That's not a climate plan. That's an injustice with a green sticker on it.</a:t>
+              <a:t>(~40 sec) Now the justice layer. Every wealthy country on Earth got rich by burning coal, then oil, then gas. They are now asking the continent that contributed least to the problem to skip that ladder — using clean-energy technology whose OWN supply chain still runs on fossil fuels. That's not a climate plan. That's an injustice with a green sticker on it.</a:t>
             </a:r>
           </a:p>
         </p:txBody>
@@ -1001,7 +930,7 @@
           <a:lstStyle/>
           <a:p>
             <a:r>
-              <a:t>(~40 sec) We lived this. We did the 'clean' thing — 85% of our installed capacity is hydropower. Then the climate broke our climate solution. ZESCO ran load shedding of up to 21 hours a day. The lesson is NOT 'burn more coal.' The lesson is: firm power matters, and pretending otherwise is paid for in dark hospitals and empty cold-chains.</a:t>
+              <a:t>(~30 sec) This is the Hans Rosling curve. Below about three thousand kilowatt-hours per person per year, every additional kilowatt-hour translates directly into life-years — through clinics, refrigerated vaccines, lit classrooms, water pumps. Zambia is right on the steep part of that curve. Cutting energy access there costs life-years immediately. That's why the moral arithmetic doesn't end with climate.</a:t>
             </a:r>
           </a:p>
         </p:txBody>
@@ -1071,7 +1000,7 @@
           <a:lstStyle/>
           <a:p>
             <a:r>
-              <a:t>(~30 sec) This is the Hans Rosling curve. Below about three thousand kilowatt-hours per person per year, every additional kilowatt-hour translates directly into life-years — through clinics, refrigerated vaccines, lit classrooms, water pumps. Zambia is right on the steep part of that curve. Cutting energy access there costs life-years immediately. That's why the moral arithmetic doesn't end with climate.</a:t>
+              <a:t>(~50 sec) I'm not arguing fossil fuels forever. I'm arguing for a MANAGED transition. Natural gas as a bridge — emits half what coal does, and it's the firm power that carried Alberta and would have spared Zambia; Africa holds 13% of global reserves. Renewables scaled aggressively on top — solar in Zambia is already the cheapest new capacity. And firm power kept on until storage and grid infrastructure can stand alone. That's how we keep the lights and the heat on while decarbonising.</a:t>
             </a:r>
           </a:p>
         </p:txBody>
@@ -1141,7 +1070,7 @@
           <a:lstStyle/>
           <a:p>
             <a:r>
-              <a:t>(~50 sec) I'm not arguing fossil fuels forever. I'm arguing for a MANAGED transition. Natural gas as a bridge — emits half what coal does and Africa holds 13% of global reserves. Renewables scaled aggressively on top — solar in Zambia is already the cheapest new capacity. And firm power kept on until storage and grid infrastructure can stand alone. That's how we lift the bottom billion while decarbonising the top.</a:t>
+              <a:t>Reference slide for Q&amp;A. If anyone questions a stat, the source is here. Full URLs are in the repo's research/notes.md.</a:t>
             </a:r>
           </a:p>
         </p:txBody>
@@ -4418,7 +4347,7 @@
         </p:nvSpPr>
         <p:spPr>
           <a:xfrm>
-            <a:off x="4937760" y="1737360"/>
+            <a:off x="4937760" y="1828800"/>
             <a:ext cx="6858000" cy="365760"/>
           </a:xfrm>
           <a:prstGeom prst="rect">
@@ -4440,7 +4369,7 @@
                 </a:solidFill>
                 <a:latin typeface="Calibri"/>
               </a:rPr>
-              <a:t>REPLY TO LAST WEEK</a:t>
+              <a:t>TODAY</a:t>
             </a:r>
           </a:p>
         </p:txBody>
@@ -4453,8 +4382,8 @@
         </p:nvSpPr>
         <p:spPr>
           <a:xfrm>
-            <a:off x="4937760" y="2103120"/>
-            <a:ext cx="6858000" cy="457200"/>
+            <a:off x="4937760" y="2286000"/>
+            <a:ext cx="6858000" cy="1463040"/>
           </a:xfrm>
           <a:prstGeom prst="rect">
             <a:avLst/>
@@ -4469,13 +4398,14 @@
           <a:p>
             <a:pPr algn="l"/>
             <a:r>
-              <a:rPr sz="1300" b="0">
-                <a:solidFill>
-                  <a:srgbClr val="4B5563"/>
+              <a:rPr sz="3000" b="1">
+                <a:solidFill>
+                  <a:srgbClr val="1F2937"/>
                 </a:solidFill>
                 <a:latin typeface="Calibri"/>
               </a:rPr>
-              <a:t>“How Climate Change Affects the World We Live In”</a:t>
+              <a:t>Keeping the lights —
+and the heat — on.</a:t>
             </a:r>
           </a:p>
         </p:txBody>
@@ -4488,8 +4418,8 @@
         </p:nvSpPr>
         <p:spPr>
           <a:xfrm>
-            <a:off x="4937760" y="2834640"/>
-            <a:ext cx="6858000" cy="914400"/>
+            <a:off x="4937760" y="3840480"/>
+            <a:ext cx="6858000" cy="822960"/>
           </a:xfrm>
           <a:prstGeom prst="rect">
             <a:avLst/>
@@ -4504,13 +4434,13 @@
           <a:p>
             <a:pPr algn="l"/>
             <a:r>
-              <a:rPr sz="2800" b="1">
-                <a:solidFill>
-                  <a:srgbClr val="1F2937"/>
+              <a:rPr sz="1400" b="0">
+                <a:solidFill>
+                  <a:srgbClr val="4B5563"/>
                 </a:solidFill>
                 <a:latin typeface="Calibri"/>
               </a:rPr>
-              <a:t>Today: the other half of the story.</a:t>
+              <a:t>Why cutting fossil fuels too fast can cost more lives than it saves — in Lusaka and in Alberta alike.</a:t>
             </a:r>
           </a:p>
         </p:txBody>
@@ -4523,8 +4453,8 @@
         </p:nvSpPr>
         <p:spPr>
           <a:xfrm>
-            <a:off x="4937760" y="3657600"/>
-            <a:ext cx="6858000" cy="731520"/>
+            <a:off x="4937760" y="4892040"/>
+            <a:ext cx="6858000" cy="457200"/>
           </a:xfrm>
           <a:prstGeom prst="rect">
             <a:avLst/>
@@ -4539,14 +4469,13 @@
           <a:p>
             <a:pPr algn="l"/>
             <a:r>
-              <a:rPr sz="1500" b="0">
-                <a:solidFill>
-                  <a:srgbClr val="4B5563"/>
+              <a:rPr sz="2200" b="1">
+                <a:solidFill>
+                  <a:srgbClr val="1F4E79"/>
                 </a:solidFill>
                 <a:latin typeface="Calibri"/>
               </a:rPr>
-              <a:t>Why cutting fossil fuels now can cost
-more lives than it saves.</a:t>
+              <a:t>Choolwe</a:t>
             </a:r>
           </a:p>
         </p:txBody>
@@ -4559,8 +4488,8 @@
         </p:nvSpPr>
         <p:spPr>
           <a:xfrm>
-            <a:off x="4937760" y="4663440"/>
-            <a:ext cx="6858000" cy="457200"/>
+            <a:off x="4937760" y="5394960"/>
+            <a:ext cx="6858000" cy="365760"/>
           </a:xfrm>
           <a:prstGeom prst="rect">
             <a:avLst/>
@@ -4575,41 +4504,6 @@
           <a:p>
             <a:pPr algn="l"/>
             <a:r>
-              <a:rPr sz="2200" b="1">
-                <a:solidFill>
-                  <a:srgbClr val="1F4E79"/>
-                </a:solidFill>
-                <a:latin typeface="Calibri"/>
-              </a:rPr>
-              <a:t>Choolwe</a:t>
-            </a:r>
-          </a:p>
-        </p:txBody>
-      </p:sp>
-      <p:sp>
-        <p:nvSpPr>
-          <p:cNvPr id="14" name="TextBox 13"/>
-          <p:cNvSpPr txBox="1"/>
-          <p:nvPr/>
-        </p:nvSpPr>
-        <p:spPr>
-          <a:xfrm>
-            <a:off x="4937760" y="5166360"/>
-            <a:ext cx="6858000" cy="365760"/>
-          </a:xfrm>
-          <a:prstGeom prst="rect">
-            <a:avLst/>
-          </a:prstGeom>
-          <a:noFill/>
-        </p:spPr>
-        <p:txBody>
-          <a:bodyPr wrap="square" lIns="0" rIns="0" tIns="0" bIns="0" anchor="t">
-            <a:spAutoFit/>
-          </a:bodyPr>
-          <a:lstStyle/>
-          <a:p>
-            <a:pPr algn="l"/>
-            <a:r>
               <a:rPr sz="1300" b="0">
                 <a:solidFill>
                   <a:srgbClr val="4B5563"/>
@@ -4623,14 +4517,14 @@
       </p:sp>
       <p:sp>
         <p:nvSpPr>
-          <p:cNvPr id="15" name="Oval 14"/>
+          <p:cNvPr id="14" name="Oval 13"/>
           <p:cNvSpPr/>
           <p:nvPr/>
         </p:nvSpPr>
         <p:spPr>
           <a:xfrm>
-            <a:off x="10378440" y="5591556"/>
-            <a:ext cx="640080" cy="704088"/>
+            <a:off x="10405872" y="5804611"/>
+            <a:ext cx="585216" cy="643737"/>
           </a:xfrm>
           <a:prstGeom prst="ellipse">
             <a:avLst/>
@@ -4667,14 +4561,14 @@
       </p:sp>
       <p:sp>
         <p:nvSpPr>
-          <p:cNvPr id="16" name="Oval 15"/>
+          <p:cNvPr id="15" name="Oval 14"/>
           <p:cNvSpPr/>
           <p:nvPr/>
         </p:nvSpPr>
         <p:spPr>
           <a:xfrm>
-            <a:off x="10554462" y="5815584"/>
-            <a:ext cx="288036" cy="384048"/>
+            <a:off x="10566806" y="6009436"/>
+            <a:ext cx="263347" cy="351129"/>
           </a:xfrm>
           <a:prstGeom prst="ellipse">
             <a:avLst/>
@@ -4711,14 +4605,14 @@
       </p:sp>
       <p:sp>
         <p:nvSpPr>
-          <p:cNvPr id="17" name="Oval 16"/>
+          <p:cNvPr id="16" name="Oval 15"/>
           <p:cNvSpPr/>
           <p:nvPr/>
         </p:nvSpPr>
         <p:spPr>
           <a:xfrm>
-            <a:off x="11109960" y="5623560"/>
-            <a:ext cx="640080" cy="640080"/>
+            <a:off x="11137392" y="5833872"/>
+            <a:ext cx="585216" cy="585216"/>
           </a:xfrm>
           <a:prstGeom prst="ellipse">
             <a:avLst/>
@@ -4755,14 +4649,14 @@
       </p:sp>
       <p:sp>
         <p:nvSpPr>
-          <p:cNvPr id="18" name="Lightning Bolt 17"/>
+          <p:cNvPr id="17" name="Lightning Bolt 16"/>
           <p:cNvSpPr/>
           <p:nvPr/>
         </p:nvSpPr>
         <p:spPr>
           <a:xfrm>
-            <a:off x="11269980" y="5703570"/>
-            <a:ext cx="320040" cy="480060"/>
+            <a:off x="11283696" y="5907024"/>
+            <a:ext cx="292608" cy="438912"/>
           </a:xfrm>
           <a:prstGeom prst="lightningBolt">
             <a:avLst/>
@@ -4794,1541 +4688,6 @@
           <a:lstStyle/>
           <a:p>
             <a:pPr algn="ctr"/>
-          </a:p>
-        </p:txBody>
-      </p:sp>
-    </p:spTree>
-  </p:cSld>
-  <p:clrMapOvr>
-    <a:masterClrMapping/>
-  </p:clrMapOvr>
-</p:sld>
-</file>
-
-<file path=ppt/slides/slide10.xml><?xml version="1.0" encoding="utf-8"?>
-<p:sld xmlns:a="http://schemas.openxmlformats.org/drawingml/2006/main" xmlns:p="http://schemas.openxmlformats.org/presentationml/2006/main" xmlns:r="http://schemas.openxmlformats.org/officeDocument/2006/relationships">
-  <p:cSld>
-    <p:spTree>
-      <p:nvGrpSpPr>
-        <p:cNvPr id="1" name=""/>
-        <p:cNvGrpSpPr/>
-        <p:nvPr/>
-      </p:nvGrpSpPr>
-      <p:grpSpPr/>
-      <p:sp>
-        <p:nvSpPr>
-          <p:cNvPr id="2" name="Rectangle 1"/>
-          <p:cNvSpPr/>
-          <p:nvPr/>
-        </p:nvSpPr>
-        <p:spPr>
-          <a:xfrm>
-            <a:off x="0" y="0"/>
-            <a:ext cx="12191695" cy="146304"/>
-          </a:xfrm>
-          <a:prstGeom prst="rect">
-            <a:avLst/>
-          </a:prstGeom>
-          <a:solidFill>
-            <a:srgbClr val="1F4E79"/>
-          </a:solidFill>
-          <a:ln>
-            <a:noFill/>
-          </a:ln>
-          <a:effectLst/>
-        </p:spPr>
-        <p:style>
-          <a:lnRef idx="1">
-            <a:schemeClr val="accent1"/>
-          </a:lnRef>
-          <a:fillRef idx="3">
-            <a:schemeClr val="accent1"/>
-          </a:fillRef>
-          <a:effectRef idx="2">
-            <a:schemeClr val="accent1"/>
-          </a:effectRef>
-          <a:fontRef idx="minor">
-            <a:schemeClr val="lt1"/>
-          </a:fontRef>
-        </p:style>
-        <p:txBody>
-          <a:bodyPr rtlCol="0" anchor="ctr"/>
-          <a:lstStyle/>
-          <a:p>
-            <a:pPr algn="ctr"/>
-          </a:p>
-        </p:txBody>
-      </p:sp>
-      <p:sp>
-        <p:nvSpPr>
-          <p:cNvPr id="3" name="Oval 2"/>
-          <p:cNvSpPr/>
-          <p:nvPr/>
-        </p:nvSpPr>
-        <p:spPr>
-          <a:xfrm>
-            <a:off x="576072" y="539496"/>
-            <a:ext cx="128016" cy="128016"/>
-          </a:xfrm>
-          <a:prstGeom prst="ellipse">
-            <a:avLst/>
-          </a:prstGeom>
-          <a:solidFill>
-            <a:srgbClr val="1F4E79"/>
-          </a:solidFill>
-          <a:ln>
-            <a:noFill/>
-          </a:ln>
-          <a:effectLst/>
-        </p:spPr>
-        <p:style>
-          <a:lnRef idx="1">
-            <a:schemeClr val="accent1"/>
-          </a:lnRef>
-          <a:fillRef idx="3">
-            <a:schemeClr val="accent1"/>
-          </a:fillRef>
-          <a:effectRef idx="2">
-            <a:schemeClr val="accent1"/>
-          </a:effectRef>
-          <a:fontRef idx="minor">
-            <a:schemeClr val="lt1"/>
-          </a:fontRef>
-        </p:style>
-        <p:txBody>
-          <a:bodyPr rtlCol="0" anchor="ctr"/>
-          <a:lstStyle/>
-          <a:p>
-            <a:pPr algn="ctr"/>
-          </a:p>
-        </p:txBody>
-      </p:sp>
-      <p:sp>
-        <p:nvSpPr>
-          <p:cNvPr id="4" name="TextBox 3"/>
-          <p:cNvSpPr txBox="1"/>
-          <p:nvPr/>
-        </p:nvSpPr>
-        <p:spPr>
-          <a:xfrm>
-            <a:off x="822960" y="457200"/>
-            <a:ext cx="4572000" cy="365760"/>
-          </a:xfrm>
-          <a:prstGeom prst="rect">
-            <a:avLst/>
-          </a:prstGeom>
-          <a:noFill/>
-        </p:spPr>
-        <p:txBody>
-          <a:bodyPr wrap="square" lIns="0" rIns="0" tIns="0" bIns="0" anchor="t">
-            <a:spAutoFit/>
-          </a:bodyPr>
-          <a:lstStyle/>
-          <a:p>
-            <a:pPr algn="l"/>
-            <a:r>
-              <a:rPr sz="1100" b="1">
-                <a:solidFill>
-                  <a:srgbClr val="1F4E79"/>
-                </a:solidFill>
-                <a:latin typeface="Calibri"/>
-              </a:rPr>
-              <a:t>APPENDIX  •  SOURCES</a:t>
-            </a:r>
-          </a:p>
-        </p:txBody>
-      </p:sp>
-      <p:sp>
-        <p:nvSpPr>
-          <p:cNvPr id="5" name="TextBox 4"/>
-          <p:cNvSpPr txBox="1"/>
-          <p:nvPr/>
-        </p:nvSpPr>
-        <p:spPr>
-          <a:xfrm>
-            <a:off x="548640" y="1005840"/>
-            <a:ext cx="10972800" cy="731520"/>
-          </a:xfrm>
-          <a:prstGeom prst="rect">
-            <a:avLst/>
-          </a:prstGeom>
-          <a:noFill/>
-        </p:spPr>
-        <p:txBody>
-          <a:bodyPr wrap="square" lIns="0" rIns="0" tIns="0" bIns="0" anchor="t">
-            <a:spAutoFit/>
-          </a:bodyPr>
-          <a:lstStyle/>
-          <a:p>
-            <a:pPr algn="l"/>
-            <a:r>
-              <a:rPr sz="2200" b="1">
-                <a:solidFill>
-                  <a:srgbClr val="1F2937"/>
-                </a:solidFill>
-                <a:latin typeface="Calibri"/>
-              </a:rPr>
-              <a:t>Every statistic on every slide, with a citation.</a:t>
-            </a:r>
-          </a:p>
-        </p:txBody>
-      </p:sp>
-      <p:sp>
-        <p:nvSpPr>
-          <p:cNvPr id="6" name="TextBox 5"/>
-          <p:cNvSpPr txBox="1"/>
-          <p:nvPr/>
-        </p:nvSpPr>
-        <p:spPr>
-          <a:xfrm>
-            <a:off x="548640" y="1554480"/>
-            <a:ext cx="10972800" cy="365760"/>
-          </a:xfrm>
-          <a:prstGeom prst="rect">
-            <a:avLst/>
-          </a:prstGeom>
-          <a:noFill/>
-        </p:spPr>
-        <p:txBody>
-          <a:bodyPr wrap="square" lIns="0" rIns="0" tIns="0" bIns="0" anchor="t">
-            <a:spAutoFit/>
-          </a:bodyPr>
-          <a:lstStyle/>
-          <a:p>
-            <a:pPr algn="l"/>
-            <a:r>
-              <a:rPr sz="1200" b="0">
-                <a:solidFill>
-                  <a:srgbClr val="4B5563"/>
-                </a:solidFill>
-                <a:latin typeface="Calibri"/>
-              </a:rPr>
-              <a:t>Full notes preserved in the repo at  research/notes.md.</a:t>
-            </a:r>
-          </a:p>
-        </p:txBody>
-      </p:sp>
-      <p:sp>
-        <p:nvSpPr>
-          <p:cNvPr id="7" name="Oval 6"/>
-          <p:cNvSpPr/>
-          <p:nvPr/>
-        </p:nvSpPr>
-        <p:spPr>
-          <a:xfrm>
-            <a:off x="594360" y="2286000"/>
-            <a:ext cx="91440" cy="91440"/>
-          </a:xfrm>
-          <a:prstGeom prst="ellipse">
-            <a:avLst/>
-          </a:prstGeom>
-          <a:solidFill>
-            <a:srgbClr val="D97706"/>
-          </a:solidFill>
-          <a:ln>
-            <a:noFill/>
-          </a:ln>
-          <a:effectLst/>
-        </p:spPr>
-        <p:style>
-          <a:lnRef idx="1">
-            <a:schemeClr val="accent1"/>
-          </a:lnRef>
-          <a:fillRef idx="3">
-            <a:schemeClr val="accent1"/>
-          </a:fillRef>
-          <a:effectRef idx="2">
-            <a:schemeClr val="accent1"/>
-          </a:effectRef>
-          <a:fontRef idx="minor">
-            <a:schemeClr val="lt1"/>
-          </a:fontRef>
-        </p:style>
-        <p:txBody>
-          <a:bodyPr rtlCol="0" anchor="ctr"/>
-          <a:lstStyle/>
-          <a:p>
-            <a:pPr algn="ctr"/>
-          </a:p>
-        </p:txBody>
-      </p:sp>
-      <p:sp>
-        <p:nvSpPr>
-          <p:cNvPr id="8" name="TextBox 7"/>
-          <p:cNvSpPr txBox="1"/>
-          <p:nvPr/>
-        </p:nvSpPr>
-        <p:spPr>
-          <a:xfrm>
-            <a:off x="777240" y="2194560"/>
-            <a:ext cx="5257800" cy="228600"/>
-          </a:xfrm>
-          <a:prstGeom prst="rect">
-            <a:avLst/>
-          </a:prstGeom>
-          <a:noFill/>
-        </p:spPr>
-        <p:txBody>
-          <a:bodyPr wrap="square" lIns="0" rIns="0" tIns="0" bIns="0" anchor="t">
-            <a:spAutoFit/>
-          </a:bodyPr>
-          <a:lstStyle/>
-          <a:p>
-            <a:pPr algn="l"/>
-            <a:r>
-              <a:rPr sz="1100" b="1">
-                <a:solidFill>
-                  <a:srgbClr val="1F2937"/>
-                </a:solidFill>
-                <a:latin typeface="Calibri"/>
-              </a:rPr>
-              <a:t>Cooking-smoke deaths (~3.2M/yr global)</a:t>
-            </a:r>
-          </a:p>
-        </p:txBody>
-      </p:sp>
-      <p:sp>
-        <p:nvSpPr>
-          <p:cNvPr id="9" name="TextBox 8"/>
-          <p:cNvSpPr txBox="1"/>
-          <p:nvPr/>
-        </p:nvSpPr>
-        <p:spPr>
-          <a:xfrm>
-            <a:off x="777240" y="2395728"/>
-            <a:ext cx="5257800" cy="228600"/>
-          </a:xfrm>
-          <a:prstGeom prst="rect">
-            <a:avLst/>
-          </a:prstGeom>
-          <a:noFill/>
-        </p:spPr>
-        <p:txBody>
-          <a:bodyPr wrap="square" lIns="0" rIns="0" tIns="0" bIns="0" anchor="t">
-            <a:spAutoFit/>
-          </a:bodyPr>
-          <a:lstStyle/>
-          <a:p>
-            <a:pPr algn="l"/>
-            <a:r>
-              <a:rPr sz="1000" b="0">
-                <a:solidFill>
-                  <a:srgbClr val="4B5563"/>
-                </a:solidFill>
-                <a:latin typeface="Calibri"/>
-              </a:rPr>
-              <a:t>WHO Household Air Pollution Fact Sheet</a:t>
-            </a:r>
-          </a:p>
-        </p:txBody>
-      </p:sp>
-      <p:sp>
-        <p:nvSpPr>
-          <p:cNvPr id="10" name="Oval 9"/>
-          <p:cNvSpPr/>
-          <p:nvPr/>
-        </p:nvSpPr>
-        <p:spPr>
-          <a:xfrm>
-            <a:off x="6400800" y="2286000"/>
-            <a:ext cx="91440" cy="91440"/>
-          </a:xfrm>
-          <a:prstGeom prst="ellipse">
-            <a:avLst/>
-          </a:prstGeom>
-          <a:solidFill>
-            <a:srgbClr val="D97706"/>
-          </a:solidFill>
-          <a:ln>
-            <a:noFill/>
-          </a:ln>
-          <a:effectLst/>
-        </p:spPr>
-        <p:style>
-          <a:lnRef idx="1">
-            <a:schemeClr val="accent1"/>
-          </a:lnRef>
-          <a:fillRef idx="3">
-            <a:schemeClr val="accent1"/>
-          </a:fillRef>
-          <a:effectRef idx="2">
-            <a:schemeClr val="accent1"/>
-          </a:effectRef>
-          <a:fontRef idx="minor">
-            <a:schemeClr val="lt1"/>
-          </a:fontRef>
-        </p:style>
-        <p:txBody>
-          <a:bodyPr rtlCol="0" anchor="ctr"/>
-          <a:lstStyle/>
-          <a:p>
-            <a:pPr algn="ctr"/>
-          </a:p>
-        </p:txBody>
-      </p:sp>
-      <p:sp>
-        <p:nvSpPr>
-          <p:cNvPr id="11" name="TextBox 10"/>
-          <p:cNvSpPr txBox="1"/>
-          <p:nvPr/>
-        </p:nvSpPr>
-        <p:spPr>
-          <a:xfrm>
-            <a:off x="6583680" y="2194560"/>
-            <a:ext cx="5257800" cy="228600"/>
-          </a:xfrm>
-          <a:prstGeom prst="rect">
-            <a:avLst/>
-          </a:prstGeom>
-          <a:noFill/>
-        </p:spPr>
-        <p:txBody>
-          <a:bodyPr wrap="square" lIns="0" rIns="0" tIns="0" bIns="0" anchor="t">
-            <a:spAutoFit/>
-          </a:bodyPr>
-          <a:lstStyle/>
-          <a:p>
-            <a:pPr algn="l"/>
-            <a:r>
-              <a:rPr sz="1100" b="1">
-                <a:solidFill>
-                  <a:srgbClr val="1F2937"/>
-                </a:solidFill>
-                <a:latin typeface="Calibri"/>
-              </a:rPr>
-              <a:t>Sub-Saharan Africa household air pollution deaths (~815k/yr)</a:t>
-            </a:r>
-          </a:p>
-        </p:txBody>
-      </p:sp>
-      <p:sp>
-        <p:nvSpPr>
-          <p:cNvPr id="12" name="TextBox 11"/>
-          <p:cNvSpPr txBox="1"/>
-          <p:nvPr/>
-        </p:nvSpPr>
-        <p:spPr>
-          <a:xfrm>
-            <a:off x="6583680" y="2395728"/>
-            <a:ext cx="5257800" cy="228600"/>
-          </a:xfrm>
-          <a:prstGeom prst="rect">
-            <a:avLst/>
-          </a:prstGeom>
-          <a:noFill/>
-        </p:spPr>
-        <p:txBody>
-          <a:bodyPr wrap="square" lIns="0" rIns="0" tIns="0" bIns="0" anchor="t">
-            <a:spAutoFit/>
-          </a:bodyPr>
-          <a:lstStyle/>
-          <a:p>
-            <a:pPr algn="l"/>
-            <a:r>
-              <a:rPr sz="1000" b="0">
-                <a:solidFill>
-                  <a:srgbClr val="4B5563"/>
-                </a:solidFill>
-                <a:latin typeface="Calibri"/>
-              </a:rPr>
-              <a:t>IEA, Universal Access to Clean Cooking in Africa (2024)</a:t>
-            </a:r>
-          </a:p>
-        </p:txBody>
-      </p:sp>
-      <p:sp>
-        <p:nvSpPr>
-          <p:cNvPr id="13" name="Oval 12"/>
-          <p:cNvSpPr/>
-          <p:nvPr/>
-        </p:nvSpPr>
-        <p:spPr>
-          <a:xfrm>
-            <a:off x="594360" y="2834640"/>
-            <a:ext cx="91440" cy="91440"/>
-          </a:xfrm>
-          <a:prstGeom prst="ellipse">
-            <a:avLst/>
-          </a:prstGeom>
-          <a:solidFill>
-            <a:srgbClr val="D97706"/>
-          </a:solidFill>
-          <a:ln>
-            <a:noFill/>
-          </a:ln>
-          <a:effectLst/>
-        </p:spPr>
-        <p:style>
-          <a:lnRef idx="1">
-            <a:schemeClr val="accent1"/>
-          </a:lnRef>
-          <a:fillRef idx="3">
-            <a:schemeClr val="accent1"/>
-          </a:fillRef>
-          <a:effectRef idx="2">
-            <a:schemeClr val="accent1"/>
-          </a:effectRef>
-          <a:fontRef idx="minor">
-            <a:schemeClr val="lt1"/>
-          </a:fontRef>
-        </p:style>
-        <p:txBody>
-          <a:bodyPr rtlCol="0" anchor="ctr"/>
-          <a:lstStyle/>
-          <a:p>
-            <a:pPr algn="ctr"/>
-          </a:p>
-        </p:txBody>
-      </p:sp>
-      <p:sp>
-        <p:nvSpPr>
-          <p:cNvPr id="14" name="TextBox 13"/>
-          <p:cNvSpPr txBox="1"/>
-          <p:nvPr/>
-        </p:nvSpPr>
-        <p:spPr>
-          <a:xfrm>
-            <a:off x="777240" y="2743200"/>
-            <a:ext cx="5257800" cy="228600"/>
-          </a:xfrm>
-          <a:prstGeom prst="rect">
-            <a:avLst/>
-          </a:prstGeom>
-          <a:noFill/>
-        </p:spPr>
-        <p:txBody>
-          <a:bodyPr wrap="square" lIns="0" rIns="0" tIns="0" bIns="0" anchor="t">
-            <a:spAutoFit/>
-          </a:bodyPr>
-          <a:lstStyle/>
-          <a:p>
-            <a:pPr algn="l"/>
-            <a:r>
-              <a:rPr sz="1100" b="1">
-                <a:solidFill>
-                  <a:srgbClr val="1F2937"/>
-                </a:solidFill>
-                <a:latin typeface="Calibri"/>
-              </a:rPr>
-              <a:t>Outdoor air pollution deaths (~4.2M/yr)</a:t>
-            </a:r>
-          </a:p>
-        </p:txBody>
-      </p:sp>
-      <p:sp>
-        <p:nvSpPr>
-          <p:cNvPr id="15" name="TextBox 14"/>
-          <p:cNvSpPr txBox="1"/>
-          <p:nvPr/>
-        </p:nvSpPr>
-        <p:spPr>
-          <a:xfrm>
-            <a:off x="777240" y="2944368"/>
-            <a:ext cx="5257800" cy="228600"/>
-          </a:xfrm>
-          <a:prstGeom prst="rect">
-            <a:avLst/>
-          </a:prstGeom>
-          <a:noFill/>
-        </p:spPr>
-        <p:txBody>
-          <a:bodyPr wrap="square" lIns="0" rIns="0" tIns="0" bIns="0" anchor="t">
-            <a:spAutoFit/>
-          </a:bodyPr>
-          <a:lstStyle/>
-          <a:p>
-            <a:pPr algn="l"/>
-            <a:r>
-              <a:rPr sz="1000" b="0">
-                <a:solidFill>
-                  <a:srgbClr val="4B5563"/>
-                </a:solidFill>
-                <a:latin typeface="Calibri"/>
-              </a:rPr>
-              <a:t>WHO Ambient Air Pollution</a:t>
-            </a:r>
-          </a:p>
-        </p:txBody>
-      </p:sp>
-      <p:sp>
-        <p:nvSpPr>
-          <p:cNvPr id="16" name="Oval 15"/>
-          <p:cNvSpPr/>
-          <p:nvPr/>
-        </p:nvSpPr>
-        <p:spPr>
-          <a:xfrm>
-            <a:off x="6400800" y="2834640"/>
-            <a:ext cx="91440" cy="91440"/>
-          </a:xfrm>
-          <a:prstGeom prst="ellipse">
-            <a:avLst/>
-          </a:prstGeom>
-          <a:solidFill>
-            <a:srgbClr val="D97706"/>
-          </a:solidFill>
-          <a:ln>
-            <a:noFill/>
-          </a:ln>
-          <a:effectLst/>
-        </p:spPr>
-        <p:style>
-          <a:lnRef idx="1">
-            <a:schemeClr val="accent1"/>
-          </a:lnRef>
-          <a:fillRef idx="3">
-            <a:schemeClr val="accent1"/>
-          </a:fillRef>
-          <a:effectRef idx="2">
-            <a:schemeClr val="accent1"/>
-          </a:effectRef>
-          <a:fontRef idx="minor">
-            <a:schemeClr val="lt1"/>
-          </a:fontRef>
-        </p:style>
-        <p:txBody>
-          <a:bodyPr rtlCol="0" anchor="ctr"/>
-          <a:lstStyle/>
-          <a:p>
-            <a:pPr algn="ctr"/>
-          </a:p>
-        </p:txBody>
-      </p:sp>
-      <p:sp>
-        <p:nvSpPr>
-          <p:cNvPr id="17" name="TextBox 16"/>
-          <p:cNvSpPr txBox="1"/>
-          <p:nvPr/>
-        </p:nvSpPr>
-        <p:spPr>
-          <a:xfrm>
-            <a:off x="6583680" y="2743200"/>
-            <a:ext cx="5257800" cy="228600"/>
-          </a:xfrm>
-          <a:prstGeom prst="rect">
-            <a:avLst/>
-          </a:prstGeom>
-          <a:noFill/>
-        </p:spPr>
-        <p:txBody>
-          <a:bodyPr wrap="square" lIns="0" rIns="0" tIns="0" bIns="0" anchor="t">
-            <a:spAutoFit/>
-          </a:bodyPr>
-          <a:lstStyle/>
-          <a:p>
-            <a:pPr algn="l"/>
-            <a:r>
-              <a:rPr sz="1100" b="1">
-                <a:solidFill>
-                  <a:srgbClr val="1F2937"/>
-                </a:solidFill>
-                <a:latin typeface="Calibri"/>
-              </a:rPr>
-              <a:t>Africa electricity access (~600M without; ~730M globally)</a:t>
-            </a:r>
-          </a:p>
-        </p:txBody>
-      </p:sp>
-      <p:sp>
-        <p:nvSpPr>
-          <p:cNvPr id="18" name="TextBox 17"/>
-          <p:cNvSpPr txBox="1"/>
-          <p:nvPr/>
-        </p:nvSpPr>
-        <p:spPr>
-          <a:xfrm>
-            <a:off x="6583680" y="2944368"/>
-            <a:ext cx="5257800" cy="228600"/>
-          </a:xfrm>
-          <a:prstGeom prst="rect">
-            <a:avLst/>
-          </a:prstGeom>
-          <a:noFill/>
-        </p:spPr>
-        <p:txBody>
-          <a:bodyPr wrap="square" lIns="0" rIns="0" tIns="0" bIns="0" anchor="t">
-            <a:spAutoFit/>
-          </a:bodyPr>
-          <a:lstStyle/>
-          <a:p>
-            <a:pPr algn="l"/>
-            <a:r>
-              <a:rPr sz="1000" b="0">
-                <a:solidFill>
-                  <a:srgbClr val="4B5563"/>
-                </a:solidFill>
-                <a:latin typeface="Calibri"/>
-              </a:rPr>
-              <a:t>IEA, Financing Electricity Access in Africa (2025)</a:t>
-            </a:r>
-          </a:p>
-        </p:txBody>
-      </p:sp>
-      <p:sp>
-        <p:nvSpPr>
-          <p:cNvPr id="19" name="Oval 18"/>
-          <p:cNvSpPr/>
-          <p:nvPr/>
-        </p:nvSpPr>
-        <p:spPr>
-          <a:xfrm>
-            <a:off x="594360" y="3383280"/>
-            <a:ext cx="91440" cy="91440"/>
-          </a:xfrm>
-          <a:prstGeom prst="ellipse">
-            <a:avLst/>
-          </a:prstGeom>
-          <a:solidFill>
-            <a:srgbClr val="D97706"/>
-          </a:solidFill>
-          <a:ln>
-            <a:noFill/>
-          </a:ln>
-          <a:effectLst/>
-        </p:spPr>
-        <p:style>
-          <a:lnRef idx="1">
-            <a:schemeClr val="accent1"/>
-          </a:lnRef>
-          <a:fillRef idx="3">
-            <a:schemeClr val="accent1"/>
-          </a:fillRef>
-          <a:effectRef idx="2">
-            <a:schemeClr val="accent1"/>
-          </a:effectRef>
-          <a:fontRef idx="minor">
-            <a:schemeClr val="lt1"/>
-          </a:fontRef>
-        </p:style>
-        <p:txBody>
-          <a:bodyPr rtlCol="0" anchor="ctr"/>
-          <a:lstStyle/>
-          <a:p>
-            <a:pPr algn="ctr"/>
-          </a:p>
-        </p:txBody>
-      </p:sp>
-      <p:sp>
-        <p:nvSpPr>
-          <p:cNvPr id="20" name="TextBox 19"/>
-          <p:cNvSpPr txBox="1"/>
-          <p:nvPr/>
-        </p:nvSpPr>
-        <p:spPr>
-          <a:xfrm>
-            <a:off x="777240" y="3291840"/>
-            <a:ext cx="5257800" cy="228600"/>
-          </a:xfrm>
-          <a:prstGeom prst="rect">
-            <a:avLst/>
-          </a:prstGeom>
-          <a:noFill/>
-        </p:spPr>
-        <p:txBody>
-          <a:bodyPr wrap="square" lIns="0" rIns="0" tIns="0" bIns="0" anchor="t">
-            <a:spAutoFit/>
-          </a:bodyPr>
-          <a:lstStyle/>
-          <a:p>
-            <a:pPr algn="l"/>
-            <a:r>
-              <a:rPr sz="1100" b="1">
-                <a:solidFill>
-                  <a:srgbClr val="1F2937"/>
-                </a:solidFill>
-                <a:latin typeface="Calibri"/>
-              </a:rPr>
-              <a:t>Africa cumulative CO₂ emissions (&lt;3%; sub-Saharan ~0.55%)</a:t>
-            </a:r>
-          </a:p>
-        </p:txBody>
-      </p:sp>
-      <p:sp>
-        <p:nvSpPr>
-          <p:cNvPr id="21" name="TextBox 20"/>
-          <p:cNvSpPr txBox="1"/>
-          <p:nvPr/>
-        </p:nvSpPr>
-        <p:spPr>
-          <a:xfrm>
-            <a:off x="777240" y="3493008"/>
-            <a:ext cx="5257800" cy="228600"/>
-          </a:xfrm>
-          <a:prstGeom prst="rect">
-            <a:avLst/>
-          </a:prstGeom>
-          <a:noFill/>
-        </p:spPr>
-        <p:txBody>
-          <a:bodyPr wrap="square" lIns="0" rIns="0" tIns="0" bIns="0" anchor="t">
-            <a:spAutoFit/>
-          </a:bodyPr>
-          <a:lstStyle/>
-          <a:p>
-            <a:pPr algn="l"/>
-            <a:r>
-              <a:rPr sz="1000" b="0">
-                <a:solidFill>
-                  <a:srgbClr val="4B5563"/>
-                </a:solidFill>
-                <a:latin typeface="Calibri"/>
-              </a:rPr>
-              <a:t>Energy for Growth Hub (citing Our World in Data)</a:t>
-            </a:r>
-          </a:p>
-        </p:txBody>
-      </p:sp>
-      <p:sp>
-        <p:nvSpPr>
-          <p:cNvPr id="22" name="Oval 21"/>
-          <p:cNvSpPr/>
-          <p:nvPr/>
-        </p:nvSpPr>
-        <p:spPr>
-          <a:xfrm>
-            <a:off x="6400800" y="3383280"/>
-            <a:ext cx="91440" cy="91440"/>
-          </a:xfrm>
-          <a:prstGeom prst="ellipse">
-            <a:avLst/>
-          </a:prstGeom>
-          <a:solidFill>
-            <a:srgbClr val="D97706"/>
-          </a:solidFill>
-          <a:ln>
-            <a:noFill/>
-          </a:ln>
-          <a:effectLst/>
-        </p:spPr>
-        <p:style>
-          <a:lnRef idx="1">
-            <a:schemeClr val="accent1"/>
-          </a:lnRef>
-          <a:fillRef idx="3">
-            <a:schemeClr val="accent1"/>
-          </a:fillRef>
-          <a:effectRef idx="2">
-            <a:schemeClr val="accent1"/>
-          </a:effectRef>
-          <a:fontRef idx="minor">
-            <a:schemeClr val="lt1"/>
-          </a:fontRef>
-        </p:style>
-        <p:txBody>
-          <a:bodyPr rtlCol="0" anchor="ctr"/>
-          <a:lstStyle/>
-          <a:p>
-            <a:pPr algn="ctr"/>
-          </a:p>
-        </p:txBody>
-      </p:sp>
-      <p:sp>
-        <p:nvSpPr>
-          <p:cNvPr id="23" name="TextBox 22"/>
-          <p:cNvSpPr txBox="1"/>
-          <p:nvPr/>
-        </p:nvSpPr>
-        <p:spPr>
-          <a:xfrm>
-            <a:off x="6583680" y="3291840"/>
-            <a:ext cx="5257800" cy="228600"/>
-          </a:xfrm>
-          <a:prstGeom prst="rect">
-            <a:avLst/>
-          </a:prstGeom>
-          <a:noFill/>
-        </p:spPr>
-        <p:txBody>
-          <a:bodyPr wrap="square" lIns="0" rIns="0" tIns="0" bIns="0" anchor="t">
-            <a:spAutoFit/>
-          </a:bodyPr>
-          <a:lstStyle/>
-          <a:p>
-            <a:pPr algn="l"/>
-            <a:r>
-              <a:rPr sz="1100" b="1">
-                <a:solidFill>
-                  <a:srgbClr val="1F2937"/>
-                </a:solidFill>
-                <a:latin typeface="Calibri"/>
-              </a:rPr>
-              <a:t>Africa population share (~17% global)</a:t>
-            </a:r>
-          </a:p>
-        </p:txBody>
-      </p:sp>
-      <p:sp>
-        <p:nvSpPr>
-          <p:cNvPr id="24" name="TextBox 23"/>
-          <p:cNvSpPr txBox="1"/>
-          <p:nvPr/>
-        </p:nvSpPr>
-        <p:spPr>
-          <a:xfrm>
-            <a:off x="6583680" y="3493008"/>
-            <a:ext cx="5257800" cy="228600"/>
-          </a:xfrm>
-          <a:prstGeom prst="rect">
-            <a:avLst/>
-          </a:prstGeom>
-          <a:noFill/>
-        </p:spPr>
-        <p:txBody>
-          <a:bodyPr wrap="square" lIns="0" rIns="0" tIns="0" bIns="0" anchor="t">
-            <a:spAutoFit/>
-          </a:bodyPr>
-          <a:lstStyle/>
-          <a:p>
-            <a:pPr algn="l"/>
-            <a:r>
-              <a:rPr sz="1000" b="0">
-                <a:solidFill>
-                  <a:srgbClr val="4B5563"/>
-                </a:solidFill>
-                <a:latin typeface="Calibri"/>
-              </a:rPr>
-              <a:t>UN World Population Prospects</a:t>
-            </a:r>
-          </a:p>
-        </p:txBody>
-      </p:sp>
-      <p:sp>
-        <p:nvSpPr>
-          <p:cNvPr id="25" name="Oval 24"/>
-          <p:cNvSpPr/>
-          <p:nvPr/>
-        </p:nvSpPr>
-        <p:spPr>
-          <a:xfrm>
-            <a:off x="594360" y="3931920"/>
-            <a:ext cx="91440" cy="91440"/>
-          </a:xfrm>
-          <a:prstGeom prst="ellipse">
-            <a:avLst/>
-          </a:prstGeom>
-          <a:solidFill>
-            <a:srgbClr val="D97706"/>
-          </a:solidFill>
-          <a:ln>
-            <a:noFill/>
-          </a:ln>
-          <a:effectLst/>
-        </p:spPr>
-        <p:style>
-          <a:lnRef idx="1">
-            <a:schemeClr val="accent1"/>
-          </a:lnRef>
-          <a:fillRef idx="3">
-            <a:schemeClr val="accent1"/>
-          </a:fillRef>
-          <a:effectRef idx="2">
-            <a:schemeClr val="accent1"/>
-          </a:effectRef>
-          <a:fontRef idx="minor">
-            <a:schemeClr val="lt1"/>
-          </a:fontRef>
-        </p:style>
-        <p:txBody>
-          <a:bodyPr rtlCol="0" anchor="ctr"/>
-          <a:lstStyle/>
-          <a:p>
-            <a:pPr algn="ctr"/>
-          </a:p>
-        </p:txBody>
-      </p:sp>
-      <p:sp>
-        <p:nvSpPr>
-          <p:cNvPr id="26" name="TextBox 25"/>
-          <p:cNvSpPr txBox="1"/>
-          <p:nvPr/>
-        </p:nvSpPr>
-        <p:spPr>
-          <a:xfrm>
-            <a:off x="777240" y="3840480"/>
-            <a:ext cx="5257800" cy="228600"/>
-          </a:xfrm>
-          <a:prstGeom prst="rect">
-            <a:avLst/>
-          </a:prstGeom>
-          <a:noFill/>
-        </p:spPr>
-        <p:txBody>
-          <a:bodyPr wrap="square" lIns="0" rIns="0" tIns="0" bIns="0" anchor="t">
-            <a:spAutoFit/>
-          </a:bodyPr>
-          <a:lstStyle/>
-          <a:p>
-            <a:pPr algn="l"/>
-            <a:r>
-              <a:rPr sz="1100" b="1">
-                <a:solidFill>
-                  <a:srgbClr val="1F2937"/>
-                </a:solidFill>
-                <a:latin typeface="Calibri"/>
-              </a:rPr>
-              <a:t>Zambia capacity mix (85% hydropower; ~3,986 MW)</a:t>
-            </a:r>
-          </a:p>
-        </p:txBody>
-      </p:sp>
-      <p:sp>
-        <p:nvSpPr>
-          <p:cNvPr id="27" name="TextBox 26"/>
-          <p:cNvSpPr txBox="1"/>
-          <p:nvPr/>
-        </p:nvSpPr>
-        <p:spPr>
-          <a:xfrm>
-            <a:off x="777240" y="4041648"/>
-            <a:ext cx="5257800" cy="228600"/>
-          </a:xfrm>
-          <a:prstGeom prst="rect">
-            <a:avLst/>
-          </a:prstGeom>
-          <a:noFill/>
-        </p:spPr>
-        <p:txBody>
-          <a:bodyPr wrap="square" lIns="0" rIns="0" tIns="0" bIns="0" anchor="t">
-            <a:spAutoFit/>
-          </a:bodyPr>
-          <a:lstStyle/>
-          <a:p>
-            <a:pPr algn="l"/>
-            <a:r>
-              <a:rPr sz="1000" b="0">
-                <a:solidFill>
-                  <a:srgbClr val="4B5563"/>
-                </a:solidFill>
-                <a:latin typeface="Calibri"/>
-              </a:rPr>
-              <a:t>Global Legal Insights, Energy Laws and Regulations 2025: Zambia</a:t>
-            </a:r>
-          </a:p>
-        </p:txBody>
-      </p:sp>
-      <p:sp>
-        <p:nvSpPr>
-          <p:cNvPr id="28" name="Oval 27"/>
-          <p:cNvSpPr/>
-          <p:nvPr/>
-        </p:nvSpPr>
-        <p:spPr>
-          <a:xfrm>
-            <a:off x="6400800" y="3931920"/>
-            <a:ext cx="91440" cy="91440"/>
-          </a:xfrm>
-          <a:prstGeom prst="ellipse">
-            <a:avLst/>
-          </a:prstGeom>
-          <a:solidFill>
-            <a:srgbClr val="D97706"/>
-          </a:solidFill>
-          <a:ln>
-            <a:noFill/>
-          </a:ln>
-          <a:effectLst/>
-        </p:spPr>
-        <p:style>
-          <a:lnRef idx="1">
-            <a:schemeClr val="accent1"/>
-          </a:lnRef>
-          <a:fillRef idx="3">
-            <a:schemeClr val="accent1"/>
-          </a:fillRef>
-          <a:effectRef idx="2">
-            <a:schemeClr val="accent1"/>
-          </a:effectRef>
-          <a:fontRef idx="minor">
-            <a:schemeClr val="lt1"/>
-          </a:fontRef>
-        </p:style>
-        <p:txBody>
-          <a:bodyPr rtlCol="0" anchor="ctr"/>
-          <a:lstStyle/>
-          <a:p>
-            <a:pPr algn="ctr"/>
-          </a:p>
-        </p:txBody>
-      </p:sp>
-      <p:sp>
-        <p:nvSpPr>
-          <p:cNvPr id="29" name="TextBox 28"/>
-          <p:cNvSpPr txBox="1"/>
-          <p:nvPr/>
-        </p:nvSpPr>
-        <p:spPr>
-          <a:xfrm>
-            <a:off x="6583680" y="3840480"/>
-            <a:ext cx="5257800" cy="228600"/>
-          </a:xfrm>
-          <a:prstGeom prst="rect">
-            <a:avLst/>
-          </a:prstGeom>
-          <a:noFill/>
-        </p:spPr>
-        <p:txBody>
-          <a:bodyPr wrap="square" lIns="0" rIns="0" tIns="0" bIns="0" anchor="t">
-            <a:spAutoFit/>
-          </a:bodyPr>
-          <a:lstStyle/>
-          <a:p>
-            <a:pPr algn="l"/>
-            <a:r>
-              <a:rPr sz="1100" b="1">
-                <a:solidFill>
-                  <a:srgbClr val="1F2937"/>
-                </a:solidFill>
-                <a:latin typeface="Calibri"/>
-              </a:rPr>
-              <a:t>Zambia 2024 load shedding (up to 21 hrs/day)</a:t>
-            </a:r>
-          </a:p>
-        </p:txBody>
-      </p:sp>
-      <p:sp>
-        <p:nvSpPr>
-          <p:cNvPr id="30" name="TextBox 29"/>
-          <p:cNvSpPr txBox="1"/>
-          <p:nvPr/>
-        </p:nvSpPr>
-        <p:spPr>
-          <a:xfrm>
-            <a:off x="6583680" y="4041648"/>
-            <a:ext cx="5257800" cy="228600"/>
-          </a:xfrm>
-          <a:prstGeom prst="rect">
-            <a:avLst/>
-          </a:prstGeom>
-          <a:noFill/>
-        </p:spPr>
-        <p:txBody>
-          <a:bodyPr wrap="square" lIns="0" rIns="0" tIns="0" bIns="0" anchor="t">
-            <a:spAutoFit/>
-          </a:bodyPr>
-          <a:lstStyle/>
-          <a:p>
-            <a:pPr algn="l"/>
-            <a:r>
-              <a:rPr sz="1000" b="0">
-                <a:solidFill>
-                  <a:srgbClr val="4B5563"/>
-                </a:solidFill>
-                <a:latin typeface="Calibri"/>
-              </a:rPr>
-              <a:t>Pulitzer Center; Afrobarometer AD1178 (2025)</a:t>
-            </a:r>
-          </a:p>
-        </p:txBody>
-      </p:sp>
-      <p:sp>
-        <p:nvSpPr>
-          <p:cNvPr id="31" name="Oval 30"/>
-          <p:cNvSpPr/>
-          <p:nvPr/>
-        </p:nvSpPr>
-        <p:spPr>
-          <a:xfrm>
-            <a:off x="594360" y="4480560"/>
-            <a:ext cx="91440" cy="91440"/>
-          </a:xfrm>
-          <a:prstGeom prst="ellipse">
-            <a:avLst/>
-          </a:prstGeom>
-          <a:solidFill>
-            <a:srgbClr val="D97706"/>
-          </a:solidFill>
-          <a:ln>
-            <a:noFill/>
-          </a:ln>
-          <a:effectLst/>
-        </p:spPr>
-        <p:style>
-          <a:lnRef idx="1">
-            <a:schemeClr val="accent1"/>
-          </a:lnRef>
-          <a:fillRef idx="3">
-            <a:schemeClr val="accent1"/>
-          </a:fillRef>
-          <a:effectRef idx="2">
-            <a:schemeClr val="accent1"/>
-          </a:effectRef>
-          <a:fontRef idx="minor">
-            <a:schemeClr val="lt1"/>
-          </a:fontRef>
-        </p:style>
-        <p:txBody>
-          <a:bodyPr rtlCol="0" anchor="ctr"/>
-          <a:lstStyle/>
-          <a:p>
-            <a:pPr algn="ctr"/>
-          </a:p>
-        </p:txBody>
-      </p:sp>
-      <p:sp>
-        <p:nvSpPr>
-          <p:cNvPr id="32" name="TextBox 31"/>
-          <p:cNvSpPr txBox="1"/>
-          <p:nvPr/>
-        </p:nvSpPr>
-        <p:spPr>
-          <a:xfrm>
-            <a:off x="777240" y="4389120"/>
-            <a:ext cx="5257800" cy="228600"/>
-          </a:xfrm>
-          <a:prstGeom prst="rect">
-            <a:avLst/>
-          </a:prstGeom>
-          <a:noFill/>
-        </p:spPr>
-        <p:txBody>
-          <a:bodyPr wrap="square" lIns="0" rIns="0" tIns="0" bIns="0" anchor="t">
-            <a:spAutoFit/>
-          </a:bodyPr>
-          <a:lstStyle/>
-          <a:p>
-            <a:pPr algn="l"/>
-            <a:r>
-              <a:rPr sz="1100" b="1">
-                <a:solidFill>
-                  <a:srgbClr val="1F2937"/>
-                </a:solidFill>
-                <a:latin typeface="Calibri"/>
-              </a:rPr>
-              <a:t>Natural gas vs coal CO₂ (50–60% less); Africa gas reserves (~13%)</a:t>
-            </a:r>
-          </a:p>
-        </p:txBody>
-      </p:sp>
-      <p:sp>
-        <p:nvSpPr>
-          <p:cNvPr id="33" name="TextBox 32"/>
-          <p:cNvSpPr txBox="1"/>
-          <p:nvPr/>
-        </p:nvSpPr>
-        <p:spPr>
-          <a:xfrm>
-            <a:off x="777240" y="4590288"/>
-            <a:ext cx="5257800" cy="228600"/>
-          </a:xfrm>
-          <a:prstGeom prst="rect">
-            <a:avLst/>
-          </a:prstGeom>
-          <a:noFill/>
-        </p:spPr>
-        <p:txBody>
-          <a:bodyPr wrap="square" lIns="0" rIns="0" tIns="0" bIns="0" anchor="t">
-            <a:spAutoFit/>
-          </a:bodyPr>
-          <a:lstStyle/>
-          <a:p>
-            <a:pPr algn="l"/>
-            <a:r>
-              <a:rPr sz="1000" b="0">
-                <a:solidFill>
-                  <a:srgbClr val="4B5563"/>
-                </a:solidFill>
-                <a:latin typeface="Calibri"/>
-              </a:rPr>
-              <a:t>Atlantic Council, Natural gas in Africa's energy transition</a:t>
-            </a:r>
-          </a:p>
-        </p:txBody>
-      </p:sp>
-      <p:sp>
-        <p:nvSpPr>
-          <p:cNvPr id="34" name="Oval 33"/>
-          <p:cNvSpPr/>
-          <p:nvPr/>
-        </p:nvSpPr>
-        <p:spPr>
-          <a:xfrm>
-            <a:off x="6400800" y="4480560"/>
-            <a:ext cx="91440" cy="91440"/>
-          </a:xfrm>
-          <a:prstGeom prst="ellipse">
-            <a:avLst/>
-          </a:prstGeom>
-          <a:solidFill>
-            <a:srgbClr val="D97706"/>
-          </a:solidFill>
-          <a:ln>
-            <a:noFill/>
-          </a:ln>
-          <a:effectLst/>
-        </p:spPr>
-        <p:style>
-          <a:lnRef idx="1">
-            <a:schemeClr val="accent1"/>
-          </a:lnRef>
-          <a:fillRef idx="3">
-            <a:schemeClr val="accent1"/>
-          </a:fillRef>
-          <a:effectRef idx="2">
-            <a:schemeClr val="accent1"/>
-          </a:effectRef>
-          <a:fontRef idx="minor">
-            <a:schemeClr val="lt1"/>
-          </a:fontRef>
-        </p:style>
-        <p:txBody>
-          <a:bodyPr rtlCol="0" anchor="ctr"/>
-          <a:lstStyle/>
-          <a:p>
-            <a:pPr algn="ctr"/>
-          </a:p>
-        </p:txBody>
-      </p:sp>
-      <p:sp>
-        <p:nvSpPr>
-          <p:cNvPr id="35" name="TextBox 34"/>
-          <p:cNvSpPr txBox="1"/>
-          <p:nvPr/>
-        </p:nvSpPr>
-        <p:spPr>
-          <a:xfrm>
-            <a:off x="6583680" y="4389120"/>
-            <a:ext cx="5257800" cy="228600"/>
-          </a:xfrm>
-          <a:prstGeom prst="rect">
-            <a:avLst/>
-          </a:prstGeom>
-          <a:noFill/>
-        </p:spPr>
-        <p:txBody>
-          <a:bodyPr wrap="square" lIns="0" rIns="0" tIns="0" bIns="0" anchor="t">
-            <a:spAutoFit/>
-          </a:bodyPr>
-          <a:lstStyle/>
-          <a:p>
-            <a:pPr algn="l"/>
-            <a:r>
-              <a:rPr sz="1100" b="1">
-                <a:solidFill>
-                  <a:srgbClr val="1F2937"/>
-                </a:solidFill>
-                <a:latin typeface="Calibri"/>
-              </a:rPr>
-              <a:t>Steel &amp; cement embodied emissions in renewables</a:t>
-            </a:r>
-          </a:p>
-        </p:txBody>
-      </p:sp>
-      <p:sp>
-        <p:nvSpPr>
-          <p:cNvPr id="36" name="TextBox 35"/>
-          <p:cNvSpPr txBox="1"/>
-          <p:nvPr/>
-        </p:nvSpPr>
-        <p:spPr>
-          <a:xfrm>
-            <a:off x="6583680" y="4590288"/>
-            <a:ext cx="5257800" cy="228600"/>
-          </a:xfrm>
-          <a:prstGeom prst="rect">
-            <a:avLst/>
-          </a:prstGeom>
-          <a:noFill/>
-        </p:spPr>
-        <p:txBody>
-          <a:bodyPr wrap="square" lIns="0" rIns="0" tIns="0" bIns="0" anchor="t">
-            <a:spAutoFit/>
-          </a:bodyPr>
-          <a:lstStyle/>
-          <a:p>
-            <a:pPr algn="l"/>
-            <a:r>
-              <a:rPr sz="1000" b="0">
-                <a:solidFill>
-                  <a:srgbClr val="4B5563"/>
-                </a:solidFill>
-                <a:latin typeface="Calibri"/>
-              </a:rPr>
-              <a:t>MIT Climate Portal</a:t>
-            </a:r>
-          </a:p>
-        </p:txBody>
-      </p:sp>
-      <p:sp>
-        <p:nvSpPr>
-          <p:cNvPr id="37" name="Oval 36"/>
-          <p:cNvSpPr/>
-          <p:nvPr/>
-        </p:nvSpPr>
-        <p:spPr>
-          <a:xfrm>
-            <a:off x="594360" y="5029200"/>
-            <a:ext cx="91440" cy="91440"/>
-          </a:xfrm>
-          <a:prstGeom prst="ellipse">
-            <a:avLst/>
-          </a:prstGeom>
-          <a:solidFill>
-            <a:srgbClr val="D97706"/>
-          </a:solidFill>
-          <a:ln>
-            <a:noFill/>
-          </a:ln>
-          <a:effectLst/>
-        </p:spPr>
-        <p:style>
-          <a:lnRef idx="1">
-            <a:schemeClr val="accent1"/>
-          </a:lnRef>
-          <a:fillRef idx="3">
-            <a:schemeClr val="accent1"/>
-          </a:fillRef>
-          <a:effectRef idx="2">
-            <a:schemeClr val="accent1"/>
-          </a:effectRef>
-          <a:fontRef idx="minor">
-            <a:schemeClr val="lt1"/>
-          </a:fontRef>
-        </p:style>
-        <p:txBody>
-          <a:bodyPr rtlCol="0" anchor="ctr"/>
-          <a:lstStyle/>
-          <a:p>
-            <a:pPr algn="ctr"/>
-          </a:p>
-        </p:txBody>
-      </p:sp>
-      <p:sp>
-        <p:nvSpPr>
-          <p:cNvPr id="38" name="TextBox 37"/>
-          <p:cNvSpPr txBox="1"/>
-          <p:nvPr/>
-        </p:nvSpPr>
-        <p:spPr>
-          <a:xfrm>
-            <a:off x="777240" y="4937760"/>
-            <a:ext cx="5257800" cy="228600"/>
-          </a:xfrm>
-          <a:prstGeom prst="rect">
-            <a:avLst/>
-          </a:prstGeom>
-          <a:noFill/>
-        </p:spPr>
-        <p:txBody>
-          <a:bodyPr wrap="square" lIns="0" rIns="0" tIns="0" bIns="0" anchor="t">
-            <a:spAutoFit/>
-          </a:bodyPr>
-          <a:lstStyle/>
-          <a:p>
-            <a:pPr algn="l"/>
-            <a:r>
-              <a:rPr sz="1100" b="1">
-                <a:solidFill>
-                  <a:srgbClr val="1F2937"/>
-                </a:solidFill>
-                <a:latin typeface="Calibri"/>
-              </a:rPr>
-              <a:t>Life expectancy vs electricity per capita (illustrative)</a:t>
-            </a:r>
-          </a:p>
-        </p:txBody>
-      </p:sp>
-      <p:sp>
-        <p:nvSpPr>
-          <p:cNvPr id="39" name="TextBox 38"/>
-          <p:cNvSpPr txBox="1"/>
-          <p:nvPr/>
-        </p:nvSpPr>
-        <p:spPr>
-          <a:xfrm>
-            <a:off x="777240" y="5138928"/>
-            <a:ext cx="5257800" cy="228600"/>
-          </a:xfrm>
-          <a:prstGeom prst="rect">
-            <a:avLst/>
-          </a:prstGeom>
-          <a:noFill/>
-        </p:spPr>
-        <p:txBody>
-          <a:bodyPr wrap="square" lIns="0" rIns="0" tIns="0" bIns="0" anchor="t">
-            <a:spAutoFit/>
-          </a:bodyPr>
-          <a:lstStyle/>
-          <a:p>
-            <a:pPr algn="l"/>
-            <a:r>
-              <a:rPr sz="1000" b="0">
-                <a:solidFill>
-                  <a:srgbClr val="4B5563"/>
-                </a:solidFill>
-                <a:latin typeface="Calibri"/>
-              </a:rPr>
-              <a:t>World Bank Indicators (kWh/capita; life expectancy at birth)</a:t>
-            </a:r>
-          </a:p>
-        </p:txBody>
-      </p:sp>
-      <p:sp>
-        <p:nvSpPr>
-          <p:cNvPr id="40" name="TextBox 39"/>
-          <p:cNvSpPr txBox="1"/>
-          <p:nvPr/>
-        </p:nvSpPr>
-        <p:spPr>
-          <a:xfrm>
-            <a:off x="457200" y="6537960"/>
-            <a:ext cx="7315200" cy="274320"/>
-          </a:xfrm>
-          <a:prstGeom prst="rect">
-            <a:avLst/>
-          </a:prstGeom>
-          <a:noFill/>
-        </p:spPr>
-        <p:txBody>
-          <a:bodyPr wrap="square" lIns="0" rIns="0" tIns="0" bIns="0" anchor="t">
-            <a:spAutoFit/>
-          </a:bodyPr>
-          <a:lstStyle/>
-          <a:p>
-            <a:pPr algn="l"/>
-            <a:r>
-              <a:rPr sz="900" b="0">
-                <a:solidFill>
-                  <a:srgbClr val="9CA3AF"/>
-                </a:solidFill>
-                <a:latin typeface="Calibri"/>
-              </a:rPr>
-              <a:t>Choolwe  •  The Case For Fossil Fuels</a:t>
-            </a:r>
-          </a:p>
-        </p:txBody>
-      </p:sp>
-      <p:sp>
-        <p:nvSpPr>
-          <p:cNvPr id="41" name="TextBox 40"/>
-          <p:cNvSpPr txBox="1"/>
-          <p:nvPr/>
-        </p:nvSpPr>
-        <p:spPr>
-          <a:xfrm>
-            <a:off x="10789920" y="6537960"/>
-            <a:ext cx="1097280" cy="274320"/>
-          </a:xfrm>
-          <a:prstGeom prst="rect">
-            <a:avLst/>
-          </a:prstGeom>
-          <a:noFill/>
-        </p:spPr>
-        <p:txBody>
-          <a:bodyPr wrap="square" lIns="0" rIns="0" tIns="0" bIns="0" anchor="t">
-            <a:spAutoFit/>
-          </a:bodyPr>
-          <a:lstStyle/>
-          <a:p>
-            <a:pPr algn="r"/>
-            <a:r>
-              <a:rPr sz="900" b="0">
-                <a:solidFill>
-                  <a:srgbClr val="9CA3AF"/>
-                </a:solidFill>
-                <a:latin typeface="Calibri"/>
-              </a:rPr>
-              <a:t>10 / 10</a:t>
-            </a:r>
           </a:p>
         </p:txBody>
       </p:sp>
@@ -6447,7 +4806,7 @@
         <p:spPr>
           <a:xfrm>
             <a:off x="822960" y="457200"/>
-            <a:ext cx="4572000" cy="365760"/>
+            <a:ext cx="7315200" cy="365760"/>
           </a:xfrm>
           <a:prstGeom prst="rect">
             <a:avLst/>
@@ -7400,7 +5759,7 @@
                 </a:solidFill>
                 <a:latin typeface="Calibri"/>
               </a:rPr>
-              <a:t>2 / 10</a:t>
+              <a:t>2 / 9</a:t>
             </a:r>
           </a:p>
         </p:txBody>
@@ -7564,7 +5923,7 @@
         <p:spPr>
           <a:xfrm>
             <a:off x="1097280" y="640080"/>
-            <a:ext cx="4572000" cy="365760"/>
+            <a:ext cx="7315200" cy="365760"/>
           </a:xfrm>
           <a:prstGeom prst="rect">
             <a:avLst/>
@@ -7599,7 +5958,7 @@
         <p:spPr>
           <a:xfrm>
             <a:off x="822960" y="1554480"/>
-            <a:ext cx="10515600" cy="1828800"/>
+            <a:ext cx="10515600" cy="2194560"/>
           </a:xfrm>
           <a:prstGeom prst="rect">
             <a:avLst/>
@@ -7613,13 +5972,13 @@
           <a:lstStyle/>
           <a:p>
             <a:r>
-              <a:rPr sz="2800">
+              <a:rPr sz="2800" b="0">
                 <a:solidFill>
                   <a:srgbClr val="4B5563"/>
                 </a:solidFill>
                 <a:latin typeface="Calibri"/>
               </a:rPr>
-              <a:t>Africa caused </a:t>
+              <a:t>Reliable energy is survival — and </a:t>
             </a:r>
             <a:r>
               <a:rPr sz="2800" b="1">
@@ -7628,16 +5987,16 @@
                 </a:solidFill>
                 <a:latin typeface="Calibri"/>
               </a:rPr>
-              <a:t>3% of climate change</a:t>
-            </a:r>
-            <a:r>
-              <a:rPr sz="2800">
+              <a:t>clean energy alone can't deliver it</a:t>
+            </a:r>
+            <a:r>
+              <a:rPr sz="2800" b="0">
                 <a:solidFill>
                   <a:srgbClr val="4B5563"/>
                 </a:solidFill>
                 <a:latin typeface="Calibri"/>
               </a:rPr>
-              <a:t> but pays the highest price — and </a:t>
+              <a:t> when we need it most. From </a:t>
             </a:r>
             <a:r>
               <a:rPr sz="2800" b="1">
@@ -7646,16 +6005,34 @@
                 </a:solidFill>
                 <a:latin typeface="Calibri"/>
               </a:rPr>
-              <a:t>pure clean-energy already failed us</a:t>
-            </a:r>
-            <a:r>
-              <a:rPr sz="2800">
+              <a:t>Zambia's drought</a:t>
+            </a:r>
+            <a:r>
+              <a:rPr sz="2800" b="0">
                 <a:solidFill>
                   <a:srgbClr val="4B5563"/>
                 </a:solidFill>
                 <a:latin typeface="Calibri"/>
               </a:rPr>
-              <a:t> in last year's drought.</a:t>
+              <a:t> to </a:t>
+            </a:r>
+            <a:r>
+              <a:rPr sz="2800" b="1">
+                <a:solidFill>
+                  <a:srgbClr val="D97706"/>
+                </a:solidFill>
+                <a:latin typeface="Calibri"/>
+              </a:rPr>
+              <a:t>a Canadian winter</a:t>
+            </a:r>
+            <a:r>
+              <a:rPr sz="2800" b="0">
+                <a:solidFill>
+                  <a:srgbClr val="4B5563"/>
+                </a:solidFill>
+                <a:latin typeface="Calibri"/>
+              </a:rPr>
+              <a:t>, cutting fossil fuels now costs lives.</a:t>
             </a:r>
           </a:p>
         </p:txBody>
@@ -7668,7 +6045,7 @@
         </p:nvSpPr>
         <p:spPr>
           <a:xfrm>
-            <a:off x="822960" y="4023360"/>
+            <a:off x="822960" y="4206240"/>
             <a:ext cx="10515600" cy="1828800"/>
           </a:xfrm>
           <a:prstGeom prst="rect">
@@ -7690,7 +6067,7 @@
                 </a:solidFill>
                 <a:latin typeface="Calibri"/>
               </a:rPr>
-              <a:t>The honest path forward is a managed transition,
+              <a:t>The honest path is a managed transition,
 not abandonment.</a:t>
             </a:r>
           </a:p>
@@ -7893,7 +6270,7 @@
                 </a:solidFill>
                 <a:latin typeface="Calibri"/>
               </a:rPr>
-              <a:t>3 / 10</a:t>
+              <a:t>3 / 9</a:t>
             </a:r>
           </a:p>
         </p:txBody>
@@ -7931,7 +6308,7 @@
             <a:avLst/>
           </a:prstGeom>
           <a:solidFill>
-            <a:srgbClr val="1F4E79"/>
+            <a:srgbClr val="D97706"/>
           </a:solidFill>
           <a:ln>
             <a:noFill/>
@@ -7972,459 +6349,6 @@
             <a:ext cx="128016" cy="128016"/>
           </a:xfrm>
           <a:prstGeom prst="ellipse">
-            <a:avLst/>
-          </a:prstGeom>
-          <a:solidFill>
-            <a:srgbClr val="1F4E79"/>
-          </a:solidFill>
-          <a:ln>
-            <a:noFill/>
-          </a:ln>
-          <a:effectLst/>
-        </p:spPr>
-        <p:style>
-          <a:lnRef idx="1">
-            <a:schemeClr val="accent1"/>
-          </a:lnRef>
-          <a:fillRef idx="3">
-            <a:schemeClr val="accent1"/>
-          </a:fillRef>
-          <a:effectRef idx="2">
-            <a:schemeClr val="accent1"/>
-          </a:effectRef>
-          <a:fontRef idx="minor">
-            <a:schemeClr val="lt1"/>
-          </a:fontRef>
-        </p:style>
-        <p:txBody>
-          <a:bodyPr rtlCol="0" anchor="ctr"/>
-          <a:lstStyle/>
-          <a:p>
-            <a:pPr algn="ctr"/>
-          </a:p>
-        </p:txBody>
-      </p:sp>
-      <p:sp>
-        <p:nvSpPr>
-          <p:cNvPr id="4" name="TextBox 3"/>
-          <p:cNvSpPr txBox="1"/>
-          <p:nvPr/>
-        </p:nvSpPr>
-        <p:spPr>
-          <a:xfrm>
-            <a:off x="822960" y="457200"/>
-            <a:ext cx="4572000" cy="365760"/>
-          </a:xfrm>
-          <a:prstGeom prst="rect">
-            <a:avLst/>
-          </a:prstGeom>
-          <a:noFill/>
-        </p:spPr>
-        <p:txBody>
-          <a:bodyPr wrap="square" lIns="0" rIns="0" tIns="0" bIns="0" anchor="t">
-            <a:spAutoFit/>
-          </a:bodyPr>
-          <a:lstStyle/>
-          <a:p>
-            <a:pPr algn="l"/>
-            <a:r>
-              <a:rPr sz="1100" b="1">
-                <a:solidFill>
-                  <a:srgbClr val="1F4E79"/>
-                </a:solidFill>
-                <a:latin typeface="Calibri"/>
-              </a:rPr>
-              <a:t>SITUATION  •  WHAT I ARGUED LAST WEEK</a:t>
-            </a:r>
-          </a:p>
-        </p:txBody>
-      </p:sp>
-      <p:sp>
-        <p:nvSpPr>
-          <p:cNvPr id="5" name="TextBox 4"/>
-          <p:cNvSpPr txBox="1"/>
-          <p:nvPr/>
-        </p:nvSpPr>
-        <p:spPr>
-          <a:xfrm>
-            <a:off x="548640" y="1097280"/>
-            <a:ext cx="11064240" cy="1097280"/>
-          </a:xfrm>
-          <a:prstGeom prst="rect">
-            <a:avLst/>
-          </a:prstGeom>
-          <a:noFill/>
-        </p:spPr>
-        <p:txBody>
-          <a:bodyPr wrap="square" lIns="0" rIns="0" tIns="0" bIns="0" anchor="t">
-            <a:spAutoFit/>
-          </a:bodyPr>
-          <a:lstStyle/>
-          <a:p>
-            <a:pPr algn="l"/>
-            <a:r>
-              <a:rPr sz="2400" b="1">
-                <a:solidFill>
-                  <a:srgbClr val="1F2937"/>
-                </a:solidFill>
-                <a:latin typeface="Calibri"/>
-              </a:rPr>
-              <a:t>Last week, the case was: fossil fuels drive climate change,
-climate change kills, therefore — cut fossil fuels.</a:t>
-            </a:r>
-          </a:p>
-        </p:txBody>
-      </p:sp>
-      <p:sp>
-        <p:nvSpPr>
-          <p:cNvPr id="6" name="Rounded Rectangle 5"/>
-          <p:cNvSpPr/>
-          <p:nvPr/>
-        </p:nvSpPr>
-        <p:spPr>
-          <a:xfrm>
-            <a:off x="548640" y="2743200"/>
-            <a:ext cx="3520440" cy="3108960"/>
-          </a:xfrm>
-          <a:prstGeom prst="roundRect">
-            <a:avLst>
-              <a:gd name="adj" fmla="val 10000"/>
-            </a:avLst>
-          </a:prstGeom>
-          <a:solidFill>
-            <a:srgbClr val="F9FAFB"/>
-          </a:solidFill>
-          <a:ln>
-            <a:noFill/>
-          </a:ln>
-          <a:effectLst/>
-        </p:spPr>
-        <p:style>
-          <a:lnRef idx="1">
-            <a:schemeClr val="accent1"/>
-          </a:lnRef>
-          <a:fillRef idx="3">
-            <a:schemeClr val="accent1"/>
-          </a:fillRef>
-          <a:effectRef idx="2">
-            <a:schemeClr val="accent1"/>
-          </a:effectRef>
-          <a:fontRef idx="minor">
-            <a:schemeClr val="lt1"/>
-          </a:fontRef>
-        </p:style>
-        <p:txBody>
-          <a:bodyPr rtlCol="0" anchor="ctr"/>
-          <a:lstStyle/>
-          <a:p>
-            <a:pPr algn="ctr"/>
-          </a:p>
-        </p:txBody>
-      </p:sp>
-      <p:sp>
-        <p:nvSpPr>
-          <p:cNvPr id="7" name="Rectangle 6"/>
-          <p:cNvSpPr/>
-          <p:nvPr/>
-        </p:nvSpPr>
-        <p:spPr>
-          <a:xfrm>
-            <a:off x="548640" y="2743200"/>
-            <a:ext cx="164592" cy="3108960"/>
-          </a:xfrm>
-          <a:prstGeom prst="rect">
-            <a:avLst/>
-          </a:prstGeom>
-          <a:solidFill>
-            <a:srgbClr val="1F4E79"/>
-          </a:solidFill>
-          <a:ln>
-            <a:noFill/>
-          </a:ln>
-          <a:effectLst/>
-        </p:spPr>
-        <p:style>
-          <a:lnRef idx="1">
-            <a:schemeClr val="accent1"/>
-          </a:lnRef>
-          <a:fillRef idx="3">
-            <a:schemeClr val="accent1"/>
-          </a:fillRef>
-          <a:effectRef idx="2">
-            <a:schemeClr val="accent1"/>
-          </a:effectRef>
-          <a:fontRef idx="minor">
-            <a:schemeClr val="lt1"/>
-          </a:fontRef>
-        </p:style>
-        <p:txBody>
-          <a:bodyPr rtlCol="0" anchor="ctr"/>
-          <a:lstStyle/>
-          <a:p>
-            <a:pPr algn="ctr"/>
-          </a:p>
-        </p:txBody>
-      </p:sp>
-      <p:sp>
-        <p:nvSpPr>
-          <p:cNvPr id="8" name="Oval 7"/>
-          <p:cNvSpPr/>
-          <p:nvPr/>
-        </p:nvSpPr>
-        <p:spPr>
-          <a:xfrm>
-            <a:off x="896112" y="3044952"/>
-            <a:ext cx="585216" cy="585216"/>
-          </a:xfrm>
-          <a:prstGeom prst="ellipse">
-            <a:avLst/>
-          </a:prstGeom>
-          <a:solidFill>
-            <a:srgbClr val="1F4E79"/>
-          </a:solidFill>
-          <a:ln>
-            <a:noFill/>
-          </a:ln>
-          <a:effectLst/>
-        </p:spPr>
-        <p:style>
-          <a:lnRef idx="1">
-            <a:schemeClr val="accent1"/>
-          </a:lnRef>
-          <a:fillRef idx="3">
-            <a:schemeClr val="accent1"/>
-          </a:fillRef>
-          <a:effectRef idx="2">
-            <a:schemeClr val="accent1"/>
-          </a:effectRef>
-          <a:fontRef idx="minor">
-            <a:schemeClr val="lt1"/>
-          </a:fontRef>
-        </p:style>
-        <p:txBody>
-          <a:bodyPr rtlCol="0" anchor="ctr"/>
-          <a:lstStyle/>
-          <a:p>
-            <a:pPr algn="ctr"/>
-          </a:p>
-        </p:txBody>
-      </p:sp>
-      <p:sp>
-        <p:nvSpPr>
-          <p:cNvPr id="9" name="Rectangle 8"/>
-          <p:cNvSpPr/>
-          <p:nvPr/>
-        </p:nvSpPr>
-        <p:spPr>
-          <a:xfrm>
-            <a:off x="940003" y="3325855"/>
-            <a:ext cx="497433" cy="23408"/>
-          </a:xfrm>
-          <a:prstGeom prst="rect">
-            <a:avLst/>
-          </a:prstGeom>
-          <a:solidFill>
-            <a:srgbClr val="FFFFFF"/>
-          </a:solidFill>
-          <a:ln>
-            <a:noFill/>
-          </a:ln>
-          <a:effectLst/>
-        </p:spPr>
-        <p:style>
-          <a:lnRef idx="1">
-            <a:schemeClr val="accent1"/>
-          </a:lnRef>
-          <a:fillRef idx="3">
-            <a:schemeClr val="accent1"/>
-          </a:fillRef>
-          <a:effectRef idx="2">
-            <a:schemeClr val="accent1"/>
-          </a:effectRef>
-          <a:fontRef idx="minor">
-            <a:schemeClr val="lt1"/>
-          </a:fontRef>
-        </p:style>
-        <p:txBody>
-          <a:bodyPr rtlCol="0" anchor="ctr"/>
-          <a:lstStyle/>
-          <a:p>
-            <a:pPr algn="ctr"/>
-          </a:p>
-        </p:txBody>
-      </p:sp>
-      <p:sp>
-        <p:nvSpPr>
-          <p:cNvPr id="10" name="Rectangle 9"/>
-          <p:cNvSpPr/>
-          <p:nvPr/>
-        </p:nvSpPr>
-        <p:spPr>
-          <a:xfrm>
-            <a:off x="1177015" y="3088843"/>
-            <a:ext cx="23408" cy="497433"/>
-          </a:xfrm>
-          <a:prstGeom prst="rect">
-            <a:avLst/>
-          </a:prstGeom>
-          <a:solidFill>
-            <a:srgbClr val="FFFFFF"/>
-          </a:solidFill>
-          <a:ln>
-            <a:noFill/>
-          </a:ln>
-          <a:effectLst/>
-        </p:spPr>
-        <p:style>
-          <a:lnRef idx="1">
-            <a:schemeClr val="accent1"/>
-          </a:lnRef>
-          <a:fillRef idx="3">
-            <a:schemeClr val="accent1"/>
-          </a:fillRef>
-          <a:effectRef idx="2">
-            <a:schemeClr val="accent1"/>
-          </a:effectRef>
-          <a:fontRef idx="minor">
-            <a:schemeClr val="lt1"/>
-          </a:fontRef>
-        </p:style>
-        <p:txBody>
-          <a:bodyPr rtlCol="0" anchor="ctr"/>
-          <a:lstStyle/>
-          <a:p>
-            <a:pPr algn="ctr"/>
-          </a:p>
-        </p:txBody>
-      </p:sp>
-      <p:sp>
-        <p:nvSpPr>
-          <p:cNvPr id="11" name="TextBox 10"/>
-          <p:cNvSpPr txBox="1"/>
-          <p:nvPr/>
-        </p:nvSpPr>
-        <p:spPr>
-          <a:xfrm>
-            <a:off x="1691640" y="3063240"/>
-            <a:ext cx="2240280" cy="914400"/>
-          </a:xfrm>
-          <a:prstGeom prst="rect">
-            <a:avLst/>
-          </a:prstGeom>
-          <a:noFill/>
-        </p:spPr>
-        <p:txBody>
-          <a:bodyPr wrap="square" lIns="0" rIns="0" tIns="0" bIns="0" anchor="t">
-            <a:spAutoFit/>
-          </a:bodyPr>
-          <a:lstStyle/>
-          <a:p>
-            <a:pPr algn="l"/>
-            <a:r>
-              <a:rPr sz="1500" b="1">
-                <a:solidFill>
-                  <a:srgbClr val="1F2937"/>
-                </a:solidFill>
-                <a:latin typeface="Calibri"/>
-              </a:rPr>
-              <a:t>CO₂ at record highs</a:t>
-            </a:r>
-          </a:p>
-        </p:txBody>
-      </p:sp>
-      <p:sp>
-        <p:nvSpPr>
-          <p:cNvPr id="12" name="TextBox 11"/>
-          <p:cNvSpPr txBox="1"/>
-          <p:nvPr/>
-        </p:nvSpPr>
-        <p:spPr>
-          <a:xfrm>
-            <a:off x="914400" y="4297680"/>
-            <a:ext cx="2971800" cy="1371600"/>
-          </a:xfrm>
-          <a:prstGeom prst="rect">
-            <a:avLst/>
-          </a:prstGeom>
-          <a:noFill/>
-        </p:spPr>
-        <p:txBody>
-          <a:bodyPr wrap="square" lIns="0" rIns="0" tIns="0" bIns="0" anchor="t">
-            <a:spAutoFit/>
-          </a:bodyPr>
-          <a:lstStyle/>
-          <a:p>
-            <a:pPr algn="l"/>
-            <a:r>
-              <a:rPr sz="1250" b="0">
-                <a:solidFill>
-                  <a:srgbClr val="4B5563"/>
-                </a:solidFill>
-                <a:latin typeface="Calibri"/>
-              </a:rPr>
-              <a:t>Fossil fuels = ~90% of human CO₂ emissions.</a:t>
-            </a:r>
-          </a:p>
-        </p:txBody>
-      </p:sp>
-      <p:sp>
-        <p:nvSpPr>
-          <p:cNvPr id="13" name="Rounded Rectangle 12"/>
-          <p:cNvSpPr/>
-          <p:nvPr/>
-        </p:nvSpPr>
-        <p:spPr>
-          <a:xfrm>
-            <a:off x="4343400" y="2743200"/>
-            <a:ext cx="3520440" cy="3108960"/>
-          </a:xfrm>
-          <a:prstGeom prst="roundRect">
-            <a:avLst>
-              <a:gd name="adj" fmla="val 10000"/>
-            </a:avLst>
-          </a:prstGeom>
-          <a:solidFill>
-            <a:srgbClr val="F9FAFB"/>
-          </a:solidFill>
-          <a:ln>
-            <a:noFill/>
-          </a:ln>
-          <a:effectLst/>
-        </p:spPr>
-        <p:style>
-          <a:lnRef idx="1">
-            <a:schemeClr val="accent1"/>
-          </a:lnRef>
-          <a:fillRef idx="3">
-            <a:schemeClr val="accent1"/>
-          </a:fillRef>
-          <a:effectRef idx="2">
-            <a:schemeClr val="accent1"/>
-          </a:effectRef>
-          <a:fontRef idx="minor">
-            <a:schemeClr val="lt1"/>
-          </a:fontRef>
-        </p:style>
-        <p:txBody>
-          <a:bodyPr rtlCol="0" anchor="ctr"/>
-          <a:lstStyle/>
-          <a:p>
-            <a:pPr algn="ctr"/>
-          </a:p>
-        </p:txBody>
-      </p:sp>
-      <p:sp>
-        <p:nvSpPr>
-          <p:cNvPr id="14" name="Rectangle 13"/>
-          <p:cNvSpPr/>
-          <p:nvPr/>
-        </p:nvSpPr>
-        <p:spPr>
-          <a:xfrm>
-            <a:off x="4343400" y="2743200"/>
-            <a:ext cx="164592" cy="3108960"/>
-          </a:xfrm>
-          <a:prstGeom prst="rect">
             <a:avLst/>
           </a:prstGeom>
           <a:solidFill>
@@ -8459,61 +6383,114 @@
       </p:sp>
       <p:sp>
         <p:nvSpPr>
-          <p:cNvPr id="15" name="Oval 14"/>
+          <p:cNvPr id="4" name="TextBox 3"/>
+          <p:cNvSpPr txBox="1"/>
+          <p:nvPr/>
+        </p:nvSpPr>
+        <p:spPr>
+          <a:xfrm>
+            <a:off x="822960" y="457200"/>
+            <a:ext cx="7315200" cy="365760"/>
+          </a:xfrm>
+          <a:prstGeom prst="rect">
+            <a:avLst/>
+          </a:prstGeom>
+          <a:noFill/>
+        </p:spPr>
+        <p:txBody>
+          <a:bodyPr wrap="square" lIns="0" rIns="0" tIns="0" bIns="0" anchor="t">
+            <a:spAutoFit/>
+          </a:bodyPr>
+          <a:lstStyle/>
+          <a:p>
+            <a:pPr algn="l"/>
+            <a:r>
+              <a:rPr sz="1100" b="1">
+                <a:solidFill>
+                  <a:srgbClr val="D97706"/>
+                </a:solidFill>
+                <a:latin typeface="Calibri"/>
+              </a:rPr>
+              <a:t>COMPLICATION  •  THE RELIABILITY TEST, IN THE SOUTH</a:t>
+            </a:r>
+          </a:p>
+        </p:txBody>
+      </p:sp>
+      <p:sp>
+        <p:nvSpPr>
+          <p:cNvPr id="5" name="TextBox 4"/>
+          <p:cNvSpPr txBox="1"/>
+          <p:nvPr/>
+        </p:nvSpPr>
+        <p:spPr>
+          <a:xfrm>
+            <a:off x="548640" y="1005840"/>
+            <a:ext cx="11064240" cy="1280160"/>
+          </a:xfrm>
+          <a:prstGeom prst="rect">
+            <a:avLst/>
+          </a:prstGeom>
+          <a:noFill/>
+        </p:spPr>
+        <p:txBody>
+          <a:bodyPr wrap="square" lIns="0" rIns="0" tIns="0" bIns="0" anchor="t">
+            <a:spAutoFit/>
+          </a:bodyPr>
+          <a:lstStyle/>
+          <a:p>
+            <a:pPr algn="l"/>
+            <a:r>
+              <a:rPr sz="2200" b="1">
+                <a:solidFill>
+                  <a:srgbClr val="1F2937"/>
+                </a:solidFill>
+                <a:latin typeface="Calibri"/>
+              </a:rPr>
+              <a:t>Zambia bet 85% of its grid on "clean" hydropower —
+and a climate-driven drought left us in the dark for 21 hours a day.</a:t>
+            </a:r>
+          </a:p>
+        </p:txBody>
+      </p:sp>
+      <p:pic>
+        <p:nvPicPr>
+          <p:cNvPr id="6" name="Picture 5" descr="zambia_mix.png"/>
+          <p:cNvPicPr>
+            <a:picLocks noChangeAspect="1"/>
+          </p:cNvPicPr>
+          <p:nvPr/>
+        </p:nvPicPr>
+        <p:blipFill>
+          <a:blip r:embed="rId2"/>
+          <a:stretch>
+            <a:fillRect/>
+          </a:stretch>
+        </p:blipFill>
+        <p:spPr>
+          <a:xfrm>
+            <a:off x="365760" y="2377440"/>
+            <a:ext cx="6858000" cy="5531087"/>
+          </a:xfrm>
+          <a:prstGeom prst="rect">
+            <a:avLst/>
+          </a:prstGeom>
+        </p:spPr>
+      </p:pic>
+      <p:sp>
+        <p:nvSpPr>
+          <p:cNvPr id="7" name="Rounded Rectangle 6"/>
           <p:cNvSpPr/>
           <p:nvPr/>
         </p:nvSpPr>
         <p:spPr>
           <a:xfrm>
-            <a:off x="4690872" y="3015691"/>
-            <a:ext cx="585216" cy="643737"/>
-          </a:xfrm>
-          <a:prstGeom prst="ellipse">
-            <a:avLst/>
-          </a:prstGeom>
-          <a:solidFill>
-            <a:srgbClr val="D97706"/>
-          </a:solidFill>
-          <a:ln>
-            <a:noFill/>
-          </a:ln>
-          <a:effectLst/>
-        </p:spPr>
-        <p:style>
-          <a:lnRef idx="1">
-            <a:schemeClr val="accent1"/>
-          </a:lnRef>
-          <a:fillRef idx="3">
-            <a:schemeClr val="accent1"/>
-          </a:fillRef>
-          <a:effectRef idx="2">
-            <a:schemeClr val="accent1"/>
-          </a:effectRef>
-          <a:fontRef idx="minor">
-            <a:schemeClr val="lt1"/>
-          </a:fontRef>
-        </p:style>
-        <p:txBody>
-          <a:bodyPr rtlCol="0" anchor="ctr"/>
-          <a:lstStyle/>
-          <a:p>
-            <a:pPr algn="ctr"/>
-          </a:p>
-        </p:txBody>
-      </p:sp>
-      <p:sp>
-        <p:nvSpPr>
-          <p:cNvPr id="16" name="Oval 15"/>
-          <p:cNvSpPr/>
-          <p:nvPr/>
-        </p:nvSpPr>
-        <p:spPr>
-          <a:xfrm>
-            <a:off x="4851806" y="3220516"/>
-            <a:ext cx="263347" cy="351129"/>
-          </a:xfrm>
-          <a:prstGeom prst="ellipse">
-            <a:avLst/>
+            <a:off x="7680960" y="2468880"/>
+            <a:ext cx="4114800" cy="1554480"/>
+          </a:xfrm>
+          <a:prstGeom prst="roundRect">
+            <a:avLst>
+              <a:gd name="adj" fmla="val 10000"/>
+            </a:avLst>
           </a:prstGeom>
           <a:solidFill>
             <a:srgbClr val="FDE8CC"/>
@@ -8547,14 +6524,14 @@
       </p:sp>
       <p:sp>
         <p:nvSpPr>
-          <p:cNvPr id="17" name="TextBox 16"/>
+          <p:cNvPr id="8" name="TextBox 7"/>
           <p:cNvSpPr txBox="1"/>
           <p:nvPr/>
         </p:nvSpPr>
         <p:spPr>
           <a:xfrm>
-            <a:off x="5486400" y="3063240"/>
-            <a:ext cx="2240280" cy="914400"/>
+            <a:off x="7955280" y="2606040"/>
+            <a:ext cx="3566160" cy="365760"/>
           </a:xfrm>
           <a:prstGeom prst="rect">
             <a:avLst/>
@@ -8569,28 +6546,27 @@
           <a:p>
             <a:pPr algn="l"/>
             <a:r>
-              <a:rPr sz="1500" b="1">
-                <a:solidFill>
-                  <a:srgbClr val="1F2937"/>
+              <a:rPr sz="1100" b="1">
+                <a:solidFill>
+                  <a:srgbClr val="D97706"/>
                 </a:solidFill>
                 <a:latin typeface="Calibri"/>
               </a:rPr>
-              <a:t>Rising temperature,
-rising disasters</a:t>
-            </a:r>
-          </a:p>
-        </p:txBody>
-      </p:sp>
-      <p:sp>
-        <p:nvSpPr>
-          <p:cNvPr id="18" name="TextBox 17"/>
+              <a:t>THE BET</a:t>
+            </a:r>
+          </a:p>
+        </p:txBody>
+      </p:sp>
+      <p:sp>
+        <p:nvSpPr>
+          <p:cNvPr id="9" name="TextBox 8"/>
           <p:cNvSpPr txBox="1"/>
           <p:nvPr/>
         </p:nvSpPr>
         <p:spPr>
           <a:xfrm>
-            <a:off x="4709160" y="4297680"/>
-            <a:ext cx="2971800" cy="1371600"/>
+            <a:off x="7955280" y="2926080"/>
+            <a:ext cx="3566160" cy="1097280"/>
           </a:xfrm>
           <a:prstGeom prst="rect">
             <a:avLst/>
@@ -8605,28 +6581,28 @@
           <a:p>
             <a:pPr algn="l"/>
             <a:r>
-              <a:rPr sz="1250" b="0">
-                <a:solidFill>
-                  <a:srgbClr val="4B5563"/>
+              <a:rPr sz="1800" b="1">
+                <a:solidFill>
+                  <a:srgbClr val="1F2937"/>
                 </a:solidFill>
                 <a:latin typeface="Calibri"/>
               </a:rPr>
-              <a:t>98% chance one of the next five years
-will be the warmest on record.</a:t>
-            </a:r>
-          </a:p>
-        </p:txBody>
-      </p:sp>
-      <p:sp>
-        <p:nvSpPr>
-          <p:cNvPr id="19" name="Rounded Rectangle 18"/>
+              <a:t>85% of installed capacity
+is hydropower.</a:t>
+            </a:r>
+          </a:p>
+        </p:txBody>
+      </p:sp>
+      <p:sp>
+        <p:nvSpPr>
+          <p:cNvPr id="10" name="Rounded Rectangle 9"/>
           <p:cNvSpPr/>
           <p:nvPr/>
         </p:nvSpPr>
         <p:spPr>
           <a:xfrm>
-            <a:off x="8138160" y="2743200"/>
-            <a:ext cx="3520440" cy="3108960"/>
+            <a:off x="7680960" y="4160520"/>
+            <a:ext cx="4114800" cy="1554480"/>
           </a:xfrm>
           <a:prstGeom prst="roundRect">
             <a:avLst>
@@ -8634,7 +6610,7 @@
             </a:avLst>
           </a:prstGeom>
           <a:solidFill>
-            <a:srgbClr val="F9FAFB"/>
+            <a:srgbClr val="DBE5F1"/>
           </a:solidFill>
           <a:ln>
             <a:noFill/>
@@ -8665,146 +6641,14 @@
       </p:sp>
       <p:sp>
         <p:nvSpPr>
-          <p:cNvPr id="20" name="Rectangle 19"/>
-          <p:cNvSpPr/>
-          <p:nvPr/>
-        </p:nvSpPr>
-        <p:spPr>
-          <a:xfrm>
-            <a:off x="8138160" y="2743200"/>
-            <a:ext cx="164592" cy="3108960"/>
-          </a:xfrm>
-          <a:prstGeom prst="rect">
-            <a:avLst/>
-          </a:prstGeom>
-          <a:solidFill>
-            <a:srgbClr val="1F4E79"/>
-          </a:solidFill>
-          <a:ln>
-            <a:noFill/>
-          </a:ln>
-          <a:effectLst/>
-        </p:spPr>
-        <p:style>
-          <a:lnRef idx="1">
-            <a:schemeClr val="accent1"/>
-          </a:lnRef>
-          <a:fillRef idx="3">
-            <a:schemeClr val="accent1"/>
-          </a:fillRef>
-          <a:effectRef idx="2">
-            <a:schemeClr val="accent1"/>
-          </a:effectRef>
-          <a:fontRef idx="minor">
-            <a:schemeClr val="lt1"/>
-          </a:fontRef>
-        </p:style>
-        <p:txBody>
-          <a:bodyPr rtlCol="0" anchor="ctr"/>
-          <a:lstStyle/>
-          <a:p>
-            <a:pPr algn="ctr"/>
-          </a:p>
-        </p:txBody>
-      </p:sp>
-      <p:sp>
-        <p:nvSpPr>
-          <p:cNvPr id="21" name="Oval 20"/>
-          <p:cNvSpPr/>
-          <p:nvPr/>
-        </p:nvSpPr>
-        <p:spPr>
-          <a:xfrm>
-            <a:off x="8485632" y="3044952"/>
-            <a:ext cx="585216" cy="585216"/>
-          </a:xfrm>
-          <a:prstGeom prst="ellipse">
-            <a:avLst/>
-          </a:prstGeom>
-          <a:solidFill>
-            <a:srgbClr val="1F4E79"/>
-          </a:solidFill>
-          <a:ln>
-            <a:noFill/>
-          </a:ln>
-          <a:effectLst/>
-        </p:spPr>
-        <p:style>
-          <a:lnRef idx="1">
-            <a:schemeClr val="accent1"/>
-          </a:lnRef>
-          <a:fillRef idx="3">
-            <a:schemeClr val="accent1"/>
-          </a:fillRef>
-          <a:effectRef idx="2">
-            <a:schemeClr val="accent1"/>
-          </a:effectRef>
-          <a:fontRef idx="minor">
-            <a:schemeClr val="lt1"/>
-          </a:fontRef>
-        </p:style>
-        <p:txBody>
-          <a:bodyPr rtlCol="0" anchor="ctr"/>
-          <a:lstStyle/>
-          <a:p>
-            <a:pPr algn="ctr"/>
-          </a:p>
-        </p:txBody>
-      </p:sp>
-      <p:sp>
-        <p:nvSpPr>
-          <p:cNvPr id="22" name="Lightning Bolt 21"/>
-          <p:cNvSpPr/>
-          <p:nvPr/>
-        </p:nvSpPr>
-        <p:spPr>
-          <a:xfrm>
-            <a:off x="8631936" y="3118104"/>
-            <a:ext cx="292608" cy="438912"/>
-          </a:xfrm>
-          <a:prstGeom prst="lightningBolt">
-            <a:avLst/>
-          </a:prstGeom>
-          <a:solidFill>
-            <a:srgbClr val="FFFFFF"/>
-          </a:solidFill>
-          <a:ln>
-            <a:noFill/>
-          </a:ln>
-          <a:effectLst/>
-        </p:spPr>
-        <p:style>
-          <a:lnRef idx="1">
-            <a:schemeClr val="accent1"/>
-          </a:lnRef>
-          <a:fillRef idx="3">
-            <a:schemeClr val="accent1"/>
-          </a:fillRef>
-          <a:effectRef idx="2">
-            <a:schemeClr val="accent1"/>
-          </a:effectRef>
-          <a:fontRef idx="minor">
-            <a:schemeClr val="lt1"/>
-          </a:fontRef>
-        </p:style>
-        <p:txBody>
-          <a:bodyPr rtlCol="0" anchor="ctr"/>
-          <a:lstStyle/>
-          <a:p>
-            <a:pPr algn="ctr"/>
-          </a:p>
-        </p:txBody>
-      </p:sp>
-      <p:sp>
-        <p:nvSpPr>
-          <p:cNvPr id="23" name="TextBox 22"/>
+          <p:cNvPr id="11" name="TextBox 10"/>
           <p:cNvSpPr txBox="1"/>
           <p:nvPr/>
         </p:nvSpPr>
         <p:spPr>
           <a:xfrm>
-            <a:off x="9281160" y="3063240"/>
-            <a:ext cx="2240280" cy="914400"/>
+            <a:off x="7955280" y="4297680"/>
+            <a:ext cx="3566160" cy="365760"/>
           </a:xfrm>
           <a:prstGeom prst="rect">
             <a:avLst/>
@@ -8819,27 +6663,27 @@
           <a:p>
             <a:pPr algn="l"/>
             <a:r>
-              <a:rPr sz="1500" b="1">
-                <a:solidFill>
-                  <a:srgbClr val="1F2937"/>
+              <a:rPr sz="1100" b="1">
+                <a:solidFill>
+                  <a:srgbClr val="1F4E79"/>
                 </a:solidFill>
                 <a:latin typeface="Calibri"/>
               </a:rPr>
-              <a:t>Original conclusion</a:t>
-            </a:r>
-          </a:p>
-        </p:txBody>
-      </p:sp>
-      <p:sp>
-        <p:nvSpPr>
-          <p:cNvPr id="24" name="TextBox 23"/>
+              <a:t>THE LESSON</a:t>
+            </a:r>
+          </a:p>
+        </p:txBody>
+      </p:sp>
+      <p:sp>
+        <p:nvSpPr>
+          <p:cNvPr id="12" name="TextBox 11"/>
           <p:cNvSpPr txBox="1"/>
           <p:nvPr/>
         </p:nvSpPr>
         <p:spPr>
           <a:xfrm>
-            <a:off x="8503920" y="4297680"/>
-            <a:ext cx="2971800" cy="1371600"/>
+            <a:off x="7955280" y="4617720"/>
+            <a:ext cx="3566160" cy="1097280"/>
           </a:xfrm>
           <a:prstGeom prst="rect">
             <a:avLst/>
@@ -8854,20 +6698,21 @@
           <a:p>
             <a:pPr algn="l"/>
             <a:r>
-              <a:rPr sz="1250" b="0">
-                <a:solidFill>
-                  <a:srgbClr val="4B5563"/>
+              <a:rPr sz="1300" b="0">
+                <a:solidFill>
+                  <a:srgbClr val="1F2937"/>
                 </a:solidFill>
                 <a:latin typeface="Calibri"/>
               </a:rPr>
-              <a:t>Reduce emissions and restore forests.</a:t>
-            </a:r>
-          </a:p>
-        </p:txBody>
-      </p:sp>
-      <p:sp>
-        <p:nvSpPr>
-          <p:cNvPr id="25" name="TextBox 24"/>
+              <a:t>Firm, dispatchable power matters.
+Pretending otherwise is paid for in dark hospitals.</a:t>
+            </a:r>
+          </a:p>
+        </p:txBody>
+      </p:sp>
+      <p:sp>
+        <p:nvSpPr>
+          <p:cNvPr id="13" name="TextBox 12"/>
           <p:cNvSpPr txBox="1"/>
           <p:nvPr/>
         </p:nvSpPr>
@@ -8895,14 +6740,14 @@
                 </a:solidFill>
                 <a:latin typeface="Calibri"/>
               </a:rPr>
-              <a:t>I stand by the data. What follows is what that deck didn't show.</a:t>
-            </a:r>
-          </a:p>
-        </p:txBody>
-      </p:sp>
-      <p:sp>
-        <p:nvSpPr>
-          <p:cNvPr id="26" name="TextBox 25"/>
+              <a:t>The answer isn't "burn more coal." It's "don't bet the grid on one weather pattern."</a:t>
+            </a:r>
+          </a:p>
+        </p:txBody>
+      </p:sp>
+      <p:sp>
+        <p:nvSpPr>
+          <p:cNvPr id="14" name="TextBox 13"/>
           <p:cNvSpPr txBox="1"/>
           <p:nvPr/>
         </p:nvSpPr>
@@ -8937,7 +6782,7 @@
       </p:sp>
       <p:sp>
         <p:nvSpPr>
-          <p:cNvPr id="27" name="TextBox 26"/>
+          <p:cNvPr id="15" name="TextBox 14"/>
           <p:cNvSpPr txBox="1"/>
           <p:nvPr/>
         </p:nvSpPr>
@@ -8965,7 +6810,7 @@
                 </a:solidFill>
                 <a:latin typeface="Calibri"/>
               </a:rPr>
-              <a:t>4 / 10</a:t>
+              <a:t>4 / 9</a:t>
             </a:r>
           </a:p>
         </p:txBody>
@@ -9085,7 +6930,7 @@
         <p:spPr>
           <a:xfrm>
             <a:off x="822960" y="457200"/>
-            <a:ext cx="4572000" cy="365760"/>
+            <a:ext cx="7315200" cy="365760"/>
           </a:xfrm>
           <a:prstGeom prst="rect">
             <a:avLst/>
@@ -9106,7 +6951,7 @@
                 </a:solidFill>
                 <a:latin typeface="Calibri"/>
               </a:rPr>
-              <a:t>COMPLICATION  •  THE PRESENT-DAY DEATH TOLL</a:t>
+              <a:t>COMPLICATION  •  THE RELIABILITY TEST, IN THE NORTH</a:t>
             </a:r>
           </a:p>
         </p:txBody>
@@ -9120,7 +6965,7 @@
         <p:spPr>
           <a:xfrm>
             <a:off x="548640" y="1005840"/>
-            <a:ext cx="11064240" cy="1188720"/>
+            <a:ext cx="11064240" cy="1280160"/>
           </a:xfrm>
           <a:prstGeom prst="rect">
             <a:avLst/>
@@ -9135,21 +6980,21 @@
           <a:p>
             <a:pPr algn="l"/>
             <a:r>
-              <a:rPr sz="2300" b="1">
+              <a:rPr sz="2200" b="1">
                 <a:solidFill>
                   <a:srgbClr val="1F2937"/>
                 </a:solidFill>
                 <a:latin typeface="Calibri"/>
               </a:rPr>
-              <a:t>Cooking smoke kills ~3.2 million people every year —
-most in homes that have no clean fuel.</a:t>
+              <a:t>When it's coldest, clean energy is weakest —
+and fossil fuels are what keep people alive.</a:t>
             </a:r>
           </a:p>
         </p:txBody>
       </p:sp>
       <p:pic>
         <p:nvPicPr>
-          <p:cNvPr id="6" name="Picture 5" descr="deaths_per_year.png"/>
+          <p:cNvPr id="6" name="Picture 5" descr="cold_climate.png"/>
           <p:cNvPicPr>
             <a:picLocks noChangeAspect="1"/>
           </p:cNvPicPr>
@@ -9163,8 +7008,8 @@
         </p:blipFill>
         <p:spPr>
           <a:xfrm>
-            <a:off x="548640" y="2926080"/>
-            <a:ext cx="7863840" cy="2274325"/>
+            <a:off x="365760" y="2377440"/>
+            <a:ext cx="6949440" cy="3473082"/>
           </a:xfrm>
           <a:prstGeom prst="rect">
             <a:avLst/>
@@ -9179,8 +7024,8 @@
         </p:nvSpPr>
         <p:spPr>
           <a:xfrm>
-            <a:off x="8686800" y="2926080"/>
-            <a:ext cx="3108960" cy="2926080"/>
+            <a:off x="7772400" y="2468880"/>
+            <a:ext cx="4023360" cy="1691640"/>
           </a:xfrm>
           <a:prstGeom prst="roundRect">
             <a:avLst>
@@ -9225,8 +7070,8 @@
         </p:nvSpPr>
         <p:spPr>
           <a:xfrm>
-            <a:off x="8915400" y="3108960"/>
-            <a:ext cx="2743200" cy="457200"/>
+            <a:off x="8046720" y="2606040"/>
+            <a:ext cx="3474720" cy="365760"/>
           </a:xfrm>
           <a:prstGeom prst="rect">
             <a:avLst/>
@@ -9241,13 +7086,13 @@
           <a:p>
             <a:pPr algn="l"/>
             <a:r>
-              <a:rPr sz="1000" b="1">
+              <a:rPr sz="1100" b="1">
                 <a:solidFill>
                   <a:srgbClr val="D97706"/>
                 </a:solidFill>
                 <a:latin typeface="Calibri"/>
               </a:rPr>
-              <a:t>WHAT MY FIRST</a:t>
+              <a:t>WHY WARMTH IS NON-NEGOTIABLE</a:t>
             </a:r>
           </a:p>
         </p:txBody>
@@ -9260,8 +7105,8 @@
         </p:nvSpPr>
         <p:spPr>
           <a:xfrm>
-            <a:off x="8915400" y="3337560"/>
-            <a:ext cx="2743200" cy="457200"/>
+            <a:off x="8046720" y="2926080"/>
+            <a:ext cx="3474720" cy="640080"/>
           </a:xfrm>
           <a:prstGeom prst="rect">
             <a:avLst/>
@@ -9276,13 +7121,13 @@
           <a:p>
             <a:pPr algn="l"/>
             <a:r>
-              <a:rPr sz="1000" b="1">
+              <a:rPr sz="3000" b="1">
                 <a:solidFill>
                   <a:srgbClr val="D97706"/>
                 </a:solidFill>
                 <a:latin typeface="Calibri"/>
               </a:rPr>
-              <a:t>DECK LEFT OUT</a:t>
+              <a:t>~9× more</a:t>
             </a:r>
           </a:p>
         </p:txBody>
@@ -9295,8 +7140,8 @@
         </p:nvSpPr>
         <p:spPr>
           <a:xfrm>
-            <a:off x="8915400" y="3886200"/>
-            <a:ext cx="2743200" cy="640080"/>
+            <a:off x="8046720" y="3611880"/>
+            <a:ext cx="3474720" cy="548640"/>
           </a:xfrm>
           <a:prstGeom prst="rect">
             <a:avLst/>
@@ -9311,27 +7156,73 @@
           <a:p>
             <a:pPr algn="l"/>
             <a:r>
-              <a:rPr sz="3200" b="1">
-                <a:solidFill>
-                  <a:srgbClr val="D97706"/>
+              <a:rPr sz="1300" b="0">
+                <a:solidFill>
+                  <a:srgbClr val="1F2937"/>
                 </a:solidFill>
                 <a:latin typeface="Calibri"/>
               </a:rPr>
-              <a:t>815,000</a:t>
-            </a:r>
-          </a:p>
-        </p:txBody>
-      </p:sp>
-      <p:sp>
-        <p:nvSpPr>
-          <p:cNvPr id="11" name="TextBox 10"/>
+              <a:t>deaths from cold than from heat, worldwide.</a:t>
+            </a:r>
+          </a:p>
+        </p:txBody>
+      </p:sp>
+      <p:sp>
+        <p:nvSpPr>
+          <p:cNvPr id="11" name="Rounded Rectangle 10"/>
+          <p:cNvSpPr/>
+          <p:nvPr/>
+        </p:nvSpPr>
+        <p:spPr>
+          <a:xfrm>
+            <a:off x="7772400" y="4297680"/>
+            <a:ext cx="4023360" cy="1417320"/>
+          </a:xfrm>
+          <a:prstGeom prst="roundRect">
+            <a:avLst>
+              <a:gd name="adj" fmla="val 10000"/>
+            </a:avLst>
+          </a:prstGeom>
+          <a:solidFill>
+            <a:srgbClr val="DBE5F1"/>
+          </a:solidFill>
+          <a:ln>
+            <a:noFill/>
+          </a:ln>
+          <a:effectLst/>
+        </p:spPr>
+        <p:style>
+          <a:lnRef idx="1">
+            <a:schemeClr val="accent1"/>
+          </a:lnRef>
+          <a:fillRef idx="3">
+            <a:schemeClr val="accent1"/>
+          </a:fillRef>
+          <a:effectRef idx="2">
+            <a:schemeClr val="accent1"/>
+          </a:effectRef>
+          <a:fontRef idx="minor">
+            <a:schemeClr val="lt1"/>
+          </a:fontRef>
+        </p:style>
+        <p:txBody>
+          <a:bodyPr rtlCol="0" anchor="ctr"/>
+          <a:lstStyle/>
+          <a:p>
+            <a:pPr algn="ctr"/>
+          </a:p>
+        </p:txBody>
+      </p:sp>
+      <p:sp>
+        <p:nvSpPr>
+          <p:cNvPr id="12" name="TextBox 11"/>
           <p:cNvSpPr txBox="1"/>
           <p:nvPr/>
         </p:nvSpPr>
         <p:spPr>
           <a:xfrm>
-            <a:off x="8915400" y="4526280"/>
-            <a:ext cx="2743200" cy="457200"/>
+            <a:off x="8046720" y="4434840"/>
+            <a:ext cx="3474720" cy="365760"/>
           </a:xfrm>
           <a:prstGeom prst="rect">
             <a:avLst/>
@@ -9346,27 +7237,27 @@
           <a:p>
             <a:pPr algn="l"/>
             <a:r>
-              <a:rPr sz="1200" b="0">
-                <a:solidFill>
-                  <a:srgbClr val="1F2937"/>
+              <a:rPr sz="1100" b="1">
+                <a:solidFill>
+                  <a:srgbClr val="1F4E79"/>
                 </a:solidFill>
                 <a:latin typeface="Calibri"/>
               </a:rPr>
-              <a:t>deaths in sub-Saharan</a:t>
-            </a:r>
-          </a:p>
-        </p:txBody>
-      </p:sp>
-      <p:sp>
-        <p:nvSpPr>
-          <p:cNvPr id="12" name="TextBox 11"/>
+              <a:t>GAS HEATS HALF OF CANADIAN HOMES</a:t>
+            </a:r>
+          </a:p>
+        </p:txBody>
+      </p:sp>
+      <p:sp>
+        <p:nvSpPr>
+          <p:cNvPr id="13" name="TextBox 12"/>
           <p:cNvSpPr txBox="1"/>
           <p:nvPr/>
         </p:nvSpPr>
         <p:spPr>
           <a:xfrm>
-            <a:off x="8915400" y="4754880"/>
-            <a:ext cx="2743200" cy="457200"/>
+            <a:off x="8046720" y="4754880"/>
+            <a:ext cx="3474720" cy="914400"/>
           </a:xfrm>
           <a:prstGeom prst="rect">
             <a:avLst/>
@@ -9381,27 +7272,27 @@
           <a:p>
             <a:pPr algn="l"/>
             <a:r>
-              <a:rPr sz="1200" b="0">
+              <a:rPr sz="1300" b="0">
                 <a:solidFill>
                   <a:srgbClr val="1F2937"/>
                 </a:solidFill>
                 <a:latin typeface="Calibri"/>
               </a:rPr>
-              <a:t>Africa, every year.</a:t>
-            </a:r>
-          </a:p>
-        </p:txBody>
-      </p:sp>
-      <p:sp>
-        <p:nvSpPr>
-          <p:cNvPr id="13" name="TextBox 12"/>
+              <a:t>72% in Alberta, 62% in Ontario. In a -30°C winter, "no fossil fuels" means no heat.</a:t>
+            </a:r>
+          </a:p>
+        </p:txBody>
+      </p:sp>
+      <p:sp>
+        <p:nvSpPr>
+          <p:cNvPr id="14" name="TextBox 13"/>
           <p:cNvSpPr txBox="1"/>
           <p:nvPr/>
         </p:nvSpPr>
         <p:spPr>
           <a:xfrm>
-            <a:off x="8915400" y="5212080"/>
-            <a:ext cx="2743200" cy="457200"/>
+            <a:off x="548640" y="6126480"/>
+            <a:ext cx="10972800" cy="365760"/>
           </a:xfrm>
           <a:prstGeom prst="rect">
             <a:avLst/>
@@ -9416,21 +7307,20 @@
           <a:p>
             <a:pPr algn="l"/>
             <a:r>
-              <a:rPr sz="1100" b="0">
+              <a:rPr sz="1300" b="0">
                 <a:solidFill>
                   <a:srgbClr val="4B5563"/>
                 </a:solidFill>
                 <a:latin typeface="Calibri"/>
               </a:rPr>
-              <a:t>From a problem we already know
-how to solve: clean fuel.</a:t>
-            </a:r>
-          </a:p>
-        </p:txBody>
-      </p:sp>
-      <p:sp>
-        <p:nvSpPr>
-          <p:cNvPr id="14" name="TextBox 13"/>
+              <a:t>It isn't only the poor South. A rich, modern province nearly went dark — and only firm power kept it alive.</a:t>
+            </a:r>
+          </a:p>
+        </p:txBody>
+      </p:sp>
+      <p:sp>
+        <p:nvSpPr>
+          <p:cNvPr id="15" name="TextBox 14"/>
           <p:cNvSpPr txBox="1"/>
           <p:nvPr/>
         </p:nvSpPr>
@@ -9465,7 +7355,7 @@
       </p:sp>
       <p:sp>
         <p:nvSpPr>
-          <p:cNvPr id="15" name="TextBox 14"/>
+          <p:cNvPr id="16" name="TextBox 15"/>
           <p:cNvSpPr txBox="1"/>
           <p:nvPr/>
         </p:nvSpPr>
@@ -9493,7 +7383,7 @@
                 </a:solidFill>
                 <a:latin typeface="Calibri"/>
               </a:rPr>
-              <a:t>5 / 10</a:t>
+              <a:t>5 / 9</a:t>
             </a:r>
           </a:p>
         </p:txBody>
@@ -9613,7 +7503,7 @@
         <p:spPr>
           <a:xfrm>
             <a:off x="822960" y="457200"/>
-            <a:ext cx="4572000" cy="365760"/>
+            <a:ext cx="7315200" cy="365760"/>
           </a:xfrm>
           <a:prstGeom prst="rect">
             <a:avLst/>
@@ -9880,7 +7770,7 @@
                 </a:solidFill>
                 <a:latin typeface="Calibri"/>
               </a:rPr>
-              <a:t>6 / 10</a:t>
+              <a:t>6 / 9</a:t>
             </a:r>
           </a:p>
         </p:txBody>
@@ -10000,7 +7890,7 @@
         <p:spPr>
           <a:xfrm>
             <a:off x="822960" y="457200"/>
-            <a:ext cx="4572000" cy="365760"/>
+            <a:ext cx="7315200" cy="365760"/>
           </a:xfrm>
           <a:prstGeom prst="rect">
             <a:avLst/>
@@ -10021,7 +7911,7 @@
                 </a:solidFill>
                 <a:latin typeface="Calibri"/>
               </a:rPr>
-              <a:t>COMPLICATION  •  THE ZAMBIA LESSON</a:t>
+              <a:t>BRIDGE  •  WHAT ENERGY ACCESS BUYS</a:t>
             </a:r>
           </a:p>
         </p:txBody>
@@ -10056,15 +7946,15 @@
                 </a:solidFill>
                 <a:latin typeface="Calibri"/>
               </a:rPr>
-              <a:t>Zambia bet 85% of its grid on "clean" hydropower —
-and a climate-driven drought left us in the dark for 21 hours a day.</a:t>
+              <a:t>Below ~3,000 kWh per person per year, every extra kWh
+buys life-years. Zambia sits right on the steep part of the curve.</a:t>
             </a:r>
           </a:p>
         </p:txBody>
       </p:sp>
       <p:pic>
         <p:nvPicPr>
-          <p:cNvPr id="6" name="Picture 5" descr="zambia_mix.png"/>
+          <p:cNvPr id="6" name="Picture 5" descr="energy_life.png"/>
           <p:cNvPicPr>
             <a:picLocks noChangeAspect="1"/>
           </p:cNvPicPr>
@@ -10078,8 +7968,8 @@
         </p:blipFill>
         <p:spPr>
           <a:xfrm>
-            <a:off x="365760" y="2377440"/>
-            <a:ext cx="6858000" cy="5531087"/>
+            <a:off x="548640" y="2560320"/>
+            <a:ext cx="11064240" cy="5988850"/>
           </a:xfrm>
           <a:prstGeom prst="rect">
             <a:avLst/>
@@ -10088,60 +7978,14 @@
       </p:pic>
       <p:sp>
         <p:nvSpPr>
-          <p:cNvPr id="7" name="Rounded Rectangle 6"/>
-          <p:cNvSpPr/>
-          <p:nvPr/>
-        </p:nvSpPr>
-        <p:spPr>
-          <a:xfrm>
-            <a:off x="7680960" y="2468880"/>
-            <a:ext cx="4114800" cy="1554480"/>
-          </a:xfrm>
-          <a:prstGeom prst="roundRect">
-            <a:avLst>
-              <a:gd name="adj" fmla="val 10000"/>
-            </a:avLst>
-          </a:prstGeom>
-          <a:solidFill>
-            <a:srgbClr val="FDE8CC"/>
-          </a:solidFill>
-          <a:ln>
-            <a:noFill/>
-          </a:ln>
-          <a:effectLst/>
-        </p:spPr>
-        <p:style>
-          <a:lnRef idx="1">
-            <a:schemeClr val="accent1"/>
-          </a:lnRef>
-          <a:fillRef idx="3">
-            <a:schemeClr val="accent1"/>
-          </a:fillRef>
-          <a:effectRef idx="2">
-            <a:schemeClr val="accent1"/>
-          </a:effectRef>
-          <a:fontRef idx="minor">
-            <a:schemeClr val="lt1"/>
-          </a:fontRef>
-        </p:style>
-        <p:txBody>
-          <a:bodyPr rtlCol="0" anchor="ctr"/>
-          <a:lstStyle/>
-          <a:p>
-            <a:pPr algn="ctr"/>
-          </a:p>
-        </p:txBody>
-      </p:sp>
-      <p:sp>
-        <p:nvSpPr>
-          <p:cNvPr id="8" name="TextBox 7"/>
+          <p:cNvPr id="7" name="TextBox 6"/>
           <p:cNvSpPr txBox="1"/>
           <p:nvPr/>
         </p:nvSpPr>
         <p:spPr>
           <a:xfrm>
-            <a:off x="7955280" y="2606040"/>
-            <a:ext cx="3566160" cy="365760"/>
+            <a:off x="457200" y="6537960"/>
+            <a:ext cx="7315200" cy="274320"/>
           </a:xfrm>
           <a:prstGeom prst="rect">
             <a:avLst/>
@@ -10156,27 +8000,27 @@
           <a:p>
             <a:pPr algn="l"/>
             <a:r>
-              <a:rPr sz="1100" b="1">
-                <a:solidFill>
-                  <a:srgbClr val="D97706"/>
+              <a:rPr sz="900" b="0">
+                <a:solidFill>
+                  <a:srgbClr val="9CA3AF"/>
                 </a:solidFill>
                 <a:latin typeface="Calibri"/>
               </a:rPr>
-              <a:t>THE BET</a:t>
-            </a:r>
-          </a:p>
-        </p:txBody>
-      </p:sp>
-      <p:sp>
-        <p:nvSpPr>
-          <p:cNvPr id="9" name="TextBox 8"/>
+              <a:t>Choolwe  •  The Case For Fossil Fuels</a:t>
+            </a:r>
+          </a:p>
+        </p:txBody>
+      </p:sp>
+      <p:sp>
+        <p:nvSpPr>
+          <p:cNvPr id="8" name="TextBox 7"/>
           <p:cNvSpPr txBox="1"/>
           <p:nvPr/>
         </p:nvSpPr>
         <p:spPr>
           <a:xfrm>
-            <a:off x="7955280" y="2926080"/>
-            <a:ext cx="3566160" cy="1097280"/>
+            <a:off x="10789920" y="6537960"/>
+            <a:ext cx="1097280" cy="274320"/>
           </a:xfrm>
           <a:prstGeom prst="rect">
             <a:avLst/>
@@ -10189,238 +8033,15 @@
           </a:bodyPr>
           <a:lstStyle/>
           <a:p>
-            <a:pPr algn="l"/>
-            <a:r>
-              <a:rPr sz="1800" b="1">
-                <a:solidFill>
-                  <a:srgbClr val="1F2937"/>
+            <a:pPr algn="r"/>
+            <a:r>
+              <a:rPr sz="900" b="0">
+                <a:solidFill>
+                  <a:srgbClr val="9CA3AF"/>
                 </a:solidFill>
                 <a:latin typeface="Calibri"/>
               </a:rPr>
-              <a:t>85% of installed capacity
-is hydropower.</a:t>
-            </a:r>
-          </a:p>
-        </p:txBody>
-      </p:sp>
-      <p:sp>
-        <p:nvSpPr>
-          <p:cNvPr id="10" name="Rounded Rectangle 9"/>
-          <p:cNvSpPr/>
-          <p:nvPr/>
-        </p:nvSpPr>
-        <p:spPr>
-          <a:xfrm>
-            <a:off x="7680960" y="4160520"/>
-            <a:ext cx="4114800" cy="1554480"/>
-          </a:xfrm>
-          <a:prstGeom prst="roundRect">
-            <a:avLst>
-              <a:gd name="adj" fmla="val 10000"/>
-            </a:avLst>
-          </a:prstGeom>
-          <a:solidFill>
-            <a:srgbClr val="DBE5F1"/>
-          </a:solidFill>
-          <a:ln>
-            <a:noFill/>
-          </a:ln>
-          <a:effectLst/>
-        </p:spPr>
-        <p:style>
-          <a:lnRef idx="1">
-            <a:schemeClr val="accent1"/>
-          </a:lnRef>
-          <a:fillRef idx="3">
-            <a:schemeClr val="accent1"/>
-          </a:fillRef>
-          <a:effectRef idx="2">
-            <a:schemeClr val="accent1"/>
-          </a:effectRef>
-          <a:fontRef idx="minor">
-            <a:schemeClr val="lt1"/>
-          </a:fontRef>
-        </p:style>
-        <p:txBody>
-          <a:bodyPr rtlCol="0" anchor="ctr"/>
-          <a:lstStyle/>
-          <a:p>
-            <a:pPr algn="ctr"/>
-          </a:p>
-        </p:txBody>
-      </p:sp>
-      <p:sp>
-        <p:nvSpPr>
-          <p:cNvPr id="11" name="TextBox 10"/>
-          <p:cNvSpPr txBox="1"/>
-          <p:nvPr/>
-        </p:nvSpPr>
-        <p:spPr>
-          <a:xfrm>
-            <a:off x="7955280" y="4297680"/>
-            <a:ext cx="3566160" cy="365760"/>
-          </a:xfrm>
-          <a:prstGeom prst="rect">
-            <a:avLst/>
-          </a:prstGeom>
-          <a:noFill/>
-        </p:spPr>
-        <p:txBody>
-          <a:bodyPr wrap="square" lIns="0" rIns="0" tIns="0" bIns="0" anchor="t">
-            <a:spAutoFit/>
-          </a:bodyPr>
-          <a:lstStyle/>
-          <a:p>
-            <a:pPr algn="l"/>
-            <a:r>
-              <a:rPr sz="1100" b="1">
-                <a:solidFill>
-                  <a:srgbClr val="1F4E79"/>
-                </a:solidFill>
-                <a:latin typeface="Calibri"/>
-              </a:rPr>
-              <a:t>THE LESSON</a:t>
-            </a:r>
-          </a:p>
-        </p:txBody>
-      </p:sp>
-      <p:sp>
-        <p:nvSpPr>
-          <p:cNvPr id="12" name="TextBox 11"/>
-          <p:cNvSpPr txBox="1"/>
-          <p:nvPr/>
-        </p:nvSpPr>
-        <p:spPr>
-          <a:xfrm>
-            <a:off x="7955280" y="4617720"/>
-            <a:ext cx="3566160" cy="1097280"/>
-          </a:xfrm>
-          <a:prstGeom prst="rect">
-            <a:avLst/>
-          </a:prstGeom>
-          <a:noFill/>
-        </p:spPr>
-        <p:txBody>
-          <a:bodyPr wrap="square" lIns="0" rIns="0" tIns="0" bIns="0" anchor="t">
-            <a:spAutoFit/>
-          </a:bodyPr>
-          <a:lstStyle/>
-          <a:p>
-            <a:pPr algn="l"/>
-            <a:r>
-              <a:rPr sz="1300" b="0">
-                <a:solidFill>
-                  <a:srgbClr val="1F2937"/>
-                </a:solidFill>
-                <a:latin typeface="Calibri"/>
-              </a:rPr>
-              <a:t>Firm, dispatchable power matters.
-Pretending otherwise is paid for in dark hospitals.</a:t>
-            </a:r>
-          </a:p>
-        </p:txBody>
-      </p:sp>
-      <p:sp>
-        <p:nvSpPr>
-          <p:cNvPr id="13" name="TextBox 12"/>
-          <p:cNvSpPr txBox="1"/>
-          <p:nvPr/>
-        </p:nvSpPr>
-        <p:spPr>
-          <a:xfrm>
-            <a:off x="548640" y="6080760"/>
-            <a:ext cx="10972800" cy="365760"/>
-          </a:xfrm>
-          <a:prstGeom prst="rect">
-            <a:avLst/>
-          </a:prstGeom>
-          <a:noFill/>
-        </p:spPr>
-        <p:txBody>
-          <a:bodyPr wrap="square" lIns="0" rIns="0" tIns="0" bIns="0" anchor="t">
-            <a:spAutoFit/>
-          </a:bodyPr>
-          <a:lstStyle/>
-          <a:p>
-            <a:pPr algn="l"/>
-            <a:r>
-              <a:rPr sz="1300" b="0">
-                <a:solidFill>
-                  <a:srgbClr val="4B5563"/>
-                </a:solidFill>
-                <a:latin typeface="Calibri"/>
-              </a:rPr>
-              <a:t>The answer isn't "burn more coal." It's "don't bet the grid on one weather pattern."</a:t>
-            </a:r>
-          </a:p>
-        </p:txBody>
-      </p:sp>
-      <p:sp>
-        <p:nvSpPr>
-          <p:cNvPr id="14" name="TextBox 13"/>
-          <p:cNvSpPr txBox="1"/>
-          <p:nvPr/>
-        </p:nvSpPr>
-        <p:spPr>
-          <a:xfrm>
-            <a:off x="457200" y="6537960"/>
-            <a:ext cx="7315200" cy="274320"/>
-          </a:xfrm>
-          <a:prstGeom prst="rect">
-            <a:avLst/>
-          </a:prstGeom>
-          <a:noFill/>
-        </p:spPr>
-        <p:txBody>
-          <a:bodyPr wrap="square" lIns="0" rIns="0" tIns="0" bIns="0" anchor="t">
-            <a:spAutoFit/>
-          </a:bodyPr>
-          <a:lstStyle/>
-          <a:p>
-            <a:pPr algn="l"/>
-            <a:r>
-              <a:rPr sz="900" b="0">
-                <a:solidFill>
-                  <a:srgbClr val="9CA3AF"/>
-                </a:solidFill>
-                <a:latin typeface="Calibri"/>
-              </a:rPr>
-              <a:t>Choolwe  •  The Case For Fossil Fuels</a:t>
-            </a:r>
-          </a:p>
-        </p:txBody>
-      </p:sp>
-      <p:sp>
-        <p:nvSpPr>
-          <p:cNvPr id="15" name="TextBox 14"/>
-          <p:cNvSpPr txBox="1"/>
-          <p:nvPr/>
-        </p:nvSpPr>
-        <p:spPr>
-          <a:xfrm>
-            <a:off x="10789920" y="6537960"/>
-            <a:ext cx="1097280" cy="274320"/>
-          </a:xfrm>
-          <a:prstGeom prst="rect">
-            <a:avLst/>
-          </a:prstGeom>
-          <a:noFill/>
-        </p:spPr>
-        <p:txBody>
-          <a:bodyPr wrap="square" lIns="0" rIns="0" tIns="0" bIns="0" anchor="t">
-            <a:spAutoFit/>
-          </a:bodyPr>
-          <a:lstStyle/>
-          <a:p>
-            <a:pPr algn="r"/>
-            <a:r>
-              <a:rPr sz="900" b="0">
-                <a:solidFill>
-                  <a:srgbClr val="9CA3AF"/>
-                </a:solidFill>
-                <a:latin typeface="Calibri"/>
-              </a:rPr>
-              <a:t>7 / 10</a:t>
+              <a:t>7 / 9</a:t>
             </a:r>
           </a:p>
         </p:txBody>
@@ -10458,7 +8079,7 @@
             <a:avLst/>
           </a:prstGeom>
           <a:solidFill>
-            <a:srgbClr val="D97706"/>
+            <a:srgbClr val="1F4E79"/>
           </a:solidFill>
           <a:ln>
             <a:noFill/>
@@ -10502,7 +8123,7 @@
             <a:avLst/>
           </a:prstGeom>
           <a:solidFill>
-            <a:srgbClr val="D97706"/>
+            <a:srgbClr val="1F4E79"/>
           </a:solidFill>
           <a:ln>
             <a:noFill/>
@@ -10540,7 +8161,7 @@
         <p:spPr>
           <a:xfrm>
             <a:off x="822960" y="457200"/>
-            <a:ext cx="4572000" cy="365760"/>
+            <a:ext cx="7315200" cy="365760"/>
           </a:xfrm>
           <a:prstGeom prst="rect">
             <a:avLst/>
@@ -10557,11 +8178,11 @@
             <a:r>
               <a:rPr sz="1100" b="1">
                 <a:solidFill>
-                  <a:srgbClr val="D97706"/>
+                  <a:srgbClr val="1F4E79"/>
                 </a:solidFill>
                 <a:latin typeface="Calibri"/>
               </a:rPr>
-              <a:t>BRIDGE  •  WHAT ENERGY ACCESS BUYS</a:t>
+              <a:t>RESOLUTION  •  THE MANAGED TRANSITION</a:t>
             </a:r>
           </a:p>
         </p:txBody>
@@ -10596,46 +8217,156 @@
                 </a:solidFill>
                 <a:latin typeface="Calibri"/>
               </a:rPr>
-              <a:t>Below ~3,000 kWh per person per year, every extra kWh
-buys life-years. Zambia sits right on the steep part of the curve.</a:t>
-            </a:r>
-          </a:p>
-        </p:txBody>
-      </p:sp>
-      <p:pic>
-        <p:nvPicPr>
-          <p:cNvPr id="6" name="Picture 5" descr="energy_life.png"/>
-          <p:cNvPicPr>
-            <a:picLocks noChangeAspect="1"/>
-          </p:cNvPicPr>
-          <p:nvPr/>
-        </p:nvPicPr>
-        <p:blipFill>
-          <a:blip r:embed="rId2"/>
-          <a:stretch>
-            <a:fillRect/>
-          </a:stretch>
-        </p:blipFill>
-        <p:spPr>
-          <a:xfrm>
-            <a:off x="548640" y="2560320"/>
-            <a:ext cx="11064240" cy="5988850"/>
-          </a:xfrm>
-          <a:prstGeom prst="rect">
-            <a:avLst/>
-          </a:prstGeom>
-        </p:spPr>
-      </p:pic>
-      <p:sp>
-        <p:nvSpPr>
-          <p:cNvPr id="7" name="TextBox 6"/>
+              <a:t>Gas as a bridge, renewables stacked on top, firm power kept
+until storage can carry the load — in that order.</a:t>
+            </a:r>
+          </a:p>
+        </p:txBody>
+      </p:sp>
+      <p:sp>
+        <p:nvSpPr>
+          <p:cNvPr id="6" name="Rounded Rectangle 5"/>
+          <p:cNvSpPr/>
+          <p:nvPr/>
+        </p:nvSpPr>
+        <p:spPr>
+          <a:xfrm>
+            <a:off x="548640" y="2743200"/>
+            <a:ext cx="3611880" cy="3291840"/>
+          </a:xfrm>
+          <a:prstGeom prst="roundRect">
+            <a:avLst>
+              <a:gd name="adj" fmla="val 10000"/>
+            </a:avLst>
+          </a:prstGeom>
+          <a:solidFill>
+            <a:srgbClr val="1F4E79"/>
+          </a:solidFill>
+          <a:ln>
+            <a:noFill/>
+          </a:ln>
+          <a:effectLst/>
+        </p:spPr>
+        <p:style>
+          <a:lnRef idx="1">
+            <a:schemeClr val="accent1"/>
+          </a:lnRef>
+          <a:fillRef idx="3">
+            <a:schemeClr val="accent1"/>
+          </a:fillRef>
+          <a:effectRef idx="2">
+            <a:schemeClr val="accent1"/>
+          </a:effectRef>
+          <a:fontRef idx="minor">
+            <a:schemeClr val="lt1"/>
+          </a:fontRef>
+        </p:style>
+        <p:txBody>
+          <a:bodyPr rtlCol="0" anchor="ctr"/>
+          <a:lstStyle/>
+          <a:p>
+            <a:pPr algn="ctr"/>
+          </a:p>
+        </p:txBody>
+      </p:sp>
+      <p:sp>
+        <p:nvSpPr>
+          <p:cNvPr id="7" name="Oval 6"/>
+          <p:cNvSpPr/>
+          <p:nvPr/>
+        </p:nvSpPr>
+        <p:spPr>
+          <a:xfrm>
+            <a:off x="3337560" y="2894076"/>
+            <a:ext cx="640080" cy="704088"/>
+          </a:xfrm>
+          <a:prstGeom prst="ellipse">
+            <a:avLst/>
+          </a:prstGeom>
+          <a:solidFill>
+            <a:srgbClr val="FFFFFF"/>
+          </a:solidFill>
+          <a:ln>
+            <a:noFill/>
+          </a:ln>
+          <a:effectLst/>
+        </p:spPr>
+        <p:style>
+          <a:lnRef idx="1">
+            <a:schemeClr val="accent1"/>
+          </a:lnRef>
+          <a:fillRef idx="3">
+            <a:schemeClr val="accent1"/>
+          </a:fillRef>
+          <a:effectRef idx="2">
+            <a:schemeClr val="accent1"/>
+          </a:effectRef>
+          <a:fontRef idx="minor">
+            <a:schemeClr val="lt1"/>
+          </a:fontRef>
+        </p:style>
+        <p:txBody>
+          <a:bodyPr rtlCol="0" anchor="ctr"/>
+          <a:lstStyle/>
+          <a:p>
+            <a:pPr algn="ctr"/>
+          </a:p>
+        </p:txBody>
+      </p:sp>
+      <p:sp>
+        <p:nvSpPr>
+          <p:cNvPr id="8" name="Oval 7"/>
+          <p:cNvSpPr/>
+          <p:nvPr/>
+        </p:nvSpPr>
+        <p:spPr>
+          <a:xfrm>
+            <a:off x="3513582" y="3118104"/>
+            <a:ext cx="288036" cy="384048"/>
+          </a:xfrm>
+          <a:prstGeom prst="ellipse">
+            <a:avLst/>
+          </a:prstGeom>
+          <a:solidFill>
+            <a:srgbClr val="FDE8CC"/>
+          </a:solidFill>
+          <a:ln>
+            <a:noFill/>
+          </a:ln>
+          <a:effectLst/>
+        </p:spPr>
+        <p:style>
+          <a:lnRef idx="1">
+            <a:schemeClr val="accent1"/>
+          </a:lnRef>
+          <a:fillRef idx="3">
+            <a:schemeClr val="accent1"/>
+          </a:fillRef>
+          <a:effectRef idx="2">
+            <a:schemeClr val="accent1"/>
+          </a:effectRef>
+          <a:fontRef idx="minor">
+            <a:schemeClr val="lt1"/>
+          </a:fontRef>
+        </p:style>
+        <p:txBody>
+          <a:bodyPr rtlCol="0" anchor="ctr"/>
+          <a:lstStyle/>
+          <a:p>
+            <a:pPr algn="ctr"/>
+          </a:p>
+        </p:txBody>
+      </p:sp>
+      <p:sp>
+        <p:nvSpPr>
+          <p:cNvPr id="9" name="TextBox 8"/>
           <p:cNvSpPr txBox="1"/>
           <p:nvPr/>
         </p:nvSpPr>
         <p:spPr>
           <a:xfrm>
-            <a:off x="457200" y="6537960"/>
-            <a:ext cx="7315200" cy="274320"/>
+            <a:off x="868680" y="3063240"/>
+            <a:ext cx="2331720" cy="365760"/>
           </a:xfrm>
           <a:prstGeom prst="rect">
             <a:avLst/>
@@ -10650,6 +8381,732 @@
           <a:p>
             <a:pPr algn="l"/>
             <a:r>
+              <a:rPr sz="1100" b="1">
+                <a:solidFill>
+                  <a:srgbClr val="FFFFFF"/>
+                </a:solidFill>
+                <a:latin typeface="Calibri"/>
+              </a:rPr>
+              <a:t>NOW — BRIDGE</a:t>
+            </a:r>
+          </a:p>
+        </p:txBody>
+      </p:sp>
+      <p:sp>
+        <p:nvSpPr>
+          <p:cNvPr id="10" name="TextBox 9"/>
+          <p:cNvSpPr txBox="1"/>
+          <p:nvPr/>
+        </p:nvSpPr>
+        <p:spPr>
+          <a:xfrm>
+            <a:off x="868680" y="3520440"/>
+            <a:ext cx="3063240" cy="640080"/>
+          </a:xfrm>
+          <a:prstGeom prst="rect">
+            <a:avLst/>
+          </a:prstGeom>
+          <a:noFill/>
+        </p:spPr>
+        <p:txBody>
+          <a:bodyPr wrap="square" lIns="0" rIns="0" tIns="0" bIns="0" anchor="t">
+            <a:spAutoFit/>
+          </a:bodyPr>
+          <a:lstStyle/>
+          <a:p>
+            <a:pPr algn="l"/>
+            <a:r>
+              <a:rPr sz="2000" b="1">
+                <a:solidFill>
+                  <a:srgbClr val="FFFFFF"/>
+                </a:solidFill>
+                <a:latin typeface="Calibri"/>
+              </a:rPr>
+              <a:t>Natural gas</a:t>
+            </a:r>
+          </a:p>
+        </p:txBody>
+      </p:sp>
+      <p:sp>
+        <p:nvSpPr>
+          <p:cNvPr id="11" name="TextBox 10"/>
+          <p:cNvSpPr txBox="1"/>
+          <p:nvPr/>
+        </p:nvSpPr>
+        <p:spPr>
+          <a:xfrm>
+            <a:off x="868680" y="4389120"/>
+            <a:ext cx="3063240" cy="1463040"/>
+          </a:xfrm>
+          <a:prstGeom prst="rect">
+            <a:avLst/>
+          </a:prstGeom>
+          <a:noFill/>
+        </p:spPr>
+        <p:txBody>
+          <a:bodyPr wrap="square" lIns="0" rIns="0" tIns="0" bIns="0" anchor="t">
+            <a:spAutoFit/>
+          </a:bodyPr>
+          <a:lstStyle/>
+          <a:p>
+            <a:pPr algn="l"/>
+            <a:r>
+              <a:rPr sz="1200" b="0">
+                <a:solidFill>
+                  <a:srgbClr val="FFFFFF"/>
+                </a:solidFill>
+                <a:latin typeface="Calibri"/>
+              </a:rPr>
+              <a:t>Emits 50–60% less CO₂ than coal.
+Firm and dispatchable — the power that
+carried Alberta and would have spared
+Zambia.
+Africa holds ~13% of proven gas reserves.</a:t>
+            </a:r>
+          </a:p>
+        </p:txBody>
+      </p:sp>
+      <p:sp>
+        <p:nvSpPr>
+          <p:cNvPr id="12" name="Rounded Rectangle 11"/>
+          <p:cNvSpPr/>
+          <p:nvPr/>
+        </p:nvSpPr>
+        <p:spPr>
+          <a:xfrm>
+            <a:off x="4297680" y="2743200"/>
+            <a:ext cx="3611880" cy="3291840"/>
+          </a:xfrm>
+          <a:prstGeom prst="roundRect">
+            <a:avLst>
+              <a:gd name="adj" fmla="val 10000"/>
+            </a:avLst>
+          </a:prstGeom>
+          <a:solidFill>
+            <a:srgbClr val="F9FAFB"/>
+          </a:solidFill>
+          <a:ln>
+            <a:noFill/>
+          </a:ln>
+          <a:effectLst/>
+        </p:spPr>
+        <p:style>
+          <a:lnRef idx="1">
+            <a:schemeClr val="accent1"/>
+          </a:lnRef>
+          <a:fillRef idx="3">
+            <a:schemeClr val="accent1"/>
+          </a:fillRef>
+          <a:effectRef idx="2">
+            <a:schemeClr val="accent1"/>
+          </a:effectRef>
+          <a:fontRef idx="minor">
+            <a:schemeClr val="lt1"/>
+          </a:fontRef>
+        </p:style>
+        <p:txBody>
+          <a:bodyPr rtlCol="0" anchor="ctr"/>
+          <a:lstStyle/>
+          <a:p>
+            <a:pPr algn="ctr"/>
+          </a:p>
+        </p:txBody>
+      </p:sp>
+      <p:sp>
+        <p:nvSpPr>
+          <p:cNvPr id="13" name="Oval 12"/>
+          <p:cNvSpPr/>
+          <p:nvPr/>
+        </p:nvSpPr>
+        <p:spPr>
+          <a:xfrm>
+            <a:off x="7132320" y="2971800"/>
+            <a:ext cx="548640" cy="548640"/>
+          </a:xfrm>
+          <a:prstGeom prst="ellipse">
+            <a:avLst/>
+          </a:prstGeom>
+          <a:solidFill>
+            <a:srgbClr val="1F4E79"/>
+          </a:solidFill>
+          <a:ln>
+            <a:noFill/>
+          </a:ln>
+          <a:effectLst/>
+        </p:spPr>
+        <p:style>
+          <a:lnRef idx="1">
+            <a:schemeClr val="accent1"/>
+          </a:lnRef>
+          <a:fillRef idx="3">
+            <a:schemeClr val="accent1"/>
+          </a:fillRef>
+          <a:effectRef idx="2">
+            <a:schemeClr val="accent1"/>
+          </a:effectRef>
+          <a:fontRef idx="minor">
+            <a:schemeClr val="lt1"/>
+          </a:fontRef>
+        </p:style>
+        <p:txBody>
+          <a:bodyPr rtlCol="0" anchor="ctr"/>
+          <a:lstStyle/>
+          <a:p>
+            <a:pPr algn="ctr"/>
+          </a:p>
+        </p:txBody>
+      </p:sp>
+      <p:sp>
+        <p:nvSpPr>
+          <p:cNvPr id="14" name="Lightning Bolt 13"/>
+          <p:cNvSpPr/>
+          <p:nvPr/>
+        </p:nvSpPr>
+        <p:spPr>
+          <a:xfrm>
+            <a:off x="7269480" y="3040380"/>
+            <a:ext cx="274320" cy="411480"/>
+          </a:xfrm>
+          <a:prstGeom prst="lightningBolt">
+            <a:avLst/>
+          </a:prstGeom>
+          <a:solidFill>
+            <a:srgbClr val="FFFFFF"/>
+          </a:solidFill>
+          <a:ln>
+            <a:noFill/>
+          </a:ln>
+          <a:effectLst/>
+        </p:spPr>
+        <p:style>
+          <a:lnRef idx="1">
+            <a:schemeClr val="accent1"/>
+          </a:lnRef>
+          <a:fillRef idx="3">
+            <a:schemeClr val="accent1"/>
+          </a:fillRef>
+          <a:effectRef idx="2">
+            <a:schemeClr val="accent1"/>
+          </a:effectRef>
+          <a:fontRef idx="minor">
+            <a:schemeClr val="lt1"/>
+          </a:fontRef>
+        </p:style>
+        <p:txBody>
+          <a:bodyPr rtlCol="0" anchor="ctr"/>
+          <a:lstStyle/>
+          <a:p>
+            <a:pPr algn="ctr"/>
+          </a:p>
+        </p:txBody>
+      </p:sp>
+      <p:sp>
+        <p:nvSpPr>
+          <p:cNvPr id="15" name="TextBox 14"/>
+          <p:cNvSpPr txBox="1"/>
+          <p:nvPr/>
+        </p:nvSpPr>
+        <p:spPr>
+          <a:xfrm>
+            <a:off x="4617720" y="3063240"/>
+            <a:ext cx="2331720" cy="365760"/>
+          </a:xfrm>
+          <a:prstGeom prst="rect">
+            <a:avLst/>
+          </a:prstGeom>
+          <a:noFill/>
+        </p:spPr>
+        <p:txBody>
+          <a:bodyPr wrap="square" lIns="0" rIns="0" tIns="0" bIns="0" anchor="t">
+            <a:spAutoFit/>
+          </a:bodyPr>
+          <a:lstStyle/>
+          <a:p>
+            <a:pPr algn="l"/>
+            <a:r>
+              <a:rPr sz="1100" b="1">
+                <a:solidFill>
+                  <a:srgbClr val="1F4E79"/>
+                </a:solidFill>
+                <a:latin typeface="Calibri"/>
+              </a:rPr>
+              <a:t>BUILD-OUT</a:t>
+            </a:r>
+          </a:p>
+        </p:txBody>
+      </p:sp>
+      <p:sp>
+        <p:nvSpPr>
+          <p:cNvPr id="16" name="TextBox 15"/>
+          <p:cNvSpPr txBox="1"/>
+          <p:nvPr/>
+        </p:nvSpPr>
+        <p:spPr>
+          <a:xfrm>
+            <a:off x="4617720" y="3520440"/>
+            <a:ext cx="3063240" cy="640080"/>
+          </a:xfrm>
+          <a:prstGeom prst="rect">
+            <a:avLst/>
+          </a:prstGeom>
+          <a:noFill/>
+        </p:spPr>
+        <p:txBody>
+          <a:bodyPr wrap="square" lIns="0" rIns="0" tIns="0" bIns="0" anchor="t">
+            <a:spAutoFit/>
+          </a:bodyPr>
+          <a:lstStyle/>
+          <a:p>
+            <a:pPr algn="l"/>
+            <a:r>
+              <a:rPr sz="2000" b="1">
+                <a:solidFill>
+                  <a:srgbClr val="1F2937"/>
+                </a:solidFill>
+                <a:latin typeface="Calibri"/>
+              </a:rPr>
+              <a:t>Renewables, hard</a:t>
+            </a:r>
+          </a:p>
+        </p:txBody>
+      </p:sp>
+      <p:sp>
+        <p:nvSpPr>
+          <p:cNvPr id="17" name="TextBox 16"/>
+          <p:cNvSpPr txBox="1"/>
+          <p:nvPr/>
+        </p:nvSpPr>
+        <p:spPr>
+          <a:xfrm>
+            <a:off x="4617720" y="4389120"/>
+            <a:ext cx="3063240" cy="1463040"/>
+          </a:xfrm>
+          <a:prstGeom prst="rect">
+            <a:avLst/>
+          </a:prstGeom>
+          <a:noFill/>
+        </p:spPr>
+        <p:txBody>
+          <a:bodyPr wrap="square" lIns="0" rIns="0" tIns="0" bIns="0" anchor="t">
+            <a:spAutoFit/>
+          </a:bodyPr>
+          <a:lstStyle/>
+          <a:p>
+            <a:pPr algn="l"/>
+            <a:r>
+              <a:rPr sz="1200" b="0">
+                <a:solidFill>
+                  <a:srgbClr val="4B5563"/>
+                </a:solidFill>
+                <a:latin typeface="Calibri"/>
+              </a:rPr>
+              <a:t>Solar in Zambia is already the
+cheapest new capacity.
+Wind, hydro diversification,
+storage — scaled in parallel,
+not waited for.</a:t>
+            </a:r>
+          </a:p>
+        </p:txBody>
+      </p:sp>
+      <p:sp>
+        <p:nvSpPr>
+          <p:cNvPr id="18" name="Rounded Rectangle 17"/>
+          <p:cNvSpPr/>
+          <p:nvPr/>
+        </p:nvSpPr>
+        <p:spPr>
+          <a:xfrm>
+            <a:off x="8046720" y="2743200"/>
+            <a:ext cx="3611880" cy="3291840"/>
+          </a:xfrm>
+          <a:prstGeom prst="roundRect">
+            <a:avLst>
+              <a:gd name="adj" fmla="val 10000"/>
+            </a:avLst>
+          </a:prstGeom>
+          <a:solidFill>
+            <a:srgbClr val="F9FAFB"/>
+          </a:solidFill>
+          <a:ln>
+            <a:noFill/>
+          </a:ln>
+          <a:effectLst/>
+        </p:spPr>
+        <p:style>
+          <a:lnRef idx="1">
+            <a:schemeClr val="accent1"/>
+          </a:lnRef>
+          <a:fillRef idx="3">
+            <a:schemeClr val="accent1"/>
+          </a:fillRef>
+          <a:effectRef idx="2">
+            <a:schemeClr val="accent1"/>
+          </a:effectRef>
+          <a:fontRef idx="minor">
+            <a:schemeClr val="lt1"/>
+          </a:fontRef>
+        </p:style>
+        <p:txBody>
+          <a:bodyPr rtlCol="0" anchor="ctr"/>
+          <a:lstStyle/>
+          <a:p>
+            <a:pPr algn="ctr"/>
+          </a:p>
+        </p:txBody>
+      </p:sp>
+      <p:sp>
+        <p:nvSpPr>
+          <p:cNvPr id="19" name="Oval 18"/>
+          <p:cNvSpPr/>
+          <p:nvPr/>
+        </p:nvSpPr>
+        <p:spPr>
+          <a:xfrm>
+            <a:off x="10881360" y="2971800"/>
+            <a:ext cx="548640" cy="548640"/>
+          </a:xfrm>
+          <a:prstGeom prst="ellipse">
+            <a:avLst/>
+          </a:prstGeom>
+          <a:solidFill>
+            <a:srgbClr val="1F4E79"/>
+          </a:solidFill>
+          <a:ln>
+            <a:noFill/>
+          </a:ln>
+          <a:effectLst/>
+        </p:spPr>
+        <p:style>
+          <a:lnRef idx="1">
+            <a:schemeClr val="accent1"/>
+          </a:lnRef>
+          <a:fillRef idx="3">
+            <a:schemeClr val="accent1"/>
+          </a:fillRef>
+          <a:effectRef idx="2">
+            <a:schemeClr val="accent1"/>
+          </a:effectRef>
+          <a:fontRef idx="minor">
+            <a:schemeClr val="lt1"/>
+          </a:fontRef>
+        </p:style>
+        <p:txBody>
+          <a:bodyPr rtlCol="0" anchor="ctr"/>
+          <a:lstStyle/>
+          <a:p>
+            <a:pPr algn="ctr"/>
+          </a:p>
+        </p:txBody>
+      </p:sp>
+      <p:sp>
+        <p:nvSpPr>
+          <p:cNvPr id="20" name="Rectangle 19"/>
+          <p:cNvSpPr/>
+          <p:nvPr/>
+        </p:nvSpPr>
+        <p:spPr>
+          <a:xfrm>
+            <a:off x="10922508" y="3235147"/>
+            <a:ext cx="466344" cy="21945"/>
+          </a:xfrm>
+          <a:prstGeom prst="rect">
+            <a:avLst/>
+          </a:prstGeom>
+          <a:solidFill>
+            <a:srgbClr val="FFFFFF"/>
+          </a:solidFill>
+          <a:ln>
+            <a:noFill/>
+          </a:ln>
+          <a:effectLst/>
+        </p:spPr>
+        <p:style>
+          <a:lnRef idx="1">
+            <a:schemeClr val="accent1"/>
+          </a:lnRef>
+          <a:fillRef idx="3">
+            <a:schemeClr val="accent1"/>
+          </a:fillRef>
+          <a:effectRef idx="2">
+            <a:schemeClr val="accent1"/>
+          </a:effectRef>
+          <a:fontRef idx="minor">
+            <a:schemeClr val="lt1"/>
+          </a:fontRef>
+        </p:style>
+        <p:txBody>
+          <a:bodyPr rtlCol="0" anchor="ctr"/>
+          <a:lstStyle/>
+          <a:p>
+            <a:pPr algn="ctr"/>
+          </a:p>
+        </p:txBody>
+      </p:sp>
+      <p:sp>
+        <p:nvSpPr>
+          <p:cNvPr id="21" name="Rectangle 20"/>
+          <p:cNvSpPr/>
+          <p:nvPr/>
+        </p:nvSpPr>
+        <p:spPr>
+          <a:xfrm>
+            <a:off x="11144707" y="3012948"/>
+            <a:ext cx="21945" cy="466344"/>
+          </a:xfrm>
+          <a:prstGeom prst="rect">
+            <a:avLst/>
+          </a:prstGeom>
+          <a:solidFill>
+            <a:srgbClr val="FFFFFF"/>
+          </a:solidFill>
+          <a:ln>
+            <a:noFill/>
+          </a:ln>
+          <a:effectLst/>
+        </p:spPr>
+        <p:style>
+          <a:lnRef idx="1">
+            <a:schemeClr val="accent1"/>
+          </a:lnRef>
+          <a:fillRef idx="3">
+            <a:schemeClr val="accent1"/>
+          </a:fillRef>
+          <a:effectRef idx="2">
+            <a:schemeClr val="accent1"/>
+          </a:effectRef>
+          <a:fontRef idx="minor">
+            <a:schemeClr val="lt1"/>
+          </a:fontRef>
+        </p:style>
+        <p:txBody>
+          <a:bodyPr rtlCol="0" anchor="ctr"/>
+          <a:lstStyle/>
+          <a:p>
+            <a:pPr algn="ctr"/>
+          </a:p>
+        </p:txBody>
+      </p:sp>
+      <p:sp>
+        <p:nvSpPr>
+          <p:cNvPr id="22" name="TextBox 21"/>
+          <p:cNvSpPr txBox="1"/>
+          <p:nvPr/>
+        </p:nvSpPr>
+        <p:spPr>
+          <a:xfrm>
+            <a:off x="8366760" y="3063240"/>
+            <a:ext cx="2331720" cy="365760"/>
+          </a:xfrm>
+          <a:prstGeom prst="rect">
+            <a:avLst/>
+          </a:prstGeom>
+          <a:noFill/>
+        </p:spPr>
+        <p:txBody>
+          <a:bodyPr wrap="square" lIns="0" rIns="0" tIns="0" bIns="0" anchor="t">
+            <a:spAutoFit/>
+          </a:bodyPr>
+          <a:lstStyle/>
+          <a:p>
+            <a:pPr algn="l"/>
+            <a:r>
+              <a:rPr sz="1100" b="1">
+                <a:solidFill>
+                  <a:srgbClr val="1F4E79"/>
+                </a:solidFill>
+                <a:latin typeface="Calibri"/>
+              </a:rPr>
+              <a:t>THEN — RETIRE</a:t>
+            </a:r>
+          </a:p>
+        </p:txBody>
+      </p:sp>
+      <p:sp>
+        <p:nvSpPr>
+          <p:cNvPr id="23" name="TextBox 22"/>
+          <p:cNvSpPr txBox="1"/>
+          <p:nvPr/>
+        </p:nvSpPr>
+        <p:spPr>
+          <a:xfrm>
+            <a:off x="8366760" y="3520440"/>
+            <a:ext cx="3063240" cy="640080"/>
+          </a:xfrm>
+          <a:prstGeom prst="rect">
+            <a:avLst/>
+          </a:prstGeom>
+          <a:noFill/>
+        </p:spPr>
+        <p:txBody>
+          <a:bodyPr wrap="square" lIns="0" rIns="0" tIns="0" bIns="0" anchor="t">
+            <a:spAutoFit/>
+          </a:bodyPr>
+          <a:lstStyle/>
+          <a:p>
+            <a:pPr algn="l"/>
+            <a:r>
+              <a:rPr sz="2000" b="1">
+                <a:solidFill>
+                  <a:srgbClr val="1F2937"/>
+                </a:solidFill>
+                <a:latin typeface="Calibri"/>
+              </a:rPr>
+              <a:t>Phase fossil fuels down</a:t>
+            </a:r>
+          </a:p>
+        </p:txBody>
+      </p:sp>
+      <p:sp>
+        <p:nvSpPr>
+          <p:cNvPr id="24" name="TextBox 23"/>
+          <p:cNvSpPr txBox="1"/>
+          <p:nvPr/>
+        </p:nvSpPr>
+        <p:spPr>
+          <a:xfrm>
+            <a:off x="8366760" y="4389120"/>
+            <a:ext cx="3063240" cy="1463040"/>
+          </a:xfrm>
+          <a:prstGeom prst="rect">
+            <a:avLst/>
+          </a:prstGeom>
+          <a:noFill/>
+        </p:spPr>
+        <p:txBody>
+          <a:bodyPr wrap="square" lIns="0" rIns="0" tIns="0" bIns="0" anchor="t">
+            <a:spAutoFit/>
+          </a:bodyPr>
+          <a:lstStyle/>
+          <a:p>
+            <a:pPr algn="l"/>
+            <a:r>
+              <a:rPr sz="1200" b="0">
+                <a:solidFill>
+                  <a:srgbClr val="4B5563"/>
+                </a:solidFill>
+                <a:latin typeface="Calibri"/>
+              </a:rPr>
+              <a:t>When grids are firm and storage can
+carry the load, retire gas plants.
+Not before. Not as a slogan.
+As an engineering schedule.</a:t>
+            </a:r>
+          </a:p>
+        </p:txBody>
+      </p:sp>
+      <p:sp>
+        <p:nvSpPr>
+          <p:cNvPr id="25" name="Right Arrow 24"/>
+          <p:cNvSpPr/>
+          <p:nvPr/>
+        </p:nvSpPr>
+        <p:spPr>
+          <a:xfrm>
+            <a:off x="4114800" y="4160520"/>
+            <a:ext cx="274320" cy="411480"/>
+          </a:xfrm>
+          <a:prstGeom prst="rightArrow">
+            <a:avLst/>
+          </a:prstGeom>
+          <a:solidFill>
+            <a:srgbClr val="9CA3AF"/>
+          </a:solidFill>
+          <a:ln>
+            <a:noFill/>
+          </a:ln>
+          <a:effectLst/>
+        </p:spPr>
+        <p:style>
+          <a:lnRef idx="1">
+            <a:schemeClr val="accent1"/>
+          </a:lnRef>
+          <a:fillRef idx="3">
+            <a:schemeClr val="accent1"/>
+          </a:fillRef>
+          <a:effectRef idx="2">
+            <a:schemeClr val="accent1"/>
+          </a:effectRef>
+          <a:fontRef idx="minor">
+            <a:schemeClr val="lt1"/>
+          </a:fontRef>
+        </p:style>
+        <p:txBody>
+          <a:bodyPr rtlCol="0" anchor="ctr"/>
+          <a:lstStyle/>
+          <a:p>
+            <a:pPr algn="ctr"/>
+          </a:p>
+        </p:txBody>
+      </p:sp>
+      <p:sp>
+        <p:nvSpPr>
+          <p:cNvPr id="26" name="Right Arrow 25"/>
+          <p:cNvSpPr/>
+          <p:nvPr/>
+        </p:nvSpPr>
+        <p:spPr>
+          <a:xfrm>
+            <a:off x="7863840" y="4160520"/>
+            <a:ext cx="274320" cy="411480"/>
+          </a:xfrm>
+          <a:prstGeom prst="rightArrow">
+            <a:avLst/>
+          </a:prstGeom>
+          <a:solidFill>
+            <a:srgbClr val="9CA3AF"/>
+          </a:solidFill>
+          <a:ln>
+            <a:noFill/>
+          </a:ln>
+          <a:effectLst/>
+        </p:spPr>
+        <p:style>
+          <a:lnRef idx="1">
+            <a:schemeClr val="accent1"/>
+          </a:lnRef>
+          <a:fillRef idx="3">
+            <a:schemeClr val="accent1"/>
+          </a:fillRef>
+          <a:effectRef idx="2">
+            <a:schemeClr val="accent1"/>
+          </a:effectRef>
+          <a:fontRef idx="minor">
+            <a:schemeClr val="lt1"/>
+          </a:fontRef>
+        </p:style>
+        <p:txBody>
+          <a:bodyPr rtlCol="0" anchor="ctr"/>
+          <a:lstStyle/>
+          <a:p>
+            <a:pPr algn="ctr"/>
+          </a:p>
+        </p:txBody>
+      </p:sp>
+      <p:sp>
+        <p:nvSpPr>
+          <p:cNvPr id="27" name="TextBox 26"/>
+          <p:cNvSpPr txBox="1"/>
+          <p:nvPr/>
+        </p:nvSpPr>
+        <p:spPr>
+          <a:xfrm>
+            <a:off x="457200" y="6537960"/>
+            <a:ext cx="7315200" cy="274320"/>
+          </a:xfrm>
+          <a:prstGeom prst="rect">
+            <a:avLst/>
+          </a:prstGeom>
+          <a:noFill/>
+        </p:spPr>
+        <p:txBody>
+          <a:bodyPr wrap="square" lIns="0" rIns="0" tIns="0" bIns="0" anchor="t">
+            <a:spAutoFit/>
+          </a:bodyPr>
+          <a:lstStyle/>
+          <a:p>
+            <a:pPr algn="l"/>
+            <a:r>
               <a:rPr sz="900" b="0">
                 <a:solidFill>
                   <a:srgbClr val="9CA3AF"/>
@@ -10663,7 +9120,7 @@
       </p:sp>
       <p:sp>
         <p:nvSpPr>
-          <p:cNvPr id="8" name="TextBox 7"/>
+          <p:cNvPr id="28" name="TextBox 27"/>
           <p:cNvSpPr txBox="1"/>
           <p:nvPr/>
         </p:nvSpPr>
@@ -10691,7 +9148,7 @@
                 </a:solidFill>
                 <a:latin typeface="Calibri"/>
               </a:rPr>
-              <a:t>8 / 10</a:t>
+              <a:t>8 / 9</a:t>
             </a:r>
           </a:p>
         </p:txBody>
@@ -10811,7 +9268,7 @@
         <p:spPr>
           <a:xfrm>
             <a:off x="822960" y="457200"/>
-            <a:ext cx="4572000" cy="365760"/>
+            <a:ext cx="7315200" cy="365760"/>
           </a:xfrm>
           <a:prstGeom prst="rect">
             <a:avLst/>
@@ -10832,7 +9289,7 @@
                 </a:solidFill>
                 <a:latin typeface="Calibri"/>
               </a:rPr>
-              <a:t>RESOLUTION  •  THE MANAGED TRANSITION</a:t>
+              <a:t>APPENDIX  •  SOURCES</a:t>
             </a:r>
           </a:p>
         </p:txBody>
@@ -10846,7 +9303,7 @@
         <p:spPr>
           <a:xfrm>
             <a:off x="548640" y="1005840"/>
-            <a:ext cx="11064240" cy="1280160"/>
+            <a:ext cx="10972800" cy="731520"/>
           </a:xfrm>
           <a:prstGeom prst="rect">
             <a:avLst/>
@@ -10867,30 +9324,62 @@
                 </a:solidFill>
                 <a:latin typeface="Calibri"/>
               </a:rPr>
-              <a:t>Gas as a bridge, renewables stacked on top, firm power kept
-until storage can carry the load — in that order.</a:t>
-            </a:r>
-          </a:p>
-        </p:txBody>
-      </p:sp>
-      <p:sp>
-        <p:nvSpPr>
-          <p:cNvPr id="6" name="Rounded Rectangle 5"/>
+              <a:t>Every statistic on every slide, with a citation.</a:t>
+            </a:r>
+          </a:p>
+        </p:txBody>
+      </p:sp>
+      <p:sp>
+        <p:nvSpPr>
+          <p:cNvPr id="6" name="TextBox 5"/>
+          <p:cNvSpPr txBox="1"/>
+          <p:nvPr/>
+        </p:nvSpPr>
+        <p:spPr>
+          <a:xfrm>
+            <a:off x="548640" y="1554480"/>
+            <a:ext cx="10972800" cy="365760"/>
+          </a:xfrm>
+          <a:prstGeom prst="rect">
+            <a:avLst/>
+          </a:prstGeom>
+          <a:noFill/>
+        </p:spPr>
+        <p:txBody>
+          <a:bodyPr wrap="square" lIns="0" rIns="0" tIns="0" bIns="0" anchor="t">
+            <a:spAutoFit/>
+          </a:bodyPr>
+          <a:lstStyle/>
+          <a:p>
+            <a:pPr algn="l"/>
+            <a:r>
+              <a:rPr sz="1200" b="0">
+                <a:solidFill>
+                  <a:srgbClr val="4B5563"/>
+                </a:solidFill>
+                <a:latin typeface="Calibri"/>
+              </a:rPr>
+              <a:t>Full notes preserved in the repo at  research/notes.md.</a:t>
+            </a:r>
+          </a:p>
+        </p:txBody>
+      </p:sp>
+      <p:sp>
+        <p:nvSpPr>
+          <p:cNvPr id="7" name="Oval 6"/>
           <p:cNvSpPr/>
           <p:nvPr/>
         </p:nvSpPr>
         <p:spPr>
           <a:xfrm>
-            <a:off x="548640" y="2743200"/>
-            <a:ext cx="3611880" cy="3291840"/>
-          </a:xfrm>
-          <a:prstGeom prst="roundRect">
-            <a:avLst>
-              <a:gd name="adj" fmla="val 10000"/>
-            </a:avLst>
+            <a:off x="594360" y="2286000"/>
+            <a:ext cx="91440" cy="91440"/>
+          </a:xfrm>
+          <a:prstGeom prst="ellipse">
+            <a:avLst/>
           </a:prstGeom>
           <a:solidFill>
-            <a:srgbClr val="1F4E79"/>
+            <a:srgbClr val="D97706"/>
           </a:solidFill>
           <a:ln>
             <a:noFill/>
@@ -10921,20 +9410,90 @@
       </p:sp>
       <p:sp>
         <p:nvSpPr>
-          <p:cNvPr id="7" name="Oval 6"/>
+          <p:cNvPr id="8" name="TextBox 7"/>
+          <p:cNvSpPr txBox="1"/>
+          <p:nvPr/>
+        </p:nvSpPr>
+        <p:spPr>
+          <a:xfrm>
+            <a:off x="777240" y="2194560"/>
+            <a:ext cx="5257800" cy="228600"/>
+          </a:xfrm>
+          <a:prstGeom prst="rect">
+            <a:avLst/>
+          </a:prstGeom>
+          <a:noFill/>
+        </p:spPr>
+        <p:txBody>
+          <a:bodyPr wrap="square" lIns="0" rIns="0" tIns="0" bIns="0" anchor="t">
+            <a:spAutoFit/>
+          </a:bodyPr>
+          <a:lstStyle/>
+          <a:p>
+            <a:pPr algn="l"/>
+            <a:r>
+              <a:rPr sz="1100" b="1">
+                <a:solidFill>
+                  <a:srgbClr val="1F2937"/>
+                </a:solidFill>
+                <a:latin typeface="Calibri"/>
+              </a:rPr>
+              <a:t>Africa electricity access (~600M without)</a:t>
+            </a:r>
+          </a:p>
+        </p:txBody>
+      </p:sp>
+      <p:sp>
+        <p:nvSpPr>
+          <p:cNvPr id="9" name="TextBox 8"/>
+          <p:cNvSpPr txBox="1"/>
+          <p:nvPr/>
+        </p:nvSpPr>
+        <p:spPr>
+          <a:xfrm>
+            <a:off x="777240" y="2395728"/>
+            <a:ext cx="5257800" cy="228600"/>
+          </a:xfrm>
+          <a:prstGeom prst="rect">
+            <a:avLst/>
+          </a:prstGeom>
+          <a:noFill/>
+        </p:spPr>
+        <p:txBody>
+          <a:bodyPr wrap="square" lIns="0" rIns="0" tIns="0" bIns="0" anchor="t">
+            <a:spAutoFit/>
+          </a:bodyPr>
+          <a:lstStyle/>
+          <a:p>
+            <a:pPr algn="l"/>
+            <a:r>
+              <a:rPr sz="1000" b="0">
+                <a:solidFill>
+                  <a:srgbClr val="4B5563"/>
+                </a:solidFill>
+                <a:latin typeface="Calibri"/>
+              </a:rPr>
+              <a:t>IEA, Financing Electricity Access in Africa (2025)</a:t>
+            </a:r>
+          </a:p>
+        </p:txBody>
+      </p:sp>
+      <p:sp>
+        <p:nvSpPr>
+          <p:cNvPr id="10" name="Oval 9"/>
           <p:cNvSpPr/>
           <p:nvPr/>
         </p:nvSpPr>
         <p:spPr>
           <a:xfrm>
-            <a:off x="3337560" y="2894076"/>
-            <a:ext cx="640080" cy="704088"/>
+            <a:off x="6400800" y="2286000"/>
+            <a:ext cx="91440" cy="91440"/>
           </a:xfrm>
           <a:prstGeom prst="ellipse">
             <a:avLst/>
           </a:prstGeom>
           <a:solidFill>
-            <a:srgbClr val="FFFFFF"/>
+            <a:srgbClr val="D97706"/>
           </a:solidFill>
           <a:ln>
             <a:noFill/>
@@ -10965,20 +9524,90 @@
       </p:sp>
       <p:sp>
         <p:nvSpPr>
-          <p:cNvPr id="8" name="Oval 7"/>
+          <p:cNvPr id="11" name="TextBox 10"/>
+          <p:cNvSpPr txBox="1"/>
+          <p:nvPr/>
+        </p:nvSpPr>
+        <p:spPr>
+          <a:xfrm>
+            <a:off x="6583680" y="2194560"/>
+            <a:ext cx="5257800" cy="228600"/>
+          </a:xfrm>
+          <a:prstGeom prst="rect">
+            <a:avLst/>
+          </a:prstGeom>
+          <a:noFill/>
+        </p:spPr>
+        <p:txBody>
+          <a:bodyPr wrap="square" lIns="0" rIns="0" tIns="0" bIns="0" anchor="t">
+            <a:spAutoFit/>
+          </a:bodyPr>
+          <a:lstStyle/>
+          <a:p>
+            <a:pPr algn="l"/>
+            <a:r>
+              <a:rPr sz="1100" b="1">
+                <a:solidFill>
+                  <a:srgbClr val="1F2937"/>
+                </a:solidFill>
+                <a:latin typeface="Calibri"/>
+              </a:rPr>
+              <a:t>Africa cumulative CO₂ emissions (&lt;3%; sub-Saharan ~0.55%)</a:t>
+            </a:r>
+          </a:p>
+        </p:txBody>
+      </p:sp>
+      <p:sp>
+        <p:nvSpPr>
+          <p:cNvPr id="12" name="TextBox 11"/>
+          <p:cNvSpPr txBox="1"/>
+          <p:nvPr/>
+        </p:nvSpPr>
+        <p:spPr>
+          <a:xfrm>
+            <a:off x="6583680" y="2395728"/>
+            <a:ext cx="5257800" cy="228600"/>
+          </a:xfrm>
+          <a:prstGeom prst="rect">
+            <a:avLst/>
+          </a:prstGeom>
+          <a:noFill/>
+        </p:spPr>
+        <p:txBody>
+          <a:bodyPr wrap="square" lIns="0" rIns="0" tIns="0" bIns="0" anchor="t">
+            <a:spAutoFit/>
+          </a:bodyPr>
+          <a:lstStyle/>
+          <a:p>
+            <a:pPr algn="l"/>
+            <a:r>
+              <a:rPr sz="1000" b="0">
+                <a:solidFill>
+                  <a:srgbClr val="4B5563"/>
+                </a:solidFill>
+                <a:latin typeface="Calibri"/>
+              </a:rPr>
+              <a:t>Energy for Growth Hub (citing Our World in Data)</a:t>
+            </a:r>
+          </a:p>
+        </p:txBody>
+      </p:sp>
+      <p:sp>
+        <p:nvSpPr>
+          <p:cNvPr id="13" name="Oval 12"/>
           <p:cNvSpPr/>
           <p:nvPr/>
         </p:nvSpPr>
         <p:spPr>
           <a:xfrm>
-            <a:off x="3513582" y="3118104"/>
-            <a:ext cx="288036" cy="384048"/>
+            <a:off x="594360" y="2834640"/>
+            <a:ext cx="91440" cy="91440"/>
           </a:xfrm>
           <a:prstGeom prst="ellipse">
             <a:avLst/>
           </a:prstGeom>
           <a:solidFill>
-            <a:srgbClr val="FDE8CC"/>
+            <a:srgbClr val="D97706"/>
           </a:solidFill>
           <a:ln>
             <a:noFill/>
@@ -11009,14 +9638,14 @@
       </p:sp>
       <p:sp>
         <p:nvSpPr>
-          <p:cNvPr id="9" name="TextBox 8"/>
+          <p:cNvPr id="14" name="TextBox 13"/>
           <p:cNvSpPr txBox="1"/>
           <p:nvPr/>
         </p:nvSpPr>
         <p:spPr>
           <a:xfrm>
-            <a:off x="868680" y="3063240"/>
-            <a:ext cx="2331720" cy="365760"/>
+            <a:off x="777240" y="2743200"/>
+            <a:ext cx="5257800" cy="228600"/>
           </a:xfrm>
           <a:prstGeom prst="rect">
             <a:avLst/>
@@ -11033,25 +9662,25 @@
             <a:r>
               <a:rPr sz="1100" b="1">
                 <a:solidFill>
-                  <a:srgbClr val="FFFFFF"/>
+                  <a:srgbClr val="1F2937"/>
                 </a:solidFill>
                 <a:latin typeface="Calibri"/>
               </a:rPr>
-              <a:t>NOW — BRIDGE</a:t>
-            </a:r>
-          </a:p>
-        </p:txBody>
-      </p:sp>
-      <p:sp>
-        <p:nvSpPr>
-          <p:cNvPr id="10" name="TextBox 9"/>
+              <a:t>Africa population share (~17% global)</a:t>
+            </a:r>
+          </a:p>
+        </p:txBody>
+      </p:sp>
+      <p:sp>
+        <p:nvSpPr>
+          <p:cNvPr id="15" name="TextBox 14"/>
           <p:cNvSpPr txBox="1"/>
           <p:nvPr/>
         </p:nvSpPr>
         <p:spPr>
           <a:xfrm>
-            <a:off x="868680" y="3520440"/>
-            <a:ext cx="3063240" cy="640080"/>
+            <a:off x="777240" y="2944368"/>
+            <a:ext cx="5257800" cy="228600"/>
           </a:xfrm>
           <a:prstGeom prst="rect">
             <a:avLst/>
@@ -11066,73 +9695,33 @@
           <a:p>
             <a:pPr algn="l"/>
             <a:r>
-              <a:rPr sz="2000" b="1">
-                <a:solidFill>
-                  <a:srgbClr val="FFFFFF"/>
+              <a:rPr sz="1000" b="0">
+                <a:solidFill>
+                  <a:srgbClr val="4B5563"/>
                 </a:solidFill>
                 <a:latin typeface="Calibri"/>
               </a:rPr>
-              <a:t>Natural gas</a:t>
-            </a:r>
-          </a:p>
-        </p:txBody>
-      </p:sp>
-      <p:sp>
-        <p:nvSpPr>
-          <p:cNvPr id="11" name="TextBox 10"/>
-          <p:cNvSpPr txBox="1"/>
-          <p:nvPr/>
-        </p:nvSpPr>
-        <p:spPr>
-          <a:xfrm>
-            <a:off x="868680" y="4389120"/>
-            <a:ext cx="3063240" cy="1463040"/>
-          </a:xfrm>
-          <a:prstGeom prst="rect">
-            <a:avLst/>
-          </a:prstGeom>
-          <a:noFill/>
-        </p:spPr>
-        <p:txBody>
-          <a:bodyPr wrap="square" lIns="0" rIns="0" tIns="0" bIns="0" anchor="t">
-            <a:spAutoFit/>
-          </a:bodyPr>
-          <a:lstStyle/>
-          <a:p>
-            <a:pPr algn="l"/>
-            <a:r>
-              <a:rPr sz="1200" b="0">
-                <a:solidFill>
-                  <a:srgbClr val="FFFFFF"/>
-                </a:solidFill>
-                <a:latin typeface="Calibri"/>
-              </a:rPr>
-              <a:t>Emits 50–60% less CO₂ than coal.
-Africa holds ~13% of proven gas reserves.
-Faster to deploy than nuclear,
-firm in a way solar alone is not.</a:t>
-            </a:r>
-          </a:p>
-        </p:txBody>
-      </p:sp>
-      <p:sp>
-        <p:nvSpPr>
-          <p:cNvPr id="12" name="Rounded Rectangle 11"/>
+              <a:t>UN World Population Prospects</a:t>
+            </a:r>
+          </a:p>
+        </p:txBody>
+      </p:sp>
+      <p:sp>
+        <p:nvSpPr>
+          <p:cNvPr id="16" name="Oval 15"/>
           <p:cNvSpPr/>
           <p:nvPr/>
         </p:nvSpPr>
         <p:spPr>
           <a:xfrm>
-            <a:off x="4297680" y="2743200"/>
-            <a:ext cx="3611880" cy="3291840"/>
-          </a:xfrm>
-          <a:prstGeom prst="roundRect">
-            <a:avLst>
-              <a:gd name="adj" fmla="val 10000"/>
-            </a:avLst>
+            <a:off x="6400800" y="2834640"/>
+            <a:ext cx="91440" cy="91440"/>
+          </a:xfrm>
+          <a:prstGeom prst="ellipse">
+            <a:avLst/>
           </a:prstGeom>
           <a:solidFill>
-            <a:srgbClr val="F9FAFB"/>
+            <a:srgbClr val="D97706"/>
           </a:solidFill>
           <a:ln>
             <a:noFill/>
@@ -11163,20 +9752,90 @@
       </p:sp>
       <p:sp>
         <p:nvSpPr>
-          <p:cNvPr id="13" name="Oval 12"/>
+          <p:cNvPr id="17" name="TextBox 16"/>
+          <p:cNvSpPr txBox="1"/>
+          <p:nvPr/>
+        </p:nvSpPr>
+        <p:spPr>
+          <a:xfrm>
+            <a:off x="6583680" y="2743200"/>
+            <a:ext cx="5257800" cy="228600"/>
+          </a:xfrm>
+          <a:prstGeom prst="rect">
+            <a:avLst/>
+          </a:prstGeom>
+          <a:noFill/>
+        </p:spPr>
+        <p:txBody>
+          <a:bodyPr wrap="square" lIns="0" rIns="0" tIns="0" bIns="0" anchor="t">
+            <a:spAutoFit/>
+          </a:bodyPr>
+          <a:lstStyle/>
+          <a:p>
+            <a:pPr algn="l"/>
+            <a:r>
+              <a:rPr sz="1100" b="1">
+                <a:solidFill>
+                  <a:srgbClr val="1F2937"/>
+                </a:solidFill>
+                <a:latin typeface="Calibri"/>
+              </a:rPr>
+              <a:t>Zambia capacity mix (85% hydropower; ~3,986 MW)</a:t>
+            </a:r>
+          </a:p>
+        </p:txBody>
+      </p:sp>
+      <p:sp>
+        <p:nvSpPr>
+          <p:cNvPr id="18" name="TextBox 17"/>
+          <p:cNvSpPr txBox="1"/>
+          <p:nvPr/>
+        </p:nvSpPr>
+        <p:spPr>
+          <a:xfrm>
+            <a:off x="6583680" y="2944368"/>
+            <a:ext cx="5257800" cy="228600"/>
+          </a:xfrm>
+          <a:prstGeom prst="rect">
+            <a:avLst/>
+          </a:prstGeom>
+          <a:noFill/>
+        </p:spPr>
+        <p:txBody>
+          <a:bodyPr wrap="square" lIns="0" rIns="0" tIns="0" bIns="0" anchor="t">
+            <a:spAutoFit/>
+          </a:bodyPr>
+          <a:lstStyle/>
+          <a:p>
+            <a:pPr algn="l"/>
+            <a:r>
+              <a:rPr sz="1000" b="0">
+                <a:solidFill>
+                  <a:srgbClr val="4B5563"/>
+                </a:solidFill>
+                <a:latin typeface="Calibri"/>
+              </a:rPr>
+              <a:t>Global Legal Insights, Energy Laws and Regulations 2025: Zambia</a:t>
+            </a:r>
+          </a:p>
+        </p:txBody>
+      </p:sp>
+      <p:sp>
+        <p:nvSpPr>
+          <p:cNvPr id="19" name="Oval 18"/>
           <p:cNvSpPr/>
           <p:nvPr/>
         </p:nvSpPr>
         <p:spPr>
           <a:xfrm>
-            <a:off x="7132320" y="2971800"/>
-            <a:ext cx="548640" cy="548640"/>
+            <a:off x="594360" y="3383280"/>
+            <a:ext cx="91440" cy="91440"/>
           </a:xfrm>
           <a:prstGeom prst="ellipse">
             <a:avLst/>
           </a:prstGeom>
           <a:solidFill>
-            <a:srgbClr val="1F4E79"/>
+            <a:srgbClr val="D97706"/>
           </a:solidFill>
           <a:ln>
             <a:noFill/>
@@ -11207,20 +9866,90 @@
       </p:sp>
       <p:sp>
         <p:nvSpPr>
-          <p:cNvPr id="14" name="Lightning Bolt 13"/>
+          <p:cNvPr id="20" name="TextBox 19"/>
+          <p:cNvSpPr txBox="1"/>
+          <p:nvPr/>
+        </p:nvSpPr>
+        <p:spPr>
+          <a:xfrm>
+            <a:off x="777240" y="3291840"/>
+            <a:ext cx="5257800" cy="228600"/>
+          </a:xfrm>
+          <a:prstGeom prst="rect">
+            <a:avLst/>
+          </a:prstGeom>
+          <a:noFill/>
+        </p:spPr>
+        <p:txBody>
+          <a:bodyPr wrap="square" lIns="0" rIns="0" tIns="0" bIns="0" anchor="t">
+            <a:spAutoFit/>
+          </a:bodyPr>
+          <a:lstStyle/>
+          <a:p>
+            <a:pPr algn="l"/>
+            <a:r>
+              <a:rPr sz="1100" b="1">
+                <a:solidFill>
+                  <a:srgbClr val="1F2937"/>
+                </a:solidFill>
+                <a:latin typeface="Calibri"/>
+              </a:rPr>
+              <a:t>Zambia 2024 load shedding (up to 21 hrs/day)</a:t>
+            </a:r>
+          </a:p>
+        </p:txBody>
+      </p:sp>
+      <p:sp>
+        <p:nvSpPr>
+          <p:cNvPr id="21" name="TextBox 20"/>
+          <p:cNvSpPr txBox="1"/>
+          <p:nvPr/>
+        </p:nvSpPr>
+        <p:spPr>
+          <a:xfrm>
+            <a:off x="777240" y="3493008"/>
+            <a:ext cx="5257800" cy="228600"/>
+          </a:xfrm>
+          <a:prstGeom prst="rect">
+            <a:avLst/>
+          </a:prstGeom>
+          <a:noFill/>
+        </p:spPr>
+        <p:txBody>
+          <a:bodyPr wrap="square" lIns="0" rIns="0" tIns="0" bIns="0" anchor="t">
+            <a:spAutoFit/>
+          </a:bodyPr>
+          <a:lstStyle/>
+          <a:p>
+            <a:pPr algn="l"/>
+            <a:r>
+              <a:rPr sz="1000" b="0">
+                <a:solidFill>
+                  <a:srgbClr val="4B5563"/>
+                </a:solidFill>
+                <a:latin typeface="Calibri"/>
+              </a:rPr>
+              <a:t>Pulitzer Center; Afrobarometer AD1178 (2025)</a:t>
+            </a:r>
+          </a:p>
+        </p:txBody>
+      </p:sp>
+      <p:sp>
+        <p:nvSpPr>
+          <p:cNvPr id="22" name="Oval 21"/>
           <p:cNvSpPr/>
           <p:nvPr/>
         </p:nvSpPr>
         <p:spPr>
           <a:xfrm>
-            <a:off x="7269480" y="3040380"/>
-            <a:ext cx="274320" cy="411480"/>
-          </a:xfrm>
-          <a:prstGeom prst="lightningBolt">
+            <a:off x="6400800" y="3383280"/>
+            <a:ext cx="91440" cy="91440"/>
+          </a:xfrm>
+          <a:prstGeom prst="ellipse">
             <a:avLst/>
           </a:prstGeom>
           <a:solidFill>
-            <a:srgbClr val="FFFFFF"/>
+            <a:srgbClr val="D97706"/>
           </a:solidFill>
           <a:ln>
             <a:noFill/>
@@ -11251,14 +9980,14 @@
       </p:sp>
       <p:sp>
         <p:nvSpPr>
-          <p:cNvPr id="15" name="TextBox 14"/>
+          <p:cNvPr id="23" name="TextBox 22"/>
           <p:cNvSpPr txBox="1"/>
           <p:nvPr/>
         </p:nvSpPr>
         <p:spPr>
           <a:xfrm>
-            <a:off x="4617720" y="3063240"/>
-            <a:ext cx="2331720" cy="365760"/>
+            <a:off x="6583680" y="3291840"/>
+            <a:ext cx="5257800" cy="228600"/>
           </a:xfrm>
           <a:prstGeom prst="rect">
             <a:avLst/>
@@ -11275,25 +10004,25 @@
             <a:r>
               <a:rPr sz="1100" b="1">
                 <a:solidFill>
-                  <a:srgbClr val="1F4E79"/>
+                  <a:srgbClr val="1F2937"/>
                 </a:solidFill>
                 <a:latin typeface="Calibri"/>
               </a:rPr>
-              <a:t>BUILD-OUT</a:t>
-            </a:r>
-          </a:p>
-        </p:txBody>
-      </p:sp>
-      <p:sp>
-        <p:nvSpPr>
-          <p:cNvPr id="16" name="TextBox 15"/>
+              <a:t>Cold kills ~9× more than heat (~4.6M vs ~489k deaths/yr)</a:t>
+            </a:r>
+          </a:p>
+        </p:txBody>
+      </p:sp>
+      <p:sp>
+        <p:nvSpPr>
+          <p:cNvPr id="24" name="TextBox 23"/>
           <p:cNvSpPr txBox="1"/>
           <p:nvPr/>
         </p:nvSpPr>
         <p:spPr>
           <a:xfrm>
-            <a:off x="4617720" y="3520440"/>
-            <a:ext cx="3063240" cy="640080"/>
+            <a:off x="6583680" y="3493008"/>
+            <a:ext cx="5257800" cy="228600"/>
           </a:xfrm>
           <a:prstGeom prst="rect">
             <a:avLst/>
@@ -11308,74 +10037,33 @@
           <a:p>
             <a:pPr algn="l"/>
             <a:r>
-              <a:rPr sz="2000" b="1">
-                <a:solidFill>
-                  <a:srgbClr val="1F2937"/>
+              <a:rPr sz="1000" b="0">
+                <a:solidFill>
+                  <a:srgbClr val="4B5563"/>
                 </a:solidFill>
                 <a:latin typeface="Calibri"/>
               </a:rPr>
-              <a:t>Renewables, hard</a:t>
-            </a:r>
-          </a:p>
-        </p:txBody>
-      </p:sp>
-      <p:sp>
-        <p:nvSpPr>
-          <p:cNvPr id="17" name="TextBox 16"/>
-          <p:cNvSpPr txBox="1"/>
-          <p:nvPr/>
-        </p:nvSpPr>
-        <p:spPr>
-          <a:xfrm>
-            <a:off x="4617720" y="4389120"/>
-            <a:ext cx="3063240" cy="1463040"/>
-          </a:xfrm>
-          <a:prstGeom prst="rect">
-            <a:avLst/>
-          </a:prstGeom>
-          <a:noFill/>
-        </p:spPr>
-        <p:txBody>
-          <a:bodyPr wrap="square" lIns="0" rIns="0" tIns="0" bIns="0" anchor="t">
-            <a:spAutoFit/>
-          </a:bodyPr>
-          <a:lstStyle/>
-          <a:p>
-            <a:pPr algn="l"/>
-            <a:r>
-              <a:rPr sz="1200" b="0">
-                <a:solidFill>
-                  <a:srgbClr val="4B5563"/>
-                </a:solidFill>
-                <a:latin typeface="Calibri"/>
-              </a:rPr>
-              <a:t>Solar in Zambia is already the
-cheapest new capacity.
-Wind, hydro diversification,
-storage — scaled in parallel,
-not waited for.</a:t>
-            </a:r>
-          </a:p>
-        </p:txBody>
-      </p:sp>
-      <p:sp>
-        <p:nvSpPr>
-          <p:cNvPr id="18" name="Rounded Rectangle 17"/>
+              <a:t>The Lancet Planetary Health (Gasparrini et al.)</a:t>
+            </a:r>
+          </a:p>
+        </p:txBody>
+      </p:sp>
+      <p:sp>
+        <p:nvSpPr>
+          <p:cNvPr id="25" name="Oval 24"/>
           <p:cNvSpPr/>
           <p:nvPr/>
         </p:nvSpPr>
         <p:spPr>
           <a:xfrm>
-            <a:off x="8046720" y="2743200"/>
-            <a:ext cx="3611880" cy="3291840"/>
-          </a:xfrm>
-          <a:prstGeom prst="roundRect">
-            <a:avLst>
-              <a:gd name="adj" fmla="val 10000"/>
-            </a:avLst>
+            <a:off x="594360" y="3931920"/>
+            <a:ext cx="91440" cy="91440"/>
+          </a:xfrm>
+          <a:prstGeom prst="ellipse">
+            <a:avLst/>
           </a:prstGeom>
           <a:solidFill>
-            <a:srgbClr val="F9FAFB"/>
+            <a:srgbClr val="D97706"/>
           </a:solidFill>
           <a:ln>
             <a:noFill/>
@@ -11406,20 +10094,90 @@
       </p:sp>
       <p:sp>
         <p:nvSpPr>
-          <p:cNvPr id="19" name="Oval 18"/>
+          <p:cNvPr id="26" name="TextBox 25"/>
+          <p:cNvSpPr txBox="1"/>
+          <p:nvPr/>
+        </p:nvSpPr>
+        <p:spPr>
+          <a:xfrm>
+            <a:off x="777240" y="3840480"/>
+            <a:ext cx="5257800" cy="228600"/>
+          </a:xfrm>
+          <a:prstGeom prst="rect">
+            <a:avLst/>
+          </a:prstGeom>
+          <a:noFill/>
+        </p:spPr>
+        <p:txBody>
+          <a:bodyPr wrap="square" lIns="0" rIns="0" tIns="0" bIns="0" anchor="t">
+            <a:spAutoFit/>
+          </a:bodyPr>
+          <a:lstStyle/>
+          <a:p>
+            <a:pPr algn="l"/>
+            <a:r>
+              <a:rPr sz="1100" b="1">
+                <a:solidFill>
+                  <a:srgbClr val="1F2937"/>
+                </a:solidFill>
+                <a:latin typeface="Calibri"/>
+              </a:rPr>
+              <a:t>Canadian homes heated by gas (~half; 72% AB, 62% ON)</a:t>
+            </a:r>
+          </a:p>
+        </p:txBody>
+      </p:sp>
+      <p:sp>
+        <p:nvSpPr>
+          <p:cNvPr id="27" name="TextBox 26"/>
+          <p:cNvSpPr txBox="1"/>
+          <p:nvPr/>
+        </p:nvSpPr>
+        <p:spPr>
+          <a:xfrm>
+            <a:off x="777240" y="4041648"/>
+            <a:ext cx="5257800" cy="228600"/>
+          </a:xfrm>
+          <a:prstGeom prst="rect">
+            <a:avLst/>
+          </a:prstGeom>
+          <a:noFill/>
+        </p:spPr>
+        <p:txBody>
+          <a:bodyPr wrap="square" lIns="0" rIns="0" tIns="0" bIns="0" anchor="t">
+            <a:spAutoFit/>
+          </a:bodyPr>
+          <a:lstStyle/>
+          <a:p>
+            <a:pPr algn="l"/>
+            <a:r>
+              <a:rPr sz="1000" b="0">
+                <a:solidFill>
+                  <a:srgbClr val="4B5563"/>
+                </a:solidFill>
+                <a:latin typeface="Calibri"/>
+              </a:rPr>
+              <a:t>Statistics Canada — How Canadians heat their home</a:t>
+            </a:r>
+          </a:p>
+        </p:txBody>
+      </p:sp>
+      <p:sp>
+        <p:nvSpPr>
+          <p:cNvPr id="28" name="Oval 27"/>
           <p:cNvSpPr/>
           <p:nvPr/>
         </p:nvSpPr>
         <p:spPr>
           <a:xfrm>
-            <a:off x="10881360" y="2971800"/>
-            <a:ext cx="548640" cy="548640"/>
+            <a:off x="6400800" y="3931920"/>
+            <a:ext cx="91440" cy="91440"/>
           </a:xfrm>
           <a:prstGeom prst="ellipse">
             <a:avLst/>
           </a:prstGeom>
           <a:solidFill>
-            <a:srgbClr val="1F4E79"/>
+            <a:srgbClr val="D97706"/>
           </a:solidFill>
           <a:ln>
             <a:noFill/>
@@ -11450,20 +10208,90 @@
       </p:sp>
       <p:sp>
         <p:nvSpPr>
-          <p:cNvPr id="20" name="Rectangle 19"/>
+          <p:cNvPr id="29" name="TextBox 28"/>
+          <p:cNvSpPr txBox="1"/>
+          <p:nvPr/>
+        </p:nvSpPr>
+        <p:spPr>
+          <a:xfrm>
+            <a:off x="6583680" y="3840480"/>
+            <a:ext cx="5257800" cy="228600"/>
+          </a:xfrm>
+          <a:prstGeom prst="rect">
+            <a:avLst/>
+          </a:prstGeom>
+          <a:noFill/>
+        </p:spPr>
+        <p:txBody>
+          <a:bodyPr wrap="square" lIns="0" rIns="0" tIns="0" bIns="0" anchor="t">
+            <a:spAutoFit/>
+          </a:bodyPr>
+          <a:lstStyle/>
+          <a:p>
+            <a:pPr algn="l"/>
+            <a:r>
+              <a:rPr sz="1100" b="1">
+                <a:solidFill>
+                  <a:srgbClr val="1F2937"/>
+                </a:solidFill>
+                <a:latin typeface="Calibri"/>
+              </a:rPr>
+              <a:t>Alberta cold-snap grid alert (record 12,384 MW; reserves to 10 MW)</a:t>
+            </a:r>
+          </a:p>
+        </p:txBody>
+      </p:sp>
+      <p:sp>
+        <p:nvSpPr>
+          <p:cNvPr id="30" name="TextBox 29"/>
+          <p:cNvSpPr txBox="1"/>
+          <p:nvPr/>
+        </p:nvSpPr>
+        <p:spPr>
+          <a:xfrm>
+            <a:off x="6583680" y="4041648"/>
+            <a:ext cx="5257800" cy="228600"/>
+          </a:xfrm>
+          <a:prstGeom prst="rect">
+            <a:avLst/>
+          </a:prstGeom>
+          <a:noFill/>
+        </p:spPr>
+        <p:txBody>
+          <a:bodyPr wrap="square" lIns="0" rIns="0" tIns="0" bIns="0" anchor="t">
+            <a:spAutoFit/>
+          </a:bodyPr>
+          <a:lstStyle/>
+          <a:p>
+            <a:pPr algn="l"/>
+            <a:r>
+              <a:rPr sz="1000" b="0">
+                <a:solidFill>
+                  <a:srgbClr val="4B5563"/>
+                </a:solidFill>
+                <a:latin typeface="Calibri"/>
+              </a:rPr>
+              <a:t>AESO / Alberta MSA, Jan &amp; Apr 2024 Event Report</a:t>
+            </a:r>
+          </a:p>
+        </p:txBody>
+      </p:sp>
+      <p:sp>
+        <p:nvSpPr>
+          <p:cNvPr id="31" name="Oval 30"/>
           <p:cNvSpPr/>
           <p:nvPr/>
         </p:nvSpPr>
         <p:spPr>
           <a:xfrm>
-            <a:off x="10922508" y="3235147"/>
-            <a:ext cx="466344" cy="21945"/>
-          </a:xfrm>
-          <a:prstGeom prst="rect">
+            <a:off x="594360" y="4480560"/>
+            <a:ext cx="91440" cy="91440"/>
+          </a:xfrm>
+          <a:prstGeom prst="ellipse">
             <a:avLst/>
           </a:prstGeom>
           <a:solidFill>
-            <a:srgbClr val="FFFFFF"/>
+            <a:srgbClr val="D97706"/>
           </a:solidFill>
           <a:ln>
             <a:noFill/>
@@ -11494,20 +10322,90 @@
       </p:sp>
       <p:sp>
         <p:nvSpPr>
-          <p:cNvPr id="21" name="Rectangle 20"/>
+          <p:cNvPr id="32" name="TextBox 31"/>
+          <p:cNvSpPr txBox="1"/>
+          <p:nvPr/>
+        </p:nvSpPr>
+        <p:spPr>
+          <a:xfrm>
+            <a:off x="777240" y="4389120"/>
+            <a:ext cx="5257800" cy="228600"/>
+          </a:xfrm>
+          <a:prstGeom prst="rect">
+            <a:avLst/>
+          </a:prstGeom>
+          <a:noFill/>
+        </p:spPr>
+        <p:txBody>
+          <a:bodyPr wrap="square" lIns="0" rIns="0" tIns="0" bIns="0" anchor="t">
+            <a:spAutoFit/>
+          </a:bodyPr>
+          <a:lstStyle/>
+          <a:p>
+            <a:pPr algn="l"/>
+            <a:r>
+              <a:rPr sz="1100" b="1">
+                <a:solidFill>
+                  <a:srgbClr val="1F2937"/>
+                </a:solidFill>
+                <a:latin typeface="Calibri"/>
+              </a:rPr>
+              <a:t>Natural gas vs coal CO₂ (50–60% less); Africa gas reserves (~13%)</a:t>
+            </a:r>
+          </a:p>
+        </p:txBody>
+      </p:sp>
+      <p:sp>
+        <p:nvSpPr>
+          <p:cNvPr id="33" name="TextBox 32"/>
+          <p:cNvSpPr txBox="1"/>
+          <p:nvPr/>
+        </p:nvSpPr>
+        <p:spPr>
+          <a:xfrm>
+            <a:off x="777240" y="4590288"/>
+            <a:ext cx="5257800" cy="228600"/>
+          </a:xfrm>
+          <a:prstGeom prst="rect">
+            <a:avLst/>
+          </a:prstGeom>
+          <a:noFill/>
+        </p:spPr>
+        <p:txBody>
+          <a:bodyPr wrap="square" lIns="0" rIns="0" tIns="0" bIns="0" anchor="t">
+            <a:spAutoFit/>
+          </a:bodyPr>
+          <a:lstStyle/>
+          <a:p>
+            <a:pPr algn="l"/>
+            <a:r>
+              <a:rPr sz="1000" b="0">
+                <a:solidFill>
+                  <a:srgbClr val="4B5563"/>
+                </a:solidFill>
+                <a:latin typeface="Calibri"/>
+              </a:rPr>
+              <a:t>Atlantic Council, Natural gas in Africa's energy transition</a:t>
+            </a:r>
+          </a:p>
+        </p:txBody>
+      </p:sp>
+      <p:sp>
+        <p:nvSpPr>
+          <p:cNvPr id="34" name="Oval 33"/>
           <p:cNvSpPr/>
           <p:nvPr/>
         </p:nvSpPr>
         <p:spPr>
           <a:xfrm>
-            <a:off x="11144707" y="3012948"/>
-            <a:ext cx="21945" cy="466344"/>
-          </a:xfrm>
-          <a:prstGeom prst="rect">
+            <a:off x="6400800" y="4480560"/>
+            <a:ext cx="91440" cy="91440"/>
+          </a:xfrm>
+          <a:prstGeom prst="ellipse">
             <a:avLst/>
           </a:prstGeom>
           <a:solidFill>
-            <a:srgbClr val="FFFFFF"/>
+            <a:srgbClr val="D97706"/>
           </a:solidFill>
           <a:ln>
             <a:noFill/>
@@ -11538,14 +10436,14 @@
       </p:sp>
       <p:sp>
         <p:nvSpPr>
-          <p:cNvPr id="22" name="TextBox 21"/>
+          <p:cNvPr id="35" name="TextBox 34"/>
           <p:cNvSpPr txBox="1"/>
           <p:nvPr/>
         </p:nvSpPr>
         <p:spPr>
           <a:xfrm>
-            <a:off x="8366760" y="3063240"/>
-            <a:ext cx="2331720" cy="365760"/>
+            <a:off x="6583680" y="4389120"/>
+            <a:ext cx="5257800" cy="228600"/>
           </a:xfrm>
           <a:prstGeom prst="rect">
             <a:avLst/>
@@ -11562,25 +10460,25 @@
             <a:r>
               <a:rPr sz="1100" b="1">
                 <a:solidFill>
-                  <a:srgbClr val="1F4E79"/>
+                  <a:srgbClr val="1F2937"/>
                 </a:solidFill>
                 <a:latin typeface="Calibri"/>
               </a:rPr>
-              <a:t>THEN — RETIRE</a:t>
-            </a:r>
-          </a:p>
-        </p:txBody>
-      </p:sp>
-      <p:sp>
-        <p:nvSpPr>
-          <p:cNvPr id="23" name="TextBox 22"/>
+              <a:t>Steel &amp; cement embodied emissions in renewables</a:t>
+            </a:r>
+          </a:p>
+        </p:txBody>
+      </p:sp>
+      <p:sp>
+        <p:nvSpPr>
+          <p:cNvPr id="36" name="TextBox 35"/>
           <p:cNvSpPr txBox="1"/>
           <p:nvPr/>
         </p:nvSpPr>
         <p:spPr>
           <a:xfrm>
-            <a:off x="8366760" y="3520440"/>
-            <a:ext cx="3063240" cy="640080"/>
+            <a:off x="6583680" y="4590288"/>
+            <a:ext cx="5257800" cy="228600"/>
           </a:xfrm>
           <a:prstGeom prst="rect">
             <a:avLst/>
@@ -11595,71 +10493,33 @@
           <a:p>
             <a:pPr algn="l"/>
             <a:r>
-              <a:rPr sz="2000" b="1">
-                <a:solidFill>
-                  <a:srgbClr val="1F2937"/>
+              <a:rPr sz="1000" b="0">
+                <a:solidFill>
+                  <a:srgbClr val="4B5563"/>
                 </a:solidFill>
                 <a:latin typeface="Calibri"/>
               </a:rPr>
-              <a:t>Phase fossil fuels down</a:t>
-            </a:r>
-          </a:p>
-        </p:txBody>
-      </p:sp>
-      <p:sp>
-        <p:nvSpPr>
-          <p:cNvPr id="24" name="TextBox 23"/>
-          <p:cNvSpPr txBox="1"/>
-          <p:nvPr/>
-        </p:nvSpPr>
-        <p:spPr>
-          <a:xfrm>
-            <a:off x="8366760" y="4389120"/>
-            <a:ext cx="3063240" cy="1463040"/>
-          </a:xfrm>
-          <a:prstGeom prst="rect">
-            <a:avLst/>
-          </a:prstGeom>
-          <a:noFill/>
-        </p:spPr>
-        <p:txBody>
-          <a:bodyPr wrap="square" lIns="0" rIns="0" tIns="0" bIns="0" anchor="t">
-            <a:spAutoFit/>
-          </a:bodyPr>
-          <a:lstStyle/>
-          <a:p>
-            <a:pPr algn="l"/>
-            <a:r>
-              <a:rPr sz="1200" b="0">
-                <a:solidFill>
-                  <a:srgbClr val="4B5563"/>
-                </a:solidFill>
-                <a:latin typeface="Calibri"/>
-              </a:rPr>
-              <a:t>When grids are firm and storage can
-carry the load, retire gas plants.
-Not before. Not as a slogan.
-As an engineering schedule.</a:t>
-            </a:r>
-          </a:p>
-        </p:txBody>
-      </p:sp>
-      <p:sp>
-        <p:nvSpPr>
-          <p:cNvPr id="25" name="Right Arrow 24"/>
+              <a:t>MIT Climate Portal</a:t>
+            </a:r>
+          </a:p>
+        </p:txBody>
+      </p:sp>
+      <p:sp>
+        <p:nvSpPr>
+          <p:cNvPr id="37" name="Oval 36"/>
           <p:cNvSpPr/>
           <p:nvPr/>
         </p:nvSpPr>
         <p:spPr>
           <a:xfrm>
-            <a:off x="4114800" y="4160520"/>
-            <a:ext cx="274320" cy="411480"/>
-          </a:xfrm>
-          <a:prstGeom prst="rightArrow">
+            <a:off x="594360" y="5029200"/>
+            <a:ext cx="91440" cy="91440"/>
+          </a:xfrm>
+          <a:prstGeom prst="ellipse">
             <a:avLst/>
           </a:prstGeom>
           <a:solidFill>
-            <a:srgbClr val="9CA3AF"/>
+            <a:srgbClr val="D97706"/>
           </a:solidFill>
           <a:ln>
             <a:noFill/>
@@ -11690,58 +10550,14 @@
       </p:sp>
       <p:sp>
         <p:nvSpPr>
-          <p:cNvPr id="26" name="Right Arrow 25"/>
-          <p:cNvSpPr/>
-          <p:nvPr/>
-        </p:nvSpPr>
-        <p:spPr>
-          <a:xfrm>
-            <a:off x="7863840" y="4160520"/>
-            <a:ext cx="274320" cy="411480"/>
-          </a:xfrm>
-          <a:prstGeom prst="rightArrow">
-            <a:avLst/>
-          </a:prstGeom>
-          <a:solidFill>
-            <a:srgbClr val="9CA3AF"/>
-          </a:solidFill>
-          <a:ln>
-            <a:noFill/>
-          </a:ln>
-          <a:effectLst/>
-        </p:spPr>
-        <p:style>
-          <a:lnRef idx="1">
-            <a:schemeClr val="accent1"/>
-          </a:lnRef>
-          <a:fillRef idx="3">
-            <a:schemeClr val="accent1"/>
-          </a:fillRef>
-          <a:effectRef idx="2">
-            <a:schemeClr val="accent1"/>
-          </a:effectRef>
-          <a:fontRef idx="minor">
-            <a:schemeClr val="lt1"/>
-          </a:fontRef>
-        </p:style>
-        <p:txBody>
-          <a:bodyPr rtlCol="0" anchor="ctr"/>
-          <a:lstStyle/>
-          <a:p>
-            <a:pPr algn="ctr"/>
-          </a:p>
-        </p:txBody>
-      </p:sp>
-      <p:sp>
-        <p:nvSpPr>
-          <p:cNvPr id="27" name="TextBox 26"/>
+          <p:cNvPr id="38" name="TextBox 37"/>
           <p:cNvSpPr txBox="1"/>
           <p:nvPr/>
         </p:nvSpPr>
         <p:spPr>
           <a:xfrm>
-            <a:off x="457200" y="6537960"/>
-            <a:ext cx="7315200" cy="274320"/>
+            <a:off x="777240" y="4937760"/>
+            <a:ext cx="5257800" cy="228600"/>
           </a:xfrm>
           <a:prstGeom prst="rect">
             <a:avLst/>
@@ -11756,6 +10572,76 @@
           <a:p>
             <a:pPr algn="l"/>
             <a:r>
+              <a:rPr sz="1100" b="1">
+                <a:solidFill>
+                  <a:srgbClr val="1F2937"/>
+                </a:solidFill>
+                <a:latin typeface="Calibri"/>
+              </a:rPr>
+              <a:t>Life expectancy vs electricity per capita (illustrative)</a:t>
+            </a:r>
+          </a:p>
+        </p:txBody>
+      </p:sp>
+      <p:sp>
+        <p:nvSpPr>
+          <p:cNvPr id="39" name="TextBox 38"/>
+          <p:cNvSpPr txBox="1"/>
+          <p:nvPr/>
+        </p:nvSpPr>
+        <p:spPr>
+          <a:xfrm>
+            <a:off x="777240" y="5138928"/>
+            <a:ext cx="5257800" cy="228600"/>
+          </a:xfrm>
+          <a:prstGeom prst="rect">
+            <a:avLst/>
+          </a:prstGeom>
+          <a:noFill/>
+        </p:spPr>
+        <p:txBody>
+          <a:bodyPr wrap="square" lIns="0" rIns="0" tIns="0" bIns="0" anchor="t">
+            <a:spAutoFit/>
+          </a:bodyPr>
+          <a:lstStyle/>
+          <a:p>
+            <a:pPr algn="l"/>
+            <a:r>
+              <a:rPr sz="1000" b="0">
+                <a:solidFill>
+                  <a:srgbClr val="4B5563"/>
+                </a:solidFill>
+                <a:latin typeface="Calibri"/>
+              </a:rPr>
+              <a:t>World Bank Indicators (kWh/capita; life expectancy at birth)</a:t>
+            </a:r>
+          </a:p>
+        </p:txBody>
+      </p:sp>
+      <p:sp>
+        <p:nvSpPr>
+          <p:cNvPr id="40" name="TextBox 39"/>
+          <p:cNvSpPr txBox="1"/>
+          <p:nvPr/>
+        </p:nvSpPr>
+        <p:spPr>
+          <a:xfrm>
+            <a:off x="457200" y="6537960"/>
+            <a:ext cx="7315200" cy="274320"/>
+          </a:xfrm>
+          <a:prstGeom prst="rect">
+            <a:avLst/>
+          </a:prstGeom>
+          <a:noFill/>
+        </p:spPr>
+        <p:txBody>
+          <a:bodyPr wrap="square" lIns="0" rIns="0" tIns="0" bIns="0" anchor="t">
+            <a:spAutoFit/>
+          </a:bodyPr>
+          <a:lstStyle/>
+          <a:p>
+            <a:pPr algn="l"/>
+            <a:r>
               <a:rPr sz="900" b="0">
                 <a:solidFill>
                   <a:srgbClr val="9CA3AF"/>
@@ -11769,7 +10655,7 @@
       </p:sp>
       <p:sp>
         <p:nvSpPr>
-          <p:cNvPr id="28" name="TextBox 27"/>
+          <p:cNvPr id="41" name="TextBox 40"/>
           <p:cNvSpPr txBox="1"/>
           <p:nvPr/>
         </p:nvSpPr>
@@ -11797,7 +10683,7 @@
                 </a:solidFill>
                 <a:latin typeface="Calibri"/>
               </a:rPr>
-              <a:t>9 / 10</a:t>
+              <a:t>9 / 9</a:t>
             </a:r>
           </a:p>
         </p:txBody>

--- a/case-for-fossil-fuels.pptx
+++ b/case-for-fossil-fuels.pptx
@@ -14,6 +14,7 @@
     <p:sldId id="262" r:id="rId14"/>
     <p:sldId id="263" r:id="rId15"/>
     <p:sldId id="264" r:id="rId16"/>
+    <p:sldId id="265" r:id="rId17"/>
   </p:sldIdLst>
   <p:sldSz cx="12191695" cy="6858000" type="screen4x3"/>
   <p:notesSz cx="6858000" cy="9144000"/>
@@ -535,6 +536,76 @@
 </p:notes>
 </file>
 
+<file path=ppt/notesSlides/notesSlide10.xml><?xml version="1.0" encoding="utf-8"?>
+<p:notes xmlns:a="http://schemas.openxmlformats.org/drawingml/2006/main" xmlns:p="http://schemas.openxmlformats.org/presentationml/2006/main" xmlns:r="http://schemas.openxmlformats.org/officeDocument/2006/relationships">
+  <p:cSld>
+    <p:spTree>
+      <p:nvGrpSpPr>
+        <p:cNvPr id="1" name=""/>
+        <p:cNvGrpSpPr/>
+        <p:nvPr/>
+      </p:nvGrpSpPr>
+      <p:grpSpPr>
+        <a:xfrm>
+          <a:off x="0" y="0"/>
+          <a:ext cx="0" cy="0"/>
+          <a:chOff x="0" y="0"/>
+          <a:chExt cx="0" cy="0"/>
+        </a:xfrm>
+      </p:grpSpPr>
+      <p:sp>
+        <p:nvSpPr>
+          <p:cNvPr id="2" name="Slide Image Placeholder 1"/>
+          <p:cNvSpPr>
+            <a:spLocks noGrp="1"/>
+          </p:cNvSpPr>
+          <p:nvPr>
+            <p:ph type="sldImg" idx="2"/>
+          </p:nvPr>
+        </p:nvSpPr>
+        <p:spPr/>
+      </p:sp>
+      <p:sp>
+        <p:nvSpPr>
+          <p:cNvPr id="3" name="Notes Placeholder 2"/>
+          <p:cNvSpPr>
+            <a:spLocks noGrp="1"/>
+          </p:cNvSpPr>
+          <p:nvPr>
+            <p:ph type="body" idx="3" sz="quarter"/>
+          </p:nvPr>
+        </p:nvSpPr>
+        <p:spPr/>
+        <p:txBody>
+          <a:bodyPr/>
+          <a:lstStyle/>
+          <a:p>
+            <a:r>
+              <a:t>Reference slide for Q&amp;A. If anyone questions a stat, the source is here. Full URLs are in the repo's research/notes.md.</a:t>
+            </a:r>
+          </a:p>
+        </p:txBody>
+      </p:sp>
+      <p:sp>
+        <p:nvSpPr>
+          <p:cNvPr id="4" name="Slide Number Placeholder 3"/>
+          <p:cNvSpPr>
+            <a:spLocks noGrp="1"/>
+          </p:cNvSpPr>
+          <p:nvPr>
+            <p:ph type="sldNum" idx="5" sz="quarter"/>
+          </p:nvPr>
+        </p:nvSpPr>
+        <p:spPr/>
+      </p:sp>
+    </p:spTree>
+  </p:cSld>
+  <p:clrMapOvr>
+    <a:masterClrMapping/>
+  </p:clrMapOvr>
+</p:notes>
+</file>
+
 <file path=ppt/notesSlides/notesSlide2.xml><?xml version="1.0" encoding="utf-8"?>
 <p:notes xmlns:a="http://schemas.openxmlformats.org/drawingml/2006/main" xmlns:p="http://schemas.openxmlformats.org/presentationml/2006/main" xmlns:r="http://schemas.openxmlformats.org/officeDocument/2006/relationships">
   <p:cSld>
@@ -580,7 +651,7 @@
           <a:lstStyle/>
           <a:p>
             <a:r>
-              <a:t>(~25 sec) Quick grounding before the argument. Fossil fuels are just stored ancient sunlight — plants and ocean plankton, buried and cooked over millions of years into coal, oil and gas. Burning them releases that stored energy, and the CO₂ that comes with it. They're still roughly 80% of all the energy humanity uses — not just electricity, but transport, heat, and the steel, cement and fertilizer modern life is built from. Hold that scale in mind for everything that follows.</a:t>
+              <a:t>(~15 sec) Before any data, here's the one question this whole talk turns on. Yesterday I argued we should cut fossil fuels. But this is the steelman I couldn't shake: what if cutting them too fast costs more lives than it saves? Hold that question — everything today is my honest attempt to answer it.</a:t>
             </a:r>
           </a:p>
         </p:txBody>
@@ -650,7 +721,7 @@
           <a:lstStyle/>
           <a:p>
             <a:r>
-              <a:t>(~20 sec) This is what I want you to walk out of the room remembering. Reliable energy is survival — and the clean-energy-only plan can't guarantee it yet. We have lived proof on two continents: Zambia's drought and a Canadian winter. So the honest answer isn't abandonment — it's a managed transition. Let me show you how I got there.</a:t>
+              <a:t>(~25 sec) Quick grounding before the argument. Fossil fuels are just stored ancient sunlight — plants and ocean plankton, buried and cooked over millions of years into coal, oil and gas. Burning them releases that stored energy, and the CO₂ that comes with it. They're still roughly 80% of all the energy humanity uses — not just electricity, but transport, heat, and the steel, cement and fertilizer modern life is built from. Hold that scale in mind for everything that follows.</a:t>
             </a:r>
           </a:p>
         </p:txBody>
@@ -720,7 +791,7 @@
           <a:lstStyle/>
           <a:p>
             <a:r>
-              <a:t>(~40 sec) We lived this. We did the 'clean' thing — 85% of our installed capacity is hydropower. Then the climate broke our climate solution. The 2024 drought collapsed reservoir levels and ZESCO ran load shedding of up to 21 hours a day. The lesson is NOT 'burn more coal.' The lesson is: firm, dispatchable power matters, and pretending otherwise is paid for in dark hospitals and empty cold-chains.</a:t>
+              <a:t>(~20 sec) This is what I want you to walk out of the room remembering. Reliable energy is survival — and the clean-energy-only plan can't guarantee it yet. We have lived proof on two continents: Zambia's drought and a Canadian winter. So the honest answer isn't abandonment — it's a managed transition. Let me show you how I got there.</a:t>
             </a:r>
           </a:p>
         </p:txBody>
@@ -790,7 +861,7 @@
           <a:lstStyle/>
           <a:p>
             <a:r>
-              <a:t>(~45 sec) And it isn't only the poor South. In January 2024, Alberta — a rich, modern province — hit a minus-forty cold snap. Demand smashed a record at 12,384 megawatts. The province has over six thousand megawatts of wind and solar, but at the evening peak the sun had set and the wind was calm, so it delivered almost nothing. The grid fell to TEN megawatts of reserve and the government sent an emergency text telling everyone to cut power to essentials. Gas-fired plants carried the province. And remember — worldwide, cold kills about nine times as many people as heat. In most of the cold world, staying warm runs on fossil fuels: gas heats roughly half of Canadian homes. 'No fossil fuels' in a minus-thirty winter means no heat.</a:t>
+              <a:t>(~40 sec) We lived this. We did the 'clean' thing — 85% of our installed capacity is hydropower. Then the climate broke our climate solution. The 2024 drought collapsed reservoir levels and ZESCO ran load shedding of up to 21 hours a day. The lesson is NOT 'burn more coal.' The lesson is: firm, dispatchable power matters, and pretending otherwise is paid for in dark hospitals and empty cold-chains.</a:t>
             </a:r>
           </a:p>
         </p:txBody>
@@ -860,7 +931,7 @@
           <a:lstStyle/>
           <a:p>
             <a:r>
-              <a:t>(~40 sec) Now the justice layer. Every wealthy country on Earth got rich by burning coal, then oil, then gas. They are now asking the continent that contributed least to the problem to skip that ladder — using clean-energy technology whose OWN supply chain still runs on fossil fuels. That's not a climate plan. That's an injustice with a green sticker on it.</a:t>
+              <a:t>(~45 sec) And it isn't only the poor South. In January 2024, Alberta — a rich, modern province — hit a minus-forty cold snap. Demand smashed a record at 12,384 megawatts. The province has over six thousand megawatts of wind and solar, but at the evening peak the sun had set and the wind was calm, so it delivered almost nothing. The grid fell to TEN megawatts of reserve and the government sent an emergency text telling everyone to cut power to essentials. Gas-fired plants carried the province. And remember — worldwide, cold kills about nine times as many people as heat. In most of the cold world, staying warm runs on fossil fuels: gas heats roughly half of Canadian homes. 'No fossil fuels' in a minus-thirty winter means no heat.</a:t>
             </a:r>
           </a:p>
         </p:txBody>
@@ -930,7 +1001,7 @@
           <a:lstStyle/>
           <a:p>
             <a:r>
-              <a:t>(~30 sec) This is the Hans Rosling curve. Below about three thousand kilowatt-hours per person per year, every additional kilowatt-hour translates directly into life-years — through clinics, refrigerated vaccines, lit classrooms, water pumps. Zambia is right on the steep part of that curve. Cutting energy access there costs life-years immediately. That's why the moral arithmetic doesn't end with climate.</a:t>
+              <a:t>(~40 sec) Now the justice layer. Every wealthy country on Earth got rich by burning coal, then oil, then gas. They are now asking the continent that contributed least to the problem to skip that ladder — using clean-energy technology whose OWN supply chain still runs on fossil fuels. That's not a climate plan. That's an injustice with a green sticker on it.</a:t>
             </a:r>
           </a:p>
         </p:txBody>
@@ -1000,7 +1071,7 @@
           <a:lstStyle/>
           <a:p>
             <a:r>
-              <a:t>(~50 sec) I'm not arguing fossil fuels forever. I'm arguing for a MANAGED transition. Natural gas as a bridge — emits half what coal does, and it's the firm power that carried Alberta and would have spared Zambia; Africa holds 13% of global reserves. Renewables scaled aggressively on top — solar in Zambia is already the cheapest new capacity. And firm power kept on until storage and grid infrastructure can stand alone. That's how we keep the lights and the heat on while decarbonising.</a:t>
+              <a:t>(~30 sec) This is the Hans Rosling curve. Below about three thousand kilowatt-hours per person per year, every additional kilowatt-hour translates directly into life-years — through clinics, refrigerated vaccines, lit classrooms, water pumps. Zambia is right on the steep part of that curve. Cutting energy access there costs life-years immediately. That's why the moral arithmetic doesn't end with climate.</a:t>
             </a:r>
           </a:p>
         </p:txBody>
@@ -1070,7 +1141,7 @@
           <a:lstStyle/>
           <a:p>
             <a:r>
-              <a:t>Reference slide for Q&amp;A. If anyone questions a stat, the source is here. Full URLs are in the repo's research/notes.md.</a:t>
+              <a:t>(~50 sec) I'm not arguing fossil fuels forever. I'm arguing for a MANAGED transition. Natural gas as a bridge — emits half what coal does, and it's the firm power that carried Alberta and would have spared Zambia; Africa holds 13% of global reserves. Renewables scaled aggressively on top — solar in Zambia is already the cheapest new capacity. And firm power kept on until storage and grid infrastructure can stand alone. That's how we keep the lights and the heat on while decarbonising.</a:t>
             </a:r>
           </a:p>
         </p:txBody>
@@ -4699,6 +4770,1541 @@
 </p:sld>
 </file>
 
+<file path=ppt/slides/slide10.xml><?xml version="1.0" encoding="utf-8"?>
+<p:sld xmlns:a="http://schemas.openxmlformats.org/drawingml/2006/main" xmlns:p="http://schemas.openxmlformats.org/presentationml/2006/main" xmlns:r="http://schemas.openxmlformats.org/officeDocument/2006/relationships">
+  <p:cSld>
+    <p:spTree>
+      <p:nvGrpSpPr>
+        <p:cNvPr id="1" name=""/>
+        <p:cNvGrpSpPr/>
+        <p:nvPr/>
+      </p:nvGrpSpPr>
+      <p:grpSpPr/>
+      <p:sp>
+        <p:nvSpPr>
+          <p:cNvPr id="2" name="Rectangle 1"/>
+          <p:cNvSpPr/>
+          <p:nvPr/>
+        </p:nvSpPr>
+        <p:spPr>
+          <a:xfrm>
+            <a:off x="0" y="0"/>
+            <a:ext cx="12191695" cy="146304"/>
+          </a:xfrm>
+          <a:prstGeom prst="rect">
+            <a:avLst/>
+          </a:prstGeom>
+          <a:solidFill>
+            <a:srgbClr val="1F4E79"/>
+          </a:solidFill>
+          <a:ln>
+            <a:noFill/>
+          </a:ln>
+          <a:effectLst/>
+        </p:spPr>
+        <p:style>
+          <a:lnRef idx="1">
+            <a:schemeClr val="accent1"/>
+          </a:lnRef>
+          <a:fillRef idx="3">
+            <a:schemeClr val="accent1"/>
+          </a:fillRef>
+          <a:effectRef idx="2">
+            <a:schemeClr val="accent1"/>
+          </a:effectRef>
+          <a:fontRef idx="minor">
+            <a:schemeClr val="lt1"/>
+          </a:fontRef>
+        </p:style>
+        <p:txBody>
+          <a:bodyPr rtlCol="0" anchor="ctr"/>
+          <a:lstStyle/>
+          <a:p>
+            <a:pPr algn="ctr"/>
+          </a:p>
+        </p:txBody>
+      </p:sp>
+      <p:sp>
+        <p:nvSpPr>
+          <p:cNvPr id="3" name="Oval 2"/>
+          <p:cNvSpPr/>
+          <p:nvPr/>
+        </p:nvSpPr>
+        <p:spPr>
+          <a:xfrm>
+            <a:off x="576072" y="539496"/>
+            <a:ext cx="128016" cy="128016"/>
+          </a:xfrm>
+          <a:prstGeom prst="ellipse">
+            <a:avLst/>
+          </a:prstGeom>
+          <a:solidFill>
+            <a:srgbClr val="1F4E79"/>
+          </a:solidFill>
+          <a:ln>
+            <a:noFill/>
+          </a:ln>
+          <a:effectLst/>
+        </p:spPr>
+        <p:style>
+          <a:lnRef idx="1">
+            <a:schemeClr val="accent1"/>
+          </a:lnRef>
+          <a:fillRef idx="3">
+            <a:schemeClr val="accent1"/>
+          </a:fillRef>
+          <a:effectRef idx="2">
+            <a:schemeClr val="accent1"/>
+          </a:effectRef>
+          <a:fontRef idx="minor">
+            <a:schemeClr val="lt1"/>
+          </a:fontRef>
+        </p:style>
+        <p:txBody>
+          <a:bodyPr rtlCol="0" anchor="ctr"/>
+          <a:lstStyle/>
+          <a:p>
+            <a:pPr algn="ctr"/>
+          </a:p>
+        </p:txBody>
+      </p:sp>
+      <p:sp>
+        <p:nvSpPr>
+          <p:cNvPr id="4" name="TextBox 3"/>
+          <p:cNvSpPr txBox="1"/>
+          <p:nvPr/>
+        </p:nvSpPr>
+        <p:spPr>
+          <a:xfrm>
+            <a:off x="822960" y="457200"/>
+            <a:ext cx="7315200" cy="365760"/>
+          </a:xfrm>
+          <a:prstGeom prst="rect">
+            <a:avLst/>
+          </a:prstGeom>
+          <a:noFill/>
+        </p:spPr>
+        <p:txBody>
+          <a:bodyPr wrap="square" lIns="0" rIns="0" tIns="0" bIns="0" anchor="t">
+            <a:spAutoFit/>
+          </a:bodyPr>
+          <a:lstStyle/>
+          <a:p>
+            <a:pPr algn="l"/>
+            <a:r>
+              <a:rPr sz="1100" b="1">
+                <a:solidFill>
+                  <a:srgbClr val="1F4E79"/>
+                </a:solidFill>
+                <a:latin typeface="Calibri"/>
+              </a:rPr>
+              <a:t>APPENDIX  •  SOURCES</a:t>
+            </a:r>
+          </a:p>
+        </p:txBody>
+      </p:sp>
+      <p:sp>
+        <p:nvSpPr>
+          <p:cNvPr id="5" name="TextBox 4"/>
+          <p:cNvSpPr txBox="1"/>
+          <p:nvPr/>
+        </p:nvSpPr>
+        <p:spPr>
+          <a:xfrm>
+            <a:off x="548640" y="1005840"/>
+            <a:ext cx="10972800" cy="731520"/>
+          </a:xfrm>
+          <a:prstGeom prst="rect">
+            <a:avLst/>
+          </a:prstGeom>
+          <a:noFill/>
+        </p:spPr>
+        <p:txBody>
+          <a:bodyPr wrap="square" lIns="0" rIns="0" tIns="0" bIns="0" anchor="t">
+            <a:spAutoFit/>
+          </a:bodyPr>
+          <a:lstStyle/>
+          <a:p>
+            <a:pPr algn="l"/>
+            <a:r>
+              <a:rPr sz="2200" b="1">
+                <a:solidFill>
+                  <a:srgbClr val="1F2937"/>
+                </a:solidFill>
+                <a:latin typeface="Calibri"/>
+              </a:rPr>
+              <a:t>Every statistic on every slide, with a citation.</a:t>
+            </a:r>
+          </a:p>
+        </p:txBody>
+      </p:sp>
+      <p:sp>
+        <p:nvSpPr>
+          <p:cNvPr id="6" name="TextBox 5"/>
+          <p:cNvSpPr txBox="1"/>
+          <p:nvPr/>
+        </p:nvSpPr>
+        <p:spPr>
+          <a:xfrm>
+            <a:off x="548640" y="1554480"/>
+            <a:ext cx="10972800" cy="365760"/>
+          </a:xfrm>
+          <a:prstGeom prst="rect">
+            <a:avLst/>
+          </a:prstGeom>
+          <a:noFill/>
+        </p:spPr>
+        <p:txBody>
+          <a:bodyPr wrap="square" lIns="0" rIns="0" tIns="0" bIns="0" anchor="t">
+            <a:spAutoFit/>
+          </a:bodyPr>
+          <a:lstStyle/>
+          <a:p>
+            <a:pPr algn="l"/>
+            <a:r>
+              <a:rPr sz="1200" b="0">
+                <a:solidFill>
+                  <a:srgbClr val="4B5563"/>
+                </a:solidFill>
+                <a:latin typeface="Calibri"/>
+              </a:rPr>
+              <a:t>Full notes preserved in the repo at  research/notes.md.</a:t>
+            </a:r>
+          </a:p>
+        </p:txBody>
+      </p:sp>
+      <p:sp>
+        <p:nvSpPr>
+          <p:cNvPr id="7" name="Oval 6"/>
+          <p:cNvSpPr/>
+          <p:nvPr/>
+        </p:nvSpPr>
+        <p:spPr>
+          <a:xfrm>
+            <a:off x="594360" y="2286000"/>
+            <a:ext cx="91440" cy="91440"/>
+          </a:xfrm>
+          <a:prstGeom prst="ellipse">
+            <a:avLst/>
+          </a:prstGeom>
+          <a:solidFill>
+            <a:srgbClr val="D97706"/>
+          </a:solidFill>
+          <a:ln>
+            <a:noFill/>
+          </a:ln>
+          <a:effectLst/>
+        </p:spPr>
+        <p:style>
+          <a:lnRef idx="1">
+            <a:schemeClr val="accent1"/>
+          </a:lnRef>
+          <a:fillRef idx="3">
+            <a:schemeClr val="accent1"/>
+          </a:fillRef>
+          <a:effectRef idx="2">
+            <a:schemeClr val="accent1"/>
+          </a:effectRef>
+          <a:fontRef idx="minor">
+            <a:schemeClr val="lt1"/>
+          </a:fontRef>
+        </p:style>
+        <p:txBody>
+          <a:bodyPr rtlCol="0" anchor="ctr"/>
+          <a:lstStyle/>
+          <a:p>
+            <a:pPr algn="ctr"/>
+          </a:p>
+        </p:txBody>
+      </p:sp>
+      <p:sp>
+        <p:nvSpPr>
+          <p:cNvPr id="8" name="TextBox 7"/>
+          <p:cNvSpPr txBox="1"/>
+          <p:nvPr/>
+        </p:nvSpPr>
+        <p:spPr>
+          <a:xfrm>
+            <a:off x="777240" y="2194560"/>
+            <a:ext cx="5257800" cy="228600"/>
+          </a:xfrm>
+          <a:prstGeom prst="rect">
+            <a:avLst/>
+          </a:prstGeom>
+          <a:noFill/>
+        </p:spPr>
+        <p:txBody>
+          <a:bodyPr wrap="square" lIns="0" rIns="0" tIns="0" bIns="0" anchor="t">
+            <a:spAutoFit/>
+          </a:bodyPr>
+          <a:lstStyle/>
+          <a:p>
+            <a:pPr algn="l"/>
+            <a:r>
+              <a:rPr sz="1100" b="1">
+                <a:solidFill>
+                  <a:srgbClr val="1F2937"/>
+                </a:solidFill>
+                <a:latin typeface="Calibri"/>
+              </a:rPr>
+              <a:t>Africa electricity access (~600M without)</a:t>
+            </a:r>
+          </a:p>
+        </p:txBody>
+      </p:sp>
+      <p:sp>
+        <p:nvSpPr>
+          <p:cNvPr id="9" name="TextBox 8"/>
+          <p:cNvSpPr txBox="1"/>
+          <p:nvPr/>
+        </p:nvSpPr>
+        <p:spPr>
+          <a:xfrm>
+            <a:off x="777240" y="2395728"/>
+            <a:ext cx="5257800" cy="228600"/>
+          </a:xfrm>
+          <a:prstGeom prst="rect">
+            <a:avLst/>
+          </a:prstGeom>
+          <a:noFill/>
+        </p:spPr>
+        <p:txBody>
+          <a:bodyPr wrap="square" lIns="0" rIns="0" tIns="0" bIns="0" anchor="t">
+            <a:spAutoFit/>
+          </a:bodyPr>
+          <a:lstStyle/>
+          <a:p>
+            <a:pPr algn="l"/>
+            <a:r>
+              <a:rPr sz="1000" b="0">
+                <a:solidFill>
+                  <a:srgbClr val="4B5563"/>
+                </a:solidFill>
+                <a:latin typeface="Calibri"/>
+              </a:rPr>
+              <a:t>IEA, Financing Electricity Access in Africa (2025)</a:t>
+            </a:r>
+          </a:p>
+        </p:txBody>
+      </p:sp>
+      <p:sp>
+        <p:nvSpPr>
+          <p:cNvPr id="10" name="Oval 9"/>
+          <p:cNvSpPr/>
+          <p:nvPr/>
+        </p:nvSpPr>
+        <p:spPr>
+          <a:xfrm>
+            <a:off x="6400800" y="2286000"/>
+            <a:ext cx="91440" cy="91440"/>
+          </a:xfrm>
+          <a:prstGeom prst="ellipse">
+            <a:avLst/>
+          </a:prstGeom>
+          <a:solidFill>
+            <a:srgbClr val="D97706"/>
+          </a:solidFill>
+          <a:ln>
+            <a:noFill/>
+          </a:ln>
+          <a:effectLst/>
+        </p:spPr>
+        <p:style>
+          <a:lnRef idx="1">
+            <a:schemeClr val="accent1"/>
+          </a:lnRef>
+          <a:fillRef idx="3">
+            <a:schemeClr val="accent1"/>
+          </a:fillRef>
+          <a:effectRef idx="2">
+            <a:schemeClr val="accent1"/>
+          </a:effectRef>
+          <a:fontRef idx="minor">
+            <a:schemeClr val="lt1"/>
+          </a:fontRef>
+        </p:style>
+        <p:txBody>
+          <a:bodyPr rtlCol="0" anchor="ctr"/>
+          <a:lstStyle/>
+          <a:p>
+            <a:pPr algn="ctr"/>
+          </a:p>
+        </p:txBody>
+      </p:sp>
+      <p:sp>
+        <p:nvSpPr>
+          <p:cNvPr id="11" name="TextBox 10"/>
+          <p:cNvSpPr txBox="1"/>
+          <p:nvPr/>
+        </p:nvSpPr>
+        <p:spPr>
+          <a:xfrm>
+            <a:off x="6583680" y="2194560"/>
+            <a:ext cx="5257800" cy="228600"/>
+          </a:xfrm>
+          <a:prstGeom prst="rect">
+            <a:avLst/>
+          </a:prstGeom>
+          <a:noFill/>
+        </p:spPr>
+        <p:txBody>
+          <a:bodyPr wrap="square" lIns="0" rIns="0" tIns="0" bIns="0" anchor="t">
+            <a:spAutoFit/>
+          </a:bodyPr>
+          <a:lstStyle/>
+          <a:p>
+            <a:pPr algn="l"/>
+            <a:r>
+              <a:rPr sz="1100" b="1">
+                <a:solidFill>
+                  <a:srgbClr val="1F2937"/>
+                </a:solidFill>
+                <a:latin typeface="Calibri"/>
+              </a:rPr>
+              <a:t>Africa cumulative CO₂ emissions (&lt;3%; sub-Saharan ~0.55%)</a:t>
+            </a:r>
+          </a:p>
+        </p:txBody>
+      </p:sp>
+      <p:sp>
+        <p:nvSpPr>
+          <p:cNvPr id="12" name="TextBox 11"/>
+          <p:cNvSpPr txBox="1"/>
+          <p:nvPr/>
+        </p:nvSpPr>
+        <p:spPr>
+          <a:xfrm>
+            <a:off x="6583680" y="2395728"/>
+            <a:ext cx="5257800" cy="228600"/>
+          </a:xfrm>
+          <a:prstGeom prst="rect">
+            <a:avLst/>
+          </a:prstGeom>
+          <a:noFill/>
+        </p:spPr>
+        <p:txBody>
+          <a:bodyPr wrap="square" lIns="0" rIns="0" tIns="0" bIns="0" anchor="t">
+            <a:spAutoFit/>
+          </a:bodyPr>
+          <a:lstStyle/>
+          <a:p>
+            <a:pPr algn="l"/>
+            <a:r>
+              <a:rPr sz="1000" b="0">
+                <a:solidFill>
+                  <a:srgbClr val="4B5563"/>
+                </a:solidFill>
+                <a:latin typeface="Calibri"/>
+              </a:rPr>
+              <a:t>Energy for Growth Hub (citing Our World in Data)</a:t>
+            </a:r>
+          </a:p>
+        </p:txBody>
+      </p:sp>
+      <p:sp>
+        <p:nvSpPr>
+          <p:cNvPr id="13" name="Oval 12"/>
+          <p:cNvSpPr/>
+          <p:nvPr/>
+        </p:nvSpPr>
+        <p:spPr>
+          <a:xfrm>
+            <a:off x="594360" y="2834640"/>
+            <a:ext cx="91440" cy="91440"/>
+          </a:xfrm>
+          <a:prstGeom prst="ellipse">
+            <a:avLst/>
+          </a:prstGeom>
+          <a:solidFill>
+            <a:srgbClr val="D97706"/>
+          </a:solidFill>
+          <a:ln>
+            <a:noFill/>
+          </a:ln>
+          <a:effectLst/>
+        </p:spPr>
+        <p:style>
+          <a:lnRef idx="1">
+            <a:schemeClr val="accent1"/>
+          </a:lnRef>
+          <a:fillRef idx="3">
+            <a:schemeClr val="accent1"/>
+          </a:fillRef>
+          <a:effectRef idx="2">
+            <a:schemeClr val="accent1"/>
+          </a:effectRef>
+          <a:fontRef idx="minor">
+            <a:schemeClr val="lt1"/>
+          </a:fontRef>
+        </p:style>
+        <p:txBody>
+          <a:bodyPr rtlCol="0" anchor="ctr"/>
+          <a:lstStyle/>
+          <a:p>
+            <a:pPr algn="ctr"/>
+          </a:p>
+        </p:txBody>
+      </p:sp>
+      <p:sp>
+        <p:nvSpPr>
+          <p:cNvPr id="14" name="TextBox 13"/>
+          <p:cNvSpPr txBox="1"/>
+          <p:nvPr/>
+        </p:nvSpPr>
+        <p:spPr>
+          <a:xfrm>
+            <a:off x="777240" y="2743200"/>
+            <a:ext cx="5257800" cy="228600"/>
+          </a:xfrm>
+          <a:prstGeom prst="rect">
+            <a:avLst/>
+          </a:prstGeom>
+          <a:noFill/>
+        </p:spPr>
+        <p:txBody>
+          <a:bodyPr wrap="square" lIns="0" rIns="0" tIns="0" bIns="0" anchor="t">
+            <a:spAutoFit/>
+          </a:bodyPr>
+          <a:lstStyle/>
+          <a:p>
+            <a:pPr algn="l"/>
+            <a:r>
+              <a:rPr sz="1100" b="1">
+                <a:solidFill>
+                  <a:srgbClr val="1F2937"/>
+                </a:solidFill>
+                <a:latin typeface="Calibri"/>
+              </a:rPr>
+              <a:t>Africa population share (~17% global)</a:t>
+            </a:r>
+          </a:p>
+        </p:txBody>
+      </p:sp>
+      <p:sp>
+        <p:nvSpPr>
+          <p:cNvPr id="15" name="TextBox 14"/>
+          <p:cNvSpPr txBox="1"/>
+          <p:nvPr/>
+        </p:nvSpPr>
+        <p:spPr>
+          <a:xfrm>
+            <a:off x="777240" y="2944368"/>
+            <a:ext cx="5257800" cy="228600"/>
+          </a:xfrm>
+          <a:prstGeom prst="rect">
+            <a:avLst/>
+          </a:prstGeom>
+          <a:noFill/>
+        </p:spPr>
+        <p:txBody>
+          <a:bodyPr wrap="square" lIns="0" rIns="0" tIns="0" bIns="0" anchor="t">
+            <a:spAutoFit/>
+          </a:bodyPr>
+          <a:lstStyle/>
+          <a:p>
+            <a:pPr algn="l"/>
+            <a:r>
+              <a:rPr sz="1000" b="0">
+                <a:solidFill>
+                  <a:srgbClr val="4B5563"/>
+                </a:solidFill>
+                <a:latin typeface="Calibri"/>
+              </a:rPr>
+              <a:t>UN World Population Prospects</a:t>
+            </a:r>
+          </a:p>
+        </p:txBody>
+      </p:sp>
+      <p:sp>
+        <p:nvSpPr>
+          <p:cNvPr id="16" name="Oval 15"/>
+          <p:cNvSpPr/>
+          <p:nvPr/>
+        </p:nvSpPr>
+        <p:spPr>
+          <a:xfrm>
+            <a:off x="6400800" y="2834640"/>
+            <a:ext cx="91440" cy="91440"/>
+          </a:xfrm>
+          <a:prstGeom prst="ellipse">
+            <a:avLst/>
+          </a:prstGeom>
+          <a:solidFill>
+            <a:srgbClr val="D97706"/>
+          </a:solidFill>
+          <a:ln>
+            <a:noFill/>
+          </a:ln>
+          <a:effectLst/>
+        </p:spPr>
+        <p:style>
+          <a:lnRef idx="1">
+            <a:schemeClr val="accent1"/>
+          </a:lnRef>
+          <a:fillRef idx="3">
+            <a:schemeClr val="accent1"/>
+          </a:fillRef>
+          <a:effectRef idx="2">
+            <a:schemeClr val="accent1"/>
+          </a:effectRef>
+          <a:fontRef idx="minor">
+            <a:schemeClr val="lt1"/>
+          </a:fontRef>
+        </p:style>
+        <p:txBody>
+          <a:bodyPr rtlCol="0" anchor="ctr"/>
+          <a:lstStyle/>
+          <a:p>
+            <a:pPr algn="ctr"/>
+          </a:p>
+        </p:txBody>
+      </p:sp>
+      <p:sp>
+        <p:nvSpPr>
+          <p:cNvPr id="17" name="TextBox 16"/>
+          <p:cNvSpPr txBox="1"/>
+          <p:nvPr/>
+        </p:nvSpPr>
+        <p:spPr>
+          <a:xfrm>
+            <a:off x="6583680" y="2743200"/>
+            <a:ext cx="5257800" cy="228600"/>
+          </a:xfrm>
+          <a:prstGeom prst="rect">
+            <a:avLst/>
+          </a:prstGeom>
+          <a:noFill/>
+        </p:spPr>
+        <p:txBody>
+          <a:bodyPr wrap="square" lIns="0" rIns="0" tIns="0" bIns="0" anchor="t">
+            <a:spAutoFit/>
+          </a:bodyPr>
+          <a:lstStyle/>
+          <a:p>
+            <a:pPr algn="l"/>
+            <a:r>
+              <a:rPr sz="1100" b="1">
+                <a:solidFill>
+                  <a:srgbClr val="1F2937"/>
+                </a:solidFill>
+                <a:latin typeface="Calibri"/>
+              </a:rPr>
+              <a:t>Zambia capacity mix (85% hydropower; ~3,986 MW)</a:t>
+            </a:r>
+          </a:p>
+        </p:txBody>
+      </p:sp>
+      <p:sp>
+        <p:nvSpPr>
+          <p:cNvPr id="18" name="TextBox 17"/>
+          <p:cNvSpPr txBox="1"/>
+          <p:nvPr/>
+        </p:nvSpPr>
+        <p:spPr>
+          <a:xfrm>
+            <a:off x="6583680" y="2944368"/>
+            <a:ext cx="5257800" cy="228600"/>
+          </a:xfrm>
+          <a:prstGeom prst="rect">
+            <a:avLst/>
+          </a:prstGeom>
+          <a:noFill/>
+        </p:spPr>
+        <p:txBody>
+          <a:bodyPr wrap="square" lIns="0" rIns="0" tIns="0" bIns="0" anchor="t">
+            <a:spAutoFit/>
+          </a:bodyPr>
+          <a:lstStyle/>
+          <a:p>
+            <a:pPr algn="l"/>
+            <a:r>
+              <a:rPr sz="1000" b="0">
+                <a:solidFill>
+                  <a:srgbClr val="4B5563"/>
+                </a:solidFill>
+                <a:latin typeface="Calibri"/>
+              </a:rPr>
+              <a:t>Global Legal Insights, Energy Laws and Regulations 2025: Zambia</a:t>
+            </a:r>
+          </a:p>
+        </p:txBody>
+      </p:sp>
+      <p:sp>
+        <p:nvSpPr>
+          <p:cNvPr id="19" name="Oval 18"/>
+          <p:cNvSpPr/>
+          <p:nvPr/>
+        </p:nvSpPr>
+        <p:spPr>
+          <a:xfrm>
+            <a:off x="594360" y="3383280"/>
+            <a:ext cx="91440" cy="91440"/>
+          </a:xfrm>
+          <a:prstGeom prst="ellipse">
+            <a:avLst/>
+          </a:prstGeom>
+          <a:solidFill>
+            <a:srgbClr val="D97706"/>
+          </a:solidFill>
+          <a:ln>
+            <a:noFill/>
+          </a:ln>
+          <a:effectLst/>
+        </p:spPr>
+        <p:style>
+          <a:lnRef idx="1">
+            <a:schemeClr val="accent1"/>
+          </a:lnRef>
+          <a:fillRef idx="3">
+            <a:schemeClr val="accent1"/>
+          </a:fillRef>
+          <a:effectRef idx="2">
+            <a:schemeClr val="accent1"/>
+          </a:effectRef>
+          <a:fontRef idx="minor">
+            <a:schemeClr val="lt1"/>
+          </a:fontRef>
+        </p:style>
+        <p:txBody>
+          <a:bodyPr rtlCol="0" anchor="ctr"/>
+          <a:lstStyle/>
+          <a:p>
+            <a:pPr algn="ctr"/>
+          </a:p>
+        </p:txBody>
+      </p:sp>
+      <p:sp>
+        <p:nvSpPr>
+          <p:cNvPr id="20" name="TextBox 19"/>
+          <p:cNvSpPr txBox="1"/>
+          <p:nvPr/>
+        </p:nvSpPr>
+        <p:spPr>
+          <a:xfrm>
+            <a:off x="777240" y="3291840"/>
+            <a:ext cx="5257800" cy="228600"/>
+          </a:xfrm>
+          <a:prstGeom prst="rect">
+            <a:avLst/>
+          </a:prstGeom>
+          <a:noFill/>
+        </p:spPr>
+        <p:txBody>
+          <a:bodyPr wrap="square" lIns="0" rIns="0" tIns="0" bIns="0" anchor="t">
+            <a:spAutoFit/>
+          </a:bodyPr>
+          <a:lstStyle/>
+          <a:p>
+            <a:pPr algn="l"/>
+            <a:r>
+              <a:rPr sz="1100" b="1">
+                <a:solidFill>
+                  <a:srgbClr val="1F2937"/>
+                </a:solidFill>
+                <a:latin typeface="Calibri"/>
+              </a:rPr>
+              <a:t>Zambia 2024 load shedding (up to 21 hrs/day)</a:t>
+            </a:r>
+          </a:p>
+        </p:txBody>
+      </p:sp>
+      <p:sp>
+        <p:nvSpPr>
+          <p:cNvPr id="21" name="TextBox 20"/>
+          <p:cNvSpPr txBox="1"/>
+          <p:nvPr/>
+        </p:nvSpPr>
+        <p:spPr>
+          <a:xfrm>
+            <a:off x="777240" y="3493008"/>
+            <a:ext cx="5257800" cy="228600"/>
+          </a:xfrm>
+          <a:prstGeom prst="rect">
+            <a:avLst/>
+          </a:prstGeom>
+          <a:noFill/>
+        </p:spPr>
+        <p:txBody>
+          <a:bodyPr wrap="square" lIns="0" rIns="0" tIns="0" bIns="0" anchor="t">
+            <a:spAutoFit/>
+          </a:bodyPr>
+          <a:lstStyle/>
+          <a:p>
+            <a:pPr algn="l"/>
+            <a:r>
+              <a:rPr sz="1000" b="0">
+                <a:solidFill>
+                  <a:srgbClr val="4B5563"/>
+                </a:solidFill>
+                <a:latin typeface="Calibri"/>
+              </a:rPr>
+              <a:t>Pulitzer Center; Afrobarometer AD1178 (2025)</a:t>
+            </a:r>
+          </a:p>
+        </p:txBody>
+      </p:sp>
+      <p:sp>
+        <p:nvSpPr>
+          <p:cNvPr id="22" name="Oval 21"/>
+          <p:cNvSpPr/>
+          <p:nvPr/>
+        </p:nvSpPr>
+        <p:spPr>
+          <a:xfrm>
+            <a:off x="6400800" y="3383280"/>
+            <a:ext cx="91440" cy="91440"/>
+          </a:xfrm>
+          <a:prstGeom prst="ellipse">
+            <a:avLst/>
+          </a:prstGeom>
+          <a:solidFill>
+            <a:srgbClr val="D97706"/>
+          </a:solidFill>
+          <a:ln>
+            <a:noFill/>
+          </a:ln>
+          <a:effectLst/>
+        </p:spPr>
+        <p:style>
+          <a:lnRef idx="1">
+            <a:schemeClr val="accent1"/>
+          </a:lnRef>
+          <a:fillRef idx="3">
+            <a:schemeClr val="accent1"/>
+          </a:fillRef>
+          <a:effectRef idx="2">
+            <a:schemeClr val="accent1"/>
+          </a:effectRef>
+          <a:fontRef idx="minor">
+            <a:schemeClr val="lt1"/>
+          </a:fontRef>
+        </p:style>
+        <p:txBody>
+          <a:bodyPr rtlCol="0" anchor="ctr"/>
+          <a:lstStyle/>
+          <a:p>
+            <a:pPr algn="ctr"/>
+          </a:p>
+        </p:txBody>
+      </p:sp>
+      <p:sp>
+        <p:nvSpPr>
+          <p:cNvPr id="23" name="TextBox 22"/>
+          <p:cNvSpPr txBox="1"/>
+          <p:nvPr/>
+        </p:nvSpPr>
+        <p:spPr>
+          <a:xfrm>
+            <a:off x="6583680" y="3291840"/>
+            <a:ext cx="5257800" cy="228600"/>
+          </a:xfrm>
+          <a:prstGeom prst="rect">
+            <a:avLst/>
+          </a:prstGeom>
+          <a:noFill/>
+        </p:spPr>
+        <p:txBody>
+          <a:bodyPr wrap="square" lIns="0" rIns="0" tIns="0" bIns="0" anchor="t">
+            <a:spAutoFit/>
+          </a:bodyPr>
+          <a:lstStyle/>
+          <a:p>
+            <a:pPr algn="l"/>
+            <a:r>
+              <a:rPr sz="1100" b="1">
+                <a:solidFill>
+                  <a:srgbClr val="1F2937"/>
+                </a:solidFill>
+                <a:latin typeface="Calibri"/>
+              </a:rPr>
+              <a:t>Cold kills ~9× more than heat (~4.6M vs ~489k deaths/yr)</a:t>
+            </a:r>
+          </a:p>
+        </p:txBody>
+      </p:sp>
+      <p:sp>
+        <p:nvSpPr>
+          <p:cNvPr id="24" name="TextBox 23"/>
+          <p:cNvSpPr txBox="1"/>
+          <p:nvPr/>
+        </p:nvSpPr>
+        <p:spPr>
+          <a:xfrm>
+            <a:off x="6583680" y="3493008"/>
+            <a:ext cx="5257800" cy="228600"/>
+          </a:xfrm>
+          <a:prstGeom prst="rect">
+            <a:avLst/>
+          </a:prstGeom>
+          <a:noFill/>
+        </p:spPr>
+        <p:txBody>
+          <a:bodyPr wrap="square" lIns="0" rIns="0" tIns="0" bIns="0" anchor="t">
+            <a:spAutoFit/>
+          </a:bodyPr>
+          <a:lstStyle/>
+          <a:p>
+            <a:pPr algn="l"/>
+            <a:r>
+              <a:rPr sz="1000" b="0">
+                <a:solidFill>
+                  <a:srgbClr val="4B5563"/>
+                </a:solidFill>
+                <a:latin typeface="Calibri"/>
+              </a:rPr>
+              <a:t>The Lancet Planetary Health (Gasparrini et al.)</a:t>
+            </a:r>
+          </a:p>
+        </p:txBody>
+      </p:sp>
+      <p:sp>
+        <p:nvSpPr>
+          <p:cNvPr id="25" name="Oval 24"/>
+          <p:cNvSpPr/>
+          <p:nvPr/>
+        </p:nvSpPr>
+        <p:spPr>
+          <a:xfrm>
+            <a:off x="594360" y="3931920"/>
+            <a:ext cx="91440" cy="91440"/>
+          </a:xfrm>
+          <a:prstGeom prst="ellipse">
+            <a:avLst/>
+          </a:prstGeom>
+          <a:solidFill>
+            <a:srgbClr val="D97706"/>
+          </a:solidFill>
+          <a:ln>
+            <a:noFill/>
+          </a:ln>
+          <a:effectLst/>
+        </p:spPr>
+        <p:style>
+          <a:lnRef idx="1">
+            <a:schemeClr val="accent1"/>
+          </a:lnRef>
+          <a:fillRef idx="3">
+            <a:schemeClr val="accent1"/>
+          </a:fillRef>
+          <a:effectRef idx="2">
+            <a:schemeClr val="accent1"/>
+          </a:effectRef>
+          <a:fontRef idx="minor">
+            <a:schemeClr val="lt1"/>
+          </a:fontRef>
+        </p:style>
+        <p:txBody>
+          <a:bodyPr rtlCol="0" anchor="ctr"/>
+          <a:lstStyle/>
+          <a:p>
+            <a:pPr algn="ctr"/>
+          </a:p>
+        </p:txBody>
+      </p:sp>
+      <p:sp>
+        <p:nvSpPr>
+          <p:cNvPr id="26" name="TextBox 25"/>
+          <p:cNvSpPr txBox="1"/>
+          <p:nvPr/>
+        </p:nvSpPr>
+        <p:spPr>
+          <a:xfrm>
+            <a:off x="777240" y="3840480"/>
+            <a:ext cx="5257800" cy="228600"/>
+          </a:xfrm>
+          <a:prstGeom prst="rect">
+            <a:avLst/>
+          </a:prstGeom>
+          <a:noFill/>
+        </p:spPr>
+        <p:txBody>
+          <a:bodyPr wrap="square" lIns="0" rIns="0" tIns="0" bIns="0" anchor="t">
+            <a:spAutoFit/>
+          </a:bodyPr>
+          <a:lstStyle/>
+          <a:p>
+            <a:pPr algn="l"/>
+            <a:r>
+              <a:rPr sz="1100" b="1">
+                <a:solidFill>
+                  <a:srgbClr val="1F2937"/>
+                </a:solidFill>
+                <a:latin typeface="Calibri"/>
+              </a:rPr>
+              <a:t>Canadian homes heated by gas (~half; 72% AB, 62% ON)</a:t>
+            </a:r>
+          </a:p>
+        </p:txBody>
+      </p:sp>
+      <p:sp>
+        <p:nvSpPr>
+          <p:cNvPr id="27" name="TextBox 26"/>
+          <p:cNvSpPr txBox="1"/>
+          <p:nvPr/>
+        </p:nvSpPr>
+        <p:spPr>
+          <a:xfrm>
+            <a:off x="777240" y="4041648"/>
+            <a:ext cx="5257800" cy="228600"/>
+          </a:xfrm>
+          <a:prstGeom prst="rect">
+            <a:avLst/>
+          </a:prstGeom>
+          <a:noFill/>
+        </p:spPr>
+        <p:txBody>
+          <a:bodyPr wrap="square" lIns="0" rIns="0" tIns="0" bIns="0" anchor="t">
+            <a:spAutoFit/>
+          </a:bodyPr>
+          <a:lstStyle/>
+          <a:p>
+            <a:pPr algn="l"/>
+            <a:r>
+              <a:rPr sz="1000" b="0">
+                <a:solidFill>
+                  <a:srgbClr val="4B5563"/>
+                </a:solidFill>
+                <a:latin typeface="Calibri"/>
+              </a:rPr>
+              <a:t>Statistics Canada — How Canadians heat their home</a:t>
+            </a:r>
+          </a:p>
+        </p:txBody>
+      </p:sp>
+      <p:sp>
+        <p:nvSpPr>
+          <p:cNvPr id="28" name="Oval 27"/>
+          <p:cNvSpPr/>
+          <p:nvPr/>
+        </p:nvSpPr>
+        <p:spPr>
+          <a:xfrm>
+            <a:off x="6400800" y="3931920"/>
+            <a:ext cx="91440" cy="91440"/>
+          </a:xfrm>
+          <a:prstGeom prst="ellipse">
+            <a:avLst/>
+          </a:prstGeom>
+          <a:solidFill>
+            <a:srgbClr val="D97706"/>
+          </a:solidFill>
+          <a:ln>
+            <a:noFill/>
+          </a:ln>
+          <a:effectLst/>
+        </p:spPr>
+        <p:style>
+          <a:lnRef idx="1">
+            <a:schemeClr val="accent1"/>
+          </a:lnRef>
+          <a:fillRef idx="3">
+            <a:schemeClr val="accent1"/>
+          </a:fillRef>
+          <a:effectRef idx="2">
+            <a:schemeClr val="accent1"/>
+          </a:effectRef>
+          <a:fontRef idx="minor">
+            <a:schemeClr val="lt1"/>
+          </a:fontRef>
+        </p:style>
+        <p:txBody>
+          <a:bodyPr rtlCol="0" anchor="ctr"/>
+          <a:lstStyle/>
+          <a:p>
+            <a:pPr algn="ctr"/>
+          </a:p>
+        </p:txBody>
+      </p:sp>
+      <p:sp>
+        <p:nvSpPr>
+          <p:cNvPr id="29" name="TextBox 28"/>
+          <p:cNvSpPr txBox="1"/>
+          <p:nvPr/>
+        </p:nvSpPr>
+        <p:spPr>
+          <a:xfrm>
+            <a:off x="6583680" y="3840480"/>
+            <a:ext cx="5257800" cy="228600"/>
+          </a:xfrm>
+          <a:prstGeom prst="rect">
+            <a:avLst/>
+          </a:prstGeom>
+          <a:noFill/>
+        </p:spPr>
+        <p:txBody>
+          <a:bodyPr wrap="square" lIns="0" rIns="0" tIns="0" bIns="0" anchor="t">
+            <a:spAutoFit/>
+          </a:bodyPr>
+          <a:lstStyle/>
+          <a:p>
+            <a:pPr algn="l"/>
+            <a:r>
+              <a:rPr sz="1100" b="1">
+                <a:solidFill>
+                  <a:srgbClr val="1F2937"/>
+                </a:solidFill>
+                <a:latin typeface="Calibri"/>
+              </a:rPr>
+              <a:t>Alberta cold-snap grid alert (record 12,384 MW; reserves to 10 MW)</a:t>
+            </a:r>
+          </a:p>
+        </p:txBody>
+      </p:sp>
+      <p:sp>
+        <p:nvSpPr>
+          <p:cNvPr id="30" name="TextBox 29"/>
+          <p:cNvSpPr txBox="1"/>
+          <p:nvPr/>
+        </p:nvSpPr>
+        <p:spPr>
+          <a:xfrm>
+            <a:off x="6583680" y="4041648"/>
+            <a:ext cx="5257800" cy="228600"/>
+          </a:xfrm>
+          <a:prstGeom prst="rect">
+            <a:avLst/>
+          </a:prstGeom>
+          <a:noFill/>
+        </p:spPr>
+        <p:txBody>
+          <a:bodyPr wrap="square" lIns="0" rIns="0" tIns="0" bIns="0" anchor="t">
+            <a:spAutoFit/>
+          </a:bodyPr>
+          <a:lstStyle/>
+          <a:p>
+            <a:pPr algn="l"/>
+            <a:r>
+              <a:rPr sz="1000" b="0">
+                <a:solidFill>
+                  <a:srgbClr val="4B5563"/>
+                </a:solidFill>
+                <a:latin typeface="Calibri"/>
+              </a:rPr>
+              <a:t>AESO / Alberta MSA, Jan &amp; Apr 2024 Event Report</a:t>
+            </a:r>
+          </a:p>
+        </p:txBody>
+      </p:sp>
+      <p:sp>
+        <p:nvSpPr>
+          <p:cNvPr id="31" name="Oval 30"/>
+          <p:cNvSpPr/>
+          <p:nvPr/>
+        </p:nvSpPr>
+        <p:spPr>
+          <a:xfrm>
+            <a:off x="594360" y="4480560"/>
+            <a:ext cx="91440" cy="91440"/>
+          </a:xfrm>
+          <a:prstGeom prst="ellipse">
+            <a:avLst/>
+          </a:prstGeom>
+          <a:solidFill>
+            <a:srgbClr val="D97706"/>
+          </a:solidFill>
+          <a:ln>
+            <a:noFill/>
+          </a:ln>
+          <a:effectLst/>
+        </p:spPr>
+        <p:style>
+          <a:lnRef idx="1">
+            <a:schemeClr val="accent1"/>
+          </a:lnRef>
+          <a:fillRef idx="3">
+            <a:schemeClr val="accent1"/>
+          </a:fillRef>
+          <a:effectRef idx="2">
+            <a:schemeClr val="accent1"/>
+          </a:effectRef>
+          <a:fontRef idx="minor">
+            <a:schemeClr val="lt1"/>
+          </a:fontRef>
+        </p:style>
+        <p:txBody>
+          <a:bodyPr rtlCol="0" anchor="ctr"/>
+          <a:lstStyle/>
+          <a:p>
+            <a:pPr algn="ctr"/>
+          </a:p>
+        </p:txBody>
+      </p:sp>
+      <p:sp>
+        <p:nvSpPr>
+          <p:cNvPr id="32" name="TextBox 31"/>
+          <p:cNvSpPr txBox="1"/>
+          <p:nvPr/>
+        </p:nvSpPr>
+        <p:spPr>
+          <a:xfrm>
+            <a:off x="777240" y="4389120"/>
+            <a:ext cx="5257800" cy="228600"/>
+          </a:xfrm>
+          <a:prstGeom prst="rect">
+            <a:avLst/>
+          </a:prstGeom>
+          <a:noFill/>
+        </p:spPr>
+        <p:txBody>
+          <a:bodyPr wrap="square" lIns="0" rIns="0" tIns="0" bIns="0" anchor="t">
+            <a:spAutoFit/>
+          </a:bodyPr>
+          <a:lstStyle/>
+          <a:p>
+            <a:pPr algn="l"/>
+            <a:r>
+              <a:rPr sz="1100" b="1">
+                <a:solidFill>
+                  <a:srgbClr val="1F2937"/>
+                </a:solidFill>
+                <a:latin typeface="Calibri"/>
+              </a:rPr>
+              <a:t>Natural gas vs coal CO₂ (50–60% less); Africa gas reserves (~13%)</a:t>
+            </a:r>
+          </a:p>
+        </p:txBody>
+      </p:sp>
+      <p:sp>
+        <p:nvSpPr>
+          <p:cNvPr id="33" name="TextBox 32"/>
+          <p:cNvSpPr txBox="1"/>
+          <p:nvPr/>
+        </p:nvSpPr>
+        <p:spPr>
+          <a:xfrm>
+            <a:off x="777240" y="4590288"/>
+            <a:ext cx="5257800" cy="228600"/>
+          </a:xfrm>
+          <a:prstGeom prst="rect">
+            <a:avLst/>
+          </a:prstGeom>
+          <a:noFill/>
+        </p:spPr>
+        <p:txBody>
+          <a:bodyPr wrap="square" lIns="0" rIns="0" tIns="0" bIns="0" anchor="t">
+            <a:spAutoFit/>
+          </a:bodyPr>
+          <a:lstStyle/>
+          <a:p>
+            <a:pPr algn="l"/>
+            <a:r>
+              <a:rPr sz="1000" b="0">
+                <a:solidFill>
+                  <a:srgbClr val="4B5563"/>
+                </a:solidFill>
+                <a:latin typeface="Calibri"/>
+              </a:rPr>
+              <a:t>Atlantic Council, Natural gas in Africa's energy transition</a:t>
+            </a:r>
+          </a:p>
+        </p:txBody>
+      </p:sp>
+      <p:sp>
+        <p:nvSpPr>
+          <p:cNvPr id="34" name="Oval 33"/>
+          <p:cNvSpPr/>
+          <p:nvPr/>
+        </p:nvSpPr>
+        <p:spPr>
+          <a:xfrm>
+            <a:off x="6400800" y="4480560"/>
+            <a:ext cx="91440" cy="91440"/>
+          </a:xfrm>
+          <a:prstGeom prst="ellipse">
+            <a:avLst/>
+          </a:prstGeom>
+          <a:solidFill>
+            <a:srgbClr val="D97706"/>
+          </a:solidFill>
+          <a:ln>
+            <a:noFill/>
+          </a:ln>
+          <a:effectLst/>
+        </p:spPr>
+        <p:style>
+          <a:lnRef idx="1">
+            <a:schemeClr val="accent1"/>
+          </a:lnRef>
+          <a:fillRef idx="3">
+            <a:schemeClr val="accent1"/>
+          </a:fillRef>
+          <a:effectRef idx="2">
+            <a:schemeClr val="accent1"/>
+          </a:effectRef>
+          <a:fontRef idx="minor">
+            <a:schemeClr val="lt1"/>
+          </a:fontRef>
+        </p:style>
+        <p:txBody>
+          <a:bodyPr rtlCol="0" anchor="ctr"/>
+          <a:lstStyle/>
+          <a:p>
+            <a:pPr algn="ctr"/>
+          </a:p>
+        </p:txBody>
+      </p:sp>
+      <p:sp>
+        <p:nvSpPr>
+          <p:cNvPr id="35" name="TextBox 34"/>
+          <p:cNvSpPr txBox="1"/>
+          <p:nvPr/>
+        </p:nvSpPr>
+        <p:spPr>
+          <a:xfrm>
+            <a:off x="6583680" y="4389120"/>
+            <a:ext cx="5257800" cy="228600"/>
+          </a:xfrm>
+          <a:prstGeom prst="rect">
+            <a:avLst/>
+          </a:prstGeom>
+          <a:noFill/>
+        </p:spPr>
+        <p:txBody>
+          <a:bodyPr wrap="square" lIns="0" rIns="0" tIns="0" bIns="0" anchor="t">
+            <a:spAutoFit/>
+          </a:bodyPr>
+          <a:lstStyle/>
+          <a:p>
+            <a:pPr algn="l"/>
+            <a:r>
+              <a:rPr sz="1100" b="1">
+                <a:solidFill>
+                  <a:srgbClr val="1F2937"/>
+                </a:solidFill>
+                <a:latin typeface="Calibri"/>
+              </a:rPr>
+              <a:t>Steel &amp; cement embodied emissions in renewables</a:t>
+            </a:r>
+          </a:p>
+        </p:txBody>
+      </p:sp>
+      <p:sp>
+        <p:nvSpPr>
+          <p:cNvPr id="36" name="TextBox 35"/>
+          <p:cNvSpPr txBox="1"/>
+          <p:nvPr/>
+        </p:nvSpPr>
+        <p:spPr>
+          <a:xfrm>
+            <a:off x="6583680" y="4590288"/>
+            <a:ext cx="5257800" cy="228600"/>
+          </a:xfrm>
+          <a:prstGeom prst="rect">
+            <a:avLst/>
+          </a:prstGeom>
+          <a:noFill/>
+        </p:spPr>
+        <p:txBody>
+          <a:bodyPr wrap="square" lIns="0" rIns="0" tIns="0" bIns="0" anchor="t">
+            <a:spAutoFit/>
+          </a:bodyPr>
+          <a:lstStyle/>
+          <a:p>
+            <a:pPr algn="l"/>
+            <a:r>
+              <a:rPr sz="1000" b="0">
+                <a:solidFill>
+                  <a:srgbClr val="4B5563"/>
+                </a:solidFill>
+                <a:latin typeface="Calibri"/>
+              </a:rPr>
+              <a:t>MIT Climate Portal</a:t>
+            </a:r>
+          </a:p>
+        </p:txBody>
+      </p:sp>
+      <p:sp>
+        <p:nvSpPr>
+          <p:cNvPr id="37" name="Oval 36"/>
+          <p:cNvSpPr/>
+          <p:nvPr/>
+        </p:nvSpPr>
+        <p:spPr>
+          <a:xfrm>
+            <a:off x="594360" y="5029200"/>
+            <a:ext cx="91440" cy="91440"/>
+          </a:xfrm>
+          <a:prstGeom prst="ellipse">
+            <a:avLst/>
+          </a:prstGeom>
+          <a:solidFill>
+            <a:srgbClr val="D97706"/>
+          </a:solidFill>
+          <a:ln>
+            <a:noFill/>
+          </a:ln>
+          <a:effectLst/>
+        </p:spPr>
+        <p:style>
+          <a:lnRef idx="1">
+            <a:schemeClr val="accent1"/>
+          </a:lnRef>
+          <a:fillRef idx="3">
+            <a:schemeClr val="accent1"/>
+          </a:fillRef>
+          <a:effectRef idx="2">
+            <a:schemeClr val="accent1"/>
+          </a:effectRef>
+          <a:fontRef idx="minor">
+            <a:schemeClr val="lt1"/>
+          </a:fontRef>
+        </p:style>
+        <p:txBody>
+          <a:bodyPr rtlCol="0" anchor="ctr"/>
+          <a:lstStyle/>
+          <a:p>
+            <a:pPr algn="ctr"/>
+          </a:p>
+        </p:txBody>
+      </p:sp>
+      <p:sp>
+        <p:nvSpPr>
+          <p:cNvPr id="38" name="TextBox 37"/>
+          <p:cNvSpPr txBox="1"/>
+          <p:nvPr/>
+        </p:nvSpPr>
+        <p:spPr>
+          <a:xfrm>
+            <a:off x="777240" y="4937760"/>
+            <a:ext cx="5257800" cy="228600"/>
+          </a:xfrm>
+          <a:prstGeom prst="rect">
+            <a:avLst/>
+          </a:prstGeom>
+          <a:noFill/>
+        </p:spPr>
+        <p:txBody>
+          <a:bodyPr wrap="square" lIns="0" rIns="0" tIns="0" bIns="0" anchor="t">
+            <a:spAutoFit/>
+          </a:bodyPr>
+          <a:lstStyle/>
+          <a:p>
+            <a:pPr algn="l"/>
+            <a:r>
+              <a:rPr sz="1100" b="1">
+                <a:solidFill>
+                  <a:srgbClr val="1F2937"/>
+                </a:solidFill>
+                <a:latin typeface="Calibri"/>
+              </a:rPr>
+              <a:t>Life expectancy vs electricity per capita (illustrative)</a:t>
+            </a:r>
+          </a:p>
+        </p:txBody>
+      </p:sp>
+      <p:sp>
+        <p:nvSpPr>
+          <p:cNvPr id="39" name="TextBox 38"/>
+          <p:cNvSpPr txBox="1"/>
+          <p:nvPr/>
+        </p:nvSpPr>
+        <p:spPr>
+          <a:xfrm>
+            <a:off x="777240" y="5138928"/>
+            <a:ext cx="5257800" cy="228600"/>
+          </a:xfrm>
+          <a:prstGeom prst="rect">
+            <a:avLst/>
+          </a:prstGeom>
+          <a:noFill/>
+        </p:spPr>
+        <p:txBody>
+          <a:bodyPr wrap="square" lIns="0" rIns="0" tIns="0" bIns="0" anchor="t">
+            <a:spAutoFit/>
+          </a:bodyPr>
+          <a:lstStyle/>
+          <a:p>
+            <a:pPr algn="l"/>
+            <a:r>
+              <a:rPr sz="1000" b="0">
+                <a:solidFill>
+                  <a:srgbClr val="4B5563"/>
+                </a:solidFill>
+                <a:latin typeface="Calibri"/>
+              </a:rPr>
+              <a:t>World Bank Indicators (kWh/capita; life expectancy at birth)</a:t>
+            </a:r>
+          </a:p>
+        </p:txBody>
+      </p:sp>
+      <p:sp>
+        <p:nvSpPr>
+          <p:cNvPr id="40" name="TextBox 39"/>
+          <p:cNvSpPr txBox="1"/>
+          <p:nvPr/>
+        </p:nvSpPr>
+        <p:spPr>
+          <a:xfrm>
+            <a:off x="457200" y="6537960"/>
+            <a:ext cx="7315200" cy="274320"/>
+          </a:xfrm>
+          <a:prstGeom prst="rect">
+            <a:avLst/>
+          </a:prstGeom>
+          <a:noFill/>
+        </p:spPr>
+        <p:txBody>
+          <a:bodyPr wrap="square" lIns="0" rIns="0" tIns="0" bIns="0" anchor="t">
+            <a:spAutoFit/>
+          </a:bodyPr>
+          <a:lstStyle/>
+          <a:p>
+            <a:pPr algn="l"/>
+            <a:r>
+              <a:rPr sz="900" b="0">
+                <a:solidFill>
+                  <a:srgbClr val="9CA3AF"/>
+                </a:solidFill>
+                <a:latin typeface="Calibri"/>
+              </a:rPr>
+              <a:t>Choolwe  •  The Case For Fossil Fuels</a:t>
+            </a:r>
+          </a:p>
+        </p:txBody>
+      </p:sp>
+      <p:sp>
+        <p:nvSpPr>
+          <p:cNvPr id="41" name="TextBox 40"/>
+          <p:cNvSpPr txBox="1"/>
+          <p:nvPr/>
+        </p:nvSpPr>
+        <p:spPr>
+          <a:xfrm>
+            <a:off x="10789920" y="6537960"/>
+            <a:ext cx="1097280" cy="274320"/>
+          </a:xfrm>
+          <a:prstGeom prst="rect">
+            <a:avLst/>
+          </a:prstGeom>
+          <a:noFill/>
+        </p:spPr>
+        <p:txBody>
+          <a:bodyPr wrap="square" lIns="0" rIns="0" tIns="0" bIns="0" anchor="t">
+            <a:spAutoFit/>
+          </a:bodyPr>
+          <a:lstStyle/>
+          <a:p>
+            <a:pPr algn="r"/>
+            <a:r>
+              <a:rPr sz="900" b="0">
+                <a:solidFill>
+                  <a:srgbClr val="9CA3AF"/>
+                </a:solidFill>
+                <a:latin typeface="Calibri"/>
+              </a:rPr>
+              <a:t>10 / 10</a:t>
+            </a:r>
+          </a:p>
+        </p:txBody>
+      </p:sp>
+    </p:spTree>
+  </p:cSld>
+  <p:clrMapOvr>
+    <a:masterClrMapping/>
+  </p:clrMapOvr>
+</p:sld>
+</file>
+
 <file path=ppt/slides/slide2.xml><?xml version="1.0" encoding="utf-8"?>
 <p:sld xmlns:a="http://schemas.openxmlformats.org/drawingml/2006/main" xmlns:p="http://schemas.openxmlformats.org/presentationml/2006/main" xmlns:r="http://schemas.openxmlformats.org/officeDocument/2006/relationships">
   <p:cSld>
@@ -4718,7 +6324,7 @@
         <p:spPr>
           <a:xfrm>
             <a:off x="0" y="0"/>
-            <a:ext cx="12191695" cy="146304"/>
+            <a:ext cx="12191695" cy="6858000"/>
           </a:xfrm>
           <a:prstGeom prst="rect">
             <a:avLst/>
@@ -4755,468 +6361,14 @@
       </p:sp>
       <p:sp>
         <p:nvSpPr>
-          <p:cNvPr id="3" name="Oval 2"/>
+          <p:cNvPr id="3" name="Rectangle 2"/>
           <p:cNvSpPr/>
           <p:nvPr/>
         </p:nvSpPr>
         <p:spPr>
           <a:xfrm>
-            <a:off x="576072" y="539496"/>
-            <a:ext cx="128016" cy="128016"/>
-          </a:xfrm>
-          <a:prstGeom prst="ellipse">
-            <a:avLst/>
-          </a:prstGeom>
-          <a:solidFill>
-            <a:srgbClr val="1F4E79"/>
-          </a:solidFill>
-          <a:ln>
-            <a:noFill/>
-          </a:ln>
-          <a:effectLst/>
-        </p:spPr>
-        <p:style>
-          <a:lnRef idx="1">
-            <a:schemeClr val="accent1"/>
-          </a:lnRef>
-          <a:fillRef idx="3">
-            <a:schemeClr val="accent1"/>
-          </a:fillRef>
-          <a:effectRef idx="2">
-            <a:schemeClr val="accent1"/>
-          </a:effectRef>
-          <a:fontRef idx="minor">
-            <a:schemeClr val="lt1"/>
-          </a:fontRef>
-        </p:style>
-        <p:txBody>
-          <a:bodyPr rtlCol="0" anchor="ctr"/>
-          <a:lstStyle/>
-          <a:p>
-            <a:pPr algn="ctr"/>
-          </a:p>
-        </p:txBody>
-      </p:sp>
-      <p:sp>
-        <p:nvSpPr>
-          <p:cNvPr id="4" name="TextBox 3"/>
-          <p:cNvSpPr txBox="1"/>
-          <p:nvPr/>
-        </p:nvSpPr>
-        <p:spPr>
-          <a:xfrm>
-            <a:off x="822960" y="457200"/>
-            <a:ext cx="7315200" cy="365760"/>
-          </a:xfrm>
-          <a:prstGeom prst="rect">
-            <a:avLst/>
-          </a:prstGeom>
-          <a:noFill/>
-        </p:spPr>
-        <p:txBody>
-          <a:bodyPr wrap="square" lIns="0" rIns="0" tIns="0" bIns="0" anchor="t">
-            <a:spAutoFit/>
-          </a:bodyPr>
-          <a:lstStyle/>
-          <a:p>
-            <a:pPr algn="l"/>
-            <a:r>
-              <a:rPr sz="1100" b="1">
-                <a:solidFill>
-                  <a:srgbClr val="1F4E79"/>
-                </a:solidFill>
-                <a:latin typeface="Calibri"/>
-              </a:rPr>
-              <a:t>PRIMER  •  WHAT WE'RE TALKING ABOUT</a:t>
-            </a:r>
-          </a:p>
-        </p:txBody>
-      </p:sp>
-      <p:sp>
-        <p:nvSpPr>
-          <p:cNvPr id="5" name="TextBox 4"/>
-          <p:cNvSpPr txBox="1"/>
-          <p:nvPr/>
-        </p:nvSpPr>
-        <p:spPr>
-          <a:xfrm>
-            <a:off x="548640" y="1097280"/>
-            <a:ext cx="11064240" cy="1097280"/>
-          </a:xfrm>
-          <a:prstGeom prst="rect">
-            <a:avLst/>
-          </a:prstGeom>
-          <a:noFill/>
-        </p:spPr>
-        <p:txBody>
-          <a:bodyPr wrap="square" lIns="0" rIns="0" tIns="0" bIns="0" anchor="t">
-            <a:spAutoFit/>
-          </a:bodyPr>
-          <a:lstStyle/>
-          <a:p>
-            <a:pPr algn="l"/>
-            <a:r>
-              <a:rPr sz="2400" b="1">
-                <a:solidFill>
-                  <a:srgbClr val="1F2937"/>
-                </a:solidFill>
-                <a:latin typeface="Calibri"/>
-              </a:rPr>
-              <a:t>Fossil fuels are stored ancient sunlight —
-and still about 80% of the energy the world runs on.</a:t>
-            </a:r>
-          </a:p>
-        </p:txBody>
-      </p:sp>
-      <p:sp>
-        <p:nvSpPr>
-          <p:cNvPr id="6" name="Rounded Rectangle 5"/>
-          <p:cNvSpPr/>
-          <p:nvPr/>
-        </p:nvSpPr>
-        <p:spPr>
-          <a:xfrm>
-            <a:off x="548640" y="2651760"/>
-            <a:ext cx="3520440" cy="2743200"/>
-          </a:xfrm>
-          <a:prstGeom prst="roundRect">
-            <a:avLst>
-              <a:gd name="adj" fmla="val 10000"/>
-            </a:avLst>
-          </a:prstGeom>
-          <a:solidFill>
-            <a:srgbClr val="F9FAFB"/>
-          </a:solidFill>
-          <a:ln>
-            <a:noFill/>
-          </a:ln>
-          <a:effectLst/>
-        </p:spPr>
-        <p:style>
-          <a:lnRef idx="1">
-            <a:schemeClr val="accent1"/>
-          </a:lnRef>
-          <a:fillRef idx="3">
-            <a:schemeClr val="accent1"/>
-          </a:fillRef>
-          <a:effectRef idx="2">
-            <a:schemeClr val="accent1"/>
-          </a:effectRef>
-          <a:fontRef idx="minor">
-            <a:schemeClr val="lt1"/>
-          </a:fontRef>
-        </p:style>
-        <p:txBody>
-          <a:bodyPr rtlCol="0" anchor="ctr"/>
-          <a:lstStyle/>
-          <a:p>
-            <a:pPr algn="ctr"/>
-          </a:p>
-        </p:txBody>
-      </p:sp>
-      <p:sp>
-        <p:nvSpPr>
-          <p:cNvPr id="7" name="Rectangle 6"/>
-          <p:cNvSpPr/>
-          <p:nvPr/>
-        </p:nvSpPr>
-        <p:spPr>
-          <a:xfrm>
-            <a:off x="548640" y="2651760"/>
-            <a:ext cx="164592" cy="2743200"/>
-          </a:xfrm>
-          <a:prstGeom prst="rect">
-            <a:avLst/>
-          </a:prstGeom>
-          <a:solidFill>
-            <a:srgbClr val="1F4E79"/>
-          </a:solidFill>
-          <a:ln>
-            <a:noFill/>
-          </a:ln>
-          <a:effectLst/>
-        </p:spPr>
-        <p:style>
-          <a:lnRef idx="1">
-            <a:schemeClr val="accent1"/>
-          </a:lnRef>
-          <a:fillRef idx="3">
-            <a:schemeClr val="accent1"/>
-          </a:fillRef>
-          <a:effectRef idx="2">
-            <a:schemeClr val="accent1"/>
-          </a:effectRef>
-          <a:fontRef idx="minor">
-            <a:schemeClr val="lt1"/>
-          </a:fontRef>
-        </p:style>
-        <p:txBody>
-          <a:bodyPr rtlCol="0" anchor="ctr"/>
-          <a:lstStyle/>
-          <a:p>
-            <a:pPr algn="ctr"/>
-          </a:p>
-        </p:txBody>
-      </p:sp>
-      <p:sp>
-        <p:nvSpPr>
-          <p:cNvPr id="8" name="Oval 7"/>
-          <p:cNvSpPr/>
-          <p:nvPr/>
-        </p:nvSpPr>
-        <p:spPr>
-          <a:xfrm>
-            <a:off x="896112" y="2953512"/>
-            <a:ext cx="585216" cy="585216"/>
-          </a:xfrm>
-          <a:prstGeom prst="ellipse">
-            <a:avLst/>
-          </a:prstGeom>
-          <a:solidFill>
-            <a:srgbClr val="1F4E79"/>
-          </a:solidFill>
-          <a:ln>
-            <a:noFill/>
-          </a:ln>
-          <a:effectLst/>
-        </p:spPr>
-        <p:style>
-          <a:lnRef idx="1">
-            <a:schemeClr val="accent1"/>
-          </a:lnRef>
-          <a:fillRef idx="3">
-            <a:schemeClr val="accent1"/>
-          </a:fillRef>
-          <a:effectRef idx="2">
-            <a:schemeClr val="accent1"/>
-          </a:effectRef>
-          <a:fontRef idx="minor">
-            <a:schemeClr val="lt1"/>
-          </a:fontRef>
-        </p:style>
-        <p:txBody>
-          <a:bodyPr rtlCol="0" anchor="ctr"/>
-          <a:lstStyle/>
-          <a:p>
-            <a:pPr algn="ctr"/>
-          </a:p>
-        </p:txBody>
-      </p:sp>
-      <p:sp>
-        <p:nvSpPr>
-          <p:cNvPr id="9" name="Rectangle 8"/>
-          <p:cNvSpPr/>
-          <p:nvPr/>
-        </p:nvSpPr>
-        <p:spPr>
-          <a:xfrm>
-            <a:off x="940003" y="3234415"/>
-            <a:ext cx="497433" cy="23408"/>
-          </a:xfrm>
-          <a:prstGeom prst="rect">
-            <a:avLst/>
-          </a:prstGeom>
-          <a:solidFill>
-            <a:srgbClr val="FFFFFF"/>
-          </a:solidFill>
-          <a:ln>
-            <a:noFill/>
-          </a:ln>
-          <a:effectLst/>
-        </p:spPr>
-        <p:style>
-          <a:lnRef idx="1">
-            <a:schemeClr val="accent1"/>
-          </a:lnRef>
-          <a:fillRef idx="3">
-            <a:schemeClr val="accent1"/>
-          </a:fillRef>
-          <a:effectRef idx="2">
-            <a:schemeClr val="accent1"/>
-          </a:effectRef>
-          <a:fontRef idx="minor">
-            <a:schemeClr val="lt1"/>
-          </a:fontRef>
-        </p:style>
-        <p:txBody>
-          <a:bodyPr rtlCol="0" anchor="ctr"/>
-          <a:lstStyle/>
-          <a:p>
-            <a:pPr algn="ctr"/>
-          </a:p>
-        </p:txBody>
-      </p:sp>
-      <p:sp>
-        <p:nvSpPr>
-          <p:cNvPr id="10" name="Rectangle 9"/>
-          <p:cNvSpPr/>
-          <p:nvPr/>
-        </p:nvSpPr>
-        <p:spPr>
-          <a:xfrm>
-            <a:off x="1177015" y="2997403"/>
-            <a:ext cx="23408" cy="497433"/>
-          </a:xfrm>
-          <a:prstGeom prst="rect">
-            <a:avLst/>
-          </a:prstGeom>
-          <a:solidFill>
-            <a:srgbClr val="FFFFFF"/>
-          </a:solidFill>
-          <a:ln>
-            <a:noFill/>
-          </a:ln>
-          <a:effectLst/>
-        </p:spPr>
-        <p:style>
-          <a:lnRef idx="1">
-            <a:schemeClr val="accent1"/>
-          </a:lnRef>
-          <a:fillRef idx="3">
-            <a:schemeClr val="accent1"/>
-          </a:fillRef>
-          <a:effectRef idx="2">
-            <a:schemeClr val="accent1"/>
-          </a:effectRef>
-          <a:fontRef idx="minor">
-            <a:schemeClr val="lt1"/>
-          </a:fontRef>
-        </p:style>
-        <p:txBody>
-          <a:bodyPr rtlCol="0" anchor="ctr"/>
-          <a:lstStyle/>
-          <a:p>
-            <a:pPr algn="ctr"/>
-          </a:p>
-        </p:txBody>
-      </p:sp>
-      <p:sp>
-        <p:nvSpPr>
-          <p:cNvPr id="11" name="TextBox 10"/>
-          <p:cNvSpPr txBox="1"/>
-          <p:nvPr/>
-        </p:nvSpPr>
-        <p:spPr>
-          <a:xfrm>
-            <a:off x="1691640" y="3063240"/>
-            <a:ext cx="2240280" cy="731520"/>
-          </a:xfrm>
-          <a:prstGeom prst="rect">
-            <a:avLst/>
-          </a:prstGeom>
-          <a:noFill/>
-        </p:spPr>
-        <p:txBody>
-          <a:bodyPr wrap="square" lIns="0" rIns="0" tIns="0" bIns="0" anchor="t">
-            <a:spAutoFit/>
-          </a:bodyPr>
-          <a:lstStyle/>
-          <a:p>
-            <a:pPr algn="l"/>
-            <a:r>
-              <a:rPr sz="1600" b="1">
-                <a:solidFill>
-                  <a:srgbClr val="1F2937"/>
-                </a:solidFill>
-                <a:latin typeface="Calibri"/>
-              </a:rPr>
-              <a:t>Coal</a:t>
-            </a:r>
-          </a:p>
-        </p:txBody>
-      </p:sp>
-      <p:sp>
-        <p:nvSpPr>
-          <p:cNvPr id="12" name="TextBox 11"/>
-          <p:cNvSpPr txBox="1"/>
-          <p:nvPr/>
-        </p:nvSpPr>
-        <p:spPr>
-          <a:xfrm>
-            <a:off x="914400" y="4069080"/>
-            <a:ext cx="2971800" cy="1188720"/>
-          </a:xfrm>
-          <a:prstGeom prst="rect">
-            <a:avLst/>
-          </a:prstGeom>
-          <a:noFill/>
-        </p:spPr>
-        <p:txBody>
-          <a:bodyPr wrap="square" lIns="0" rIns="0" tIns="0" bIns="0" anchor="t">
-            <a:spAutoFit/>
-          </a:bodyPr>
-          <a:lstStyle/>
-          <a:p>
-            <a:pPr algn="l"/>
-            <a:r>
-              <a:rPr sz="1250" b="0">
-                <a:solidFill>
-                  <a:srgbClr val="4B5563"/>
-                </a:solidFill>
-                <a:latin typeface="Calibri"/>
-              </a:rPr>
-              <a:t>Ancient land plants and swamp forests,
-buried and compressed. Mined as a solid.</a:t>
-            </a:r>
-          </a:p>
-        </p:txBody>
-      </p:sp>
-      <p:sp>
-        <p:nvSpPr>
-          <p:cNvPr id="13" name="Rounded Rectangle 12"/>
-          <p:cNvSpPr/>
-          <p:nvPr/>
-        </p:nvSpPr>
-        <p:spPr>
-          <a:xfrm>
-            <a:off x="4343400" y="2651760"/>
-            <a:ext cx="3520440" cy="2743200"/>
-          </a:xfrm>
-          <a:prstGeom prst="roundRect">
-            <a:avLst>
-              <a:gd name="adj" fmla="val 10000"/>
-            </a:avLst>
-          </a:prstGeom>
-          <a:solidFill>
-            <a:srgbClr val="F9FAFB"/>
-          </a:solidFill>
-          <a:ln>
-            <a:noFill/>
-          </a:ln>
-          <a:effectLst/>
-        </p:spPr>
-        <p:style>
-          <a:lnRef idx="1">
-            <a:schemeClr val="accent1"/>
-          </a:lnRef>
-          <a:fillRef idx="3">
-            <a:schemeClr val="accent1"/>
-          </a:fillRef>
-          <a:effectRef idx="2">
-            <a:schemeClr val="accent1"/>
-          </a:effectRef>
-          <a:fontRef idx="minor">
-            <a:schemeClr val="lt1"/>
-          </a:fontRef>
-        </p:style>
-        <p:txBody>
-          <a:bodyPr rtlCol="0" anchor="ctr"/>
-          <a:lstStyle/>
-          <a:p>
-            <a:pPr algn="ctr"/>
-          </a:p>
-        </p:txBody>
-      </p:sp>
-      <p:sp>
-        <p:nvSpPr>
-          <p:cNvPr id="14" name="Rectangle 13"/>
-          <p:cNvSpPr/>
-          <p:nvPr/>
-        </p:nvSpPr>
-        <p:spPr>
-          <a:xfrm>
-            <a:off x="4343400" y="2651760"/>
-            <a:ext cx="164592" cy="2743200"/>
+            <a:off x="0" y="0"/>
+            <a:ext cx="201168" cy="6858000"/>
           </a:xfrm>
           <a:prstGeom prst="rect">
             <a:avLst/>
@@ -5253,102 +6405,14 @@
       </p:sp>
       <p:sp>
         <p:nvSpPr>
-          <p:cNvPr id="15" name="Oval 14"/>
-          <p:cNvSpPr/>
-          <p:nvPr/>
-        </p:nvSpPr>
-        <p:spPr>
-          <a:xfrm>
-            <a:off x="4690872" y="2924251"/>
-            <a:ext cx="585216" cy="643737"/>
-          </a:xfrm>
-          <a:prstGeom prst="ellipse">
-            <a:avLst/>
-          </a:prstGeom>
-          <a:solidFill>
-            <a:srgbClr val="D97706"/>
-          </a:solidFill>
-          <a:ln>
-            <a:noFill/>
-          </a:ln>
-          <a:effectLst/>
-        </p:spPr>
-        <p:style>
-          <a:lnRef idx="1">
-            <a:schemeClr val="accent1"/>
-          </a:lnRef>
-          <a:fillRef idx="3">
-            <a:schemeClr val="accent1"/>
-          </a:fillRef>
-          <a:effectRef idx="2">
-            <a:schemeClr val="accent1"/>
-          </a:effectRef>
-          <a:fontRef idx="minor">
-            <a:schemeClr val="lt1"/>
-          </a:fontRef>
-        </p:style>
-        <p:txBody>
-          <a:bodyPr rtlCol="0" anchor="ctr"/>
-          <a:lstStyle/>
-          <a:p>
-            <a:pPr algn="ctr"/>
-          </a:p>
-        </p:txBody>
-      </p:sp>
-      <p:sp>
-        <p:nvSpPr>
-          <p:cNvPr id="16" name="Oval 15"/>
-          <p:cNvSpPr/>
-          <p:nvPr/>
-        </p:nvSpPr>
-        <p:spPr>
-          <a:xfrm>
-            <a:off x="4851806" y="3129076"/>
-            <a:ext cx="263347" cy="351129"/>
-          </a:xfrm>
-          <a:prstGeom prst="ellipse">
-            <a:avLst/>
-          </a:prstGeom>
-          <a:solidFill>
-            <a:srgbClr val="FDE8CC"/>
-          </a:solidFill>
-          <a:ln>
-            <a:noFill/>
-          </a:ln>
-          <a:effectLst/>
-        </p:spPr>
-        <p:style>
-          <a:lnRef idx="1">
-            <a:schemeClr val="accent1"/>
-          </a:lnRef>
-          <a:fillRef idx="3">
-            <a:schemeClr val="accent1"/>
-          </a:fillRef>
-          <a:effectRef idx="2">
-            <a:schemeClr val="accent1"/>
-          </a:effectRef>
-          <a:fontRef idx="minor">
-            <a:schemeClr val="lt1"/>
-          </a:fontRef>
-        </p:style>
-        <p:txBody>
-          <a:bodyPr rtlCol="0" anchor="ctr"/>
-          <a:lstStyle/>
-          <a:p>
-            <a:pPr algn="ctr"/>
-          </a:p>
-        </p:txBody>
-      </p:sp>
-      <p:sp>
-        <p:nvSpPr>
-          <p:cNvPr id="17" name="TextBox 16"/>
+          <p:cNvPr id="4" name="TextBox 3"/>
           <p:cNvSpPr txBox="1"/>
           <p:nvPr/>
         </p:nvSpPr>
         <p:spPr>
           <a:xfrm>
-            <a:off x="5486400" y="3063240"/>
-            <a:ext cx="2240280" cy="731520"/>
+            <a:off x="822960" y="1417320"/>
+            <a:ext cx="10515600" cy="457200"/>
           </a:xfrm>
           <a:prstGeom prst="rect">
             <a:avLst/>
@@ -5363,27 +6427,97 @@
           <a:p>
             <a:pPr algn="l"/>
             <a:r>
-              <a:rPr sz="1600" b="1">
-                <a:solidFill>
-                  <a:srgbClr val="1F2937"/>
+              <a:rPr sz="1300" b="1">
+                <a:solidFill>
+                  <a:srgbClr val="D97706"/>
                 </a:solidFill>
                 <a:latin typeface="Calibri"/>
               </a:rPr>
-              <a:t>Oil (petroleum)</a:t>
-            </a:r>
-          </a:p>
-        </p:txBody>
-      </p:sp>
-      <p:sp>
-        <p:nvSpPr>
-          <p:cNvPr id="18" name="TextBox 17"/>
+              <a:t>THE BIG IDEA  •  THE QUESTION THIS TALK TURNS ON</a:t>
+            </a:r>
+          </a:p>
+        </p:txBody>
+      </p:sp>
+      <p:sp>
+        <p:nvSpPr>
+          <p:cNvPr id="5" name="TextBox 4"/>
           <p:cNvSpPr txBox="1"/>
           <p:nvPr/>
         </p:nvSpPr>
         <p:spPr>
           <a:xfrm>
-            <a:off x="4709160" y="4069080"/>
-            <a:ext cx="2971800" cy="1188720"/>
+            <a:off x="822960" y="2148840"/>
+            <a:ext cx="10424160" cy="2651760"/>
+          </a:xfrm>
+          <a:prstGeom prst="rect">
+            <a:avLst/>
+          </a:prstGeom>
+          <a:noFill/>
+        </p:spPr>
+        <p:txBody>
+          <a:bodyPr wrap="square" lIns="0" rIns="0">
+            <a:spAutoFit/>
+          </a:bodyPr>
+          <a:lstStyle/>
+          <a:p>
+            <a:r>
+              <a:rPr sz="4400" b="1">
+                <a:solidFill>
+                  <a:srgbClr val="FFFFFF"/>
+                </a:solidFill>
+                <a:latin typeface="Calibri"/>
+              </a:rPr>
+              <a:t>What if cutting fossil fuels </a:t>
+            </a:r>
+            <a:r>
+              <a:rPr sz="4400" b="1">
+                <a:solidFill>
+                  <a:srgbClr val="D97706"/>
+                </a:solidFill>
+                <a:latin typeface="Calibri"/>
+              </a:rPr>
+              <a:t>too fast</a:t>
+            </a:r>
+            <a:r>
+              <a:rPr sz="4400" b="1">
+                <a:solidFill>
+                  <a:srgbClr val="FFFFFF"/>
+                </a:solidFill>
+                <a:latin typeface="Calibri"/>
+              </a:rPr>
+              <a:t> costs </a:t>
+            </a:r>
+            <a:r>
+              <a:rPr sz="4400" b="1">
+                <a:solidFill>
+                  <a:srgbClr val="D97706"/>
+                </a:solidFill>
+                <a:latin typeface="Calibri"/>
+              </a:rPr>
+              <a:t>more lives</a:t>
+            </a:r>
+            <a:r>
+              <a:rPr sz="4400" b="1">
+                <a:solidFill>
+                  <a:srgbClr val="FFFFFF"/>
+                </a:solidFill>
+                <a:latin typeface="Calibri"/>
+              </a:rPr>
+              <a:t> than it saves?</a:t>
+            </a:r>
+          </a:p>
+        </p:txBody>
+      </p:sp>
+      <p:sp>
+        <p:nvSpPr>
+          <p:cNvPr id="6" name="TextBox 5"/>
+          <p:cNvSpPr txBox="1"/>
+          <p:nvPr/>
+        </p:nvSpPr>
+        <p:spPr>
+          <a:xfrm>
+            <a:off x="822960" y="4983480"/>
+            <a:ext cx="9692640" cy="822960"/>
           </a:xfrm>
           <a:prstGeom prst="rect">
             <a:avLst/>
@@ -5398,206 +6532,27 @@
           <a:p>
             <a:pPr algn="l"/>
             <a:r>
-              <a:rPr sz="1250" b="0">
-                <a:solidFill>
-                  <a:srgbClr val="4B5563"/>
+              <a:rPr sz="1600" b="0">
+                <a:solidFill>
+                  <a:srgbClr val="DBE5F1"/>
                 </a:solidFill>
                 <a:latin typeface="Calibri"/>
               </a:rPr>
-              <a:t>Ancient ocean plankton and algae,
-cooked under pressure. Drilled as a liquid.</a:t>
-            </a:r>
-          </a:p>
-        </p:txBody>
-      </p:sp>
-      <p:sp>
-        <p:nvSpPr>
-          <p:cNvPr id="19" name="Rounded Rectangle 18"/>
-          <p:cNvSpPr/>
-          <p:nvPr/>
-        </p:nvSpPr>
-        <p:spPr>
-          <a:xfrm>
-            <a:off x="8138160" y="2651760"/>
-            <a:ext cx="3520440" cy="2743200"/>
-          </a:xfrm>
-          <a:prstGeom prst="roundRect">
-            <a:avLst>
-              <a:gd name="adj" fmla="val 10000"/>
-            </a:avLst>
-          </a:prstGeom>
-          <a:solidFill>
-            <a:srgbClr val="F9FAFB"/>
-          </a:solidFill>
-          <a:ln>
-            <a:noFill/>
-          </a:ln>
-          <a:effectLst/>
-        </p:spPr>
-        <p:style>
-          <a:lnRef idx="1">
-            <a:schemeClr val="accent1"/>
-          </a:lnRef>
-          <a:fillRef idx="3">
-            <a:schemeClr val="accent1"/>
-          </a:fillRef>
-          <a:effectRef idx="2">
-            <a:schemeClr val="accent1"/>
-          </a:effectRef>
-          <a:fontRef idx="minor">
-            <a:schemeClr val="lt1"/>
-          </a:fontRef>
-        </p:style>
-        <p:txBody>
-          <a:bodyPr rtlCol="0" anchor="ctr"/>
-          <a:lstStyle/>
-          <a:p>
-            <a:pPr algn="ctr"/>
-          </a:p>
-        </p:txBody>
-      </p:sp>
-      <p:sp>
-        <p:nvSpPr>
-          <p:cNvPr id="20" name="Rectangle 19"/>
-          <p:cNvSpPr/>
-          <p:nvPr/>
-        </p:nvSpPr>
-        <p:spPr>
-          <a:xfrm>
-            <a:off x="8138160" y="2651760"/>
-            <a:ext cx="164592" cy="2743200"/>
-          </a:xfrm>
-          <a:prstGeom prst="rect">
-            <a:avLst/>
-          </a:prstGeom>
-          <a:solidFill>
-            <a:srgbClr val="1F4E79"/>
-          </a:solidFill>
-          <a:ln>
-            <a:noFill/>
-          </a:ln>
-          <a:effectLst/>
-        </p:spPr>
-        <p:style>
-          <a:lnRef idx="1">
-            <a:schemeClr val="accent1"/>
-          </a:lnRef>
-          <a:fillRef idx="3">
-            <a:schemeClr val="accent1"/>
-          </a:fillRef>
-          <a:effectRef idx="2">
-            <a:schemeClr val="accent1"/>
-          </a:effectRef>
-          <a:fontRef idx="minor">
-            <a:schemeClr val="lt1"/>
-          </a:fontRef>
-        </p:style>
-        <p:txBody>
-          <a:bodyPr rtlCol="0" anchor="ctr"/>
-          <a:lstStyle/>
-          <a:p>
-            <a:pPr algn="ctr"/>
-          </a:p>
-        </p:txBody>
-      </p:sp>
-      <p:sp>
-        <p:nvSpPr>
-          <p:cNvPr id="21" name="Oval 20"/>
-          <p:cNvSpPr/>
-          <p:nvPr/>
-        </p:nvSpPr>
-        <p:spPr>
-          <a:xfrm>
-            <a:off x="8485632" y="2953512"/>
-            <a:ext cx="585216" cy="585216"/>
-          </a:xfrm>
-          <a:prstGeom prst="ellipse">
-            <a:avLst/>
-          </a:prstGeom>
-          <a:solidFill>
-            <a:srgbClr val="1F4E79"/>
-          </a:solidFill>
-          <a:ln>
-            <a:noFill/>
-          </a:ln>
-          <a:effectLst/>
-        </p:spPr>
-        <p:style>
-          <a:lnRef idx="1">
-            <a:schemeClr val="accent1"/>
-          </a:lnRef>
-          <a:fillRef idx="3">
-            <a:schemeClr val="accent1"/>
-          </a:fillRef>
-          <a:effectRef idx="2">
-            <a:schemeClr val="accent1"/>
-          </a:effectRef>
-          <a:fontRef idx="minor">
-            <a:schemeClr val="lt1"/>
-          </a:fontRef>
-        </p:style>
-        <p:txBody>
-          <a:bodyPr rtlCol="0" anchor="ctr"/>
-          <a:lstStyle/>
-          <a:p>
-            <a:pPr algn="ctr"/>
-          </a:p>
-        </p:txBody>
-      </p:sp>
-      <p:sp>
-        <p:nvSpPr>
-          <p:cNvPr id="22" name="Lightning Bolt 21"/>
-          <p:cNvSpPr/>
-          <p:nvPr/>
-        </p:nvSpPr>
-        <p:spPr>
-          <a:xfrm>
-            <a:off x="8631936" y="3026664"/>
-            <a:ext cx="292608" cy="438912"/>
-          </a:xfrm>
-          <a:prstGeom prst="lightningBolt">
-            <a:avLst/>
-          </a:prstGeom>
-          <a:solidFill>
-            <a:srgbClr val="FFFFFF"/>
-          </a:solidFill>
-          <a:ln>
-            <a:noFill/>
-          </a:ln>
-          <a:effectLst/>
-        </p:spPr>
-        <p:style>
-          <a:lnRef idx="1">
-            <a:schemeClr val="accent1"/>
-          </a:lnRef>
-          <a:fillRef idx="3">
-            <a:schemeClr val="accent1"/>
-          </a:fillRef>
-          <a:effectRef idx="2">
-            <a:schemeClr val="accent1"/>
-          </a:effectRef>
-          <a:fontRef idx="minor">
-            <a:schemeClr val="lt1"/>
-          </a:fontRef>
-        </p:style>
-        <p:txBody>
-          <a:bodyPr rtlCol="0" anchor="ctr"/>
-          <a:lstStyle/>
-          <a:p>
-            <a:pPr algn="ctr"/>
-          </a:p>
-        </p:txBody>
-      </p:sp>
-      <p:sp>
-        <p:nvSpPr>
-          <p:cNvPr id="23" name="TextBox 22"/>
+              <a:t>A steelman I have to take seriously — even as someone who wants fossil fuels gone.</a:t>
+            </a:r>
+          </a:p>
+        </p:txBody>
+      </p:sp>
+      <p:sp>
+        <p:nvSpPr>
+          <p:cNvPr id="7" name="TextBox 6"/>
           <p:cNvSpPr txBox="1"/>
           <p:nvPr/>
         </p:nvSpPr>
         <p:spPr>
           <a:xfrm>
-            <a:off x="9281160" y="3063240"/>
-            <a:ext cx="2240280" cy="731520"/>
+            <a:off x="457200" y="6537960"/>
+            <a:ext cx="7315200" cy="274320"/>
           </a:xfrm>
           <a:prstGeom prst="rect">
             <a:avLst/>
@@ -5612,27 +6567,27 @@
           <a:p>
             <a:pPr algn="l"/>
             <a:r>
-              <a:rPr sz="1600" b="1">
-                <a:solidFill>
-                  <a:srgbClr val="1F2937"/>
+              <a:rPr sz="900" b="0">
+                <a:solidFill>
+                  <a:srgbClr val="9CA3AF"/>
                 </a:solidFill>
                 <a:latin typeface="Calibri"/>
               </a:rPr>
-              <a:t>Natural gas</a:t>
-            </a:r>
-          </a:p>
-        </p:txBody>
-      </p:sp>
-      <p:sp>
-        <p:nvSpPr>
-          <p:cNvPr id="24" name="TextBox 23"/>
+              <a:t>Choolwe  •  The Case For Fossil Fuels</a:t>
+            </a:r>
+          </a:p>
+        </p:txBody>
+      </p:sp>
+      <p:sp>
+        <p:nvSpPr>
+          <p:cNvPr id="8" name="TextBox 7"/>
           <p:cNvSpPr txBox="1"/>
           <p:nvPr/>
         </p:nvSpPr>
         <p:spPr>
           <a:xfrm>
-            <a:off x="8503920" y="4069080"/>
-            <a:ext cx="2971800" cy="1188720"/>
+            <a:off x="10789920" y="6537960"/>
+            <a:ext cx="1097280" cy="274320"/>
           </a:xfrm>
           <a:prstGeom prst="rect">
             <a:avLst/>
@@ -5645,121 +6600,15 @@
           </a:bodyPr>
           <a:lstStyle/>
           <a:p>
-            <a:pPr algn="l"/>
-            <a:r>
-              <a:rPr sz="1250" b="0">
-                <a:solidFill>
-                  <a:srgbClr val="4B5563"/>
+            <a:pPr algn="r"/>
+            <a:r>
+              <a:rPr sz="900" b="0">
+                <a:solidFill>
+                  <a:srgbClr val="9CA3AF"/>
                 </a:solidFill>
                 <a:latin typeface="Calibri"/>
               </a:rPr>
-              <a:t>The same organic matter, cooked hotter.
-Drilled as a gas — mostly methane.</a:t>
-            </a:r>
-          </a:p>
-        </p:txBody>
-      </p:sp>
-      <p:sp>
-        <p:nvSpPr>
-          <p:cNvPr id="25" name="TextBox 24"/>
-          <p:cNvSpPr txBox="1"/>
-          <p:nvPr/>
-        </p:nvSpPr>
-        <p:spPr>
-          <a:xfrm>
-            <a:off x="548640" y="5760720"/>
-            <a:ext cx="11064240" cy="548640"/>
-          </a:xfrm>
-          <a:prstGeom prst="rect">
-            <a:avLst/>
-          </a:prstGeom>
-          <a:noFill/>
-        </p:spPr>
-        <p:txBody>
-          <a:bodyPr wrap="square" lIns="0" rIns="0" tIns="0" bIns="0" anchor="t">
-            <a:spAutoFit/>
-          </a:bodyPr>
-          <a:lstStyle/>
-          <a:p>
-            <a:pPr algn="l"/>
-            <a:r>
-              <a:rPr sz="1300" b="1">
-                <a:solidFill>
-                  <a:srgbClr val="4B5563"/>
-                </a:solidFill>
-                <a:latin typeface="Calibri"/>
-              </a:rPr>
-              <a:t>What we use them for today:  electricity · transport · heat · industry (steel, cement, fertilizer) · cooking.</a:t>
-            </a:r>
-          </a:p>
-        </p:txBody>
-      </p:sp>
-      <p:sp>
-        <p:nvSpPr>
-          <p:cNvPr id="26" name="TextBox 25"/>
-          <p:cNvSpPr txBox="1"/>
-          <p:nvPr/>
-        </p:nvSpPr>
-        <p:spPr>
-          <a:xfrm>
-            <a:off x="457200" y="6537960"/>
-            <a:ext cx="7315200" cy="274320"/>
-          </a:xfrm>
-          <a:prstGeom prst="rect">
-            <a:avLst/>
-          </a:prstGeom>
-          <a:noFill/>
-        </p:spPr>
-        <p:txBody>
-          <a:bodyPr wrap="square" lIns="0" rIns="0" tIns="0" bIns="0" anchor="t">
-            <a:spAutoFit/>
-          </a:bodyPr>
-          <a:lstStyle/>
-          <a:p>
-            <a:pPr algn="l"/>
-            <a:r>
-              <a:rPr sz="900" b="0">
-                <a:solidFill>
-                  <a:srgbClr val="9CA3AF"/>
-                </a:solidFill>
-                <a:latin typeface="Calibri"/>
-              </a:rPr>
-              <a:t>Choolwe  •  The Case For Fossil Fuels</a:t>
-            </a:r>
-          </a:p>
-        </p:txBody>
-      </p:sp>
-      <p:sp>
-        <p:nvSpPr>
-          <p:cNvPr id="27" name="TextBox 26"/>
-          <p:cNvSpPr txBox="1"/>
-          <p:nvPr/>
-        </p:nvSpPr>
-        <p:spPr>
-          <a:xfrm>
-            <a:off x="10789920" y="6537960"/>
-            <a:ext cx="1097280" cy="274320"/>
-          </a:xfrm>
-          <a:prstGeom prst="rect">
-            <a:avLst/>
-          </a:prstGeom>
-          <a:noFill/>
-        </p:spPr>
-        <p:txBody>
-          <a:bodyPr wrap="square" lIns="0" rIns="0" tIns="0" bIns="0" anchor="t">
-            <a:spAutoFit/>
-          </a:bodyPr>
-          <a:lstStyle/>
-          <a:p>
-            <a:pPr algn="r"/>
-            <a:r>
-              <a:rPr sz="900" b="0">
-                <a:solidFill>
-                  <a:srgbClr val="9CA3AF"/>
-                </a:solidFill>
-                <a:latin typeface="Calibri"/>
-              </a:rPr>
-              <a:t>2 / 9</a:t>
+              <a:t>2 / 10</a:t>
             </a:r>
           </a:p>
         </p:txBody>
@@ -5828,14 +6677,468 @@
       </p:sp>
       <p:sp>
         <p:nvSpPr>
-          <p:cNvPr id="3" name="Rectangle 2"/>
+          <p:cNvPr id="3" name="Oval 2"/>
           <p:cNvSpPr/>
           <p:nvPr/>
         </p:nvSpPr>
         <p:spPr>
           <a:xfrm>
-            <a:off x="0" y="146304"/>
-            <a:ext cx="411480" cy="6711696"/>
+            <a:off x="576072" y="539496"/>
+            <a:ext cx="128016" cy="128016"/>
+          </a:xfrm>
+          <a:prstGeom prst="ellipse">
+            <a:avLst/>
+          </a:prstGeom>
+          <a:solidFill>
+            <a:srgbClr val="1F4E79"/>
+          </a:solidFill>
+          <a:ln>
+            <a:noFill/>
+          </a:ln>
+          <a:effectLst/>
+        </p:spPr>
+        <p:style>
+          <a:lnRef idx="1">
+            <a:schemeClr val="accent1"/>
+          </a:lnRef>
+          <a:fillRef idx="3">
+            <a:schemeClr val="accent1"/>
+          </a:fillRef>
+          <a:effectRef idx="2">
+            <a:schemeClr val="accent1"/>
+          </a:effectRef>
+          <a:fontRef idx="minor">
+            <a:schemeClr val="lt1"/>
+          </a:fontRef>
+        </p:style>
+        <p:txBody>
+          <a:bodyPr rtlCol="0" anchor="ctr"/>
+          <a:lstStyle/>
+          <a:p>
+            <a:pPr algn="ctr"/>
+          </a:p>
+        </p:txBody>
+      </p:sp>
+      <p:sp>
+        <p:nvSpPr>
+          <p:cNvPr id="4" name="TextBox 3"/>
+          <p:cNvSpPr txBox="1"/>
+          <p:nvPr/>
+        </p:nvSpPr>
+        <p:spPr>
+          <a:xfrm>
+            <a:off x="822960" y="457200"/>
+            <a:ext cx="7315200" cy="365760"/>
+          </a:xfrm>
+          <a:prstGeom prst="rect">
+            <a:avLst/>
+          </a:prstGeom>
+          <a:noFill/>
+        </p:spPr>
+        <p:txBody>
+          <a:bodyPr wrap="square" lIns="0" rIns="0" tIns="0" bIns="0" anchor="t">
+            <a:spAutoFit/>
+          </a:bodyPr>
+          <a:lstStyle/>
+          <a:p>
+            <a:pPr algn="l"/>
+            <a:r>
+              <a:rPr sz="1100" b="1">
+                <a:solidFill>
+                  <a:srgbClr val="1F4E79"/>
+                </a:solidFill>
+                <a:latin typeface="Calibri"/>
+              </a:rPr>
+              <a:t>PRIMER  •  WHAT WE'RE TALKING ABOUT</a:t>
+            </a:r>
+          </a:p>
+        </p:txBody>
+      </p:sp>
+      <p:sp>
+        <p:nvSpPr>
+          <p:cNvPr id="5" name="TextBox 4"/>
+          <p:cNvSpPr txBox="1"/>
+          <p:nvPr/>
+        </p:nvSpPr>
+        <p:spPr>
+          <a:xfrm>
+            <a:off x="548640" y="1097280"/>
+            <a:ext cx="11064240" cy="1097280"/>
+          </a:xfrm>
+          <a:prstGeom prst="rect">
+            <a:avLst/>
+          </a:prstGeom>
+          <a:noFill/>
+        </p:spPr>
+        <p:txBody>
+          <a:bodyPr wrap="square" lIns="0" rIns="0" tIns="0" bIns="0" anchor="t">
+            <a:spAutoFit/>
+          </a:bodyPr>
+          <a:lstStyle/>
+          <a:p>
+            <a:pPr algn="l"/>
+            <a:r>
+              <a:rPr sz="2400" b="1">
+                <a:solidFill>
+                  <a:srgbClr val="1F2937"/>
+                </a:solidFill>
+                <a:latin typeface="Calibri"/>
+              </a:rPr>
+              <a:t>Fossil fuels are stored ancient sunlight —
+and still about 80% of the energy the world runs on.</a:t>
+            </a:r>
+          </a:p>
+        </p:txBody>
+      </p:sp>
+      <p:sp>
+        <p:nvSpPr>
+          <p:cNvPr id="6" name="Rounded Rectangle 5"/>
+          <p:cNvSpPr/>
+          <p:nvPr/>
+        </p:nvSpPr>
+        <p:spPr>
+          <a:xfrm>
+            <a:off x="548640" y="2651760"/>
+            <a:ext cx="3520440" cy="2743200"/>
+          </a:xfrm>
+          <a:prstGeom prst="roundRect">
+            <a:avLst>
+              <a:gd name="adj" fmla="val 10000"/>
+            </a:avLst>
+          </a:prstGeom>
+          <a:solidFill>
+            <a:srgbClr val="F9FAFB"/>
+          </a:solidFill>
+          <a:ln>
+            <a:noFill/>
+          </a:ln>
+          <a:effectLst/>
+        </p:spPr>
+        <p:style>
+          <a:lnRef idx="1">
+            <a:schemeClr val="accent1"/>
+          </a:lnRef>
+          <a:fillRef idx="3">
+            <a:schemeClr val="accent1"/>
+          </a:fillRef>
+          <a:effectRef idx="2">
+            <a:schemeClr val="accent1"/>
+          </a:effectRef>
+          <a:fontRef idx="minor">
+            <a:schemeClr val="lt1"/>
+          </a:fontRef>
+        </p:style>
+        <p:txBody>
+          <a:bodyPr rtlCol="0" anchor="ctr"/>
+          <a:lstStyle/>
+          <a:p>
+            <a:pPr algn="ctr"/>
+          </a:p>
+        </p:txBody>
+      </p:sp>
+      <p:sp>
+        <p:nvSpPr>
+          <p:cNvPr id="7" name="Rectangle 6"/>
+          <p:cNvSpPr/>
+          <p:nvPr/>
+        </p:nvSpPr>
+        <p:spPr>
+          <a:xfrm>
+            <a:off x="548640" y="2651760"/>
+            <a:ext cx="164592" cy="2743200"/>
+          </a:xfrm>
+          <a:prstGeom prst="rect">
+            <a:avLst/>
+          </a:prstGeom>
+          <a:solidFill>
+            <a:srgbClr val="1F4E79"/>
+          </a:solidFill>
+          <a:ln>
+            <a:noFill/>
+          </a:ln>
+          <a:effectLst/>
+        </p:spPr>
+        <p:style>
+          <a:lnRef idx="1">
+            <a:schemeClr val="accent1"/>
+          </a:lnRef>
+          <a:fillRef idx="3">
+            <a:schemeClr val="accent1"/>
+          </a:fillRef>
+          <a:effectRef idx="2">
+            <a:schemeClr val="accent1"/>
+          </a:effectRef>
+          <a:fontRef idx="minor">
+            <a:schemeClr val="lt1"/>
+          </a:fontRef>
+        </p:style>
+        <p:txBody>
+          <a:bodyPr rtlCol="0" anchor="ctr"/>
+          <a:lstStyle/>
+          <a:p>
+            <a:pPr algn="ctr"/>
+          </a:p>
+        </p:txBody>
+      </p:sp>
+      <p:sp>
+        <p:nvSpPr>
+          <p:cNvPr id="8" name="Oval 7"/>
+          <p:cNvSpPr/>
+          <p:nvPr/>
+        </p:nvSpPr>
+        <p:spPr>
+          <a:xfrm>
+            <a:off x="896112" y="2953512"/>
+            <a:ext cx="585216" cy="585216"/>
+          </a:xfrm>
+          <a:prstGeom prst="ellipse">
+            <a:avLst/>
+          </a:prstGeom>
+          <a:solidFill>
+            <a:srgbClr val="1F4E79"/>
+          </a:solidFill>
+          <a:ln>
+            <a:noFill/>
+          </a:ln>
+          <a:effectLst/>
+        </p:spPr>
+        <p:style>
+          <a:lnRef idx="1">
+            <a:schemeClr val="accent1"/>
+          </a:lnRef>
+          <a:fillRef idx="3">
+            <a:schemeClr val="accent1"/>
+          </a:fillRef>
+          <a:effectRef idx="2">
+            <a:schemeClr val="accent1"/>
+          </a:effectRef>
+          <a:fontRef idx="minor">
+            <a:schemeClr val="lt1"/>
+          </a:fontRef>
+        </p:style>
+        <p:txBody>
+          <a:bodyPr rtlCol="0" anchor="ctr"/>
+          <a:lstStyle/>
+          <a:p>
+            <a:pPr algn="ctr"/>
+          </a:p>
+        </p:txBody>
+      </p:sp>
+      <p:sp>
+        <p:nvSpPr>
+          <p:cNvPr id="9" name="Rectangle 8"/>
+          <p:cNvSpPr/>
+          <p:nvPr/>
+        </p:nvSpPr>
+        <p:spPr>
+          <a:xfrm>
+            <a:off x="940003" y="3234415"/>
+            <a:ext cx="497433" cy="23408"/>
+          </a:xfrm>
+          <a:prstGeom prst="rect">
+            <a:avLst/>
+          </a:prstGeom>
+          <a:solidFill>
+            <a:srgbClr val="FFFFFF"/>
+          </a:solidFill>
+          <a:ln>
+            <a:noFill/>
+          </a:ln>
+          <a:effectLst/>
+        </p:spPr>
+        <p:style>
+          <a:lnRef idx="1">
+            <a:schemeClr val="accent1"/>
+          </a:lnRef>
+          <a:fillRef idx="3">
+            <a:schemeClr val="accent1"/>
+          </a:fillRef>
+          <a:effectRef idx="2">
+            <a:schemeClr val="accent1"/>
+          </a:effectRef>
+          <a:fontRef idx="minor">
+            <a:schemeClr val="lt1"/>
+          </a:fontRef>
+        </p:style>
+        <p:txBody>
+          <a:bodyPr rtlCol="0" anchor="ctr"/>
+          <a:lstStyle/>
+          <a:p>
+            <a:pPr algn="ctr"/>
+          </a:p>
+        </p:txBody>
+      </p:sp>
+      <p:sp>
+        <p:nvSpPr>
+          <p:cNvPr id="10" name="Rectangle 9"/>
+          <p:cNvSpPr/>
+          <p:nvPr/>
+        </p:nvSpPr>
+        <p:spPr>
+          <a:xfrm>
+            <a:off x="1177015" y="2997403"/>
+            <a:ext cx="23408" cy="497433"/>
+          </a:xfrm>
+          <a:prstGeom prst="rect">
+            <a:avLst/>
+          </a:prstGeom>
+          <a:solidFill>
+            <a:srgbClr val="FFFFFF"/>
+          </a:solidFill>
+          <a:ln>
+            <a:noFill/>
+          </a:ln>
+          <a:effectLst/>
+        </p:spPr>
+        <p:style>
+          <a:lnRef idx="1">
+            <a:schemeClr val="accent1"/>
+          </a:lnRef>
+          <a:fillRef idx="3">
+            <a:schemeClr val="accent1"/>
+          </a:fillRef>
+          <a:effectRef idx="2">
+            <a:schemeClr val="accent1"/>
+          </a:effectRef>
+          <a:fontRef idx="minor">
+            <a:schemeClr val="lt1"/>
+          </a:fontRef>
+        </p:style>
+        <p:txBody>
+          <a:bodyPr rtlCol="0" anchor="ctr"/>
+          <a:lstStyle/>
+          <a:p>
+            <a:pPr algn="ctr"/>
+          </a:p>
+        </p:txBody>
+      </p:sp>
+      <p:sp>
+        <p:nvSpPr>
+          <p:cNvPr id="11" name="TextBox 10"/>
+          <p:cNvSpPr txBox="1"/>
+          <p:nvPr/>
+        </p:nvSpPr>
+        <p:spPr>
+          <a:xfrm>
+            <a:off x="1691640" y="3063240"/>
+            <a:ext cx="2240280" cy="731520"/>
+          </a:xfrm>
+          <a:prstGeom prst="rect">
+            <a:avLst/>
+          </a:prstGeom>
+          <a:noFill/>
+        </p:spPr>
+        <p:txBody>
+          <a:bodyPr wrap="square" lIns="0" rIns="0" tIns="0" bIns="0" anchor="t">
+            <a:spAutoFit/>
+          </a:bodyPr>
+          <a:lstStyle/>
+          <a:p>
+            <a:pPr algn="l"/>
+            <a:r>
+              <a:rPr sz="1600" b="1">
+                <a:solidFill>
+                  <a:srgbClr val="1F2937"/>
+                </a:solidFill>
+                <a:latin typeface="Calibri"/>
+              </a:rPr>
+              <a:t>Coal</a:t>
+            </a:r>
+          </a:p>
+        </p:txBody>
+      </p:sp>
+      <p:sp>
+        <p:nvSpPr>
+          <p:cNvPr id="12" name="TextBox 11"/>
+          <p:cNvSpPr txBox="1"/>
+          <p:nvPr/>
+        </p:nvSpPr>
+        <p:spPr>
+          <a:xfrm>
+            <a:off x="914400" y="4069080"/>
+            <a:ext cx="2971800" cy="1188720"/>
+          </a:xfrm>
+          <a:prstGeom prst="rect">
+            <a:avLst/>
+          </a:prstGeom>
+          <a:noFill/>
+        </p:spPr>
+        <p:txBody>
+          <a:bodyPr wrap="square" lIns="0" rIns="0" tIns="0" bIns="0" anchor="t">
+            <a:spAutoFit/>
+          </a:bodyPr>
+          <a:lstStyle/>
+          <a:p>
+            <a:pPr algn="l"/>
+            <a:r>
+              <a:rPr sz="1250" b="0">
+                <a:solidFill>
+                  <a:srgbClr val="4B5563"/>
+                </a:solidFill>
+                <a:latin typeface="Calibri"/>
+              </a:rPr>
+              <a:t>Ancient land plants and swamp forests,
+buried and compressed. Mined as a solid.</a:t>
+            </a:r>
+          </a:p>
+        </p:txBody>
+      </p:sp>
+      <p:sp>
+        <p:nvSpPr>
+          <p:cNvPr id="13" name="Rounded Rectangle 12"/>
+          <p:cNvSpPr/>
+          <p:nvPr/>
+        </p:nvSpPr>
+        <p:spPr>
+          <a:xfrm>
+            <a:off x="4343400" y="2651760"/>
+            <a:ext cx="3520440" cy="2743200"/>
+          </a:xfrm>
+          <a:prstGeom prst="roundRect">
+            <a:avLst>
+              <a:gd name="adj" fmla="val 10000"/>
+            </a:avLst>
+          </a:prstGeom>
+          <a:solidFill>
+            <a:srgbClr val="F9FAFB"/>
+          </a:solidFill>
+          <a:ln>
+            <a:noFill/>
+          </a:ln>
+          <a:effectLst/>
+        </p:spPr>
+        <p:style>
+          <a:lnRef idx="1">
+            <a:schemeClr val="accent1"/>
+          </a:lnRef>
+          <a:fillRef idx="3">
+            <a:schemeClr val="accent1"/>
+          </a:fillRef>
+          <a:effectRef idx="2">
+            <a:schemeClr val="accent1"/>
+          </a:effectRef>
+          <a:fontRef idx="minor">
+            <a:schemeClr val="lt1"/>
+          </a:fontRef>
+        </p:style>
+        <p:txBody>
+          <a:bodyPr rtlCol="0" anchor="ctr"/>
+          <a:lstStyle/>
+          <a:p>
+            <a:pPr algn="ctr"/>
+          </a:p>
+        </p:txBody>
+      </p:sp>
+      <p:sp>
+        <p:nvSpPr>
+          <p:cNvPr id="14" name="Rectangle 13"/>
+          <p:cNvSpPr/>
+          <p:nvPr/>
+        </p:nvSpPr>
+        <p:spPr>
+          <a:xfrm>
+            <a:off x="4343400" y="2651760"/>
+            <a:ext cx="164592" cy="2743200"/>
           </a:xfrm>
           <a:prstGeom prst="rect">
             <a:avLst/>
@@ -5872,14 +7175,14 @@
       </p:sp>
       <p:sp>
         <p:nvSpPr>
-          <p:cNvPr id="4" name="Oval 3"/>
+          <p:cNvPr id="15" name="Oval 14"/>
           <p:cNvSpPr/>
           <p:nvPr/>
         </p:nvSpPr>
         <p:spPr>
           <a:xfrm>
-            <a:off x="850392" y="722376"/>
-            <a:ext cx="128016" cy="128016"/>
+            <a:off x="4690872" y="2924251"/>
+            <a:ext cx="585216" cy="643737"/>
           </a:xfrm>
           <a:prstGeom prst="ellipse">
             <a:avLst/>
@@ -5916,14 +7219,58 @@
       </p:sp>
       <p:sp>
         <p:nvSpPr>
-          <p:cNvPr id="5" name="TextBox 4"/>
+          <p:cNvPr id="16" name="Oval 15"/>
+          <p:cNvSpPr/>
+          <p:nvPr/>
+        </p:nvSpPr>
+        <p:spPr>
+          <a:xfrm>
+            <a:off x="4851806" y="3129076"/>
+            <a:ext cx="263347" cy="351129"/>
+          </a:xfrm>
+          <a:prstGeom prst="ellipse">
+            <a:avLst/>
+          </a:prstGeom>
+          <a:solidFill>
+            <a:srgbClr val="FDE8CC"/>
+          </a:solidFill>
+          <a:ln>
+            <a:noFill/>
+          </a:ln>
+          <a:effectLst/>
+        </p:spPr>
+        <p:style>
+          <a:lnRef idx="1">
+            <a:schemeClr val="accent1"/>
+          </a:lnRef>
+          <a:fillRef idx="3">
+            <a:schemeClr val="accent1"/>
+          </a:fillRef>
+          <a:effectRef idx="2">
+            <a:schemeClr val="accent1"/>
+          </a:effectRef>
+          <a:fontRef idx="minor">
+            <a:schemeClr val="lt1"/>
+          </a:fontRef>
+        </p:style>
+        <p:txBody>
+          <a:bodyPr rtlCol="0" anchor="ctr"/>
+          <a:lstStyle/>
+          <a:p>
+            <a:pPr algn="ctr"/>
+          </a:p>
+        </p:txBody>
+      </p:sp>
+      <p:sp>
+        <p:nvSpPr>
+          <p:cNvPr id="17" name="TextBox 16"/>
           <p:cNvSpPr txBox="1"/>
           <p:nvPr/>
         </p:nvSpPr>
         <p:spPr>
           <a:xfrm>
-            <a:off x="1097280" y="640080"/>
-            <a:ext cx="7315200" cy="365760"/>
+            <a:off x="5486400" y="3063240"/>
+            <a:ext cx="2240280" cy="731520"/>
           </a:xfrm>
           <a:prstGeom prst="rect">
             <a:avLst/>
@@ -5938,115 +7285,27 @@
           <a:p>
             <a:pPr algn="l"/>
             <a:r>
-              <a:rPr sz="1100" b="1">
-                <a:solidFill>
-                  <a:srgbClr val="D97706"/>
+              <a:rPr sz="1600" b="1">
+                <a:solidFill>
+                  <a:srgbClr val="1F2937"/>
                 </a:solidFill>
                 <a:latin typeface="Calibri"/>
               </a:rPr>
-              <a:t>THE BIG IDEA</a:t>
-            </a:r>
-          </a:p>
-        </p:txBody>
-      </p:sp>
-      <p:sp>
-        <p:nvSpPr>
-          <p:cNvPr id="6" name="TextBox 5"/>
+              <a:t>Oil (petroleum)</a:t>
+            </a:r>
+          </a:p>
+        </p:txBody>
+      </p:sp>
+      <p:sp>
+        <p:nvSpPr>
+          <p:cNvPr id="18" name="TextBox 17"/>
           <p:cNvSpPr txBox="1"/>
           <p:nvPr/>
         </p:nvSpPr>
         <p:spPr>
           <a:xfrm>
-            <a:off x="822960" y="1554480"/>
-            <a:ext cx="10515600" cy="2194560"/>
-          </a:xfrm>
-          <a:prstGeom prst="rect">
-            <a:avLst/>
-          </a:prstGeom>
-          <a:noFill/>
-        </p:spPr>
-        <p:txBody>
-          <a:bodyPr wrap="square" lIns="0" rIns="0">
-            <a:spAutoFit/>
-          </a:bodyPr>
-          <a:lstStyle/>
-          <a:p>
-            <a:r>
-              <a:rPr sz="2800" b="0">
-                <a:solidFill>
-                  <a:srgbClr val="4B5563"/>
-                </a:solidFill>
-                <a:latin typeface="Calibri"/>
-              </a:rPr>
-              <a:t>Reliable energy is survival — and </a:t>
-            </a:r>
-            <a:r>
-              <a:rPr sz="2800" b="1">
-                <a:solidFill>
-                  <a:srgbClr val="D97706"/>
-                </a:solidFill>
-                <a:latin typeface="Calibri"/>
-              </a:rPr>
-              <a:t>clean energy alone can't deliver it</a:t>
-            </a:r>
-            <a:r>
-              <a:rPr sz="2800" b="0">
-                <a:solidFill>
-                  <a:srgbClr val="4B5563"/>
-                </a:solidFill>
-                <a:latin typeface="Calibri"/>
-              </a:rPr>
-              <a:t> when we need it most. From </a:t>
-            </a:r>
-            <a:r>
-              <a:rPr sz="2800" b="1">
-                <a:solidFill>
-                  <a:srgbClr val="D97706"/>
-                </a:solidFill>
-                <a:latin typeface="Calibri"/>
-              </a:rPr>
-              <a:t>Zambia's drought</a:t>
-            </a:r>
-            <a:r>
-              <a:rPr sz="2800" b="0">
-                <a:solidFill>
-                  <a:srgbClr val="4B5563"/>
-                </a:solidFill>
-                <a:latin typeface="Calibri"/>
-              </a:rPr>
-              <a:t> to </a:t>
-            </a:r>
-            <a:r>
-              <a:rPr sz="2800" b="1">
-                <a:solidFill>
-                  <a:srgbClr val="D97706"/>
-                </a:solidFill>
-                <a:latin typeface="Calibri"/>
-              </a:rPr>
-              <a:t>a Canadian winter</a:t>
-            </a:r>
-            <a:r>
-              <a:rPr sz="2800" b="0">
-                <a:solidFill>
-                  <a:srgbClr val="4B5563"/>
-                </a:solidFill>
-                <a:latin typeface="Calibri"/>
-              </a:rPr>
-              <a:t>, cutting fossil fuels now costs lives.</a:t>
-            </a:r>
-          </a:p>
-        </p:txBody>
-      </p:sp>
-      <p:sp>
-        <p:nvSpPr>
-          <p:cNvPr id="7" name="TextBox 6"/>
-          <p:cNvSpPr txBox="1"/>
-          <p:nvPr/>
-        </p:nvSpPr>
-        <p:spPr>
-          <a:xfrm>
-            <a:off x="822960" y="4206240"/>
-            <a:ext cx="10515600" cy="1828800"/>
+            <a:off x="4709160" y="4069080"/>
+            <a:ext cx="2971800" cy="1188720"/>
           </a:xfrm>
           <a:prstGeom prst="rect">
             <a:avLst/>
@@ -6061,30 +7320,76 @@
           <a:p>
             <a:pPr algn="l"/>
             <a:r>
-              <a:rPr sz="4000" b="1">
-                <a:solidFill>
-                  <a:srgbClr val="1F4E79"/>
+              <a:rPr sz="1250" b="0">
+                <a:solidFill>
+                  <a:srgbClr val="4B5563"/>
                 </a:solidFill>
                 <a:latin typeface="Calibri"/>
               </a:rPr>
-              <a:t>The honest path is a managed transition,
-not abandonment.</a:t>
-            </a:r>
-          </a:p>
-        </p:txBody>
-      </p:sp>
-      <p:sp>
-        <p:nvSpPr>
-          <p:cNvPr id="8" name="Oval 7"/>
+              <a:t>Ancient ocean plankton and algae,
+cooked under pressure. Drilled as a liquid.</a:t>
+            </a:r>
+          </a:p>
+        </p:txBody>
+      </p:sp>
+      <p:sp>
+        <p:nvSpPr>
+          <p:cNvPr id="19" name="Rounded Rectangle 18"/>
           <p:cNvSpPr/>
           <p:nvPr/>
         </p:nvSpPr>
         <p:spPr>
           <a:xfrm>
-            <a:off x="10972800" y="594360"/>
-            <a:ext cx="731520" cy="731520"/>
-          </a:xfrm>
-          <a:prstGeom prst="ellipse">
+            <a:off x="8138160" y="2651760"/>
+            <a:ext cx="3520440" cy="2743200"/>
+          </a:xfrm>
+          <a:prstGeom prst="roundRect">
+            <a:avLst>
+              <a:gd name="adj" fmla="val 10000"/>
+            </a:avLst>
+          </a:prstGeom>
+          <a:solidFill>
+            <a:srgbClr val="F9FAFB"/>
+          </a:solidFill>
+          <a:ln>
+            <a:noFill/>
+          </a:ln>
+          <a:effectLst/>
+        </p:spPr>
+        <p:style>
+          <a:lnRef idx="1">
+            <a:schemeClr val="accent1"/>
+          </a:lnRef>
+          <a:fillRef idx="3">
+            <a:schemeClr val="accent1"/>
+          </a:fillRef>
+          <a:effectRef idx="2">
+            <a:schemeClr val="accent1"/>
+          </a:effectRef>
+          <a:fontRef idx="minor">
+            <a:schemeClr val="lt1"/>
+          </a:fontRef>
+        </p:style>
+        <p:txBody>
+          <a:bodyPr rtlCol="0" anchor="ctr"/>
+          <a:lstStyle/>
+          <a:p>
+            <a:pPr algn="ctr"/>
+          </a:p>
+        </p:txBody>
+      </p:sp>
+      <p:sp>
+        <p:nvSpPr>
+          <p:cNvPr id="20" name="Rectangle 19"/>
+          <p:cNvSpPr/>
+          <p:nvPr/>
+        </p:nvSpPr>
+        <p:spPr>
+          <a:xfrm>
+            <a:off x="8138160" y="2651760"/>
+            <a:ext cx="164592" cy="2743200"/>
+          </a:xfrm>
+          <a:prstGeom prst="rect">
             <a:avLst/>
           </a:prstGeom>
           <a:solidFill>
@@ -6119,16 +7424,60 @@
       </p:sp>
       <p:sp>
         <p:nvSpPr>
-          <p:cNvPr id="9" name="Rectangle 8"/>
+          <p:cNvPr id="21" name="Oval 20"/>
           <p:cNvSpPr/>
           <p:nvPr/>
         </p:nvSpPr>
         <p:spPr>
           <a:xfrm>
-            <a:off x="11082528" y="941832"/>
-            <a:ext cx="512063" cy="36576"/>
-          </a:xfrm>
-          <a:prstGeom prst="rect">
+            <a:off x="8485632" y="2953512"/>
+            <a:ext cx="585216" cy="585216"/>
+          </a:xfrm>
+          <a:prstGeom prst="ellipse">
+            <a:avLst/>
+          </a:prstGeom>
+          <a:solidFill>
+            <a:srgbClr val="1F4E79"/>
+          </a:solidFill>
+          <a:ln>
+            <a:noFill/>
+          </a:ln>
+          <a:effectLst/>
+        </p:spPr>
+        <p:style>
+          <a:lnRef idx="1">
+            <a:schemeClr val="accent1"/>
+          </a:lnRef>
+          <a:fillRef idx="3">
+            <a:schemeClr val="accent1"/>
+          </a:fillRef>
+          <a:effectRef idx="2">
+            <a:schemeClr val="accent1"/>
+          </a:effectRef>
+          <a:fontRef idx="minor">
+            <a:schemeClr val="lt1"/>
+          </a:fontRef>
+        </p:style>
+        <p:txBody>
+          <a:bodyPr rtlCol="0" anchor="ctr"/>
+          <a:lstStyle/>
+          <a:p>
+            <a:pPr algn="ctr"/>
+          </a:p>
+        </p:txBody>
+      </p:sp>
+      <p:sp>
+        <p:nvSpPr>
+          <p:cNvPr id="22" name="Lightning Bolt 21"/>
+          <p:cNvSpPr/>
+          <p:nvPr/>
+        </p:nvSpPr>
+        <p:spPr>
+          <a:xfrm>
+            <a:off x="8631936" y="3026664"/>
+            <a:ext cx="292608" cy="438912"/>
+          </a:xfrm>
+          <a:prstGeom prst="lightningBolt">
             <a:avLst/>
           </a:prstGeom>
           <a:solidFill>
@@ -6163,58 +7512,14 @@
       </p:sp>
       <p:sp>
         <p:nvSpPr>
-          <p:cNvPr id="10" name="Rectangle 9"/>
-          <p:cNvSpPr/>
-          <p:nvPr/>
-        </p:nvSpPr>
-        <p:spPr>
-          <a:xfrm>
-            <a:off x="11320272" y="941832"/>
-            <a:ext cx="36576" cy="237744"/>
-          </a:xfrm>
-          <a:prstGeom prst="rect">
-            <a:avLst/>
-          </a:prstGeom>
-          <a:solidFill>
-            <a:srgbClr val="FFFFFF"/>
-          </a:solidFill>
-          <a:ln>
-            <a:noFill/>
-          </a:ln>
-          <a:effectLst/>
-        </p:spPr>
-        <p:style>
-          <a:lnRef idx="1">
-            <a:schemeClr val="accent1"/>
-          </a:lnRef>
-          <a:fillRef idx="3">
-            <a:schemeClr val="accent1"/>
-          </a:fillRef>
-          <a:effectRef idx="2">
-            <a:schemeClr val="accent1"/>
-          </a:effectRef>
-          <a:fontRef idx="minor">
-            <a:schemeClr val="lt1"/>
-          </a:fontRef>
-        </p:style>
-        <p:txBody>
-          <a:bodyPr rtlCol="0" anchor="ctr"/>
-          <a:lstStyle/>
-          <a:p>
-            <a:pPr algn="ctr"/>
-          </a:p>
-        </p:txBody>
-      </p:sp>
-      <p:sp>
-        <p:nvSpPr>
-          <p:cNvPr id="11" name="TextBox 10"/>
+          <p:cNvPr id="23" name="TextBox 22"/>
           <p:cNvSpPr txBox="1"/>
           <p:nvPr/>
         </p:nvSpPr>
         <p:spPr>
           <a:xfrm>
-            <a:off x="457200" y="6537960"/>
-            <a:ext cx="7315200" cy="274320"/>
+            <a:off x="9281160" y="3063240"/>
+            <a:ext cx="2240280" cy="731520"/>
           </a:xfrm>
           <a:prstGeom prst="rect">
             <a:avLst/>
@@ -6229,6 +7534,112 @@
           <a:p>
             <a:pPr algn="l"/>
             <a:r>
+              <a:rPr sz="1600" b="1">
+                <a:solidFill>
+                  <a:srgbClr val="1F2937"/>
+                </a:solidFill>
+                <a:latin typeface="Calibri"/>
+              </a:rPr>
+              <a:t>Natural gas</a:t>
+            </a:r>
+          </a:p>
+        </p:txBody>
+      </p:sp>
+      <p:sp>
+        <p:nvSpPr>
+          <p:cNvPr id="24" name="TextBox 23"/>
+          <p:cNvSpPr txBox="1"/>
+          <p:nvPr/>
+        </p:nvSpPr>
+        <p:spPr>
+          <a:xfrm>
+            <a:off x="8503920" y="4069080"/>
+            <a:ext cx="2971800" cy="1188720"/>
+          </a:xfrm>
+          <a:prstGeom prst="rect">
+            <a:avLst/>
+          </a:prstGeom>
+          <a:noFill/>
+        </p:spPr>
+        <p:txBody>
+          <a:bodyPr wrap="square" lIns="0" rIns="0" tIns="0" bIns="0" anchor="t">
+            <a:spAutoFit/>
+          </a:bodyPr>
+          <a:lstStyle/>
+          <a:p>
+            <a:pPr algn="l"/>
+            <a:r>
+              <a:rPr sz="1250" b="0">
+                <a:solidFill>
+                  <a:srgbClr val="4B5563"/>
+                </a:solidFill>
+                <a:latin typeface="Calibri"/>
+              </a:rPr>
+              <a:t>The same organic matter, cooked hotter.
+Drilled as a gas — mostly methane.</a:t>
+            </a:r>
+          </a:p>
+        </p:txBody>
+      </p:sp>
+      <p:sp>
+        <p:nvSpPr>
+          <p:cNvPr id="25" name="TextBox 24"/>
+          <p:cNvSpPr txBox="1"/>
+          <p:nvPr/>
+        </p:nvSpPr>
+        <p:spPr>
+          <a:xfrm>
+            <a:off x="548640" y="5760720"/>
+            <a:ext cx="11064240" cy="548640"/>
+          </a:xfrm>
+          <a:prstGeom prst="rect">
+            <a:avLst/>
+          </a:prstGeom>
+          <a:noFill/>
+        </p:spPr>
+        <p:txBody>
+          <a:bodyPr wrap="square" lIns="0" rIns="0" tIns="0" bIns="0" anchor="t">
+            <a:spAutoFit/>
+          </a:bodyPr>
+          <a:lstStyle/>
+          <a:p>
+            <a:pPr algn="l"/>
+            <a:r>
+              <a:rPr sz="1300" b="1">
+                <a:solidFill>
+                  <a:srgbClr val="4B5563"/>
+                </a:solidFill>
+                <a:latin typeface="Calibri"/>
+              </a:rPr>
+              <a:t>What we use them for today:  electricity · transport · heat · industry (steel, cement, fertilizer) · cooking.</a:t>
+            </a:r>
+          </a:p>
+        </p:txBody>
+      </p:sp>
+      <p:sp>
+        <p:nvSpPr>
+          <p:cNvPr id="26" name="TextBox 25"/>
+          <p:cNvSpPr txBox="1"/>
+          <p:nvPr/>
+        </p:nvSpPr>
+        <p:spPr>
+          <a:xfrm>
+            <a:off x="457200" y="6537960"/>
+            <a:ext cx="7315200" cy="274320"/>
+          </a:xfrm>
+          <a:prstGeom prst="rect">
+            <a:avLst/>
+          </a:prstGeom>
+          <a:noFill/>
+        </p:spPr>
+        <p:txBody>
+          <a:bodyPr wrap="square" lIns="0" rIns="0" tIns="0" bIns="0" anchor="t">
+            <a:spAutoFit/>
+          </a:bodyPr>
+          <a:lstStyle/>
+          <a:p>
+            <a:pPr algn="l"/>
+            <a:r>
               <a:rPr sz="900" b="0">
                 <a:solidFill>
                   <a:srgbClr val="9CA3AF"/>
@@ -6242,7 +7653,7 @@
       </p:sp>
       <p:sp>
         <p:nvSpPr>
-          <p:cNvPr id="12" name="TextBox 11"/>
+          <p:cNvPr id="27" name="TextBox 26"/>
           <p:cNvSpPr txBox="1"/>
           <p:nvPr/>
         </p:nvSpPr>
@@ -6270,7 +7681,7 @@
                 </a:solidFill>
                 <a:latin typeface="Calibri"/>
               </a:rPr>
-              <a:t>3 / 9</a:t>
+              <a:t>3 / 10</a:t>
             </a:r>
           </a:p>
         </p:txBody>
@@ -6308,7 +7719,7 @@
             <a:avLst/>
           </a:prstGeom>
           <a:solidFill>
-            <a:srgbClr val="D97706"/>
+            <a:srgbClr val="1F4E79"/>
           </a:solidFill>
           <a:ln>
             <a:noFill/>
@@ -6339,16 +7750,16 @@
       </p:sp>
       <p:sp>
         <p:nvSpPr>
-          <p:cNvPr id="3" name="Oval 2"/>
+          <p:cNvPr id="3" name="Rectangle 2"/>
           <p:cNvSpPr/>
           <p:nvPr/>
         </p:nvSpPr>
         <p:spPr>
           <a:xfrm>
-            <a:off x="576072" y="539496"/>
-            <a:ext cx="128016" cy="128016"/>
-          </a:xfrm>
-          <a:prstGeom prst="ellipse">
+            <a:off x="0" y="146304"/>
+            <a:ext cx="411480" cy="6711696"/>
+          </a:xfrm>
+          <a:prstGeom prst="rect">
             <a:avLst/>
           </a:prstGeom>
           <a:solidFill>
@@ -6383,117 +7794,20 @@
       </p:sp>
       <p:sp>
         <p:nvSpPr>
-          <p:cNvPr id="4" name="TextBox 3"/>
-          <p:cNvSpPr txBox="1"/>
-          <p:nvPr/>
-        </p:nvSpPr>
-        <p:spPr>
-          <a:xfrm>
-            <a:off x="822960" y="457200"/>
-            <a:ext cx="7315200" cy="365760"/>
-          </a:xfrm>
-          <a:prstGeom prst="rect">
-            <a:avLst/>
-          </a:prstGeom>
-          <a:noFill/>
-        </p:spPr>
-        <p:txBody>
-          <a:bodyPr wrap="square" lIns="0" rIns="0" tIns="0" bIns="0" anchor="t">
-            <a:spAutoFit/>
-          </a:bodyPr>
-          <a:lstStyle/>
-          <a:p>
-            <a:pPr algn="l"/>
-            <a:r>
-              <a:rPr sz="1100" b="1">
-                <a:solidFill>
-                  <a:srgbClr val="D97706"/>
-                </a:solidFill>
-                <a:latin typeface="Calibri"/>
-              </a:rPr>
-              <a:t>COMPLICATION  •  THE RELIABILITY TEST, IN THE SOUTH</a:t>
-            </a:r>
-          </a:p>
-        </p:txBody>
-      </p:sp>
-      <p:sp>
-        <p:nvSpPr>
-          <p:cNvPr id="5" name="TextBox 4"/>
-          <p:cNvSpPr txBox="1"/>
-          <p:nvPr/>
-        </p:nvSpPr>
-        <p:spPr>
-          <a:xfrm>
-            <a:off x="548640" y="1005840"/>
-            <a:ext cx="11064240" cy="1280160"/>
-          </a:xfrm>
-          <a:prstGeom prst="rect">
-            <a:avLst/>
-          </a:prstGeom>
-          <a:noFill/>
-        </p:spPr>
-        <p:txBody>
-          <a:bodyPr wrap="square" lIns="0" rIns="0" tIns="0" bIns="0" anchor="t">
-            <a:spAutoFit/>
-          </a:bodyPr>
-          <a:lstStyle/>
-          <a:p>
-            <a:pPr algn="l"/>
-            <a:r>
-              <a:rPr sz="2200" b="1">
-                <a:solidFill>
-                  <a:srgbClr val="1F2937"/>
-                </a:solidFill>
-                <a:latin typeface="Calibri"/>
-              </a:rPr>
-              <a:t>Zambia bet 85% of its grid on "clean" hydropower —
-and a climate-driven drought left us in the dark for 21 hours a day.</a:t>
-            </a:r>
-          </a:p>
-        </p:txBody>
-      </p:sp>
-      <p:pic>
-        <p:nvPicPr>
-          <p:cNvPr id="6" name="Picture 5" descr="zambia_mix.png"/>
-          <p:cNvPicPr>
-            <a:picLocks noChangeAspect="1"/>
-          </p:cNvPicPr>
-          <p:nvPr/>
-        </p:nvPicPr>
-        <p:blipFill>
-          <a:blip r:embed="rId2"/>
-          <a:stretch>
-            <a:fillRect/>
-          </a:stretch>
-        </p:blipFill>
-        <p:spPr>
-          <a:xfrm>
-            <a:off x="365760" y="2377440"/>
-            <a:ext cx="6858000" cy="5531087"/>
-          </a:xfrm>
-          <a:prstGeom prst="rect">
-            <a:avLst/>
-          </a:prstGeom>
-        </p:spPr>
-      </p:pic>
-      <p:sp>
-        <p:nvSpPr>
-          <p:cNvPr id="7" name="Rounded Rectangle 6"/>
+          <p:cNvPr id="4" name="Oval 3"/>
           <p:cNvSpPr/>
           <p:nvPr/>
         </p:nvSpPr>
         <p:spPr>
           <a:xfrm>
-            <a:off x="7680960" y="2468880"/>
-            <a:ext cx="4114800" cy="1554480"/>
-          </a:xfrm>
-          <a:prstGeom prst="roundRect">
-            <a:avLst>
-              <a:gd name="adj" fmla="val 10000"/>
-            </a:avLst>
+            <a:off x="850392" y="722376"/>
+            <a:ext cx="128016" cy="128016"/>
+          </a:xfrm>
+          <a:prstGeom prst="ellipse">
+            <a:avLst/>
           </a:prstGeom>
           <a:solidFill>
-            <a:srgbClr val="FDE8CC"/>
+            <a:srgbClr val="D97706"/>
           </a:solidFill>
           <a:ln>
             <a:noFill/>
@@ -6524,14 +7838,14 @@
       </p:sp>
       <p:sp>
         <p:nvSpPr>
-          <p:cNvPr id="8" name="TextBox 7"/>
+          <p:cNvPr id="5" name="TextBox 4"/>
           <p:cNvSpPr txBox="1"/>
           <p:nvPr/>
         </p:nvSpPr>
         <p:spPr>
           <a:xfrm>
-            <a:off x="7955280" y="2606040"/>
-            <a:ext cx="3566160" cy="365760"/>
+            <a:off x="1097280" y="640080"/>
+            <a:ext cx="7315200" cy="365760"/>
           </a:xfrm>
           <a:prstGeom prst="rect">
             <a:avLst/>
@@ -6552,21 +7866,109 @@
                 </a:solidFill>
                 <a:latin typeface="Calibri"/>
               </a:rPr>
-              <a:t>THE BET</a:t>
-            </a:r>
-          </a:p>
-        </p:txBody>
-      </p:sp>
-      <p:sp>
-        <p:nvSpPr>
-          <p:cNvPr id="9" name="TextBox 8"/>
+              <a:t>THE BIG IDEA</a:t>
+            </a:r>
+          </a:p>
+        </p:txBody>
+      </p:sp>
+      <p:sp>
+        <p:nvSpPr>
+          <p:cNvPr id="6" name="TextBox 5"/>
           <p:cNvSpPr txBox="1"/>
           <p:nvPr/>
         </p:nvSpPr>
         <p:spPr>
           <a:xfrm>
-            <a:off x="7955280" y="2926080"/>
-            <a:ext cx="3566160" cy="1097280"/>
+            <a:off x="822960" y="1554480"/>
+            <a:ext cx="10515600" cy="2194560"/>
+          </a:xfrm>
+          <a:prstGeom prst="rect">
+            <a:avLst/>
+          </a:prstGeom>
+          <a:noFill/>
+        </p:spPr>
+        <p:txBody>
+          <a:bodyPr wrap="square" lIns="0" rIns="0">
+            <a:spAutoFit/>
+          </a:bodyPr>
+          <a:lstStyle/>
+          <a:p>
+            <a:r>
+              <a:rPr sz="2800" b="0">
+                <a:solidFill>
+                  <a:srgbClr val="4B5563"/>
+                </a:solidFill>
+                <a:latin typeface="Calibri"/>
+              </a:rPr>
+              <a:t>Reliable energy is survival — and </a:t>
+            </a:r>
+            <a:r>
+              <a:rPr sz="2800" b="1">
+                <a:solidFill>
+                  <a:srgbClr val="D97706"/>
+                </a:solidFill>
+                <a:latin typeface="Calibri"/>
+              </a:rPr>
+              <a:t>clean energy alone can't deliver it</a:t>
+            </a:r>
+            <a:r>
+              <a:rPr sz="2800" b="0">
+                <a:solidFill>
+                  <a:srgbClr val="4B5563"/>
+                </a:solidFill>
+                <a:latin typeface="Calibri"/>
+              </a:rPr>
+              <a:t> when we need it most. From </a:t>
+            </a:r>
+            <a:r>
+              <a:rPr sz="2800" b="1">
+                <a:solidFill>
+                  <a:srgbClr val="D97706"/>
+                </a:solidFill>
+                <a:latin typeface="Calibri"/>
+              </a:rPr>
+              <a:t>Zambia's drought</a:t>
+            </a:r>
+            <a:r>
+              <a:rPr sz="2800" b="0">
+                <a:solidFill>
+                  <a:srgbClr val="4B5563"/>
+                </a:solidFill>
+                <a:latin typeface="Calibri"/>
+              </a:rPr>
+              <a:t> to </a:t>
+            </a:r>
+            <a:r>
+              <a:rPr sz="2800" b="1">
+                <a:solidFill>
+                  <a:srgbClr val="D97706"/>
+                </a:solidFill>
+                <a:latin typeface="Calibri"/>
+              </a:rPr>
+              <a:t>a Canadian winter</a:t>
+            </a:r>
+            <a:r>
+              <a:rPr sz="2800" b="0">
+                <a:solidFill>
+                  <a:srgbClr val="4B5563"/>
+                </a:solidFill>
+                <a:latin typeface="Calibri"/>
+              </a:rPr>
+              <a:t>, cutting fossil fuels now costs lives.</a:t>
+            </a:r>
+          </a:p>
+        </p:txBody>
+      </p:sp>
+      <p:sp>
+        <p:nvSpPr>
+          <p:cNvPr id="7" name="TextBox 6"/>
+          <p:cNvSpPr txBox="1"/>
+          <p:nvPr/>
+        </p:nvSpPr>
+        <p:spPr>
+          <a:xfrm>
+            <a:off x="822960" y="4206240"/>
+            <a:ext cx="10515600" cy="1828800"/>
           </a:xfrm>
           <a:prstGeom prst="rect">
             <a:avLst/>
@@ -6581,36 +7983,34 @@
           <a:p>
             <a:pPr algn="l"/>
             <a:r>
-              <a:rPr sz="1800" b="1">
-                <a:solidFill>
-                  <a:srgbClr val="1F2937"/>
+              <a:rPr sz="4000" b="1">
+                <a:solidFill>
+                  <a:srgbClr val="1F4E79"/>
                 </a:solidFill>
                 <a:latin typeface="Calibri"/>
               </a:rPr>
-              <a:t>85% of installed capacity
-is hydropower.</a:t>
-            </a:r>
-          </a:p>
-        </p:txBody>
-      </p:sp>
-      <p:sp>
-        <p:nvSpPr>
-          <p:cNvPr id="10" name="Rounded Rectangle 9"/>
+              <a:t>The honest path is a managed transition,
+not abandonment.</a:t>
+            </a:r>
+          </a:p>
+        </p:txBody>
+      </p:sp>
+      <p:sp>
+        <p:nvSpPr>
+          <p:cNvPr id="8" name="Oval 7"/>
           <p:cNvSpPr/>
           <p:nvPr/>
         </p:nvSpPr>
         <p:spPr>
           <a:xfrm>
-            <a:off x="7680960" y="4160520"/>
-            <a:ext cx="4114800" cy="1554480"/>
-          </a:xfrm>
-          <a:prstGeom prst="roundRect">
-            <a:avLst>
-              <a:gd name="adj" fmla="val 10000"/>
-            </a:avLst>
+            <a:off x="10972800" y="594360"/>
+            <a:ext cx="731520" cy="731520"/>
+          </a:xfrm>
+          <a:prstGeom prst="ellipse">
+            <a:avLst/>
           </a:prstGeom>
           <a:solidFill>
-            <a:srgbClr val="DBE5F1"/>
+            <a:srgbClr val="1F4E79"/>
           </a:solidFill>
           <a:ln>
             <a:noFill/>
@@ -6641,14 +8041,102 @@
       </p:sp>
       <p:sp>
         <p:nvSpPr>
+          <p:cNvPr id="9" name="Rectangle 8"/>
+          <p:cNvSpPr/>
+          <p:nvPr/>
+        </p:nvSpPr>
+        <p:spPr>
+          <a:xfrm>
+            <a:off x="11082528" y="941832"/>
+            <a:ext cx="512063" cy="36576"/>
+          </a:xfrm>
+          <a:prstGeom prst="rect">
+            <a:avLst/>
+          </a:prstGeom>
+          <a:solidFill>
+            <a:srgbClr val="FFFFFF"/>
+          </a:solidFill>
+          <a:ln>
+            <a:noFill/>
+          </a:ln>
+          <a:effectLst/>
+        </p:spPr>
+        <p:style>
+          <a:lnRef idx="1">
+            <a:schemeClr val="accent1"/>
+          </a:lnRef>
+          <a:fillRef idx="3">
+            <a:schemeClr val="accent1"/>
+          </a:fillRef>
+          <a:effectRef idx="2">
+            <a:schemeClr val="accent1"/>
+          </a:effectRef>
+          <a:fontRef idx="minor">
+            <a:schemeClr val="lt1"/>
+          </a:fontRef>
+        </p:style>
+        <p:txBody>
+          <a:bodyPr rtlCol="0" anchor="ctr"/>
+          <a:lstStyle/>
+          <a:p>
+            <a:pPr algn="ctr"/>
+          </a:p>
+        </p:txBody>
+      </p:sp>
+      <p:sp>
+        <p:nvSpPr>
+          <p:cNvPr id="10" name="Rectangle 9"/>
+          <p:cNvSpPr/>
+          <p:nvPr/>
+        </p:nvSpPr>
+        <p:spPr>
+          <a:xfrm>
+            <a:off x="11320272" y="941832"/>
+            <a:ext cx="36576" cy="237744"/>
+          </a:xfrm>
+          <a:prstGeom prst="rect">
+            <a:avLst/>
+          </a:prstGeom>
+          <a:solidFill>
+            <a:srgbClr val="FFFFFF"/>
+          </a:solidFill>
+          <a:ln>
+            <a:noFill/>
+          </a:ln>
+          <a:effectLst/>
+        </p:spPr>
+        <p:style>
+          <a:lnRef idx="1">
+            <a:schemeClr val="accent1"/>
+          </a:lnRef>
+          <a:fillRef idx="3">
+            <a:schemeClr val="accent1"/>
+          </a:fillRef>
+          <a:effectRef idx="2">
+            <a:schemeClr val="accent1"/>
+          </a:effectRef>
+          <a:fontRef idx="minor">
+            <a:schemeClr val="lt1"/>
+          </a:fontRef>
+        </p:style>
+        <p:txBody>
+          <a:bodyPr rtlCol="0" anchor="ctr"/>
+          <a:lstStyle/>
+          <a:p>
+            <a:pPr algn="ctr"/>
+          </a:p>
+        </p:txBody>
+      </p:sp>
+      <p:sp>
+        <p:nvSpPr>
           <p:cNvPr id="11" name="TextBox 10"/>
           <p:cNvSpPr txBox="1"/>
           <p:nvPr/>
         </p:nvSpPr>
         <p:spPr>
           <a:xfrm>
-            <a:off x="7955280" y="4297680"/>
-            <a:ext cx="3566160" cy="365760"/>
+            <a:off x="457200" y="6537960"/>
+            <a:ext cx="7315200" cy="274320"/>
           </a:xfrm>
           <a:prstGeom prst="rect">
             <a:avLst/>
@@ -6663,13 +8151,13 @@
           <a:p>
             <a:pPr algn="l"/>
             <a:r>
-              <a:rPr sz="1100" b="1">
-                <a:solidFill>
-                  <a:srgbClr val="1F4E79"/>
+              <a:rPr sz="900" b="0">
+                <a:solidFill>
+                  <a:srgbClr val="9CA3AF"/>
                 </a:solidFill>
                 <a:latin typeface="Calibri"/>
               </a:rPr>
-              <a:t>THE LESSON</a:t>
+              <a:t>Choolwe  •  The Case For Fossil Fuels</a:t>
             </a:r>
           </a:p>
         </p:txBody>
@@ -6682,8 +8170,8 @@
         </p:nvSpPr>
         <p:spPr>
           <a:xfrm>
-            <a:off x="7955280" y="4617720"/>
-            <a:ext cx="3566160" cy="1097280"/>
+            <a:off x="10789920" y="6537960"/>
+            <a:ext cx="1097280" cy="274320"/>
           </a:xfrm>
           <a:prstGeom prst="rect">
             <a:avLst/>
@@ -6696,121 +8184,15 @@
           </a:bodyPr>
           <a:lstStyle/>
           <a:p>
-            <a:pPr algn="l"/>
-            <a:r>
-              <a:rPr sz="1300" b="0">
-                <a:solidFill>
-                  <a:srgbClr val="1F2937"/>
+            <a:pPr algn="r"/>
+            <a:r>
+              <a:rPr sz="900" b="0">
+                <a:solidFill>
+                  <a:srgbClr val="9CA3AF"/>
                 </a:solidFill>
                 <a:latin typeface="Calibri"/>
               </a:rPr>
-              <a:t>Firm, dispatchable power matters.
-Pretending otherwise is paid for in dark hospitals.</a:t>
-            </a:r>
-          </a:p>
-        </p:txBody>
-      </p:sp>
-      <p:sp>
-        <p:nvSpPr>
-          <p:cNvPr id="13" name="TextBox 12"/>
-          <p:cNvSpPr txBox="1"/>
-          <p:nvPr/>
-        </p:nvSpPr>
-        <p:spPr>
-          <a:xfrm>
-            <a:off x="548640" y="6080760"/>
-            <a:ext cx="10972800" cy="365760"/>
-          </a:xfrm>
-          <a:prstGeom prst="rect">
-            <a:avLst/>
-          </a:prstGeom>
-          <a:noFill/>
-        </p:spPr>
-        <p:txBody>
-          <a:bodyPr wrap="square" lIns="0" rIns="0" tIns="0" bIns="0" anchor="t">
-            <a:spAutoFit/>
-          </a:bodyPr>
-          <a:lstStyle/>
-          <a:p>
-            <a:pPr algn="l"/>
-            <a:r>
-              <a:rPr sz="1300" b="0">
-                <a:solidFill>
-                  <a:srgbClr val="4B5563"/>
-                </a:solidFill>
-                <a:latin typeface="Calibri"/>
-              </a:rPr>
-              <a:t>The answer isn't "burn more coal." It's "don't bet the grid on one weather pattern."</a:t>
-            </a:r>
-          </a:p>
-        </p:txBody>
-      </p:sp>
-      <p:sp>
-        <p:nvSpPr>
-          <p:cNvPr id="14" name="TextBox 13"/>
-          <p:cNvSpPr txBox="1"/>
-          <p:nvPr/>
-        </p:nvSpPr>
-        <p:spPr>
-          <a:xfrm>
-            <a:off x="457200" y="6537960"/>
-            <a:ext cx="7315200" cy="274320"/>
-          </a:xfrm>
-          <a:prstGeom prst="rect">
-            <a:avLst/>
-          </a:prstGeom>
-          <a:noFill/>
-        </p:spPr>
-        <p:txBody>
-          <a:bodyPr wrap="square" lIns="0" rIns="0" tIns="0" bIns="0" anchor="t">
-            <a:spAutoFit/>
-          </a:bodyPr>
-          <a:lstStyle/>
-          <a:p>
-            <a:pPr algn="l"/>
-            <a:r>
-              <a:rPr sz="900" b="0">
-                <a:solidFill>
-                  <a:srgbClr val="9CA3AF"/>
-                </a:solidFill>
-                <a:latin typeface="Calibri"/>
-              </a:rPr>
-              <a:t>Choolwe  •  The Case For Fossil Fuels</a:t>
-            </a:r>
-          </a:p>
-        </p:txBody>
-      </p:sp>
-      <p:sp>
-        <p:nvSpPr>
-          <p:cNvPr id="15" name="TextBox 14"/>
-          <p:cNvSpPr txBox="1"/>
-          <p:nvPr/>
-        </p:nvSpPr>
-        <p:spPr>
-          <a:xfrm>
-            <a:off x="10789920" y="6537960"/>
-            <a:ext cx="1097280" cy="274320"/>
-          </a:xfrm>
-          <a:prstGeom prst="rect">
-            <a:avLst/>
-          </a:prstGeom>
-          <a:noFill/>
-        </p:spPr>
-        <p:txBody>
-          <a:bodyPr wrap="square" lIns="0" rIns="0" tIns="0" bIns="0" anchor="t">
-            <a:spAutoFit/>
-          </a:bodyPr>
-          <a:lstStyle/>
-          <a:p>
-            <a:pPr algn="r"/>
-            <a:r>
-              <a:rPr sz="900" b="0">
-                <a:solidFill>
-                  <a:srgbClr val="9CA3AF"/>
-                </a:solidFill>
-                <a:latin typeface="Calibri"/>
-              </a:rPr>
-              <a:t>4 / 9</a:t>
+              <a:t>4 / 10</a:t>
             </a:r>
           </a:p>
         </p:txBody>
@@ -6951,7 +8333,7 @@
                 </a:solidFill>
                 <a:latin typeface="Calibri"/>
               </a:rPr>
-              <a:t>COMPLICATION  •  THE RELIABILITY TEST, IN THE NORTH</a:t>
+              <a:t>COMPLICATION  •  THE RELIABILITY TEST, IN THE SOUTH</a:t>
             </a:r>
           </a:p>
         </p:txBody>
@@ -6986,15 +8368,15 @@
                 </a:solidFill>
                 <a:latin typeface="Calibri"/>
               </a:rPr>
-              <a:t>When it's coldest, clean energy is weakest —
-and fossil fuels are what keep people alive.</a:t>
+              <a:t>Zambia bet 85% of its grid on "clean" hydropower —
+and a climate-driven drought left us in the dark for 21 hours a day.</a:t>
             </a:r>
           </a:p>
         </p:txBody>
       </p:sp>
       <p:pic>
         <p:nvPicPr>
-          <p:cNvPr id="6" name="Picture 5" descr="cold_climate.png"/>
+          <p:cNvPr id="6" name="Picture 5" descr="zambia_mix.png"/>
           <p:cNvPicPr>
             <a:picLocks noChangeAspect="1"/>
           </p:cNvPicPr>
@@ -7009,7 +8391,7 @@
         <p:spPr>
           <a:xfrm>
             <a:off x="365760" y="2377440"/>
-            <a:ext cx="6949440" cy="3473082"/>
+            <a:ext cx="6858000" cy="5531087"/>
           </a:xfrm>
           <a:prstGeom prst="rect">
             <a:avLst/>
@@ -7024,8 +8406,8 @@
         </p:nvSpPr>
         <p:spPr>
           <a:xfrm>
-            <a:off x="7772400" y="2468880"/>
-            <a:ext cx="4023360" cy="1691640"/>
+            <a:off x="7680960" y="2468880"/>
+            <a:ext cx="4114800" cy="1554480"/>
           </a:xfrm>
           <a:prstGeom prst="roundRect">
             <a:avLst>
@@ -7070,8 +8452,8 @@
         </p:nvSpPr>
         <p:spPr>
           <a:xfrm>
-            <a:off x="8046720" y="2606040"/>
-            <a:ext cx="3474720" cy="365760"/>
+            <a:off x="7955280" y="2606040"/>
+            <a:ext cx="3566160" cy="365760"/>
           </a:xfrm>
           <a:prstGeom prst="rect">
             <a:avLst/>
@@ -7092,7 +8474,7 @@
                 </a:solidFill>
                 <a:latin typeface="Calibri"/>
               </a:rPr>
-              <a:t>WHY WARMTH IS NON-NEGOTIABLE</a:t>
+              <a:t>THE BET</a:t>
             </a:r>
           </a:p>
         </p:txBody>
@@ -7105,8 +8487,8 @@
         </p:nvSpPr>
         <p:spPr>
           <a:xfrm>
-            <a:off x="8046720" y="2926080"/>
-            <a:ext cx="3474720" cy="640080"/>
+            <a:off x="7955280" y="2926080"/>
+            <a:ext cx="3566160" cy="1097280"/>
           </a:xfrm>
           <a:prstGeom prst="rect">
             <a:avLst/>
@@ -7121,62 +8503,28 @@
           <a:p>
             <a:pPr algn="l"/>
             <a:r>
-              <a:rPr sz="3000" b="1">
-                <a:solidFill>
-                  <a:srgbClr val="D97706"/>
+              <a:rPr sz="1800" b="1">
+                <a:solidFill>
+                  <a:srgbClr val="1F2937"/>
                 </a:solidFill>
                 <a:latin typeface="Calibri"/>
               </a:rPr>
-              <a:t>~9× more</a:t>
-            </a:r>
-          </a:p>
-        </p:txBody>
-      </p:sp>
-      <p:sp>
-        <p:nvSpPr>
-          <p:cNvPr id="10" name="TextBox 9"/>
-          <p:cNvSpPr txBox="1"/>
-          <p:nvPr/>
-        </p:nvSpPr>
-        <p:spPr>
-          <a:xfrm>
-            <a:off x="8046720" y="3611880"/>
-            <a:ext cx="3474720" cy="548640"/>
-          </a:xfrm>
-          <a:prstGeom prst="rect">
-            <a:avLst/>
-          </a:prstGeom>
-          <a:noFill/>
-        </p:spPr>
-        <p:txBody>
-          <a:bodyPr wrap="square" lIns="0" rIns="0" tIns="0" bIns="0" anchor="t">
-            <a:spAutoFit/>
-          </a:bodyPr>
-          <a:lstStyle/>
-          <a:p>
-            <a:pPr algn="l"/>
-            <a:r>
-              <a:rPr sz="1300" b="0">
-                <a:solidFill>
-                  <a:srgbClr val="1F2937"/>
-                </a:solidFill>
-                <a:latin typeface="Calibri"/>
-              </a:rPr>
-              <a:t>deaths from cold than from heat, worldwide.</a:t>
-            </a:r>
-          </a:p>
-        </p:txBody>
-      </p:sp>
-      <p:sp>
-        <p:nvSpPr>
-          <p:cNvPr id="11" name="Rounded Rectangle 10"/>
+              <a:t>85% of installed capacity
+is hydropower.</a:t>
+            </a:r>
+          </a:p>
+        </p:txBody>
+      </p:sp>
+      <p:sp>
+        <p:nvSpPr>
+          <p:cNvPr id="10" name="Rounded Rectangle 9"/>
           <p:cNvSpPr/>
           <p:nvPr/>
         </p:nvSpPr>
         <p:spPr>
           <a:xfrm>
-            <a:off x="7772400" y="4297680"/>
-            <a:ext cx="4023360" cy="1417320"/>
+            <a:off x="7680960" y="4160520"/>
+            <a:ext cx="4114800" cy="1554480"/>
           </a:xfrm>
           <a:prstGeom prst="roundRect">
             <a:avLst>
@@ -7215,14 +8563,14 @@
       </p:sp>
       <p:sp>
         <p:nvSpPr>
-          <p:cNvPr id="12" name="TextBox 11"/>
+          <p:cNvPr id="11" name="TextBox 10"/>
           <p:cNvSpPr txBox="1"/>
           <p:nvPr/>
         </p:nvSpPr>
         <p:spPr>
           <a:xfrm>
-            <a:off x="8046720" y="4434840"/>
-            <a:ext cx="3474720" cy="365760"/>
+            <a:off x="7955280" y="4297680"/>
+            <a:ext cx="3566160" cy="365760"/>
           </a:xfrm>
           <a:prstGeom prst="rect">
             <a:avLst/>
@@ -7243,21 +8591,21 @@
                 </a:solidFill>
                 <a:latin typeface="Calibri"/>
               </a:rPr>
-              <a:t>GAS HEATS HALF OF CANADIAN HOMES</a:t>
-            </a:r>
-          </a:p>
-        </p:txBody>
-      </p:sp>
-      <p:sp>
-        <p:nvSpPr>
-          <p:cNvPr id="13" name="TextBox 12"/>
+              <a:t>THE LESSON</a:t>
+            </a:r>
+          </a:p>
+        </p:txBody>
+      </p:sp>
+      <p:sp>
+        <p:nvSpPr>
+          <p:cNvPr id="12" name="TextBox 11"/>
           <p:cNvSpPr txBox="1"/>
           <p:nvPr/>
         </p:nvSpPr>
         <p:spPr>
           <a:xfrm>
-            <a:off x="8046720" y="4754880"/>
-            <a:ext cx="3474720" cy="914400"/>
+            <a:off x="7955280" y="4617720"/>
+            <a:ext cx="3566160" cy="1097280"/>
           </a:xfrm>
           <a:prstGeom prst="rect">
             <a:avLst/>
@@ -7278,20 +8626,21 @@
                 </a:solidFill>
                 <a:latin typeface="Calibri"/>
               </a:rPr>
-              <a:t>72% in Alberta, 62% in Ontario. In a -30°C winter, "no fossil fuels" means no heat.</a:t>
-            </a:r>
-          </a:p>
-        </p:txBody>
-      </p:sp>
-      <p:sp>
-        <p:nvSpPr>
-          <p:cNvPr id="14" name="TextBox 13"/>
+              <a:t>Firm, dispatchable power matters.
+Pretending otherwise is paid for in dark hospitals.</a:t>
+            </a:r>
+          </a:p>
+        </p:txBody>
+      </p:sp>
+      <p:sp>
+        <p:nvSpPr>
+          <p:cNvPr id="13" name="TextBox 12"/>
           <p:cNvSpPr txBox="1"/>
           <p:nvPr/>
         </p:nvSpPr>
         <p:spPr>
           <a:xfrm>
-            <a:off x="548640" y="6126480"/>
+            <a:off x="548640" y="6080760"/>
             <a:ext cx="10972800" cy="365760"/>
           </a:xfrm>
           <a:prstGeom prst="rect">
@@ -7313,14 +8662,14 @@
                 </a:solidFill>
                 <a:latin typeface="Calibri"/>
               </a:rPr>
-              <a:t>It isn't only the poor South. A rich, modern province nearly went dark — and only firm power kept it alive.</a:t>
-            </a:r>
-          </a:p>
-        </p:txBody>
-      </p:sp>
-      <p:sp>
-        <p:nvSpPr>
-          <p:cNvPr id="15" name="TextBox 14"/>
+              <a:t>The answer isn't "burn more coal." It's "don't bet the grid on one weather pattern."</a:t>
+            </a:r>
+          </a:p>
+        </p:txBody>
+      </p:sp>
+      <p:sp>
+        <p:nvSpPr>
+          <p:cNvPr id="14" name="TextBox 13"/>
           <p:cNvSpPr txBox="1"/>
           <p:nvPr/>
         </p:nvSpPr>
@@ -7355,7 +8704,7 @@
       </p:sp>
       <p:sp>
         <p:nvSpPr>
-          <p:cNvPr id="16" name="TextBox 15"/>
+          <p:cNvPr id="15" name="TextBox 14"/>
           <p:cNvSpPr txBox="1"/>
           <p:nvPr/>
         </p:nvSpPr>
@@ -7383,7 +8732,7 @@
                 </a:solidFill>
                 <a:latin typeface="Calibri"/>
               </a:rPr>
-              <a:t>5 / 9</a:t>
+              <a:t>5 / 10</a:t>
             </a:r>
           </a:p>
         </p:txBody>
@@ -7524,7 +8873,7 @@
                 </a:solidFill>
                 <a:latin typeface="Calibri"/>
               </a:rPr>
-              <a:t>COMPLICATION  •  THE JUSTICE ASYMMETRY</a:t>
+              <a:t>COMPLICATION  •  THE RELIABILITY TEST, IN THE NORTH</a:t>
             </a:r>
           </a:p>
         </p:txBody>
@@ -7553,21 +8902,21 @@
           <a:p>
             <a:pPr algn="l"/>
             <a:r>
-              <a:rPr sz="2100" b="1">
+              <a:rPr sz="2200" b="1">
                 <a:solidFill>
                   <a:srgbClr val="1F2937"/>
                 </a:solidFill>
                 <a:latin typeface="Calibri"/>
               </a:rPr>
-              <a:t>Africa hosts 17% of the world's people, caused under 3% of cumulative
-emissions — and is being asked to skip the ladder every wealthy country climbed.</a:t>
+              <a:t>When it's coldest, clean energy is weakest —
+and fossil fuels are what keep people alive.</a:t>
             </a:r>
           </a:p>
         </p:txBody>
       </p:sp>
       <p:pic>
         <p:nvPicPr>
-          <p:cNvPr id="6" name="Picture 5" descr="africa_asymmetry.png"/>
+          <p:cNvPr id="6" name="Picture 5" descr="cold_climate.png"/>
           <p:cNvPicPr>
             <a:picLocks noChangeAspect="1"/>
           </p:cNvPicPr>
@@ -7581,8 +8930,8 @@
         </p:blipFill>
         <p:spPr>
           <a:xfrm>
-            <a:off x="365760" y="2651760"/>
-            <a:ext cx="11430000" cy="2230367"/>
+            <a:off x="365760" y="2377440"/>
+            <a:ext cx="6949440" cy="3473082"/>
           </a:xfrm>
           <a:prstGeom prst="rect">
             <a:avLst/>
@@ -7597,8 +8946,159 @@
         </p:nvSpPr>
         <p:spPr>
           <a:xfrm>
-            <a:off x="548640" y="5440680"/>
-            <a:ext cx="11064240" cy="868680"/>
+            <a:off x="7772400" y="2468880"/>
+            <a:ext cx="4023360" cy="1691640"/>
+          </a:xfrm>
+          <a:prstGeom prst="roundRect">
+            <a:avLst>
+              <a:gd name="adj" fmla="val 10000"/>
+            </a:avLst>
+          </a:prstGeom>
+          <a:solidFill>
+            <a:srgbClr val="FDE8CC"/>
+          </a:solidFill>
+          <a:ln>
+            <a:noFill/>
+          </a:ln>
+          <a:effectLst/>
+        </p:spPr>
+        <p:style>
+          <a:lnRef idx="1">
+            <a:schemeClr val="accent1"/>
+          </a:lnRef>
+          <a:fillRef idx="3">
+            <a:schemeClr val="accent1"/>
+          </a:fillRef>
+          <a:effectRef idx="2">
+            <a:schemeClr val="accent1"/>
+          </a:effectRef>
+          <a:fontRef idx="minor">
+            <a:schemeClr val="lt1"/>
+          </a:fontRef>
+        </p:style>
+        <p:txBody>
+          <a:bodyPr rtlCol="0" anchor="ctr"/>
+          <a:lstStyle/>
+          <a:p>
+            <a:pPr algn="ctr"/>
+          </a:p>
+        </p:txBody>
+      </p:sp>
+      <p:sp>
+        <p:nvSpPr>
+          <p:cNvPr id="8" name="TextBox 7"/>
+          <p:cNvSpPr txBox="1"/>
+          <p:nvPr/>
+        </p:nvSpPr>
+        <p:spPr>
+          <a:xfrm>
+            <a:off x="8046720" y="2606040"/>
+            <a:ext cx="3474720" cy="365760"/>
+          </a:xfrm>
+          <a:prstGeom prst="rect">
+            <a:avLst/>
+          </a:prstGeom>
+          <a:noFill/>
+        </p:spPr>
+        <p:txBody>
+          <a:bodyPr wrap="square" lIns="0" rIns="0" tIns="0" bIns="0" anchor="t">
+            <a:spAutoFit/>
+          </a:bodyPr>
+          <a:lstStyle/>
+          <a:p>
+            <a:pPr algn="l"/>
+            <a:r>
+              <a:rPr sz="1100" b="1">
+                <a:solidFill>
+                  <a:srgbClr val="D97706"/>
+                </a:solidFill>
+                <a:latin typeface="Calibri"/>
+              </a:rPr>
+              <a:t>WHY WARMTH IS NON-NEGOTIABLE</a:t>
+            </a:r>
+          </a:p>
+        </p:txBody>
+      </p:sp>
+      <p:sp>
+        <p:nvSpPr>
+          <p:cNvPr id="9" name="TextBox 8"/>
+          <p:cNvSpPr txBox="1"/>
+          <p:nvPr/>
+        </p:nvSpPr>
+        <p:spPr>
+          <a:xfrm>
+            <a:off x="8046720" y="2926080"/>
+            <a:ext cx="3474720" cy="640080"/>
+          </a:xfrm>
+          <a:prstGeom prst="rect">
+            <a:avLst/>
+          </a:prstGeom>
+          <a:noFill/>
+        </p:spPr>
+        <p:txBody>
+          <a:bodyPr wrap="square" lIns="0" rIns="0" tIns="0" bIns="0" anchor="t">
+            <a:spAutoFit/>
+          </a:bodyPr>
+          <a:lstStyle/>
+          <a:p>
+            <a:pPr algn="l"/>
+            <a:r>
+              <a:rPr sz="3000" b="1">
+                <a:solidFill>
+                  <a:srgbClr val="D97706"/>
+                </a:solidFill>
+                <a:latin typeface="Calibri"/>
+              </a:rPr>
+              <a:t>~9× more</a:t>
+            </a:r>
+          </a:p>
+        </p:txBody>
+      </p:sp>
+      <p:sp>
+        <p:nvSpPr>
+          <p:cNvPr id="10" name="TextBox 9"/>
+          <p:cNvSpPr txBox="1"/>
+          <p:nvPr/>
+        </p:nvSpPr>
+        <p:spPr>
+          <a:xfrm>
+            <a:off x="8046720" y="3611880"/>
+            <a:ext cx="3474720" cy="548640"/>
+          </a:xfrm>
+          <a:prstGeom prst="rect">
+            <a:avLst/>
+          </a:prstGeom>
+          <a:noFill/>
+        </p:spPr>
+        <p:txBody>
+          <a:bodyPr wrap="square" lIns="0" rIns="0" tIns="0" bIns="0" anchor="t">
+            <a:spAutoFit/>
+          </a:bodyPr>
+          <a:lstStyle/>
+          <a:p>
+            <a:pPr algn="l"/>
+            <a:r>
+              <a:rPr sz="1300" b="0">
+                <a:solidFill>
+                  <a:srgbClr val="1F2937"/>
+                </a:solidFill>
+                <a:latin typeface="Calibri"/>
+              </a:rPr>
+              <a:t>deaths from cold than from heat, worldwide.</a:t>
+            </a:r>
+          </a:p>
+        </p:txBody>
+      </p:sp>
+      <p:sp>
+        <p:nvSpPr>
+          <p:cNvPr id="11" name="Rounded Rectangle 10"/>
+          <p:cNvSpPr/>
+          <p:nvPr/>
+        </p:nvSpPr>
+        <p:spPr>
+          <a:xfrm>
+            <a:off x="7772400" y="4297680"/>
+            <a:ext cx="4023360" cy="1417320"/>
           </a:xfrm>
           <a:prstGeom prst="roundRect">
             <a:avLst>
@@ -7637,14 +9137,14 @@
       </p:sp>
       <p:sp>
         <p:nvSpPr>
-          <p:cNvPr id="8" name="TextBox 7"/>
+          <p:cNvPr id="12" name="TextBox 11"/>
           <p:cNvSpPr txBox="1"/>
           <p:nvPr/>
         </p:nvSpPr>
         <p:spPr>
           <a:xfrm>
-            <a:off x="868680" y="5577840"/>
-            <a:ext cx="10515600" cy="365760"/>
+            <a:off x="8046720" y="4434840"/>
+            <a:ext cx="3474720" cy="365760"/>
           </a:xfrm>
           <a:prstGeom prst="rect">
             <a:avLst/>
@@ -7659,27 +9159,27 @@
           <a:p>
             <a:pPr algn="l"/>
             <a:r>
-              <a:rPr sz="1400" b="1">
+              <a:rPr sz="1100" b="1">
                 <a:solidFill>
                   <a:srgbClr val="1F4E79"/>
                 </a:solidFill>
                 <a:latin typeface="Calibri"/>
               </a:rPr>
-              <a:t>Every wealthy country got rich by burning coal, then oil, then gas.</a:t>
-            </a:r>
-          </a:p>
-        </p:txBody>
-      </p:sp>
-      <p:sp>
-        <p:nvSpPr>
-          <p:cNvPr id="9" name="TextBox 8"/>
+              <a:t>GAS HEATS HALF OF CANADIAN HOMES</a:t>
+            </a:r>
+          </a:p>
+        </p:txBody>
+      </p:sp>
+      <p:sp>
+        <p:nvSpPr>
+          <p:cNvPr id="13" name="TextBox 12"/>
           <p:cNvSpPr txBox="1"/>
           <p:nvPr/>
         </p:nvSpPr>
         <p:spPr>
           <a:xfrm>
-            <a:off x="868680" y="5897880"/>
-            <a:ext cx="10515600" cy="365760"/>
+            <a:off x="8046720" y="4754880"/>
+            <a:ext cx="3474720" cy="914400"/>
           </a:xfrm>
           <a:prstGeom prst="rect">
             <a:avLst/>
@@ -7694,27 +9194,27 @@
           <a:p>
             <a:pPr algn="l"/>
             <a:r>
-              <a:rPr sz="1200" b="0">
-                <a:solidFill>
-                  <a:srgbClr val="4B5563"/>
+              <a:rPr sz="1300" b="0">
+                <a:solidFill>
+                  <a:srgbClr val="1F2937"/>
                 </a:solidFill>
                 <a:latin typeface="Calibri"/>
               </a:rPr>
-              <a:t>Even the clean-energy supply chain itself — steel, cement, shipping — still runs on fossil fuels today.</a:t>
-            </a:r>
-          </a:p>
-        </p:txBody>
-      </p:sp>
-      <p:sp>
-        <p:nvSpPr>
-          <p:cNvPr id="10" name="TextBox 9"/>
+              <a:t>72% in Alberta, 62% in Ontario. In a -30°C winter, "no fossil fuels" means no heat.</a:t>
+            </a:r>
+          </a:p>
+        </p:txBody>
+      </p:sp>
+      <p:sp>
+        <p:nvSpPr>
+          <p:cNvPr id="14" name="TextBox 13"/>
           <p:cNvSpPr txBox="1"/>
           <p:nvPr/>
         </p:nvSpPr>
         <p:spPr>
           <a:xfrm>
-            <a:off x="457200" y="6537960"/>
-            <a:ext cx="7315200" cy="274320"/>
+            <a:off x="548640" y="6126480"/>
+            <a:ext cx="10972800" cy="365760"/>
           </a:xfrm>
           <a:prstGeom prst="rect">
             <a:avLst/>
@@ -7729,6 +9229,41 @@
           <a:p>
             <a:pPr algn="l"/>
             <a:r>
+              <a:rPr sz="1300" b="0">
+                <a:solidFill>
+                  <a:srgbClr val="4B5563"/>
+                </a:solidFill>
+                <a:latin typeface="Calibri"/>
+              </a:rPr>
+              <a:t>It isn't only the poor South. A rich, modern province nearly went dark — and only firm power kept it alive.</a:t>
+            </a:r>
+          </a:p>
+        </p:txBody>
+      </p:sp>
+      <p:sp>
+        <p:nvSpPr>
+          <p:cNvPr id="15" name="TextBox 14"/>
+          <p:cNvSpPr txBox="1"/>
+          <p:nvPr/>
+        </p:nvSpPr>
+        <p:spPr>
+          <a:xfrm>
+            <a:off x="457200" y="6537960"/>
+            <a:ext cx="7315200" cy="274320"/>
+          </a:xfrm>
+          <a:prstGeom prst="rect">
+            <a:avLst/>
+          </a:prstGeom>
+          <a:noFill/>
+        </p:spPr>
+        <p:txBody>
+          <a:bodyPr wrap="square" lIns="0" rIns="0" tIns="0" bIns="0" anchor="t">
+            <a:spAutoFit/>
+          </a:bodyPr>
+          <a:lstStyle/>
+          <a:p>
+            <a:pPr algn="l"/>
+            <a:r>
               <a:rPr sz="900" b="0">
                 <a:solidFill>
                   <a:srgbClr val="9CA3AF"/>
@@ -7742,7 +9277,7 @@
       </p:sp>
       <p:sp>
         <p:nvSpPr>
-          <p:cNvPr id="11" name="TextBox 10"/>
+          <p:cNvPr id="16" name="TextBox 15"/>
           <p:cNvSpPr txBox="1"/>
           <p:nvPr/>
         </p:nvSpPr>
@@ -7770,7 +9305,7 @@
                 </a:solidFill>
                 <a:latin typeface="Calibri"/>
               </a:rPr>
-              <a:t>6 / 9</a:t>
+              <a:t>6 / 10</a:t>
             </a:r>
           </a:p>
         </p:txBody>
@@ -7911,7 +9446,7 @@
                 </a:solidFill>
                 <a:latin typeface="Calibri"/>
               </a:rPr>
-              <a:t>BRIDGE  •  WHAT ENERGY ACCESS BUYS</a:t>
+              <a:t>COMPLICATION  •  THE JUSTICE ASYMMETRY</a:t>
             </a:r>
           </a:p>
         </p:txBody>
@@ -7940,21 +9475,21 @@
           <a:p>
             <a:pPr algn="l"/>
             <a:r>
-              <a:rPr sz="2200" b="1">
+              <a:rPr sz="2100" b="1">
                 <a:solidFill>
                   <a:srgbClr val="1F2937"/>
                 </a:solidFill>
                 <a:latin typeface="Calibri"/>
               </a:rPr>
-              <a:t>Below ~3,000 kWh per person per year, every extra kWh
-buys life-years. Zambia sits right on the steep part of the curve.</a:t>
+              <a:t>Africa hosts 17% of the world's people, caused under 3% of cumulative
+emissions — and is being asked to skip the ladder every wealthy country climbed.</a:t>
             </a:r>
           </a:p>
         </p:txBody>
       </p:sp>
       <p:pic>
         <p:nvPicPr>
-          <p:cNvPr id="6" name="Picture 5" descr="energy_life.png"/>
+          <p:cNvPr id="6" name="Picture 5" descr="africa_asymmetry.png"/>
           <p:cNvPicPr>
             <a:picLocks noChangeAspect="1"/>
           </p:cNvPicPr>
@@ -7968,8 +9503,8 @@
         </p:blipFill>
         <p:spPr>
           <a:xfrm>
-            <a:off x="548640" y="2560320"/>
-            <a:ext cx="11064240" cy="5988850"/>
+            <a:off x="365760" y="2651760"/>
+            <a:ext cx="11430000" cy="2230367"/>
           </a:xfrm>
           <a:prstGeom prst="rect">
             <a:avLst/>
@@ -7978,14 +9513,60 @@
       </p:pic>
       <p:sp>
         <p:nvSpPr>
-          <p:cNvPr id="7" name="TextBox 6"/>
+          <p:cNvPr id="7" name="Rounded Rectangle 6"/>
+          <p:cNvSpPr/>
+          <p:nvPr/>
+        </p:nvSpPr>
+        <p:spPr>
+          <a:xfrm>
+            <a:off x="548640" y="5440680"/>
+            <a:ext cx="11064240" cy="868680"/>
+          </a:xfrm>
+          <a:prstGeom prst="roundRect">
+            <a:avLst>
+              <a:gd name="adj" fmla="val 10000"/>
+            </a:avLst>
+          </a:prstGeom>
+          <a:solidFill>
+            <a:srgbClr val="DBE5F1"/>
+          </a:solidFill>
+          <a:ln>
+            <a:noFill/>
+          </a:ln>
+          <a:effectLst/>
+        </p:spPr>
+        <p:style>
+          <a:lnRef idx="1">
+            <a:schemeClr val="accent1"/>
+          </a:lnRef>
+          <a:fillRef idx="3">
+            <a:schemeClr val="accent1"/>
+          </a:fillRef>
+          <a:effectRef idx="2">
+            <a:schemeClr val="accent1"/>
+          </a:effectRef>
+          <a:fontRef idx="minor">
+            <a:schemeClr val="lt1"/>
+          </a:fontRef>
+        </p:style>
+        <p:txBody>
+          <a:bodyPr rtlCol="0" anchor="ctr"/>
+          <a:lstStyle/>
+          <a:p>
+            <a:pPr algn="ctr"/>
+          </a:p>
+        </p:txBody>
+      </p:sp>
+      <p:sp>
+        <p:nvSpPr>
+          <p:cNvPr id="8" name="TextBox 7"/>
           <p:cNvSpPr txBox="1"/>
           <p:nvPr/>
         </p:nvSpPr>
         <p:spPr>
           <a:xfrm>
-            <a:off x="457200" y="6537960"/>
-            <a:ext cx="7315200" cy="274320"/>
+            <a:off x="868680" y="5577840"/>
+            <a:ext cx="10515600" cy="365760"/>
           </a:xfrm>
           <a:prstGeom prst="rect">
             <a:avLst/>
@@ -8000,6 +9581,76 @@
           <a:p>
             <a:pPr algn="l"/>
             <a:r>
+              <a:rPr sz="1400" b="1">
+                <a:solidFill>
+                  <a:srgbClr val="1F4E79"/>
+                </a:solidFill>
+                <a:latin typeface="Calibri"/>
+              </a:rPr>
+              <a:t>Every wealthy country got rich by burning coal, then oil, then gas.</a:t>
+            </a:r>
+          </a:p>
+        </p:txBody>
+      </p:sp>
+      <p:sp>
+        <p:nvSpPr>
+          <p:cNvPr id="9" name="TextBox 8"/>
+          <p:cNvSpPr txBox="1"/>
+          <p:nvPr/>
+        </p:nvSpPr>
+        <p:spPr>
+          <a:xfrm>
+            <a:off x="868680" y="5897880"/>
+            <a:ext cx="10515600" cy="365760"/>
+          </a:xfrm>
+          <a:prstGeom prst="rect">
+            <a:avLst/>
+          </a:prstGeom>
+          <a:noFill/>
+        </p:spPr>
+        <p:txBody>
+          <a:bodyPr wrap="square" lIns="0" rIns="0" tIns="0" bIns="0" anchor="t">
+            <a:spAutoFit/>
+          </a:bodyPr>
+          <a:lstStyle/>
+          <a:p>
+            <a:pPr algn="l"/>
+            <a:r>
+              <a:rPr sz="1200" b="0">
+                <a:solidFill>
+                  <a:srgbClr val="4B5563"/>
+                </a:solidFill>
+                <a:latin typeface="Calibri"/>
+              </a:rPr>
+              <a:t>Even the clean-energy supply chain itself — steel, cement, shipping — still runs on fossil fuels today.</a:t>
+            </a:r>
+          </a:p>
+        </p:txBody>
+      </p:sp>
+      <p:sp>
+        <p:nvSpPr>
+          <p:cNvPr id="10" name="TextBox 9"/>
+          <p:cNvSpPr txBox="1"/>
+          <p:nvPr/>
+        </p:nvSpPr>
+        <p:spPr>
+          <a:xfrm>
+            <a:off x="457200" y="6537960"/>
+            <a:ext cx="7315200" cy="274320"/>
+          </a:xfrm>
+          <a:prstGeom prst="rect">
+            <a:avLst/>
+          </a:prstGeom>
+          <a:noFill/>
+        </p:spPr>
+        <p:txBody>
+          <a:bodyPr wrap="square" lIns="0" rIns="0" tIns="0" bIns="0" anchor="t">
+            <a:spAutoFit/>
+          </a:bodyPr>
+          <a:lstStyle/>
+          <a:p>
+            <a:pPr algn="l"/>
+            <a:r>
               <a:rPr sz="900" b="0">
                 <a:solidFill>
                   <a:srgbClr val="9CA3AF"/>
@@ -8013,7 +9664,7 @@
       </p:sp>
       <p:sp>
         <p:nvSpPr>
-          <p:cNvPr id="8" name="TextBox 7"/>
+          <p:cNvPr id="11" name="TextBox 10"/>
           <p:cNvSpPr txBox="1"/>
           <p:nvPr/>
         </p:nvSpPr>
@@ -8041,7 +9692,7 @@
                 </a:solidFill>
                 <a:latin typeface="Calibri"/>
               </a:rPr>
-              <a:t>7 / 9</a:t>
+              <a:t>7 / 10</a:t>
             </a:r>
           </a:p>
         </p:txBody>
@@ -8079,7 +9730,7 @@
             <a:avLst/>
           </a:prstGeom>
           <a:solidFill>
-            <a:srgbClr val="1F4E79"/>
+            <a:srgbClr val="D97706"/>
           </a:solidFill>
           <a:ln>
             <a:noFill/>
@@ -8123,7 +9774,7 @@
             <a:avLst/>
           </a:prstGeom>
           <a:solidFill>
-            <a:srgbClr val="1F4E79"/>
+            <a:srgbClr val="D97706"/>
           </a:solidFill>
           <a:ln>
             <a:noFill/>
@@ -8178,11 +9829,11 @@
             <a:r>
               <a:rPr sz="1100" b="1">
                 <a:solidFill>
-                  <a:srgbClr val="1F4E79"/>
+                  <a:srgbClr val="D97706"/>
                 </a:solidFill>
                 <a:latin typeface="Calibri"/>
               </a:rPr>
-              <a:t>RESOLUTION  •  THE MANAGED TRANSITION</a:t>
+              <a:t>BRIDGE  •  WHAT ENERGY ACCESS BUYS</a:t>
             </a:r>
           </a:p>
         </p:txBody>
@@ -8217,156 +9868,46 @@
                 </a:solidFill>
                 <a:latin typeface="Calibri"/>
               </a:rPr>
-              <a:t>Gas as a bridge, renewables stacked on top, firm power kept
-until storage can carry the load — in that order.</a:t>
-            </a:r>
-          </a:p>
-        </p:txBody>
-      </p:sp>
-      <p:sp>
-        <p:nvSpPr>
-          <p:cNvPr id="6" name="Rounded Rectangle 5"/>
-          <p:cNvSpPr/>
-          <p:nvPr/>
-        </p:nvSpPr>
-        <p:spPr>
-          <a:xfrm>
-            <a:off x="548640" y="2743200"/>
-            <a:ext cx="3611880" cy="3291840"/>
-          </a:xfrm>
-          <a:prstGeom prst="roundRect">
-            <a:avLst>
-              <a:gd name="adj" fmla="val 10000"/>
-            </a:avLst>
-          </a:prstGeom>
-          <a:solidFill>
-            <a:srgbClr val="1F4E79"/>
-          </a:solidFill>
-          <a:ln>
-            <a:noFill/>
-          </a:ln>
-          <a:effectLst/>
-        </p:spPr>
-        <p:style>
-          <a:lnRef idx="1">
-            <a:schemeClr val="accent1"/>
-          </a:lnRef>
-          <a:fillRef idx="3">
-            <a:schemeClr val="accent1"/>
-          </a:fillRef>
-          <a:effectRef idx="2">
-            <a:schemeClr val="accent1"/>
-          </a:effectRef>
-          <a:fontRef idx="minor">
-            <a:schemeClr val="lt1"/>
-          </a:fontRef>
-        </p:style>
-        <p:txBody>
-          <a:bodyPr rtlCol="0" anchor="ctr"/>
-          <a:lstStyle/>
-          <a:p>
-            <a:pPr algn="ctr"/>
-          </a:p>
-        </p:txBody>
-      </p:sp>
-      <p:sp>
-        <p:nvSpPr>
-          <p:cNvPr id="7" name="Oval 6"/>
-          <p:cNvSpPr/>
-          <p:nvPr/>
-        </p:nvSpPr>
-        <p:spPr>
-          <a:xfrm>
-            <a:off x="3337560" y="2894076"/>
-            <a:ext cx="640080" cy="704088"/>
-          </a:xfrm>
-          <a:prstGeom prst="ellipse">
-            <a:avLst/>
-          </a:prstGeom>
-          <a:solidFill>
-            <a:srgbClr val="FFFFFF"/>
-          </a:solidFill>
-          <a:ln>
-            <a:noFill/>
-          </a:ln>
-          <a:effectLst/>
-        </p:spPr>
-        <p:style>
-          <a:lnRef idx="1">
-            <a:schemeClr val="accent1"/>
-          </a:lnRef>
-          <a:fillRef idx="3">
-            <a:schemeClr val="accent1"/>
-          </a:fillRef>
-          <a:effectRef idx="2">
-            <a:schemeClr val="accent1"/>
-          </a:effectRef>
-          <a:fontRef idx="minor">
-            <a:schemeClr val="lt1"/>
-          </a:fontRef>
-        </p:style>
-        <p:txBody>
-          <a:bodyPr rtlCol="0" anchor="ctr"/>
-          <a:lstStyle/>
-          <a:p>
-            <a:pPr algn="ctr"/>
-          </a:p>
-        </p:txBody>
-      </p:sp>
-      <p:sp>
-        <p:nvSpPr>
-          <p:cNvPr id="8" name="Oval 7"/>
-          <p:cNvSpPr/>
-          <p:nvPr/>
-        </p:nvSpPr>
-        <p:spPr>
-          <a:xfrm>
-            <a:off x="3513582" y="3118104"/>
-            <a:ext cx="288036" cy="384048"/>
-          </a:xfrm>
-          <a:prstGeom prst="ellipse">
-            <a:avLst/>
-          </a:prstGeom>
-          <a:solidFill>
-            <a:srgbClr val="FDE8CC"/>
-          </a:solidFill>
-          <a:ln>
-            <a:noFill/>
-          </a:ln>
-          <a:effectLst/>
-        </p:spPr>
-        <p:style>
-          <a:lnRef idx="1">
-            <a:schemeClr val="accent1"/>
-          </a:lnRef>
-          <a:fillRef idx="3">
-            <a:schemeClr val="accent1"/>
-          </a:fillRef>
-          <a:effectRef idx="2">
-            <a:schemeClr val="accent1"/>
-          </a:effectRef>
-          <a:fontRef idx="minor">
-            <a:schemeClr val="lt1"/>
-          </a:fontRef>
-        </p:style>
-        <p:txBody>
-          <a:bodyPr rtlCol="0" anchor="ctr"/>
-          <a:lstStyle/>
-          <a:p>
-            <a:pPr algn="ctr"/>
-          </a:p>
-        </p:txBody>
-      </p:sp>
-      <p:sp>
-        <p:nvSpPr>
-          <p:cNvPr id="9" name="TextBox 8"/>
+              <a:t>Below ~3,000 kWh per person per year, every extra kWh
+buys life-years. Zambia sits right on the steep part of the curve.</a:t>
+            </a:r>
+          </a:p>
+        </p:txBody>
+      </p:sp>
+      <p:pic>
+        <p:nvPicPr>
+          <p:cNvPr id="6" name="Picture 5" descr="energy_life.png"/>
+          <p:cNvPicPr>
+            <a:picLocks noChangeAspect="1"/>
+          </p:cNvPicPr>
+          <p:nvPr/>
+        </p:nvPicPr>
+        <p:blipFill>
+          <a:blip r:embed="rId2"/>
+          <a:stretch>
+            <a:fillRect/>
+          </a:stretch>
+        </p:blipFill>
+        <p:spPr>
+          <a:xfrm>
+            <a:off x="548640" y="2560320"/>
+            <a:ext cx="11064240" cy="5988850"/>
+          </a:xfrm>
+          <a:prstGeom prst="rect">
+            <a:avLst/>
+          </a:prstGeom>
+        </p:spPr>
+      </p:pic>
+      <p:sp>
+        <p:nvSpPr>
+          <p:cNvPr id="7" name="TextBox 6"/>
           <p:cNvSpPr txBox="1"/>
           <p:nvPr/>
         </p:nvSpPr>
         <p:spPr>
           <a:xfrm>
-            <a:off x="868680" y="3063240"/>
-            <a:ext cx="2331720" cy="365760"/>
+            <a:off x="457200" y="6537960"/>
+            <a:ext cx="7315200" cy="274320"/>
           </a:xfrm>
           <a:prstGeom prst="rect">
             <a:avLst/>
@@ -8381,27 +9922,27 @@
           <a:p>
             <a:pPr algn="l"/>
             <a:r>
-              <a:rPr sz="1100" b="1">
-                <a:solidFill>
-                  <a:srgbClr val="FFFFFF"/>
+              <a:rPr sz="900" b="0">
+                <a:solidFill>
+                  <a:srgbClr val="9CA3AF"/>
                 </a:solidFill>
                 <a:latin typeface="Calibri"/>
               </a:rPr>
-              <a:t>NOW — BRIDGE</a:t>
-            </a:r>
-          </a:p>
-        </p:txBody>
-      </p:sp>
-      <p:sp>
-        <p:nvSpPr>
-          <p:cNvPr id="10" name="TextBox 9"/>
+              <a:t>Choolwe  •  The Case For Fossil Fuels</a:t>
+            </a:r>
+          </a:p>
+        </p:txBody>
+      </p:sp>
+      <p:sp>
+        <p:nvSpPr>
+          <p:cNvPr id="8" name="TextBox 7"/>
           <p:cNvSpPr txBox="1"/>
           <p:nvPr/>
         </p:nvSpPr>
         <p:spPr>
           <a:xfrm>
-            <a:off x="868680" y="3520440"/>
-            <a:ext cx="3063240" cy="640080"/>
+            <a:off x="10789920" y="6537960"/>
+            <a:ext cx="1097280" cy="274320"/>
           </a:xfrm>
           <a:prstGeom prst="rect">
             <a:avLst/>
@@ -8414,741 +9955,15 @@
           </a:bodyPr>
           <a:lstStyle/>
           <a:p>
-            <a:pPr algn="l"/>
-            <a:r>
-              <a:rPr sz="2000" b="1">
-                <a:solidFill>
-                  <a:srgbClr val="FFFFFF"/>
+            <a:pPr algn="r"/>
+            <a:r>
+              <a:rPr sz="900" b="0">
+                <a:solidFill>
+                  <a:srgbClr val="9CA3AF"/>
                 </a:solidFill>
                 <a:latin typeface="Calibri"/>
               </a:rPr>
-              <a:t>Natural gas</a:t>
-            </a:r>
-          </a:p>
-        </p:txBody>
-      </p:sp>
-      <p:sp>
-        <p:nvSpPr>
-          <p:cNvPr id="11" name="TextBox 10"/>
-          <p:cNvSpPr txBox="1"/>
-          <p:nvPr/>
-        </p:nvSpPr>
-        <p:spPr>
-          <a:xfrm>
-            <a:off x="868680" y="4389120"/>
-            <a:ext cx="3063240" cy="1463040"/>
-          </a:xfrm>
-          <a:prstGeom prst="rect">
-            <a:avLst/>
-          </a:prstGeom>
-          <a:noFill/>
-        </p:spPr>
-        <p:txBody>
-          <a:bodyPr wrap="square" lIns="0" rIns="0" tIns="0" bIns="0" anchor="t">
-            <a:spAutoFit/>
-          </a:bodyPr>
-          <a:lstStyle/>
-          <a:p>
-            <a:pPr algn="l"/>
-            <a:r>
-              <a:rPr sz="1200" b="0">
-                <a:solidFill>
-                  <a:srgbClr val="FFFFFF"/>
-                </a:solidFill>
-                <a:latin typeface="Calibri"/>
-              </a:rPr>
-              <a:t>Emits 50–60% less CO₂ than coal.
-Firm and dispatchable — the power that
-carried Alberta and would have spared
-Zambia.
-Africa holds ~13% of proven gas reserves.</a:t>
-            </a:r>
-          </a:p>
-        </p:txBody>
-      </p:sp>
-      <p:sp>
-        <p:nvSpPr>
-          <p:cNvPr id="12" name="Rounded Rectangle 11"/>
-          <p:cNvSpPr/>
-          <p:nvPr/>
-        </p:nvSpPr>
-        <p:spPr>
-          <a:xfrm>
-            <a:off x="4297680" y="2743200"/>
-            <a:ext cx="3611880" cy="3291840"/>
-          </a:xfrm>
-          <a:prstGeom prst="roundRect">
-            <a:avLst>
-              <a:gd name="adj" fmla="val 10000"/>
-            </a:avLst>
-          </a:prstGeom>
-          <a:solidFill>
-            <a:srgbClr val="F9FAFB"/>
-          </a:solidFill>
-          <a:ln>
-            <a:noFill/>
-          </a:ln>
-          <a:effectLst/>
-        </p:spPr>
-        <p:style>
-          <a:lnRef idx="1">
-            <a:schemeClr val="accent1"/>
-          </a:lnRef>
-          <a:fillRef idx="3">
-            <a:schemeClr val="accent1"/>
-          </a:fillRef>
-          <a:effectRef idx="2">
-            <a:schemeClr val="accent1"/>
-          </a:effectRef>
-          <a:fontRef idx="minor">
-            <a:schemeClr val="lt1"/>
-          </a:fontRef>
-        </p:style>
-        <p:txBody>
-          <a:bodyPr rtlCol="0" anchor="ctr"/>
-          <a:lstStyle/>
-          <a:p>
-            <a:pPr algn="ctr"/>
-          </a:p>
-        </p:txBody>
-      </p:sp>
-      <p:sp>
-        <p:nvSpPr>
-          <p:cNvPr id="13" name="Oval 12"/>
-          <p:cNvSpPr/>
-          <p:nvPr/>
-        </p:nvSpPr>
-        <p:spPr>
-          <a:xfrm>
-            <a:off x="7132320" y="2971800"/>
-            <a:ext cx="548640" cy="548640"/>
-          </a:xfrm>
-          <a:prstGeom prst="ellipse">
-            <a:avLst/>
-          </a:prstGeom>
-          <a:solidFill>
-            <a:srgbClr val="1F4E79"/>
-          </a:solidFill>
-          <a:ln>
-            <a:noFill/>
-          </a:ln>
-          <a:effectLst/>
-        </p:spPr>
-        <p:style>
-          <a:lnRef idx="1">
-            <a:schemeClr val="accent1"/>
-          </a:lnRef>
-          <a:fillRef idx="3">
-            <a:schemeClr val="accent1"/>
-          </a:fillRef>
-          <a:effectRef idx="2">
-            <a:schemeClr val="accent1"/>
-          </a:effectRef>
-          <a:fontRef idx="minor">
-            <a:schemeClr val="lt1"/>
-          </a:fontRef>
-        </p:style>
-        <p:txBody>
-          <a:bodyPr rtlCol="0" anchor="ctr"/>
-          <a:lstStyle/>
-          <a:p>
-            <a:pPr algn="ctr"/>
-          </a:p>
-        </p:txBody>
-      </p:sp>
-      <p:sp>
-        <p:nvSpPr>
-          <p:cNvPr id="14" name="Lightning Bolt 13"/>
-          <p:cNvSpPr/>
-          <p:nvPr/>
-        </p:nvSpPr>
-        <p:spPr>
-          <a:xfrm>
-            <a:off x="7269480" y="3040380"/>
-            <a:ext cx="274320" cy="411480"/>
-          </a:xfrm>
-          <a:prstGeom prst="lightningBolt">
-            <a:avLst/>
-          </a:prstGeom>
-          <a:solidFill>
-            <a:srgbClr val="FFFFFF"/>
-          </a:solidFill>
-          <a:ln>
-            <a:noFill/>
-          </a:ln>
-          <a:effectLst/>
-        </p:spPr>
-        <p:style>
-          <a:lnRef idx="1">
-            <a:schemeClr val="accent1"/>
-          </a:lnRef>
-          <a:fillRef idx="3">
-            <a:schemeClr val="accent1"/>
-          </a:fillRef>
-          <a:effectRef idx="2">
-            <a:schemeClr val="accent1"/>
-          </a:effectRef>
-          <a:fontRef idx="minor">
-            <a:schemeClr val="lt1"/>
-          </a:fontRef>
-        </p:style>
-        <p:txBody>
-          <a:bodyPr rtlCol="0" anchor="ctr"/>
-          <a:lstStyle/>
-          <a:p>
-            <a:pPr algn="ctr"/>
-          </a:p>
-        </p:txBody>
-      </p:sp>
-      <p:sp>
-        <p:nvSpPr>
-          <p:cNvPr id="15" name="TextBox 14"/>
-          <p:cNvSpPr txBox="1"/>
-          <p:nvPr/>
-        </p:nvSpPr>
-        <p:spPr>
-          <a:xfrm>
-            <a:off x="4617720" y="3063240"/>
-            <a:ext cx="2331720" cy="365760"/>
-          </a:xfrm>
-          <a:prstGeom prst="rect">
-            <a:avLst/>
-          </a:prstGeom>
-          <a:noFill/>
-        </p:spPr>
-        <p:txBody>
-          <a:bodyPr wrap="square" lIns="0" rIns="0" tIns="0" bIns="0" anchor="t">
-            <a:spAutoFit/>
-          </a:bodyPr>
-          <a:lstStyle/>
-          <a:p>
-            <a:pPr algn="l"/>
-            <a:r>
-              <a:rPr sz="1100" b="1">
-                <a:solidFill>
-                  <a:srgbClr val="1F4E79"/>
-                </a:solidFill>
-                <a:latin typeface="Calibri"/>
-              </a:rPr>
-              <a:t>BUILD-OUT</a:t>
-            </a:r>
-          </a:p>
-        </p:txBody>
-      </p:sp>
-      <p:sp>
-        <p:nvSpPr>
-          <p:cNvPr id="16" name="TextBox 15"/>
-          <p:cNvSpPr txBox="1"/>
-          <p:nvPr/>
-        </p:nvSpPr>
-        <p:spPr>
-          <a:xfrm>
-            <a:off x="4617720" y="3520440"/>
-            <a:ext cx="3063240" cy="640080"/>
-          </a:xfrm>
-          <a:prstGeom prst="rect">
-            <a:avLst/>
-          </a:prstGeom>
-          <a:noFill/>
-        </p:spPr>
-        <p:txBody>
-          <a:bodyPr wrap="square" lIns="0" rIns="0" tIns="0" bIns="0" anchor="t">
-            <a:spAutoFit/>
-          </a:bodyPr>
-          <a:lstStyle/>
-          <a:p>
-            <a:pPr algn="l"/>
-            <a:r>
-              <a:rPr sz="2000" b="1">
-                <a:solidFill>
-                  <a:srgbClr val="1F2937"/>
-                </a:solidFill>
-                <a:latin typeface="Calibri"/>
-              </a:rPr>
-              <a:t>Renewables, hard</a:t>
-            </a:r>
-          </a:p>
-        </p:txBody>
-      </p:sp>
-      <p:sp>
-        <p:nvSpPr>
-          <p:cNvPr id="17" name="TextBox 16"/>
-          <p:cNvSpPr txBox="1"/>
-          <p:nvPr/>
-        </p:nvSpPr>
-        <p:spPr>
-          <a:xfrm>
-            <a:off x="4617720" y="4389120"/>
-            <a:ext cx="3063240" cy="1463040"/>
-          </a:xfrm>
-          <a:prstGeom prst="rect">
-            <a:avLst/>
-          </a:prstGeom>
-          <a:noFill/>
-        </p:spPr>
-        <p:txBody>
-          <a:bodyPr wrap="square" lIns="0" rIns="0" tIns="0" bIns="0" anchor="t">
-            <a:spAutoFit/>
-          </a:bodyPr>
-          <a:lstStyle/>
-          <a:p>
-            <a:pPr algn="l"/>
-            <a:r>
-              <a:rPr sz="1200" b="0">
-                <a:solidFill>
-                  <a:srgbClr val="4B5563"/>
-                </a:solidFill>
-                <a:latin typeface="Calibri"/>
-              </a:rPr>
-              <a:t>Solar in Zambia is already the
-cheapest new capacity.
-Wind, hydro diversification,
-storage — scaled in parallel,
-not waited for.</a:t>
-            </a:r>
-          </a:p>
-        </p:txBody>
-      </p:sp>
-      <p:sp>
-        <p:nvSpPr>
-          <p:cNvPr id="18" name="Rounded Rectangle 17"/>
-          <p:cNvSpPr/>
-          <p:nvPr/>
-        </p:nvSpPr>
-        <p:spPr>
-          <a:xfrm>
-            <a:off x="8046720" y="2743200"/>
-            <a:ext cx="3611880" cy="3291840"/>
-          </a:xfrm>
-          <a:prstGeom prst="roundRect">
-            <a:avLst>
-              <a:gd name="adj" fmla="val 10000"/>
-            </a:avLst>
-          </a:prstGeom>
-          <a:solidFill>
-            <a:srgbClr val="F9FAFB"/>
-          </a:solidFill>
-          <a:ln>
-            <a:noFill/>
-          </a:ln>
-          <a:effectLst/>
-        </p:spPr>
-        <p:style>
-          <a:lnRef idx="1">
-            <a:schemeClr val="accent1"/>
-          </a:lnRef>
-          <a:fillRef idx="3">
-            <a:schemeClr val="accent1"/>
-          </a:fillRef>
-          <a:effectRef idx="2">
-            <a:schemeClr val="accent1"/>
-          </a:effectRef>
-          <a:fontRef idx="minor">
-            <a:schemeClr val="lt1"/>
-          </a:fontRef>
-        </p:style>
-        <p:txBody>
-          <a:bodyPr rtlCol="0" anchor="ctr"/>
-          <a:lstStyle/>
-          <a:p>
-            <a:pPr algn="ctr"/>
-          </a:p>
-        </p:txBody>
-      </p:sp>
-      <p:sp>
-        <p:nvSpPr>
-          <p:cNvPr id="19" name="Oval 18"/>
-          <p:cNvSpPr/>
-          <p:nvPr/>
-        </p:nvSpPr>
-        <p:spPr>
-          <a:xfrm>
-            <a:off x="10881360" y="2971800"/>
-            <a:ext cx="548640" cy="548640"/>
-          </a:xfrm>
-          <a:prstGeom prst="ellipse">
-            <a:avLst/>
-          </a:prstGeom>
-          <a:solidFill>
-            <a:srgbClr val="1F4E79"/>
-          </a:solidFill>
-          <a:ln>
-            <a:noFill/>
-          </a:ln>
-          <a:effectLst/>
-        </p:spPr>
-        <p:style>
-          <a:lnRef idx="1">
-            <a:schemeClr val="accent1"/>
-          </a:lnRef>
-          <a:fillRef idx="3">
-            <a:schemeClr val="accent1"/>
-          </a:fillRef>
-          <a:effectRef idx="2">
-            <a:schemeClr val="accent1"/>
-          </a:effectRef>
-          <a:fontRef idx="minor">
-            <a:schemeClr val="lt1"/>
-          </a:fontRef>
-        </p:style>
-        <p:txBody>
-          <a:bodyPr rtlCol="0" anchor="ctr"/>
-          <a:lstStyle/>
-          <a:p>
-            <a:pPr algn="ctr"/>
-          </a:p>
-        </p:txBody>
-      </p:sp>
-      <p:sp>
-        <p:nvSpPr>
-          <p:cNvPr id="20" name="Rectangle 19"/>
-          <p:cNvSpPr/>
-          <p:nvPr/>
-        </p:nvSpPr>
-        <p:spPr>
-          <a:xfrm>
-            <a:off x="10922508" y="3235147"/>
-            <a:ext cx="466344" cy="21945"/>
-          </a:xfrm>
-          <a:prstGeom prst="rect">
-            <a:avLst/>
-          </a:prstGeom>
-          <a:solidFill>
-            <a:srgbClr val="FFFFFF"/>
-          </a:solidFill>
-          <a:ln>
-            <a:noFill/>
-          </a:ln>
-          <a:effectLst/>
-        </p:spPr>
-        <p:style>
-          <a:lnRef idx="1">
-            <a:schemeClr val="accent1"/>
-          </a:lnRef>
-          <a:fillRef idx="3">
-            <a:schemeClr val="accent1"/>
-          </a:fillRef>
-          <a:effectRef idx="2">
-            <a:schemeClr val="accent1"/>
-          </a:effectRef>
-          <a:fontRef idx="minor">
-            <a:schemeClr val="lt1"/>
-          </a:fontRef>
-        </p:style>
-        <p:txBody>
-          <a:bodyPr rtlCol="0" anchor="ctr"/>
-          <a:lstStyle/>
-          <a:p>
-            <a:pPr algn="ctr"/>
-          </a:p>
-        </p:txBody>
-      </p:sp>
-      <p:sp>
-        <p:nvSpPr>
-          <p:cNvPr id="21" name="Rectangle 20"/>
-          <p:cNvSpPr/>
-          <p:nvPr/>
-        </p:nvSpPr>
-        <p:spPr>
-          <a:xfrm>
-            <a:off x="11144707" y="3012948"/>
-            <a:ext cx="21945" cy="466344"/>
-          </a:xfrm>
-          <a:prstGeom prst="rect">
-            <a:avLst/>
-          </a:prstGeom>
-          <a:solidFill>
-            <a:srgbClr val="FFFFFF"/>
-          </a:solidFill>
-          <a:ln>
-            <a:noFill/>
-          </a:ln>
-          <a:effectLst/>
-        </p:spPr>
-        <p:style>
-          <a:lnRef idx="1">
-            <a:schemeClr val="accent1"/>
-          </a:lnRef>
-          <a:fillRef idx="3">
-            <a:schemeClr val="accent1"/>
-          </a:fillRef>
-          <a:effectRef idx="2">
-            <a:schemeClr val="accent1"/>
-          </a:effectRef>
-          <a:fontRef idx="minor">
-            <a:schemeClr val="lt1"/>
-          </a:fontRef>
-        </p:style>
-        <p:txBody>
-          <a:bodyPr rtlCol="0" anchor="ctr"/>
-          <a:lstStyle/>
-          <a:p>
-            <a:pPr algn="ctr"/>
-          </a:p>
-        </p:txBody>
-      </p:sp>
-      <p:sp>
-        <p:nvSpPr>
-          <p:cNvPr id="22" name="TextBox 21"/>
-          <p:cNvSpPr txBox="1"/>
-          <p:nvPr/>
-        </p:nvSpPr>
-        <p:spPr>
-          <a:xfrm>
-            <a:off x="8366760" y="3063240"/>
-            <a:ext cx="2331720" cy="365760"/>
-          </a:xfrm>
-          <a:prstGeom prst="rect">
-            <a:avLst/>
-          </a:prstGeom>
-          <a:noFill/>
-        </p:spPr>
-        <p:txBody>
-          <a:bodyPr wrap="square" lIns="0" rIns="0" tIns="0" bIns="0" anchor="t">
-            <a:spAutoFit/>
-          </a:bodyPr>
-          <a:lstStyle/>
-          <a:p>
-            <a:pPr algn="l"/>
-            <a:r>
-              <a:rPr sz="1100" b="1">
-                <a:solidFill>
-                  <a:srgbClr val="1F4E79"/>
-                </a:solidFill>
-                <a:latin typeface="Calibri"/>
-              </a:rPr>
-              <a:t>THEN — RETIRE</a:t>
-            </a:r>
-          </a:p>
-        </p:txBody>
-      </p:sp>
-      <p:sp>
-        <p:nvSpPr>
-          <p:cNvPr id="23" name="TextBox 22"/>
-          <p:cNvSpPr txBox="1"/>
-          <p:nvPr/>
-        </p:nvSpPr>
-        <p:spPr>
-          <a:xfrm>
-            <a:off x="8366760" y="3520440"/>
-            <a:ext cx="3063240" cy="640080"/>
-          </a:xfrm>
-          <a:prstGeom prst="rect">
-            <a:avLst/>
-          </a:prstGeom>
-          <a:noFill/>
-        </p:spPr>
-        <p:txBody>
-          <a:bodyPr wrap="square" lIns="0" rIns="0" tIns="0" bIns="0" anchor="t">
-            <a:spAutoFit/>
-          </a:bodyPr>
-          <a:lstStyle/>
-          <a:p>
-            <a:pPr algn="l"/>
-            <a:r>
-              <a:rPr sz="2000" b="1">
-                <a:solidFill>
-                  <a:srgbClr val="1F2937"/>
-                </a:solidFill>
-                <a:latin typeface="Calibri"/>
-              </a:rPr>
-              <a:t>Phase fossil fuels down</a:t>
-            </a:r>
-          </a:p>
-        </p:txBody>
-      </p:sp>
-      <p:sp>
-        <p:nvSpPr>
-          <p:cNvPr id="24" name="TextBox 23"/>
-          <p:cNvSpPr txBox="1"/>
-          <p:nvPr/>
-        </p:nvSpPr>
-        <p:spPr>
-          <a:xfrm>
-            <a:off x="8366760" y="4389120"/>
-            <a:ext cx="3063240" cy="1463040"/>
-          </a:xfrm>
-          <a:prstGeom prst="rect">
-            <a:avLst/>
-          </a:prstGeom>
-          <a:noFill/>
-        </p:spPr>
-        <p:txBody>
-          <a:bodyPr wrap="square" lIns="0" rIns="0" tIns="0" bIns="0" anchor="t">
-            <a:spAutoFit/>
-          </a:bodyPr>
-          <a:lstStyle/>
-          <a:p>
-            <a:pPr algn="l"/>
-            <a:r>
-              <a:rPr sz="1200" b="0">
-                <a:solidFill>
-                  <a:srgbClr val="4B5563"/>
-                </a:solidFill>
-                <a:latin typeface="Calibri"/>
-              </a:rPr>
-              <a:t>When grids are firm and storage can
-carry the load, retire gas plants.
-Not before. Not as a slogan.
-As an engineering schedule.</a:t>
-            </a:r>
-          </a:p>
-        </p:txBody>
-      </p:sp>
-      <p:sp>
-        <p:nvSpPr>
-          <p:cNvPr id="25" name="Right Arrow 24"/>
-          <p:cNvSpPr/>
-          <p:nvPr/>
-        </p:nvSpPr>
-        <p:spPr>
-          <a:xfrm>
-            <a:off x="4114800" y="4160520"/>
-            <a:ext cx="274320" cy="411480"/>
-          </a:xfrm>
-          <a:prstGeom prst="rightArrow">
-            <a:avLst/>
-          </a:prstGeom>
-          <a:solidFill>
-            <a:srgbClr val="9CA3AF"/>
-          </a:solidFill>
-          <a:ln>
-            <a:noFill/>
-          </a:ln>
-          <a:effectLst/>
-        </p:spPr>
-        <p:style>
-          <a:lnRef idx="1">
-            <a:schemeClr val="accent1"/>
-          </a:lnRef>
-          <a:fillRef idx="3">
-            <a:schemeClr val="accent1"/>
-          </a:fillRef>
-          <a:effectRef idx="2">
-            <a:schemeClr val="accent1"/>
-          </a:effectRef>
-          <a:fontRef idx="minor">
-            <a:schemeClr val="lt1"/>
-          </a:fontRef>
-        </p:style>
-        <p:txBody>
-          <a:bodyPr rtlCol="0" anchor="ctr"/>
-          <a:lstStyle/>
-          <a:p>
-            <a:pPr algn="ctr"/>
-          </a:p>
-        </p:txBody>
-      </p:sp>
-      <p:sp>
-        <p:nvSpPr>
-          <p:cNvPr id="26" name="Right Arrow 25"/>
-          <p:cNvSpPr/>
-          <p:nvPr/>
-        </p:nvSpPr>
-        <p:spPr>
-          <a:xfrm>
-            <a:off x="7863840" y="4160520"/>
-            <a:ext cx="274320" cy="411480"/>
-          </a:xfrm>
-          <a:prstGeom prst="rightArrow">
-            <a:avLst/>
-          </a:prstGeom>
-          <a:solidFill>
-            <a:srgbClr val="9CA3AF"/>
-          </a:solidFill>
-          <a:ln>
-            <a:noFill/>
-          </a:ln>
-          <a:effectLst/>
-        </p:spPr>
-        <p:style>
-          <a:lnRef idx="1">
-            <a:schemeClr val="accent1"/>
-          </a:lnRef>
-          <a:fillRef idx="3">
-            <a:schemeClr val="accent1"/>
-          </a:fillRef>
-          <a:effectRef idx="2">
-            <a:schemeClr val="accent1"/>
-          </a:effectRef>
-          <a:fontRef idx="minor">
-            <a:schemeClr val="lt1"/>
-          </a:fontRef>
-        </p:style>
-        <p:txBody>
-          <a:bodyPr rtlCol="0" anchor="ctr"/>
-          <a:lstStyle/>
-          <a:p>
-            <a:pPr algn="ctr"/>
-          </a:p>
-        </p:txBody>
-      </p:sp>
-      <p:sp>
-        <p:nvSpPr>
-          <p:cNvPr id="27" name="TextBox 26"/>
-          <p:cNvSpPr txBox="1"/>
-          <p:nvPr/>
-        </p:nvSpPr>
-        <p:spPr>
-          <a:xfrm>
-            <a:off x="457200" y="6537960"/>
-            <a:ext cx="7315200" cy="274320"/>
-          </a:xfrm>
-          <a:prstGeom prst="rect">
-            <a:avLst/>
-          </a:prstGeom>
-          <a:noFill/>
-        </p:spPr>
-        <p:txBody>
-          <a:bodyPr wrap="square" lIns="0" rIns="0" tIns="0" bIns="0" anchor="t">
-            <a:spAutoFit/>
-          </a:bodyPr>
-          <a:lstStyle/>
-          <a:p>
-            <a:pPr algn="l"/>
-            <a:r>
-              <a:rPr sz="900" b="0">
-                <a:solidFill>
-                  <a:srgbClr val="9CA3AF"/>
-                </a:solidFill>
-                <a:latin typeface="Calibri"/>
-              </a:rPr>
-              <a:t>Choolwe  •  The Case For Fossil Fuels</a:t>
-            </a:r>
-          </a:p>
-        </p:txBody>
-      </p:sp>
-      <p:sp>
-        <p:nvSpPr>
-          <p:cNvPr id="28" name="TextBox 27"/>
-          <p:cNvSpPr txBox="1"/>
-          <p:nvPr/>
-        </p:nvSpPr>
-        <p:spPr>
-          <a:xfrm>
-            <a:off x="10789920" y="6537960"/>
-            <a:ext cx="1097280" cy="274320"/>
-          </a:xfrm>
-          <a:prstGeom prst="rect">
-            <a:avLst/>
-          </a:prstGeom>
-          <a:noFill/>
-        </p:spPr>
-        <p:txBody>
-          <a:bodyPr wrap="square" lIns="0" rIns="0" tIns="0" bIns="0" anchor="t">
-            <a:spAutoFit/>
-          </a:bodyPr>
-          <a:lstStyle/>
-          <a:p>
-            <a:pPr algn="r"/>
-            <a:r>
-              <a:rPr sz="900" b="0">
-                <a:solidFill>
-                  <a:srgbClr val="9CA3AF"/>
-                </a:solidFill>
-                <a:latin typeface="Calibri"/>
-              </a:rPr>
-              <a:t>8 / 9</a:t>
+              <a:t>8 / 10</a:t>
             </a:r>
           </a:p>
         </p:txBody>
@@ -9289,7 +10104,7 @@
                 </a:solidFill>
                 <a:latin typeface="Calibri"/>
               </a:rPr>
-              <a:t>APPENDIX  •  SOURCES</a:t>
+              <a:t>RESOLUTION  •  THE MANAGED TRANSITION</a:t>
             </a:r>
           </a:p>
         </p:txBody>
@@ -9303,7 +10118,7 @@
         <p:spPr>
           <a:xfrm>
             <a:off x="548640" y="1005840"/>
-            <a:ext cx="10972800" cy="731520"/>
+            <a:ext cx="11064240" cy="1280160"/>
           </a:xfrm>
           <a:prstGeom prst="rect">
             <a:avLst/>
@@ -9324,62 +10139,30 @@
                 </a:solidFill>
                 <a:latin typeface="Calibri"/>
               </a:rPr>
-              <a:t>Every statistic on every slide, with a citation.</a:t>
-            </a:r>
-          </a:p>
-        </p:txBody>
-      </p:sp>
-      <p:sp>
-        <p:nvSpPr>
-          <p:cNvPr id="6" name="TextBox 5"/>
-          <p:cNvSpPr txBox="1"/>
-          <p:nvPr/>
-        </p:nvSpPr>
-        <p:spPr>
-          <a:xfrm>
-            <a:off x="548640" y="1554480"/>
-            <a:ext cx="10972800" cy="365760"/>
-          </a:xfrm>
-          <a:prstGeom prst="rect">
-            <a:avLst/>
-          </a:prstGeom>
-          <a:noFill/>
-        </p:spPr>
-        <p:txBody>
-          <a:bodyPr wrap="square" lIns="0" rIns="0" tIns="0" bIns="0" anchor="t">
-            <a:spAutoFit/>
-          </a:bodyPr>
-          <a:lstStyle/>
-          <a:p>
-            <a:pPr algn="l"/>
-            <a:r>
-              <a:rPr sz="1200" b="0">
-                <a:solidFill>
-                  <a:srgbClr val="4B5563"/>
-                </a:solidFill>
-                <a:latin typeface="Calibri"/>
-              </a:rPr>
-              <a:t>Full notes preserved in the repo at  research/notes.md.</a:t>
-            </a:r>
-          </a:p>
-        </p:txBody>
-      </p:sp>
-      <p:sp>
-        <p:nvSpPr>
-          <p:cNvPr id="7" name="Oval 6"/>
+              <a:t>Gas as a bridge, renewables stacked on top, firm power kept
+until storage can carry the load — in that order.</a:t>
+            </a:r>
+          </a:p>
+        </p:txBody>
+      </p:sp>
+      <p:sp>
+        <p:nvSpPr>
+          <p:cNvPr id="6" name="Rounded Rectangle 5"/>
           <p:cNvSpPr/>
           <p:nvPr/>
         </p:nvSpPr>
         <p:spPr>
           <a:xfrm>
-            <a:off x="594360" y="2286000"/>
-            <a:ext cx="91440" cy="91440"/>
-          </a:xfrm>
-          <a:prstGeom prst="ellipse">
-            <a:avLst/>
+            <a:off x="548640" y="2743200"/>
+            <a:ext cx="3611880" cy="3291840"/>
+          </a:xfrm>
+          <a:prstGeom prst="roundRect">
+            <a:avLst>
+              <a:gd name="adj" fmla="val 10000"/>
+            </a:avLst>
           </a:prstGeom>
           <a:solidFill>
-            <a:srgbClr val="D97706"/>
+            <a:srgbClr val="1F4E79"/>
           </a:solidFill>
           <a:ln>
             <a:noFill/>
@@ -9410,90 +10193,20 @@
       </p:sp>
       <p:sp>
         <p:nvSpPr>
-          <p:cNvPr id="8" name="TextBox 7"/>
-          <p:cNvSpPr txBox="1"/>
-          <p:nvPr/>
-        </p:nvSpPr>
-        <p:spPr>
-          <a:xfrm>
-            <a:off x="777240" y="2194560"/>
-            <a:ext cx="5257800" cy="228600"/>
-          </a:xfrm>
-          <a:prstGeom prst="rect">
-            <a:avLst/>
-          </a:prstGeom>
-          <a:noFill/>
-        </p:spPr>
-        <p:txBody>
-          <a:bodyPr wrap="square" lIns="0" rIns="0" tIns="0" bIns="0" anchor="t">
-            <a:spAutoFit/>
-          </a:bodyPr>
-          <a:lstStyle/>
-          <a:p>
-            <a:pPr algn="l"/>
-            <a:r>
-              <a:rPr sz="1100" b="1">
-                <a:solidFill>
-                  <a:srgbClr val="1F2937"/>
-                </a:solidFill>
-                <a:latin typeface="Calibri"/>
-              </a:rPr>
-              <a:t>Africa electricity access (~600M without)</a:t>
-            </a:r>
-          </a:p>
-        </p:txBody>
-      </p:sp>
-      <p:sp>
-        <p:nvSpPr>
-          <p:cNvPr id="9" name="TextBox 8"/>
-          <p:cNvSpPr txBox="1"/>
-          <p:nvPr/>
-        </p:nvSpPr>
-        <p:spPr>
-          <a:xfrm>
-            <a:off x="777240" y="2395728"/>
-            <a:ext cx="5257800" cy="228600"/>
-          </a:xfrm>
-          <a:prstGeom prst="rect">
-            <a:avLst/>
-          </a:prstGeom>
-          <a:noFill/>
-        </p:spPr>
-        <p:txBody>
-          <a:bodyPr wrap="square" lIns="0" rIns="0" tIns="0" bIns="0" anchor="t">
-            <a:spAutoFit/>
-          </a:bodyPr>
-          <a:lstStyle/>
-          <a:p>
-            <a:pPr algn="l"/>
-            <a:r>
-              <a:rPr sz="1000" b="0">
-                <a:solidFill>
-                  <a:srgbClr val="4B5563"/>
-                </a:solidFill>
-                <a:latin typeface="Calibri"/>
-              </a:rPr>
-              <a:t>IEA, Financing Electricity Access in Africa (2025)</a:t>
-            </a:r>
-          </a:p>
-        </p:txBody>
-      </p:sp>
-      <p:sp>
-        <p:nvSpPr>
-          <p:cNvPr id="10" name="Oval 9"/>
+          <p:cNvPr id="7" name="Oval 6"/>
           <p:cNvSpPr/>
           <p:nvPr/>
         </p:nvSpPr>
         <p:spPr>
           <a:xfrm>
-            <a:off x="6400800" y="2286000"/>
-            <a:ext cx="91440" cy="91440"/>
+            <a:off x="3337560" y="2894076"/>
+            <a:ext cx="640080" cy="704088"/>
           </a:xfrm>
           <a:prstGeom prst="ellipse">
             <a:avLst/>
           </a:prstGeom>
           <a:solidFill>
-            <a:srgbClr val="D97706"/>
+            <a:srgbClr val="FFFFFF"/>
           </a:solidFill>
           <a:ln>
             <a:noFill/>
@@ -9524,90 +10237,20 @@
       </p:sp>
       <p:sp>
         <p:nvSpPr>
-          <p:cNvPr id="11" name="TextBox 10"/>
-          <p:cNvSpPr txBox="1"/>
-          <p:nvPr/>
-        </p:nvSpPr>
-        <p:spPr>
-          <a:xfrm>
-            <a:off x="6583680" y="2194560"/>
-            <a:ext cx="5257800" cy="228600"/>
-          </a:xfrm>
-          <a:prstGeom prst="rect">
-            <a:avLst/>
-          </a:prstGeom>
-          <a:noFill/>
-        </p:spPr>
-        <p:txBody>
-          <a:bodyPr wrap="square" lIns="0" rIns="0" tIns="0" bIns="0" anchor="t">
-            <a:spAutoFit/>
-          </a:bodyPr>
-          <a:lstStyle/>
-          <a:p>
-            <a:pPr algn="l"/>
-            <a:r>
-              <a:rPr sz="1100" b="1">
-                <a:solidFill>
-                  <a:srgbClr val="1F2937"/>
-                </a:solidFill>
-                <a:latin typeface="Calibri"/>
-              </a:rPr>
-              <a:t>Africa cumulative CO₂ emissions (&lt;3%; sub-Saharan ~0.55%)</a:t>
-            </a:r>
-          </a:p>
-        </p:txBody>
-      </p:sp>
-      <p:sp>
-        <p:nvSpPr>
-          <p:cNvPr id="12" name="TextBox 11"/>
-          <p:cNvSpPr txBox="1"/>
-          <p:nvPr/>
-        </p:nvSpPr>
-        <p:spPr>
-          <a:xfrm>
-            <a:off x="6583680" y="2395728"/>
-            <a:ext cx="5257800" cy="228600"/>
-          </a:xfrm>
-          <a:prstGeom prst="rect">
-            <a:avLst/>
-          </a:prstGeom>
-          <a:noFill/>
-        </p:spPr>
-        <p:txBody>
-          <a:bodyPr wrap="square" lIns="0" rIns="0" tIns="0" bIns="0" anchor="t">
-            <a:spAutoFit/>
-          </a:bodyPr>
-          <a:lstStyle/>
-          <a:p>
-            <a:pPr algn="l"/>
-            <a:r>
-              <a:rPr sz="1000" b="0">
-                <a:solidFill>
-                  <a:srgbClr val="4B5563"/>
-                </a:solidFill>
-                <a:latin typeface="Calibri"/>
-              </a:rPr>
-              <a:t>Energy for Growth Hub (citing Our World in Data)</a:t>
-            </a:r>
-          </a:p>
-        </p:txBody>
-      </p:sp>
-      <p:sp>
-        <p:nvSpPr>
-          <p:cNvPr id="13" name="Oval 12"/>
+          <p:cNvPr id="8" name="Oval 7"/>
           <p:cNvSpPr/>
           <p:nvPr/>
         </p:nvSpPr>
         <p:spPr>
           <a:xfrm>
-            <a:off x="594360" y="2834640"/>
-            <a:ext cx="91440" cy="91440"/>
+            <a:off x="3513582" y="3118104"/>
+            <a:ext cx="288036" cy="384048"/>
           </a:xfrm>
           <a:prstGeom prst="ellipse">
             <a:avLst/>
           </a:prstGeom>
           <a:solidFill>
-            <a:srgbClr val="D97706"/>
+            <a:srgbClr val="FDE8CC"/>
           </a:solidFill>
           <a:ln>
             <a:noFill/>
@@ -9638,14 +10281,14 @@
       </p:sp>
       <p:sp>
         <p:nvSpPr>
-          <p:cNvPr id="14" name="TextBox 13"/>
+          <p:cNvPr id="9" name="TextBox 8"/>
           <p:cNvSpPr txBox="1"/>
           <p:nvPr/>
         </p:nvSpPr>
         <p:spPr>
           <a:xfrm>
-            <a:off x="777240" y="2743200"/>
-            <a:ext cx="5257800" cy="228600"/>
+            <a:off x="868680" y="3063240"/>
+            <a:ext cx="2331720" cy="365760"/>
           </a:xfrm>
           <a:prstGeom prst="rect">
             <a:avLst/>
@@ -9662,25 +10305,25 @@
             <a:r>
               <a:rPr sz="1100" b="1">
                 <a:solidFill>
-                  <a:srgbClr val="1F2937"/>
+                  <a:srgbClr val="FFFFFF"/>
                 </a:solidFill>
                 <a:latin typeface="Calibri"/>
               </a:rPr>
-              <a:t>Africa population share (~17% global)</a:t>
-            </a:r>
-          </a:p>
-        </p:txBody>
-      </p:sp>
-      <p:sp>
-        <p:nvSpPr>
-          <p:cNvPr id="15" name="TextBox 14"/>
+              <a:t>NOW — BRIDGE</a:t>
+            </a:r>
+          </a:p>
+        </p:txBody>
+      </p:sp>
+      <p:sp>
+        <p:nvSpPr>
+          <p:cNvPr id="10" name="TextBox 9"/>
           <p:cNvSpPr txBox="1"/>
           <p:nvPr/>
         </p:nvSpPr>
         <p:spPr>
           <a:xfrm>
-            <a:off x="777240" y="2944368"/>
-            <a:ext cx="5257800" cy="228600"/>
+            <a:off x="868680" y="3520440"/>
+            <a:ext cx="3063240" cy="640080"/>
           </a:xfrm>
           <a:prstGeom prst="rect">
             <a:avLst/>
@@ -9695,33 +10338,74 @@
           <a:p>
             <a:pPr algn="l"/>
             <a:r>
-              <a:rPr sz="1000" b="0">
-                <a:solidFill>
-                  <a:srgbClr val="4B5563"/>
+              <a:rPr sz="2000" b="1">
+                <a:solidFill>
+                  <a:srgbClr val="FFFFFF"/>
                 </a:solidFill>
                 <a:latin typeface="Calibri"/>
               </a:rPr>
-              <a:t>UN World Population Prospects</a:t>
-            </a:r>
-          </a:p>
-        </p:txBody>
-      </p:sp>
-      <p:sp>
-        <p:nvSpPr>
-          <p:cNvPr id="16" name="Oval 15"/>
+              <a:t>Natural gas</a:t>
+            </a:r>
+          </a:p>
+        </p:txBody>
+      </p:sp>
+      <p:sp>
+        <p:nvSpPr>
+          <p:cNvPr id="11" name="TextBox 10"/>
+          <p:cNvSpPr txBox="1"/>
+          <p:nvPr/>
+        </p:nvSpPr>
+        <p:spPr>
+          <a:xfrm>
+            <a:off x="868680" y="4389120"/>
+            <a:ext cx="3063240" cy="1463040"/>
+          </a:xfrm>
+          <a:prstGeom prst="rect">
+            <a:avLst/>
+          </a:prstGeom>
+          <a:noFill/>
+        </p:spPr>
+        <p:txBody>
+          <a:bodyPr wrap="square" lIns="0" rIns="0" tIns="0" bIns="0" anchor="t">
+            <a:spAutoFit/>
+          </a:bodyPr>
+          <a:lstStyle/>
+          <a:p>
+            <a:pPr algn="l"/>
+            <a:r>
+              <a:rPr sz="1200" b="0">
+                <a:solidFill>
+                  <a:srgbClr val="FFFFFF"/>
+                </a:solidFill>
+                <a:latin typeface="Calibri"/>
+              </a:rPr>
+              <a:t>Emits 50–60% less CO₂ than coal.
+Firm and dispatchable — the power that
+carried Alberta and would have spared
+Zambia.
+Africa holds ~13% of proven gas reserves.</a:t>
+            </a:r>
+          </a:p>
+        </p:txBody>
+      </p:sp>
+      <p:sp>
+        <p:nvSpPr>
+          <p:cNvPr id="12" name="Rounded Rectangle 11"/>
           <p:cNvSpPr/>
           <p:nvPr/>
         </p:nvSpPr>
         <p:spPr>
           <a:xfrm>
-            <a:off x="6400800" y="2834640"/>
-            <a:ext cx="91440" cy="91440"/>
-          </a:xfrm>
-          <a:prstGeom prst="ellipse">
-            <a:avLst/>
+            <a:off x="4297680" y="2743200"/>
+            <a:ext cx="3611880" cy="3291840"/>
+          </a:xfrm>
+          <a:prstGeom prst="roundRect">
+            <a:avLst>
+              <a:gd name="adj" fmla="val 10000"/>
+            </a:avLst>
           </a:prstGeom>
           <a:solidFill>
-            <a:srgbClr val="D97706"/>
+            <a:srgbClr val="F9FAFB"/>
           </a:solidFill>
           <a:ln>
             <a:noFill/>
@@ -9752,90 +10436,20 @@
       </p:sp>
       <p:sp>
         <p:nvSpPr>
-          <p:cNvPr id="17" name="TextBox 16"/>
-          <p:cNvSpPr txBox="1"/>
-          <p:nvPr/>
-        </p:nvSpPr>
-        <p:spPr>
-          <a:xfrm>
-            <a:off x="6583680" y="2743200"/>
-            <a:ext cx="5257800" cy="228600"/>
-          </a:xfrm>
-          <a:prstGeom prst="rect">
-            <a:avLst/>
-          </a:prstGeom>
-          <a:noFill/>
-        </p:spPr>
-        <p:txBody>
-          <a:bodyPr wrap="square" lIns="0" rIns="0" tIns="0" bIns="0" anchor="t">
-            <a:spAutoFit/>
-          </a:bodyPr>
-          <a:lstStyle/>
-          <a:p>
-            <a:pPr algn="l"/>
-            <a:r>
-              <a:rPr sz="1100" b="1">
-                <a:solidFill>
-                  <a:srgbClr val="1F2937"/>
-                </a:solidFill>
-                <a:latin typeface="Calibri"/>
-              </a:rPr>
-              <a:t>Zambia capacity mix (85% hydropower; ~3,986 MW)</a:t>
-            </a:r>
-          </a:p>
-        </p:txBody>
-      </p:sp>
-      <p:sp>
-        <p:nvSpPr>
-          <p:cNvPr id="18" name="TextBox 17"/>
-          <p:cNvSpPr txBox="1"/>
-          <p:nvPr/>
-        </p:nvSpPr>
-        <p:spPr>
-          <a:xfrm>
-            <a:off x="6583680" y="2944368"/>
-            <a:ext cx="5257800" cy="228600"/>
-          </a:xfrm>
-          <a:prstGeom prst="rect">
-            <a:avLst/>
-          </a:prstGeom>
-          <a:noFill/>
-        </p:spPr>
-        <p:txBody>
-          <a:bodyPr wrap="square" lIns="0" rIns="0" tIns="0" bIns="0" anchor="t">
-            <a:spAutoFit/>
-          </a:bodyPr>
-          <a:lstStyle/>
-          <a:p>
-            <a:pPr algn="l"/>
-            <a:r>
-              <a:rPr sz="1000" b="0">
-                <a:solidFill>
-                  <a:srgbClr val="4B5563"/>
-                </a:solidFill>
-                <a:latin typeface="Calibri"/>
-              </a:rPr>
-              <a:t>Global Legal Insights, Energy Laws and Regulations 2025: Zambia</a:t>
-            </a:r>
-          </a:p>
-        </p:txBody>
-      </p:sp>
-      <p:sp>
-        <p:nvSpPr>
-          <p:cNvPr id="19" name="Oval 18"/>
+          <p:cNvPr id="13" name="Oval 12"/>
           <p:cNvSpPr/>
           <p:nvPr/>
         </p:nvSpPr>
         <p:spPr>
           <a:xfrm>
-            <a:off x="594360" y="3383280"/>
-            <a:ext cx="91440" cy="91440"/>
+            <a:off x="7132320" y="2971800"/>
+            <a:ext cx="548640" cy="548640"/>
           </a:xfrm>
           <a:prstGeom prst="ellipse">
             <a:avLst/>
           </a:prstGeom>
           <a:solidFill>
-            <a:srgbClr val="D97706"/>
+            <a:srgbClr val="1F4E79"/>
           </a:solidFill>
           <a:ln>
             <a:noFill/>
@@ -9866,90 +10480,20 @@
       </p:sp>
       <p:sp>
         <p:nvSpPr>
-          <p:cNvPr id="20" name="TextBox 19"/>
-          <p:cNvSpPr txBox="1"/>
-          <p:nvPr/>
-        </p:nvSpPr>
-        <p:spPr>
-          <a:xfrm>
-            <a:off x="777240" y="3291840"/>
-            <a:ext cx="5257800" cy="228600"/>
-          </a:xfrm>
-          <a:prstGeom prst="rect">
-            <a:avLst/>
-          </a:prstGeom>
-          <a:noFill/>
-        </p:spPr>
-        <p:txBody>
-          <a:bodyPr wrap="square" lIns="0" rIns="0" tIns="0" bIns="0" anchor="t">
-            <a:spAutoFit/>
-          </a:bodyPr>
-          <a:lstStyle/>
-          <a:p>
-            <a:pPr algn="l"/>
-            <a:r>
-              <a:rPr sz="1100" b="1">
-                <a:solidFill>
-                  <a:srgbClr val="1F2937"/>
-                </a:solidFill>
-                <a:latin typeface="Calibri"/>
-              </a:rPr>
-              <a:t>Zambia 2024 load shedding (up to 21 hrs/day)</a:t>
-            </a:r>
-          </a:p>
-        </p:txBody>
-      </p:sp>
-      <p:sp>
-        <p:nvSpPr>
-          <p:cNvPr id="21" name="TextBox 20"/>
-          <p:cNvSpPr txBox="1"/>
-          <p:nvPr/>
-        </p:nvSpPr>
-        <p:spPr>
-          <a:xfrm>
-            <a:off x="777240" y="3493008"/>
-            <a:ext cx="5257800" cy="228600"/>
-          </a:xfrm>
-          <a:prstGeom prst="rect">
-            <a:avLst/>
-          </a:prstGeom>
-          <a:noFill/>
-        </p:spPr>
-        <p:txBody>
-          <a:bodyPr wrap="square" lIns="0" rIns="0" tIns="0" bIns="0" anchor="t">
-            <a:spAutoFit/>
-          </a:bodyPr>
-          <a:lstStyle/>
-          <a:p>
-            <a:pPr algn="l"/>
-            <a:r>
-              <a:rPr sz="1000" b="0">
-                <a:solidFill>
-                  <a:srgbClr val="4B5563"/>
-                </a:solidFill>
-                <a:latin typeface="Calibri"/>
-              </a:rPr>
-              <a:t>Pulitzer Center; Afrobarometer AD1178 (2025)</a:t>
-            </a:r>
-          </a:p>
-        </p:txBody>
-      </p:sp>
-      <p:sp>
-        <p:nvSpPr>
-          <p:cNvPr id="22" name="Oval 21"/>
+          <p:cNvPr id="14" name="Lightning Bolt 13"/>
           <p:cNvSpPr/>
           <p:nvPr/>
         </p:nvSpPr>
         <p:spPr>
           <a:xfrm>
-            <a:off x="6400800" y="3383280"/>
-            <a:ext cx="91440" cy="91440"/>
-          </a:xfrm>
-          <a:prstGeom prst="ellipse">
+            <a:off x="7269480" y="3040380"/>
+            <a:ext cx="274320" cy="411480"/>
+          </a:xfrm>
+          <a:prstGeom prst="lightningBolt">
             <a:avLst/>
           </a:prstGeom>
           <a:solidFill>
-            <a:srgbClr val="D97706"/>
+            <a:srgbClr val="FFFFFF"/>
           </a:solidFill>
           <a:ln>
             <a:noFill/>
@@ -9980,14 +10524,14 @@
       </p:sp>
       <p:sp>
         <p:nvSpPr>
-          <p:cNvPr id="23" name="TextBox 22"/>
+          <p:cNvPr id="15" name="TextBox 14"/>
           <p:cNvSpPr txBox="1"/>
           <p:nvPr/>
         </p:nvSpPr>
         <p:spPr>
           <a:xfrm>
-            <a:off x="6583680" y="3291840"/>
-            <a:ext cx="5257800" cy="228600"/>
+            <a:off x="4617720" y="3063240"/>
+            <a:ext cx="2331720" cy="365760"/>
           </a:xfrm>
           <a:prstGeom prst="rect">
             <a:avLst/>
@@ -10004,25 +10548,25 @@
             <a:r>
               <a:rPr sz="1100" b="1">
                 <a:solidFill>
-                  <a:srgbClr val="1F2937"/>
+                  <a:srgbClr val="1F4E79"/>
                 </a:solidFill>
                 <a:latin typeface="Calibri"/>
               </a:rPr>
-              <a:t>Cold kills ~9× more than heat (~4.6M vs ~489k deaths/yr)</a:t>
-            </a:r>
-          </a:p>
-        </p:txBody>
-      </p:sp>
-      <p:sp>
-        <p:nvSpPr>
-          <p:cNvPr id="24" name="TextBox 23"/>
+              <a:t>BUILD-OUT</a:t>
+            </a:r>
+          </a:p>
+        </p:txBody>
+      </p:sp>
+      <p:sp>
+        <p:nvSpPr>
+          <p:cNvPr id="16" name="TextBox 15"/>
           <p:cNvSpPr txBox="1"/>
           <p:nvPr/>
         </p:nvSpPr>
         <p:spPr>
           <a:xfrm>
-            <a:off x="6583680" y="3493008"/>
-            <a:ext cx="5257800" cy="228600"/>
+            <a:off x="4617720" y="3520440"/>
+            <a:ext cx="3063240" cy="640080"/>
           </a:xfrm>
           <a:prstGeom prst="rect">
             <a:avLst/>
@@ -10037,33 +10581,74 @@
           <a:p>
             <a:pPr algn="l"/>
             <a:r>
-              <a:rPr sz="1000" b="0">
-                <a:solidFill>
-                  <a:srgbClr val="4B5563"/>
+              <a:rPr sz="2000" b="1">
+                <a:solidFill>
+                  <a:srgbClr val="1F2937"/>
                 </a:solidFill>
                 <a:latin typeface="Calibri"/>
               </a:rPr>
-              <a:t>The Lancet Planetary Health (Gasparrini et al.)</a:t>
-            </a:r>
-          </a:p>
-        </p:txBody>
-      </p:sp>
-      <p:sp>
-        <p:nvSpPr>
-          <p:cNvPr id="25" name="Oval 24"/>
+              <a:t>Renewables, hard</a:t>
+            </a:r>
+          </a:p>
+        </p:txBody>
+      </p:sp>
+      <p:sp>
+        <p:nvSpPr>
+          <p:cNvPr id="17" name="TextBox 16"/>
+          <p:cNvSpPr txBox="1"/>
+          <p:nvPr/>
+        </p:nvSpPr>
+        <p:spPr>
+          <a:xfrm>
+            <a:off x="4617720" y="4389120"/>
+            <a:ext cx="3063240" cy="1463040"/>
+          </a:xfrm>
+          <a:prstGeom prst="rect">
+            <a:avLst/>
+          </a:prstGeom>
+          <a:noFill/>
+        </p:spPr>
+        <p:txBody>
+          <a:bodyPr wrap="square" lIns="0" rIns="0" tIns="0" bIns="0" anchor="t">
+            <a:spAutoFit/>
+          </a:bodyPr>
+          <a:lstStyle/>
+          <a:p>
+            <a:pPr algn="l"/>
+            <a:r>
+              <a:rPr sz="1200" b="0">
+                <a:solidFill>
+                  <a:srgbClr val="4B5563"/>
+                </a:solidFill>
+                <a:latin typeface="Calibri"/>
+              </a:rPr>
+              <a:t>Solar in Zambia is already the
+cheapest new capacity.
+Wind, hydro diversification,
+storage — scaled in parallel,
+not waited for.</a:t>
+            </a:r>
+          </a:p>
+        </p:txBody>
+      </p:sp>
+      <p:sp>
+        <p:nvSpPr>
+          <p:cNvPr id="18" name="Rounded Rectangle 17"/>
           <p:cNvSpPr/>
           <p:nvPr/>
         </p:nvSpPr>
         <p:spPr>
           <a:xfrm>
-            <a:off x="594360" y="3931920"/>
-            <a:ext cx="91440" cy="91440"/>
-          </a:xfrm>
-          <a:prstGeom prst="ellipse">
-            <a:avLst/>
+            <a:off x="8046720" y="2743200"/>
+            <a:ext cx="3611880" cy="3291840"/>
+          </a:xfrm>
+          <a:prstGeom prst="roundRect">
+            <a:avLst>
+              <a:gd name="adj" fmla="val 10000"/>
+            </a:avLst>
           </a:prstGeom>
           <a:solidFill>
-            <a:srgbClr val="D97706"/>
+            <a:srgbClr val="F9FAFB"/>
           </a:solidFill>
           <a:ln>
             <a:noFill/>
@@ -10094,90 +10679,20 @@
       </p:sp>
       <p:sp>
         <p:nvSpPr>
-          <p:cNvPr id="26" name="TextBox 25"/>
-          <p:cNvSpPr txBox="1"/>
-          <p:nvPr/>
-        </p:nvSpPr>
-        <p:spPr>
-          <a:xfrm>
-            <a:off x="777240" y="3840480"/>
-            <a:ext cx="5257800" cy="228600"/>
-          </a:xfrm>
-          <a:prstGeom prst="rect">
-            <a:avLst/>
-          </a:prstGeom>
-          <a:noFill/>
-        </p:spPr>
-        <p:txBody>
-          <a:bodyPr wrap="square" lIns="0" rIns="0" tIns="0" bIns="0" anchor="t">
-            <a:spAutoFit/>
-          </a:bodyPr>
-          <a:lstStyle/>
-          <a:p>
-            <a:pPr algn="l"/>
-            <a:r>
-              <a:rPr sz="1100" b="1">
-                <a:solidFill>
-                  <a:srgbClr val="1F2937"/>
-                </a:solidFill>
-                <a:latin typeface="Calibri"/>
-              </a:rPr>
-              <a:t>Canadian homes heated by gas (~half; 72% AB, 62% ON)</a:t>
-            </a:r>
-          </a:p>
-        </p:txBody>
-      </p:sp>
-      <p:sp>
-        <p:nvSpPr>
-          <p:cNvPr id="27" name="TextBox 26"/>
-          <p:cNvSpPr txBox="1"/>
-          <p:nvPr/>
-        </p:nvSpPr>
-        <p:spPr>
-          <a:xfrm>
-            <a:off x="777240" y="4041648"/>
-            <a:ext cx="5257800" cy="228600"/>
-          </a:xfrm>
-          <a:prstGeom prst="rect">
-            <a:avLst/>
-          </a:prstGeom>
-          <a:noFill/>
-        </p:spPr>
-        <p:txBody>
-          <a:bodyPr wrap="square" lIns="0" rIns="0" tIns="0" bIns="0" anchor="t">
-            <a:spAutoFit/>
-          </a:bodyPr>
-          <a:lstStyle/>
-          <a:p>
-            <a:pPr algn="l"/>
-            <a:r>
-              <a:rPr sz="1000" b="0">
-                <a:solidFill>
-                  <a:srgbClr val="4B5563"/>
-                </a:solidFill>
-                <a:latin typeface="Calibri"/>
-              </a:rPr>
-              <a:t>Statistics Canada — How Canadians heat their home</a:t>
-            </a:r>
-          </a:p>
-        </p:txBody>
-      </p:sp>
-      <p:sp>
-        <p:nvSpPr>
-          <p:cNvPr id="28" name="Oval 27"/>
+          <p:cNvPr id="19" name="Oval 18"/>
           <p:cNvSpPr/>
           <p:nvPr/>
         </p:nvSpPr>
         <p:spPr>
           <a:xfrm>
-            <a:off x="6400800" y="3931920"/>
-            <a:ext cx="91440" cy="91440"/>
+            <a:off x="10881360" y="2971800"/>
+            <a:ext cx="548640" cy="548640"/>
           </a:xfrm>
           <a:prstGeom prst="ellipse">
             <a:avLst/>
           </a:prstGeom>
           <a:solidFill>
-            <a:srgbClr val="D97706"/>
+            <a:srgbClr val="1F4E79"/>
           </a:solidFill>
           <a:ln>
             <a:noFill/>
@@ -10208,90 +10723,20 @@
       </p:sp>
       <p:sp>
         <p:nvSpPr>
-          <p:cNvPr id="29" name="TextBox 28"/>
-          <p:cNvSpPr txBox="1"/>
-          <p:nvPr/>
-        </p:nvSpPr>
-        <p:spPr>
-          <a:xfrm>
-            <a:off x="6583680" y="3840480"/>
-            <a:ext cx="5257800" cy="228600"/>
-          </a:xfrm>
-          <a:prstGeom prst="rect">
-            <a:avLst/>
-          </a:prstGeom>
-          <a:noFill/>
-        </p:spPr>
-        <p:txBody>
-          <a:bodyPr wrap="square" lIns="0" rIns="0" tIns="0" bIns="0" anchor="t">
-            <a:spAutoFit/>
-          </a:bodyPr>
-          <a:lstStyle/>
-          <a:p>
-            <a:pPr algn="l"/>
-            <a:r>
-              <a:rPr sz="1100" b="1">
-                <a:solidFill>
-                  <a:srgbClr val="1F2937"/>
-                </a:solidFill>
-                <a:latin typeface="Calibri"/>
-              </a:rPr>
-              <a:t>Alberta cold-snap grid alert (record 12,384 MW; reserves to 10 MW)</a:t>
-            </a:r>
-          </a:p>
-        </p:txBody>
-      </p:sp>
-      <p:sp>
-        <p:nvSpPr>
-          <p:cNvPr id="30" name="TextBox 29"/>
-          <p:cNvSpPr txBox="1"/>
-          <p:nvPr/>
-        </p:nvSpPr>
-        <p:spPr>
-          <a:xfrm>
-            <a:off x="6583680" y="4041648"/>
-            <a:ext cx="5257800" cy="228600"/>
-          </a:xfrm>
-          <a:prstGeom prst="rect">
-            <a:avLst/>
-          </a:prstGeom>
-          <a:noFill/>
-        </p:spPr>
-        <p:txBody>
-          <a:bodyPr wrap="square" lIns="0" rIns="0" tIns="0" bIns="0" anchor="t">
-            <a:spAutoFit/>
-          </a:bodyPr>
-          <a:lstStyle/>
-          <a:p>
-            <a:pPr algn="l"/>
-            <a:r>
-              <a:rPr sz="1000" b="0">
-                <a:solidFill>
-                  <a:srgbClr val="4B5563"/>
-                </a:solidFill>
-                <a:latin typeface="Calibri"/>
-              </a:rPr>
-              <a:t>AESO / Alberta MSA, Jan &amp; Apr 2024 Event Report</a:t>
-            </a:r>
-          </a:p>
-        </p:txBody>
-      </p:sp>
-      <p:sp>
-        <p:nvSpPr>
-          <p:cNvPr id="31" name="Oval 30"/>
+          <p:cNvPr id="20" name="Rectangle 19"/>
           <p:cNvSpPr/>
           <p:nvPr/>
         </p:nvSpPr>
         <p:spPr>
           <a:xfrm>
-            <a:off x="594360" y="4480560"/>
-            <a:ext cx="91440" cy="91440"/>
-          </a:xfrm>
-          <a:prstGeom prst="ellipse">
+            <a:off x="10922508" y="3235147"/>
+            <a:ext cx="466344" cy="21945"/>
+          </a:xfrm>
+          <a:prstGeom prst="rect">
             <a:avLst/>
           </a:prstGeom>
           <a:solidFill>
-            <a:srgbClr val="D97706"/>
+            <a:srgbClr val="FFFFFF"/>
           </a:solidFill>
           <a:ln>
             <a:noFill/>
@@ -10322,90 +10767,20 @@
       </p:sp>
       <p:sp>
         <p:nvSpPr>
-          <p:cNvPr id="32" name="TextBox 31"/>
-          <p:cNvSpPr txBox="1"/>
-          <p:nvPr/>
-        </p:nvSpPr>
-        <p:spPr>
-          <a:xfrm>
-            <a:off x="777240" y="4389120"/>
-            <a:ext cx="5257800" cy="228600"/>
-          </a:xfrm>
-          <a:prstGeom prst="rect">
-            <a:avLst/>
-          </a:prstGeom>
-          <a:noFill/>
-        </p:spPr>
-        <p:txBody>
-          <a:bodyPr wrap="square" lIns="0" rIns="0" tIns="0" bIns="0" anchor="t">
-            <a:spAutoFit/>
-          </a:bodyPr>
-          <a:lstStyle/>
-          <a:p>
-            <a:pPr algn="l"/>
-            <a:r>
-              <a:rPr sz="1100" b="1">
-                <a:solidFill>
-                  <a:srgbClr val="1F2937"/>
-                </a:solidFill>
-                <a:latin typeface="Calibri"/>
-              </a:rPr>
-              <a:t>Natural gas vs coal CO₂ (50–60% less); Africa gas reserves (~13%)</a:t>
-            </a:r>
-          </a:p>
-        </p:txBody>
-      </p:sp>
-      <p:sp>
-        <p:nvSpPr>
-          <p:cNvPr id="33" name="TextBox 32"/>
-          <p:cNvSpPr txBox="1"/>
-          <p:nvPr/>
-        </p:nvSpPr>
-        <p:spPr>
-          <a:xfrm>
-            <a:off x="777240" y="4590288"/>
-            <a:ext cx="5257800" cy="228600"/>
-          </a:xfrm>
-          <a:prstGeom prst="rect">
-            <a:avLst/>
-          </a:prstGeom>
-          <a:noFill/>
-        </p:spPr>
-        <p:txBody>
-          <a:bodyPr wrap="square" lIns="0" rIns="0" tIns="0" bIns="0" anchor="t">
-            <a:spAutoFit/>
-          </a:bodyPr>
-          <a:lstStyle/>
-          <a:p>
-            <a:pPr algn="l"/>
-            <a:r>
-              <a:rPr sz="1000" b="0">
-                <a:solidFill>
-                  <a:srgbClr val="4B5563"/>
-                </a:solidFill>
-                <a:latin typeface="Calibri"/>
-              </a:rPr>
-              <a:t>Atlantic Council, Natural gas in Africa's energy transition</a:t>
-            </a:r>
-          </a:p>
-        </p:txBody>
-      </p:sp>
-      <p:sp>
-        <p:nvSpPr>
-          <p:cNvPr id="34" name="Oval 33"/>
+          <p:cNvPr id="21" name="Rectangle 20"/>
           <p:cNvSpPr/>
           <p:nvPr/>
         </p:nvSpPr>
         <p:spPr>
           <a:xfrm>
-            <a:off x="6400800" y="4480560"/>
-            <a:ext cx="91440" cy="91440"/>
-          </a:xfrm>
-          <a:prstGeom prst="ellipse">
+            <a:off x="11144707" y="3012948"/>
+            <a:ext cx="21945" cy="466344"/>
+          </a:xfrm>
+          <a:prstGeom prst="rect">
             <a:avLst/>
           </a:prstGeom>
           <a:solidFill>
-            <a:srgbClr val="D97706"/>
+            <a:srgbClr val="FFFFFF"/>
           </a:solidFill>
           <a:ln>
             <a:noFill/>
@@ -10436,14 +10811,14 @@
       </p:sp>
       <p:sp>
         <p:nvSpPr>
-          <p:cNvPr id="35" name="TextBox 34"/>
+          <p:cNvPr id="22" name="TextBox 21"/>
           <p:cNvSpPr txBox="1"/>
           <p:nvPr/>
         </p:nvSpPr>
         <p:spPr>
           <a:xfrm>
-            <a:off x="6583680" y="4389120"/>
-            <a:ext cx="5257800" cy="228600"/>
+            <a:off x="8366760" y="3063240"/>
+            <a:ext cx="2331720" cy="365760"/>
           </a:xfrm>
           <a:prstGeom prst="rect">
             <a:avLst/>
@@ -10460,25 +10835,25 @@
             <a:r>
               <a:rPr sz="1100" b="1">
                 <a:solidFill>
-                  <a:srgbClr val="1F2937"/>
+                  <a:srgbClr val="1F4E79"/>
                 </a:solidFill>
                 <a:latin typeface="Calibri"/>
               </a:rPr>
-              <a:t>Steel &amp; cement embodied emissions in renewables</a:t>
-            </a:r>
-          </a:p>
-        </p:txBody>
-      </p:sp>
-      <p:sp>
-        <p:nvSpPr>
-          <p:cNvPr id="36" name="TextBox 35"/>
+              <a:t>THEN — RETIRE</a:t>
+            </a:r>
+          </a:p>
+        </p:txBody>
+      </p:sp>
+      <p:sp>
+        <p:nvSpPr>
+          <p:cNvPr id="23" name="TextBox 22"/>
           <p:cNvSpPr txBox="1"/>
           <p:nvPr/>
         </p:nvSpPr>
         <p:spPr>
           <a:xfrm>
-            <a:off x="6583680" y="4590288"/>
-            <a:ext cx="5257800" cy="228600"/>
+            <a:off x="8366760" y="3520440"/>
+            <a:ext cx="3063240" cy="640080"/>
           </a:xfrm>
           <a:prstGeom prst="rect">
             <a:avLst/>
@@ -10493,33 +10868,71 @@
           <a:p>
             <a:pPr algn="l"/>
             <a:r>
-              <a:rPr sz="1000" b="0">
-                <a:solidFill>
-                  <a:srgbClr val="4B5563"/>
+              <a:rPr sz="2000" b="1">
+                <a:solidFill>
+                  <a:srgbClr val="1F2937"/>
                 </a:solidFill>
                 <a:latin typeface="Calibri"/>
               </a:rPr>
-              <a:t>MIT Climate Portal</a:t>
-            </a:r>
-          </a:p>
-        </p:txBody>
-      </p:sp>
-      <p:sp>
-        <p:nvSpPr>
-          <p:cNvPr id="37" name="Oval 36"/>
+              <a:t>Phase fossil fuels down</a:t>
+            </a:r>
+          </a:p>
+        </p:txBody>
+      </p:sp>
+      <p:sp>
+        <p:nvSpPr>
+          <p:cNvPr id="24" name="TextBox 23"/>
+          <p:cNvSpPr txBox="1"/>
+          <p:nvPr/>
+        </p:nvSpPr>
+        <p:spPr>
+          <a:xfrm>
+            <a:off x="8366760" y="4389120"/>
+            <a:ext cx="3063240" cy="1463040"/>
+          </a:xfrm>
+          <a:prstGeom prst="rect">
+            <a:avLst/>
+          </a:prstGeom>
+          <a:noFill/>
+        </p:spPr>
+        <p:txBody>
+          <a:bodyPr wrap="square" lIns="0" rIns="0" tIns="0" bIns="0" anchor="t">
+            <a:spAutoFit/>
+          </a:bodyPr>
+          <a:lstStyle/>
+          <a:p>
+            <a:pPr algn="l"/>
+            <a:r>
+              <a:rPr sz="1200" b="0">
+                <a:solidFill>
+                  <a:srgbClr val="4B5563"/>
+                </a:solidFill>
+                <a:latin typeface="Calibri"/>
+              </a:rPr>
+              <a:t>When grids are firm and storage can
+carry the load, retire gas plants.
+Not before. Not as a slogan.
+As an engineering schedule.</a:t>
+            </a:r>
+          </a:p>
+        </p:txBody>
+      </p:sp>
+      <p:sp>
+        <p:nvSpPr>
+          <p:cNvPr id="25" name="Right Arrow 24"/>
           <p:cNvSpPr/>
           <p:nvPr/>
         </p:nvSpPr>
         <p:spPr>
           <a:xfrm>
-            <a:off x="594360" y="5029200"/>
-            <a:ext cx="91440" cy="91440"/>
-          </a:xfrm>
-          <a:prstGeom prst="ellipse">
+            <a:off x="4114800" y="4160520"/>
+            <a:ext cx="274320" cy="411480"/>
+          </a:xfrm>
+          <a:prstGeom prst="rightArrow">
             <a:avLst/>
           </a:prstGeom>
           <a:solidFill>
-            <a:srgbClr val="D97706"/>
+            <a:srgbClr val="9CA3AF"/>
           </a:solidFill>
           <a:ln>
             <a:noFill/>
@@ -10550,14 +10963,58 @@
       </p:sp>
       <p:sp>
         <p:nvSpPr>
-          <p:cNvPr id="38" name="TextBox 37"/>
+          <p:cNvPr id="26" name="Right Arrow 25"/>
+          <p:cNvSpPr/>
+          <p:nvPr/>
+        </p:nvSpPr>
+        <p:spPr>
+          <a:xfrm>
+            <a:off x="7863840" y="4160520"/>
+            <a:ext cx="274320" cy="411480"/>
+          </a:xfrm>
+          <a:prstGeom prst="rightArrow">
+            <a:avLst/>
+          </a:prstGeom>
+          <a:solidFill>
+            <a:srgbClr val="9CA3AF"/>
+          </a:solidFill>
+          <a:ln>
+            <a:noFill/>
+          </a:ln>
+          <a:effectLst/>
+        </p:spPr>
+        <p:style>
+          <a:lnRef idx="1">
+            <a:schemeClr val="accent1"/>
+          </a:lnRef>
+          <a:fillRef idx="3">
+            <a:schemeClr val="accent1"/>
+          </a:fillRef>
+          <a:effectRef idx="2">
+            <a:schemeClr val="accent1"/>
+          </a:effectRef>
+          <a:fontRef idx="minor">
+            <a:schemeClr val="lt1"/>
+          </a:fontRef>
+        </p:style>
+        <p:txBody>
+          <a:bodyPr rtlCol="0" anchor="ctr"/>
+          <a:lstStyle/>
+          <a:p>
+            <a:pPr algn="ctr"/>
+          </a:p>
+        </p:txBody>
+      </p:sp>
+      <p:sp>
+        <p:nvSpPr>
+          <p:cNvPr id="27" name="TextBox 26"/>
           <p:cNvSpPr txBox="1"/>
           <p:nvPr/>
         </p:nvSpPr>
         <p:spPr>
           <a:xfrm>
-            <a:off x="777240" y="4937760"/>
-            <a:ext cx="5257800" cy="228600"/>
+            <a:off x="457200" y="6537960"/>
+            <a:ext cx="7315200" cy="274320"/>
           </a:xfrm>
           <a:prstGeom prst="rect">
             <a:avLst/>
@@ -10572,27 +11029,27 @@
           <a:p>
             <a:pPr algn="l"/>
             <a:r>
-              <a:rPr sz="1100" b="1">
-                <a:solidFill>
-                  <a:srgbClr val="1F2937"/>
+              <a:rPr sz="900" b="0">
+                <a:solidFill>
+                  <a:srgbClr val="9CA3AF"/>
                 </a:solidFill>
                 <a:latin typeface="Calibri"/>
               </a:rPr>
-              <a:t>Life expectancy vs electricity per capita (illustrative)</a:t>
-            </a:r>
-          </a:p>
-        </p:txBody>
-      </p:sp>
-      <p:sp>
-        <p:nvSpPr>
-          <p:cNvPr id="39" name="TextBox 38"/>
+              <a:t>Choolwe  •  The Case For Fossil Fuels</a:t>
+            </a:r>
+          </a:p>
+        </p:txBody>
+      </p:sp>
+      <p:sp>
+        <p:nvSpPr>
+          <p:cNvPr id="28" name="TextBox 27"/>
           <p:cNvSpPr txBox="1"/>
           <p:nvPr/>
         </p:nvSpPr>
         <p:spPr>
           <a:xfrm>
-            <a:off x="777240" y="5138928"/>
-            <a:ext cx="5257800" cy="228600"/>
+            <a:off x="10789920" y="6537960"/>
+            <a:ext cx="1097280" cy="274320"/>
           </a:xfrm>
           <a:prstGeom prst="rect">
             <a:avLst/>
@@ -10605,85 +11062,15 @@
           </a:bodyPr>
           <a:lstStyle/>
           <a:p>
-            <a:pPr algn="l"/>
-            <a:r>
-              <a:rPr sz="1000" b="0">
-                <a:solidFill>
-                  <a:srgbClr val="4B5563"/>
+            <a:pPr algn="r"/>
+            <a:r>
+              <a:rPr sz="900" b="0">
+                <a:solidFill>
+                  <a:srgbClr val="9CA3AF"/>
                 </a:solidFill>
                 <a:latin typeface="Calibri"/>
               </a:rPr>
-              <a:t>World Bank Indicators (kWh/capita; life expectancy at birth)</a:t>
-            </a:r>
-          </a:p>
-        </p:txBody>
-      </p:sp>
-      <p:sp>
-        <p:nvSpPr>
-          <p:cNvPr id="40" name="TextBox 39"/>
-          <p:cNvSpPr txBox="1"/>
-          <p:nvPr/>
-        </p:nvSpPr>
-        <p:spPr>
-          <a:xfrm>
-            <a:off x="457200" y="6537960"/>
-            <a:ext cx="7315200" cy="274320"/>
-          </a:xfrm>
-          <a:prstGeom prst="rect">
-            <a:avLst/>
-          </a:prstGeom>
-          <a:noFill/>
-        </p:spPr>
-        <p:txBody>
-          <a:bodyPr wrap="square" lIns="0" rIns="0" tIns="0" bIns="0" anchor="t">
-            <a:spAutoFit/>
-          </a:bodyPr>
-          <a:lstStyle/>
-          <a:p>
-            <a:pPr algn="l"/>
-            <a:r>
-              <a:rPr sz="900" b="0">
-                <a:solidFill>
-                  <a:srgbClr val="9CA3AF"/>
-                </a:solidFill>
-                <a:latin typeface="Calibri"/>
-              </a:rPr>
-              <a:t>Choolwe  •  The Case For Fossil Fuels</a:t>
-            </a:r>
-          </a:p>
-        </p:txBody>
-      </p:sp>
-      <p:sp>
-        <p:nvSpPr>
-          <p:cNvPr id="41" name="TextBox 40"/>
-          <p:cNvSpPr txBox="1"/>
-          <p:nvPr/>
-        </p:nvSpPr>
-        <p:spPr>
-          <a:xfrm>
-            <a:off x="10789920" y="6537960"/>
-            <a:ext cx="1097280" cy="274320"/>
-          </a:xfrm>
-          <a:prstGeom prst="rect">
-            <a:avLst/>
-          </a:prstGeom>
-          <a:noFill/>
-        </p:spPr>
-        <p:txBody>
-          <a:bodyPr wrap="square" lIns="0" rIns="0" tIns="0" bIns="0" anchor="t">
-            <a:spAutoFit/>
-          </a:bodyPr>
-          <a:lstStyle/>
-          <a:p>
-            <a:pPr algn="r"/>
-            <a:r>
-              <a:rPr sz="900" b="0">
-                <a:solidFill>
-                  <a:srgbClr val="9CA3AF"/>
-                </a:solidFill>
-                <a:latin typeface="Calibri"/>
-              </a:rPr>
-              <a:t>9 / 9</a:t>
+              <a:t>9 / 10</a:t>
             </a:r>
           </a:p>
         </p:txBody>
